--- a/Progression_P6/P6-L05_Paper_4_Q2_Extended_Writing.pptx
+++ b/Progression_P6/P6-L05_Paper_4_Q2_Extended_Writing.pptx
@@ -36483,7 +36483,7 @@
                 <a:ea typeface="Calibri" pitchFamily="34" charset="-122"/>
                 <a:cs typeface="Calibri" pitchFamily="34" charset="-120"/>
               </a:rPr>
-              <a:t>8 exam words from the website in 1 groups. </a:t>
+              <a:t>8 exam words from the website in one group. </a:t>
             </a:r>
             <a:endParaRPr lang="en-US" sz="1600" dirty="0"/>
           </a:p>

--- a/Progression_P6/P6-L05_Paper_4_Q2_Extended_Writing.pptx
+++ b/Progression_P6/P6-L05_Paper_4_Q2_Extended_Writing.pptx
@@ -1,6 +1,6 @@
 
 <file path=ppt/presentation.xml><?xml version="1.0" encoding="utf-8"?>
-<p:presentation xmlns:a="http://schemas.openxmlformats.org/drawingml/2006/main" xmlns:r="http://schemas.openxmlformats.org/officeDocument/2006/relationships" xmlns:p="http://schemas.openxmlformats.org/presentationml/2006/main" saveSubsetFonts="1" autoCompressPictures="0">
+<p:presentation xmlns:a="http://schemas.openxmlformats.org/drawingml/2006/main" xmlns:r="http://schemas.openxmlformats.org/officeDocument/2006/relationships" xmlns:p="http://schemas.openxmlformats.org/presentationml/2006/main" embedTrueTypeFonts="1" saveSubsetFonts="1" autoCompressPictures="0">
   <p:sldMasterIdLst>
     <p:sldMasterId id="2147483648" r:id="rId1"/>
   </p:sldMasterIdLst>
@@ -36,6 +36,13 @@
   </p:notesMasterIdLst>
   <p:sldSz cx="12192000" cy="6858000"/>
   <p:notesSz cx="6858000" cy="12192000"/>
+  <p:embeddedFontLst>
+    <p:embeddedFont>
+      <p:font typeface="Amiri" pitchFamily="2" charset="-78"/>
+      <p:regular r:id="rIdFont1"/>
+      <p:bold r:id="rIdFont2"/>
+    </p:embeddedFont>
+  </p:embeddedFontLst>
   <p:defaultTextStyle>
     <a:lvl1pPr marL="0" algn="l" defTabSz="914400" rtl="0" eaLnBrk="1" latinLnBrk="0" hangingPunct="1">
       <a:defRPr sz="1800" kern="1200">
@@ -392,8 +399,7 @@
           <a:schemeClr val="tx1"/>
         </a:solidFill>
         <a:latin typeface="+mn-lt"/>
-        <a:ea typeface="+mn-ea"/>
-        <a:cs typeface="+mn-cs"/>
+        <a:cs typeface="Amiri" pitchFamily="2" charset="-78"/>
       </a:defRPr>
     </a:lvl1pPr>
     <a:lvl2pPr marL="457200" algn="l" defTabSz="914400" rtl="0" eaLnBrk="1" latinLnBrk="0" hangingPunct="1">
@@ -402,8 +408,7 @@
           <a:schemeClr val="tx1"/>
         </a:solidFill>
         <a:latin typeface="+mn-lt"/>
-        <a:ea typeface="+mn-ea"/>
-        <a:cs typeface="+mn-cs"/>
+        <a:cs typeface="Amiri" pitchFamily="2" charset="-78"/>
       </a:defRPr>
     </a:lvl2pPr>
     <a:lvl3pPr marL="914400" algn="l" defTabSz="914400" rtl="0" eaLnBrk="1" latinLnBrk="0" hangingPunct="1">
@@ -412,8 +417,7 @@
           <a:schemeClr val="tx1"/>
         </a:solidFill>
         <a:latin typeface="+mn-lt"/>
-        <a:ea typeface="+mn-ea"/>
-        <a:cs typeface="+mn-cs"/>
+        <a:cs typeface="Amiri" pitchFamily="2" charset="-78"/>
       </a:defRPr>
     </a:lvl3pPr>
     <a:lvl4pPr marL="1371600" algn="l" defTabSz="914400" rtl="0" eaLnBrk="1" latinLnBrk="0" hangingPunct="1">
@@ -422,8 +426,7 @@
           <a:schemeClr val="tx1"/>
         </a:solidFill>
         <a:latin typeface="+mn-lt"/>
-        <a:ea typeface="+mn-ea"/>
-        <a:cs typeface="+mn-cs"/>
+        <a:cs typeface="Amiri" pitchFamily="2" charset="-78"/>
       </a:defRPr>
     </a:lvl4pPr>
     <a:lvl5pPr marL="1828800" algn="l" defTabSz="914400" rtl="0" eaLnBrk="1" latinLnBrk="0" hangingPunct="1">
@@ -432,8 +435,7 @@
           <a:schemeClr val="tx1"/>
         </a:solidFill>
         <a:latin typeface="+mn-lt"/>
-        <a:ea typeface="+mn-ea"/>
-        <a:cs typeface="+mn-cs"/>
+        <a:cs typeface="Amiri" pitchFamily="2" charset="-78"/>
       </a:defRPr>
     </a:lvl5pPr>
     <a:lvl6pPr marL="2286000" algn="l" defTabSz="914400" rtl="0" eaLnBrk="1" latinLnBrk="0" hangingPunct="1">
@@ -442,8 +444,7 @@
           <a:schemeClr val="tx1"/>
         </a:solidFill>
         <a:latin typeface="+mn-lt"/>
-        <a:ea typeface="+mn-ea"/>
-        <a:cs typeface="+mn-cs"/>
+        <a:cs typeface="Amiri" pitchFamily="2" charset="-78"/>
       </a:defRPr>
     </a:lvl6pPr>
     <a:lvl7pPr marL="2743200" algn="l" defTabSz="914400" rtl="0" eaLnBrk="1" latinLnBrk="0" hangingPunct="1">
@@ -452,8 +453,7 @@
           <a:schemeClr val="tx1"/>
         </a:solidFill>
         <a:latin typeface="+mn-lt"/>
-        <a:ea typeface="+mn-ea"/>
-        <a:cs typeface="+mn-cs"/>
+        <a:cs typeface="Amiri" pitchFamily="2" charset="-78"/>
       </a:defRPr>
     </a:lvl7pPr>
     <a:lvl8pPr marL="3200400" algn="l" defTabSz="914400" rtl="0" eaLnBrk="1" latinLnBrk="0" hangingPunct="1">
@@ -462,8 +462,7 @@
           <a:schemeClr val="tx1"/>
         </a:solidFill>
         <a:latin typeface="+mn-lt"/>
-        <a:ea typeface="+mn-ea"/>
-        <a:cs typeface="+mn-cs"/>
+        <a:cs typeface="Amiri" pitchFamily="2" charset="-78"/>
       </a:defRPr>
     </a:lvl8pPr>
     <a:lvl9pPr marL="3657600" algn="l" defTabSz="914400" rtl="0" eaLnBrk="1" latinLnBrk="0" hangingPunct="1">
@@ -472,8 +471,7 @@
           <a:schemeClr val="tx1"/>
         </a:solidFill>
         <a:latin typeface="+mn-lt"/>
-        <a:ea typeface="+mn-ea"/>
-        <a:cs typeface="+mn-cs"/>
+        <a:cs typeface="Amiri" pitchFamily="2" charset="-78"/>
       </a:defRPr>
     </a:lvl9pPr>
   </p:notesStyle>
@@ -2798,8 +2796,7 @@
             <a:schemeClr val="tx1"/>
           </a:solidFill>
           <a:latin typeface="+mj-lt"/>
-          <a:ea typeface="+mj-ea"/>
-          <a:cs typeface="+mj-cs"/>
+          <a:cs typeface="Amiri" pitchFamily="2" charset="-78"/>
         </a:defRPr>
       </a:lvl1pPr>
     </p:titleStyle>
@@ -2815,8 +2812,7 @@
             <a:schemeClr val="tx1"/>
           </a:solidFill>
           <a:latin typeface="+mn-lt"/>
-          <a:ea typeface="+mn-ea"/>
-          <a:cs typeface="+mn-cs"/>
+          <a:cs typeface="Amiri" pitchFamily="2" charset="-78"/>
         </a:defRPr>
       </a:lvl1pPr>
       <a:lvl2pPr marL="742950" indent="-285750" algn="l" defTabSz="914400" rtl="0" eaLnBrk="1" latinLnBrk="0" hangingPunct="1">
@@ -2830,8 +2826,7 @@
             <a:schemeClr val="tx1"/>
           </a:solidFill>
           <a:latin typeface="+mn-lt"/>
-          <a:ea typeface="+mn-ea"/>
-          <a:cs typeface="+mn-cs"/>
+          <a:cs typeface="Amiri" pitchFamily="2" charset="-78"/>
         </a:defRPr>
       </a:lvl2pPr>
       <a:lvl3pPr marL="1143000" indent="-228600" algn="l" defTabSz="914400" rtl="0" eaLnBrk="1" latinLnBrk="0" hangingPunct="1">
@@ -2845,8 +2840,7 @@
             <a:schemeClr val="tx1"/>
           </a:solidFill>
           <a:latin typeface="+mn-lt"/>
-          <a:ea typeface="+mn-ea"/>
-          <a:cs typeface="+mn-cs"/>
+          <a:cs typeface="Amiri" pitchFamily="2" charset="-78"/>
         </a:defRPr>
       </a:lvl3pPr>
       <a:lvl4pPr marL="1600200" indent="-228600" algn="l" defTabSz="914400" rtl="0" eaLnBrk="1" latinLnBrk="0" hangingPunct="1">
@@ -2860,8 +2854,7 @@
             <a:schemeClr val="tx1"/>
           </a:solidFill>
           <a:latin typeface="+mn-lt"/>
-          <a:ea typeface="+mn-ea"/>
-          <a:cs typeface="+mn-cs"/>
+          <a:cs typeface="Amiri" pitchFamily="2" charset="-78"/>
         </a:defRPr>
       </a:lvl4pPr>
       <a:lvl5pPr marL="2057400" indent="-228600" algn="l" defTabSz="914400" rtl="0" eaLnBrk="1" latinLnBrk="0" hangingPunct="1">
@@ -2875,8 +2868,7 @@
             <a:schemeClr val="tx1"/>
           </a:solidFill>
           <a:latin typeface="+mn-lt"/>
-          <a:ea typeface="+mn-ea"/>
-          <a:cs typeface="+mn-cs"/>
+          <a:cs typeface="Amiri" pitchFamily="2" charset="-78"/>
         </a:defRPr>
       </a:lvl5pPr>
       <a:lvl6pPr marL="2514600" indent="-228600" algn="l" defTabSz="914400" rtl="0" eaLnBrk="1" latinLnBrk="0" hangingPunct="1">
@@ -2890,8 +2882,7 @@
             <a:schemeClr val="tx1"/>
           </a:solidFill>
           <a:latin typeface="+mn-lt"/>
-          <a:ea typeface="+mn-ea"/>
-          <a:cs typeface="+mn-cs"/>
+          <a:cs typeface="Amiri" pitchFamily="2" charset="-78"/>
         </a:defRPr>
       </a:lvl6pPr>
       <a:lvl7pPr marL="2971800" indent="-228600" algn="l" defTabSz="914400" rtl="0" eaLnBrk="1" latinLnBrk="0" hangingPunct="1">
@@ -2905,8 +2896,7 @@
             <a:schemeClr val="tx1"/>
           </a:solidFill>
           <a:latin typeface="+mn-lt"/>
-          <a:ea typeface="+mn-ea"/>
-          <a:cs typeface="+mn-cs"/>
+          <a:cs typeface="Amiri" pitchFamily="2" charset="-78"/>
         </a:defRPr>
       </a:lvl7pPr>
       <a:lvl8pPr marL="3429000" indent="-228600" algn="l" defTabSz="914400" rtl="0" eaLnBrk="1" latinLnBrk="0" hangingPunct="1">
@@ -2920,8 +2910,7 @@
             <a:schemeClr val="tx1"/>
           </a:solidFill>
           <a:latin typeface="+mn-lt"/>
-          <a:ea typeface="+mn-ea"/>
-          <a:cs typeface="+mn-cs"/>
+          <a:cs typeface="Amiri" pitchFamily="2" charset="-78"/>
         </a:defRPr>
       </a:lvl8pPr>
       <a:lvl9pPr marL="3886200" indent="-228600" algn="l" defTabSz="914400" rtl="0" eaLnBrk="1" latinLnBrk="0" hangingPunct="1">
@@ -2935,8 +2924,7 @@
             <a:schemeClr val="tx1"/>
           </a:solidFill>
           <a:latin typeface="+mn-lt"/>
-          <a:ea typeface="+mn-ea"/>
-          <a:cs typeface="+mn-cs"/>
+          <a:cs typeface="Amiri" pitchFamily="2" charset="-78"/>
         </a:defRPr>
       </a:lvl9pPr>
     </p:bodyStyle>
@@ -2950,8 +2938,7 @@
             <a:schemeClr val="tx1"/>
           </a:solidFill>
           <a:latin typeface="+mn-lt"/>
-          <a:ea typeface="+mn-ea"/>
-          <a:cs typeface="+mn-cs"/>
+          <a:cs typeface="Amiri" pitchFamily="2" charset="-78"/>
         </a:defRPr>
       </a:lvl1pPr>
       <a:lvl2pPr marL="457200" algn="l" defTabSz="914400" rtl="0" eaLnBrk="1" latinLnBrk="0" hangingPunct="1">
@@ -2960,8 +2947,7 @@
             <a:schemeClr val="tx1"/>
           </a:solidFill>
           <a:latin typeface="+mn-lt"/>
-          <a:ea typeface="+mn-ea"/>
-          <a:cs typeface="+mn-cs"/>
+          <a:cs typeface="Amiri" pitchFamily="2" charset="-78"/>
         </a:defRPr>
       </a:lvl2pPr>
       <a:lvl3pPr marL="914400" algn="l" defTabSz="914400" rtl="0" eaLnBrk="1" latinLnBrk="0" hangingPunct="1">
@@ -2970,8 +2956,7 @@
             <a:schemeClr val="tx1"/>
           </a:solidFill>
           <a:latin typeface="+mn-lt"/>
-          <a:ea typeface="+mn-ea"/>
-          <a:cs typeface="+mn-cs"/>
+          <a:cs typeface="Amiri" pitchFamily="2" charset="-78"/>
         </a:defRPr>
       </a:lvl3pPr>
       <a:lvl4pPr marL="1371600" algn="l" defTabSz="914400" rtl="0" eaLnBrk="1" latinLnBrk="0" hangingPunct="1">
@@ -2980,8 +2965,7 @@
             <a:schemeClr val="tx1"/>
           </a:solidFill>
           <a:latin typeface="+mn-lt"/>
-          <a:ea typeface="+mn-ea"/>
-          <a:cs typeface="+mn-cs"/>
+          <a:cs typeface="Amiri" pitchFamily="2" charset="-78"/>
         </a:defRPr>
       </a:lvl4pPr>
       <a:lvl5pPr marL="1828800" algn="l" defTabSz="914400" rtl="0" eaLnBrk="1" latinLnBrk="0" hangingPunct="1">
@@ -2990,8 +2974,7 @@
             <a:schemeClr val="tx1"/>
           </a:solidFill>
           <a:latin typeface="+mn-lt"/>
-          <a:ea typeface="+mn-ea"/>
-          <a:cs typeface="+mn-cs"/>
+          <a:cs typeface="Amiri" pitchFamily="2" charset="-78"/>
         </a:defRPr>
       </a:lvl5pPr>
       <a:lvl6pPr marL="2286000" algn="l" defTabSz="914400" rtl="0" eaLnBrk="1" latinLnBrk="0" hangingPunct="1">
@@ -3000,8 +2983,7 @@
             <a:schemeClr val="tx1"/>
           </a:solidFill>
           <a:latin typeface="+mn-lt"/>
-          <a:ea typeface="+mn-ea"/>
-          <a:cs typeface="+mn-cs"/>
+          <a:cs typeface="Amiri" pitchFamily="2" charset="-78"/>
         </a:defRPr>
       </a:lvl6pPr>
       <a:lvl7pPr marL="2743200" algn="l" defTabSz="914400" rtl="0" eaLnBrk="1" latinLnBrk="0" hangingPunct="1">
@@ -3010,8 +2992,7 @@
             <a:schemeClr val="tx1"/>
           </a:solidFill>
           <a:latin typeface="+mn-lt"/>
-          <a:ea typeface="+mn-ea"/>
-          <a:cs typeface="+mn-cs"/>
+          <a:cs typeface="Amiri" pitchFamily="2" charset="-78"/>
         </a:defRPr>
       </a:lvl7pPr>
       <a:lvl8pPr marL="3200400" algn="l" defTabSz="914400" rtl="0" eaLnBrk="1" latinLnBrk="0" hangingPunct="1">
@@ -3020,8 +3001,7 @@
             <a:schemeClr val="tx1"/>
           </a:solidFill>
           <a:latin typeface="+mn-lt"/>
-          <a:ea typeface="+mn-ea"/>
-          <a:cs typeface="+mn-cs"/>
+          <a:cs typeface="Amiri" pitchFamily="2" charset="-78"/>
         </a:defRPr>
       </a:lvl8pPr>
       <a:lvl9pPr marL="3657600" algn="l" defTabSz="914400" rtl="0" eaLnBrk="1" latinLnBrk="0" hangingPunct="1">
@@ -3030,8 +3010,7 @@
             <a:schemeClr val="tx1"/>
           </a:solidFill>
           <a:latin typeface="+mn-lt"/>
-          <a:ea typeface="+mn-ea"/>
-          <a:cs typeface="+mn-cs"/>
+          <a:cs typeface="Amiri" pitchFamily="2" charset="-78"/>
         </a:defRPr>
       </a:lvl9pPr>
     </p:otherStyle>
@@ -3191,9 +3170,8 @@
                 <a:solidFill>
                   <a:srgbClr val="D4AF37"/>
                 </a:solidFill>
-                <a:latin typeface="Amiri" pitchFamily="34" charset="0"/>
-                <a:ea typeface="Amiri" pitchFamily="34" charset="-122"/>
-                <a:cs typeface="Amiri" pitchFamily="34" charset="-120"/>
+                <a:latin typeface="Amiri" pitchFamily="2" charset="-78"/>
+                <a:cs typeface="Amiri" pitchFamily="2" charset="-78"/>
               </a:rPr>
               <a:t>م</a:t>
             </a:r>
@@ -3231,8 +3209,7 @@
                   <a:srgbClr val="FFFFFF"/>
                 </a:solidFill>
                 <a:latin typeface="Cambria" pitchFamily="34" charset="0"/>
-                <a:ea typeface="Cambria" pitchFamily="34" charset="-122"/>
-                <a:cs typeface="Cambria" pitchFamily="34" charset="-120"/>
+                <a:cs typeface="Amiri" pitchFamily="2" charset="-78"/>
               </a:rPr>
               <a:t>Al Madina Online School</a:t>
             </a:r>
@@ -3248,8 +3225,7 @@
                   <a:srgbClr val="D4AF37"/>
                 </a:solidFill>
                 <a:latin typeface="Calibri" pitchFamily="34" charset="0"/>
-                <a:ea typeface="Calibri" pitchFamily="34" charset="-122"/>
-                <a:cs typeface="Calibri" pitchFamily="34" charset="-120"/>
+                <a:cs typeface="Amiri" pitchFamily="2" charset="-78"/>
               </a:rPr>
               <a:t>ARABIC DEPARTMENT · MIFTAH ARABIC</a:t>
             </a:r>
@@ -3287,8 +3263,7 @@
                   <a:srgbClr val="D4AF37"/>
                 </a:solidFill>
                 <a:latin typeface="Calibri" pitchFamily="34" charset="0"/>
-                <a:ea typeface="Calibri" pitchFamily="34" charset="-122"/>
-                <a:cs typeface="Calibri" pitchFamily="34" charset="-120"/>
+                <a:cs typeface="Amiri" pitchFamily="2" charset="-78"/>
               </a:rPr>
               <a:t>CAMBRIDGE IGCSE ARABIC 0544  ·  YEAR 9  ·  PROGRESSION P6  ·  P6-L05</a:t>
             </a:r>
@@ -3326,8 +3301,7 @@
                   <a:srgbClr val="9FB3D1"/>
                 </a:solidFill>
                 <a:latin typeface="Cambria" pitchFamily="34" charset="0"/>
-                <a:ea typeface="Cambria" pitchFamily="34" charset="-122"/>
-                <a:cs typeface="Cambria" pitchFamily="34" charset="-120"/>
+                <a:cs typeface="Amiri" pitchFamily="2" charset="-78"/>
               </a:rPr>
               <a:t>P6-L05</a:t>
             </a:r>
@@ -3365,8 +3339,7 @@
                   <a:srgbClr val="FFFFFF"/>
                 </a:solidFill>
                 <a:latin typeface="Cambria" pitchFamily="34" charset="0"/>
-                <a:ea typeface="Cambria" pitchFamily="34" charset="-122"/>
-                <a:cs typeface="Cambria" pitchFamily="34" charset="-120"/>
+                <a:cs typeface="Amiri" pitchFamily="2" charset="-78"/>
               </a:rPr>
               <a:t>Paper 4 Q2 — Extended Writing: Essay Architecture Under Exam Conditions</a:t>
             </a:r>
@@ -3403,9 +3376,8 @@
                 <a:solidFill>
                   <a:srgbClr val="D4AF37"/>
                 </a:solidFill>
-                <a:latin typeface="Amiri" pitchFamily="34" charset="0"/>
-                <a:ea typeface="Amiri" pitchFamily="34" charset="-122"/>
-                <a:cs typeface="Amiri" pitchFamily="34" charset="-120"/>
+                <a:latin typeface="Amiri" pitchFamily="2" charset="-78"/>
+                <a:cs typeface="Amiri" pitchFamily="2" charset="-78"/>
               </a:rPr>
               <a:t>الوَرَقَةُ الرَّابِعَةُ — الكِتَابَةُ المُوَسَّعَةُ: هَيْكَلُ المَقَالِ تَحْتَ ضَغْطِ الوَقْتِ</a:t>
             </a:r>
@@ -3443,8 +3415,7 @@
                   <a:srgbClr val="C6D2E6"/>
                 </a:solidFill>
                 <a:latin typeface="Calibri" pitchFamily="34" charset="0"/>
-                <a:ea typeface="Calibri" pitchFamily="34" charset="-122"/>
-                <a:cs typeface="Calibri" pitchFamily="34" charset="-120"/>
+                <a:cs typeface="Amiri" pitchFamily="2" charset="-78"/>
               </a:rPr>
               <a:t>Write a full 130–150-word argumentative essay against the clock: plan for four minutes, then thesis → evidence → ṣaḥīḥun anna … ghayra anna → law … la- → wa-bināʾan ʿalā mā sabaqa + -a — with Range that never costs Accuracy.</a:t>
             </a:r>
@@ -3509,8 +3480,7 @@
                   <a:srgbClr val="D4AF37"/>
                 </a:solidFill>
                 <a:latin typeface="Calibri" pitchFamily="34" charset="0"/>
-                <a:ea typeface="Calibri" pitchFamily="34" charset="-122"/>
-                <a:cs typeface="Calibri" pitchFamily="34" charset="-120"/>
+                <a:cs typeface="Amiri" pitchFamily="2" charset="-78"/>
               </a:rPr>
               <a:t>LESSON</a:t>
             </a:r>
@@ -3526,8 +3496,7 @@
                   <a:srgbClr val="FFFFFF"/>
                 </a:solidFill>
                 <a:latin typeface="Calibri" pitchFamily="34" charset="0"/>
-                <a:ea typeface="Calibri" pitchFamily="34" charset="-122"/>
-                <a:cs typeface="Calibri" pitchFamily="34" charset="-120"/>
+                <a:cs typeface="Amiri" pitchFamily="2" charset="-78"/>
               </a:rPr>
               <a:t>P6-L05 · Progression P6 · IGCSE Bridge</a:t>
             </a:r>
@@ -3592,8 +3561,7 @@
                   <a:srgbClr val="D4AF37"/>
                 </a:solidFill>
                 <a:latin typeface="Calibri" pitchFamily="34" charset="0"/>
-                <a:ea typeface="Calibri" pitchFamily="34" charset="-122"/>
-                <a:cs typeface="Calibri" pitchFamily="34" charset="-120"/>
+                <a:cs typeface="Amiri" pitchFamily="2" charset="-78"/>
               </a:rPr>
               <a:t>DURATION</a:t>
             </a:r>
@@ -3609,8 +3577,7 @@
                   <a:srgbClr val="FFFFFF"/>
                 </a:solidFill>
                 <a:latin typeface="Calibri" pitchFamily="34" charset="0"/>
-                <a:ea typeface="Calibri" pitchFamily="34" charset="-122"/>
-                <a:cs typeface="Calibri" pitchFamily="34" charset="-120"/>
+                <a:cs typeface="Amiri" pitchFamily="2" charset="-78"/>
               </a:rPr>
               <a:t>60 minutes · Teams</a:t>
             </a:r>
@@ -3675,8 +3642,7 @@
                   <a:srgbClr val="D4AF37"/>
                 </a:solidFill>
                 <a:latin typeface="Calibri" pitchFamily="34" charset="0"/>
-                <a:ea typeface="Calibri" pitchFamily="34" charset="-122"/>
-                <a:cs typeface="Calibri" pitchFamily="34" charset="-120"/>
+                <a:cs typeface="Amiri" pitchFamily="2" charset="-78"/>
               </a:rPr>
               <a:t>LEVEL</a:t>
             </a:r>
@@ -3692,8 +3658,7 @@
                   <a:srgbClr val="FFFFFF"/>
                 </a:solidFill>
                 <a:latin typeface="Calibri" pitchFamily="34" charset="0"/>
-                <a:ea typeface="Calibri" pitchFamily="34" charset="-122"/>
-                <a:cs typeface="Calibri" pitchFamily="34" charset="-120"/>
+                <a:cs typeface="Amiri" pitchFamily="2" charset="-78"/>
               </a:rPr>
               <a:t>Progression · B1 → B2</a:t>
             </a:r>
@@ -3758,8 +3723,7 @@
                   <a:srgbClr val="D4AF37"/>
                 </a:solidFill>
                 <a:latin typeface="Calibri" pitchFamily="34" charset="0"/>
-                <a:ea typeface="Calibri" pitchFamily="34" charset="-122"/>
-                <a:cs typeface="Calibri" pitchFamily="34" charset="-120"/>
+                <a:cs typeface="Amiri" pitchFamily="2" charset="-78"/>
               </a:rPr>
               <a:t>ON THE WEBSITE</a:t>
             </a:r>
@@ -3775,8 +3739,7 @@
                   <a:srgbClr val="FFFFFF"/>
                 </a:solidFill>
                 <a:latin typeface="Calibri" pitchFamily="34" charset="0"/>
-                <a:ea typeface="Calibri" pitchFamily="34" charset="-122"/>
-                <a:cs typeface="Calibri" pitchFamily="34" charset="-120"/>
+                <a:cs typeface="Amiri" pitchFamily="2" charset="-78"/>
               </a:rPr>
               <a:t>Pathways › Progression › P6 › P6-L05</a:t>
             </a:r>
@@ -3870,9 +3833,8 @@
                 <a:solidFill>
                   <a:srgbClr val="D4AF37"/>
                 </a:solidFill>
-                <a:latin typeface="Amiri" pitchFamily="34" charset="0"/>
-                <a:ea typeface="Amiri" pitchFamily="34" charset="-122"/>
-                <a:cs typeface="Amiri" pitchFamily="34" charset="-120"/>
+                <a:latin typeface="Amiri" pitchFamily="2" charset="-78"/>
+                <a:cs typeface="Amiri" pitchFamily="2" charset="-78"/>
               </a:rPr>
               <a:t>م</a:t>
             </a:r>
@@ -3910,8 +3872,7 @@
                   <a:srgbClr val="1B3B6F"/>
                 </a:solidFill>
                 <a:latin typeface="Cambria" pitchFamily="34" charset="0"/>
-                <a:ea typeface="Cambria" pitchFamily="34" charset="-122"/>
-                <a:cs typeface="Cambria" pitchFamily="34" charset="-120"/>
+                <a:cs typeface="Amiri" pitchFamily="2" charset="-78"/>
               </a:rPr>
               <a:t>Al Madina Online School</a:t>
             </a:r>
@@ -3949,8 +3910,7 @@
                   <a:srgbClr val="8A6D1E"/>
                 </a:solidFill>
                 <a:latin typeface="Calibri" pitchFamily="34" charset="0"/>
-                <a:ea typeface="Calibri" pitchFamily="34" charset="-122"/>
-                <a:cs typeface="Calibri" pitchFamily="34" charset="-120"/>
+                <a:cs typeface="Amiri" pitchFamily="2" charset="-78"/>
               </a:rPr>
               <a:t>ARABIC DEPARTMENT · MIFTAH ARABIC · IGCSE 0544</a:t>
             </a:r>
@@ -4015,8 +3975,7 @@
                   <a:srgbClr val="FFFFFF"/>
                 </a:solidFill>
                 <a:latin typeface="Calibri" pitchFamily="34" charset="0"/>
-                <a:ea typeface="Calibri" pitchFamily="34" charset="-122"/>
-                <a:cs typeface="Calibri" pitchFamily="34" charset="-120"/>
+                <a:cs typeface="Amiri" pitchFamily="2" charset="-78"/>
               </a:rPr>
               <a:t>P6-L05 · IGCSE Bridge</a:t>
             </a:r>
@@ -4081,8 +4040,7 @@
                   <a:srgbClr val="FFFFFF"/>
                 </a:solidFill>
                 <a:latin typeface="Calibri" pitchFamily="34" charset="0"/>
-                <a:ea typeface="Calibri" pitchFamily="34" charset="-122"/>
-                <a:cs typeface="Calibri" pitchFamily="34" charset="-120"/>
+                <a:cs typeface="Amiri" pitchFamily="2" charset="-78"/>
               </a:rPr>
               <a:t>TEACHER INSTRUCTION · 3 MIN</a:t>
             </a:r>
@@ -4120,8 +4078,7 @@
                   <a:srgbClr val="1B3B6F"/>
                 </a:solidFill>
                 <a:latin typeface="Calibri" pitchFamily="34" charset="0"/>
-                <a:ea typeface="Calibri" pitchFamily="34" charset="-122"/>
-                <a:cs typeface="Calibri" pitchFamily="34" charset="-120"/>
+                <a:cs typeface="Amiri" pitchFamily="2" charset="-78"/>
               </a:rPr>
               <a:t>TEACH · PLAN · WRITE · CHECK (WEBSITE)</a:t>
             </a:r>
@@ -4159,8 +4116,7 @@
                   <a:srgbClr val="1B3B6F"/>
                 </a:solidFill>
                 <a:latin typeface="Cambria" pitchFamily="34" charset="0"/>
-                <a:ea typeface="Cambria" pitchFamily="34" charset="-122"/>
-                <a:cs typeface="Cambria" pitchFamily="34" charset="-120"/>
+                <a:cs typeface="Amiri" pitchFamily="2" charset="-78"/>
               </a:rPr>
               <a:t>Time management and architecture</a:t>
             </a:r>
@@ -4197,9 +4153,8 @@
                 <a:solidFill>
                   <a:srgbClr val="8A6D1E"/>
                 </a:solidFill>
-                <a:latin typeface="Amiri" pitchFamily="34" charset="0"/>
-                <a:ea typeface="Amiri" pitchFamily="34" charset="-122"/>
-                <a:cs typeface="Amiri" pitchFamily="34" charset="-120"/>
+                <a:latin typeface="Amiri" pitchFamily="2" charset="-78"/>
+                <a:cs typeface="Amiri" pitchFamily="2" charset="-78"/>
               </a:rPr>
               <a:t>الوَقْتُ وَالهَيْكَلُ</a:t>
             </a:r>
@@ -4237,8 +4192,7 @@
                   <a:srgbClr val="8A93A0"/>
                 </a:solidFill>
                 <a:latin typeface="Calibri" pitchFamily="34" charset="0"/>
-                <a:ea typeface="Calibri" pitchFamily="34" charset="-122"/>
-                <a:cs typeface="Calibri" pitchFamily="34" charset="-120"/>
+                <a:cs typeface="Amiri" pitchFamily="2" charset="-78"/>
               </a:rPr>
               <a:t>Miftah Arabic · Progression P6 · IGCSE Bridge · P6-L05</a:t>
             </a:r>
@@ -4310,8 +4264,7 @@
                   <a:srgbClr val="1B3B6F"/>
                 </a:solidFill>
                 <a:latin typeface="Calibri" pitchFamily="34" charset="0"/>
-                <a:ea typeface="Calibri" pitchFamily="34" charset="-122"/>
-                <a:cs typeface="Calibri" pitchFamily="34" charset="-120"/>
+                <a:cs typeface="Amiri" pitchFamily="2" charset="-78"/>
               </a:rPr>
               <a:t>TIME MANAGEMENT AND ARCHITECTURE</a:t>
             </a:r>
@@ -4374,8 +4327,7 @@
                   <a:srgbClr val="D4AF37"/>
                 </a:solidFill>
                 <a:latin typeface="Calibri" pitchFamily="34" charset="0"/>
-                <a:ea typeface="Calibri" pitchFamily="34" charset="-122"/>
-                <a:cs typeface="Calibri" pitchFamily="34" charset="-120"/>
+                <a:cs typeface="Amiri" pitchFamily="2" charset="-78"/>
               </a:rPr>
               <a:t>1</a:t>
             </a:r>
@@ -4413,8 +4365,7 @@
                   <a:srgbClr val="1F2A37"/>
                 </a:solidFill>
                 <a:latin typeface="Calibri" pitchFamily="34" charset="0"/>
-                <a:ea typeface="Calibri" pitchFamily="34" charset="-122"/>
-                <a:cs typeface="Calibri" pitchFamily="34" charset="-120"/>
+                <a:cs typeface="Amiri" pitchFamily="2" charset="-78"/>
               </a:rPr>
               <a:t>Split the hour — Paper 4 is 60 minutes: about 20 for Q1, about 35 for Q2, and 5 to check. Do not let Q1 eat Q2's time.</a:t>
             </a:r>
@@ -4477,8 +4428,7 @@
                   <a:srgbClr val="D4AF37"/>
                 </a:solidFill>
                 <a:latin typeface="Calibri" pitchFamily="34" charset="0"/>
-                <a:ea typeface="Calibri" pitchFamily="34" charset="-122"/>
-                <a:cs typeface="Calibri" pitchFamily="34" charset="-120"/>
+                <a:cs typeface="Amiri" pitchFamily="2" charset="-78"/>
               </a:rPr>
               <a:t>2</a:t>
             </a:r>
@@ -4516,8 +4466,7 @@
                   <a:srgbClr val="1F2A37"/>
                 </a:solidFill>
                 <a:latin typeface="Calibri" pitchFamily="34" charset="0"/>
-                <a:ea typeface="Calibri" pitchFamily="34" charset="-122"/>
-                <a:cs typeface="Calibri" pitchFamily="34" charset="-120"/>
+                <a:cs typeface="Amiri" pitchFamily="2" charset="-78"/>
               </a:rPr>
               <a:t>Plan for four minutes — Before writing Q2, plan the thesis, the evidence, the concession-refutation, and the conclusion.</a:t>
             </a:r>
@@ -4580,8 +4529,7 @@
                   <a:srgbClr val="D4AF37"/>
                 </a:solidFill>
                 <a:latin typeface="Calibri" pitchFamily="34" charset="0"/>
-                <a:ea typeface="Calibri" pitchFamily="34" charset="-122"/>
-                <a:cs typeface="Calibri" pitchFamily="34" charset="-120"/>
+                <a:cs typeface="Amiri" pitchFamily="2" charset="-78"/>
               </a:rPr>
               <a:t>3</a:t>
             </a:r>
@@ -4619,8 +4567,7 @@
                   <a:srgbClr val="1F2A37"/>
                 </a:solidFill>
                 <a:latin typeface="Calibri" pitchFamily="34" charset="0"/>
-                <a:ea typeface="Calibri" pitchFamily="34" charset="-122"/>
-                <a:cs typeface="Calibri" pitchFamily="34" charset="-120"/>
+                <a:cs typeface="Amiri" pitchFamily="2" charset="-78"/>
               </a:rPr>
               <a:t>Write the architecture — Each paragraph has a job.</a:t>
             </a:r>
@@ -4683,8 +4630,7 @@
                   <a:srgbClr val="D4AF37"/>
                 </a:solidFill>
                 <a:latin typeface="Calibri" pitchFamily="34" charset="0"/>
-                <a:ea typeface="Calibri" pitchFamily="34" charset="-122"/>
-                <a:cs typeface="Calibri" pitchFamily="34" charset="-120"/>
+                <a:cs typeface="Amiri" pitchFamily="2" charset="-78"/>
               </a:rPr>
               <a:t>4</a:t>
             </a:r>
@@ -4722,8 +4668,7 @@
                   <a:srgbClr val="1F2A37"/>
                 </a:solidFill>
                 <a:latin typeface="Calibri" pitchFamily="34" charset="0"/>
-                <a:ea typeface="Calibri" pitchFamily="34" charset="-122"/>
-                <a:cs typeface="Calibri" pitchFamily="34" charset="-120"/>
+                <a:cs typeface="Amiri" pitchFamily="2" charset="-78"/>
               </a:rPr>
               <a:t>Range without risk — Aim for grammar variety — different tenses, a conditional, a subjunctive trigger, a formal connector — but never at the cost of accuracy.</a:t>
             </a:r>
@@ -4795,8 +4740,7 @@
                   <a:srgbClr val="8A6D1E"/>
                 </a:solidFill>
                 <a:latin typeface="Calibri" pitchFamily="34" charset="0"/>
-                <a:ea typeface="Calibri" pitchFamily="34" charset="-122"/>
-                <a:cs typeface="Calibri" pitchFamily="34" charset="-120"/>
+                <a:cs typeface="Amiri" pitchFamily="2" charset="-78"/>
               </a:rPr>
               <a:t>IN ARABIC</a:t>
             </a:r>
@@ -4833,9 +4777,8 @@
                 <a:solidFill>
                   <a:srgbClr val="1B3B6F"/>
                 </a:solidFill>
-                <a:latin typeface="Amiri" pitchFamily="34" charset="0"/>
-                <a:ea typeface="Amiri" pitchFamily="34" charset="-122"/>
-                <a:cs typeface="Amiri" pitchFamily="34" charset="-120"/>
+                <a:latin typeface="Amiri" pitchFamily="2" charset="-78"/>
+                <a:cs typeface="Amiri" pitchFamily="2" charset="-78"/>
               </a:rPr>
               <a:t>عِشْرُونَ دَقِيقَةً · خَمْسٌ وَثَلَاثُونَ · خَمْسٌ</a:t>
             </a:r>
@@ -4873,8 +4816,7 @@
                   <a:srgbClr val="5A6472"/>
                 </a:solidFill>
                 <a:latin typeface="Calibri" pitchFamily="34" charset="0"/>
-                <a:ea typeface="Calibri" pitchFamily="34" charset="-122"/>
-                <a:cs typeface="Calibri" pitchFamily="34" charset="-120"/>
+                <a:cs typeface="Amiri" pitchFamily="2" charset="-78"/>
               </a:rPr>
               <a:t>Q1 · Q2 · checking</a:t>
             </a:r>
@@ -4934,9 +4876,8 @@
                 <a:solidFill>
                   <a:srgbClr val="1B3B6F"/>
                 </a:solidFill>
-                <a:latin typeface="Amiri" pitchFamily="34" charset="0"/>
-                <a:ea typeface="Amiri" pitchFamily="34" charset="-122"/>
-                <a:cs typeface="Amiri" pitchFamily="34" charset="-120"/>
+                <a:latin typeface="Amiri" pitchFamily="2" charset="-78"/>
+                <a:cs typeface="Amiri" pitchFamily="2" charset="-78"/>
               </a:rPr>
               <a:t>أُطْرُوحَةٌ ← دَلِيلٌ</a:t>
             </a:r>
@@ -4974,8 +4915,7 @@
                   <a:srgbClr val="5A6472"/>
                 </a:solidFill>
                 <a:latin typeface="Calibri" pitchFamily="34" charset="0"/>
-                <a:ea typeface="Calibri" pitchFamily="34" charset="-122"/>
-                <a:cs typeface="Calibri" pitchFamily="34" charset="-120"/>
+                <a:cs typeface="Amiri" pitchFamily="2" charset="-78"/>
               </a:rPr>
               <a:t>thesis → evidence</a:t>
             </a:r>
@@ -5035,9 +4975,8 @@
                 <a:solidFill>
                   <a:srgbClr val="1B3B6F"/>
                 </a:solidFill>
-                <a:latin typeface="Amiri" pitchFamily="34" charset="0"/>
-                <a:ea typeface="Amiri" pitchFamily="34" charset="-122"/>
-                <a:cs typeface="Amiri" pitchFamily="34" charset="-120"/>
+                <a:latin typeface="Amiri" pitchFamily="2" charset="-78"/>
+                <a:cs typeface="Amiri" pitchFamily="2" charset="-78"/>
               </a:rPr>
               <a:t>صَحِيحٌ أَنَّ … غَيْرَ أَنَّ ← وَبِنَاءً عَلَى مَا سَبَقَ</a:t>
             </a:r>
@@ -5075,8 +5014,7 @@
                   <a:srgbClr val="5A6472"/>
                 </a:solidFill>
                 <a:latin typeface="Calibri" pitchFamily="34" charset="0"/>
-                <a:ea typeface="Calibri" pitchFamily="34" charset="-122"/>
-                <a:cs typeface="Calibri" pitchFamily="34" charset="-120"/>
+                <a:cs typeface="Amiri" pitchFamily="2" charset="-78"/>
               </a:rPr>
               <a:t>concession → refutation → conclusion</a:t>
             </a:r>
@@ -5114,8 +5052,7 @@
                   <a:srgbClr val="8A93A0"/>
                 </a:solidFill>
                 <a:latin typeface="Calibri" pitchFamily="34" charset="0"/>
-                <a:ea typeface="Calibri" pitchFamily="34" charset="-122"/>
-                <a:cs typeface="Calibri" pitchFamily="34" charset="-120"/>
+                <a:cs typeface="Amiri" pitchFamily="2" charset="-78"/>
               </a:rPr>
               <a:t>10 / 25</a:t>
             </a:r>
@@ -5209,9 +5146,8 @@
                 <a:solidFill>
                   <a:srgbClr val="D4AF37"/>
                 </a:solidFill>
-                <a:latin typeface="Amiri" pitchFamily="34" charset="0"/>
-                <a:ea typeface="Amiri" pitchFamily="34" charset="-122"/>
-                <a:cs typeface="Amiri" pitchFamily="34" charset="-120"/>
+                <a:latin typeface="Amiri" pitchFamily="2" charset="-78"/>
+                <a:cs typeface="Amiri" pitchFamily="2" charset="-78"/>
               </a:rPr>
               <a:t>م</a:t>
             </a:r>
@@ -5249,8 +5185,7 @@
                   <a:srgbClr val="1B3B6F"/>
                 </a:solidFill>
                 <a:latin typeface="Cambria" pitchFamily="34" charset="0"/>
-                <a:ea typeface="Cambria" pitchFamily="34" charset="-122"/>
-                <a:cs typeface="Cambria" pitchFamily="34" charset="-120"/>
+                <a:cs typeface="Amiri" pitchFamily="2" charset="-78"/>
               </a:rPr>
               <a:t>Al Madina Online School</a:t>
             </a:r>
@@ -5288,8 +5223,7 @@
                   <a:srgbClr val="8A6D1E"/>
                 </a:solidFill>
                 <a:latin typeface="Calibri" pitchFamily="34" charset="0"/>
-                <a:ea typeface="Calibri" pitchFamily="34" charset="-122"/>
-                <a:cs typeface="Calibri" pitchFamily="34" charset="-120"/>
+                <a:cs typeface="Amiri" pitchFamily="2" charset="-78"/>
               </a:rPr>
               <a:t>ARABIC DEPARTMENT · MIFTAH ARABIC · IGCSE 0544</a:t>
             </a:r>
@@ -5354,8 +5288,7 @@
                   <a:srgbClr val="FFFFFF"/>
                 </a:solidFill>
                 <a:latin typeface="Calibri" pitchFamily="34" charset="0"/>
-                <a:ea typeface="Calibri" pitchFamily="34" charset="-122"/>
-                <a:cs typeface="Calibri" pitchFamily="34" charset="-120"/>
+                <a:cs typeface="Amiri" pitchFamily="2" charset="-78"/>
               </a:rPr>
               <a:t>P6-L05 · IGCSE Bridge</a:t>
             </a:r>
@@ -5420,8 +5353,7 @@
                   <a:srgbClr val="FFFFFF"/>
                 </a:solidFill>
                 <a:latin typeface="Calibri" pitchFamily="34" charset="0"/>
-                <a:ea typeface="Calibri" pitchFamily="34" charset="-122"/>
-                <a:cs typeface="Calibri" pitchFamily="34" charset="-120"/>
+                <a:cs typeface="Amiri" pitchFamily="2" charset="-78"/>
               </a:rPr>
               <a:t>TEACHER INSTRUCTION · 2 MIN</a:t>
             </a:r>
@@ -5459,8 +5391,7 @@
                   <a:srgbClr val="1B3B6F"/>
                 </a:solidFill>
                 <a:latin typeface="Calibri" pitchFamily="34" charset="0"/>
-                <a:ea typeface="Calibri" pitchFamily="34" charset="-122"/>
-                <a:cs typeface="Calibri" pitchFamily="34" charset="-120"/>
+                <a:cs typeface="Amiri" pitchFamily="2" charset="-78"/>
               </a:rPr>
               <a:t>TEACH · KNOW HOW YOU ARE MARKED (WEBSITE)</a:t>
             </a:r>
@@ -5498,8 +5429,7 @@
                   <a:srgbClr val="1B3B6F"/>
                 </a:solidFill>
                 <a:latin typeface="Cambria" pitchFamily="34" charset="0"/>
-                <a:ea typeface="Cambria" pitchFamily="34" charset="-122"/>
-                <a:cs typeface="Cambria" pitchFamily="34" charset="-120"/>
+                <a:cs typeface="Amiri" pitchFamily="2" charset="-78"/>
               </a:rPr>
               <a:t>The Paper 4 Q2 mark scheme</a:t>
             </a:r>
@@ -5536,9 +5466,8 @@
                 <a:solidFill>
                   <a:srgbClr val="8A6D1E"/>
                 </a:solidFill>
-                <a:latin typeface="Amiri" pitchFamily="34" charset="0"/>
-                <a:ea typeface="Amiri" pitchFamily="34" charset="-122"/>
-                <a:cs typeface="Amiri" pitchFamily="34" charset="-120"/>
+                <a:latin typeface="Amiri" pitchFamily="2" charset="-78"/>
+                <a:cs typeface="Amiri" pitchFamily="2" charset="-78"/>
               </a:rPr>
               <a:t>مَعَايِيرُ التَّقْيِيمِ</a:t>
             </a:r>
@@ -5576,8 +5505,7 @@
                   <a:srgbClr val="8A93A0"/>
                 </a:solidFill>
                 <a:latin typeface="Calibri" pitchFamily="34" charset="0"/>
-                <a:ea typeface="Calibri" pitchFamily="34" charset="-122"/>
-                <a:cs typeface="Calibri" pitchFamily="34" charset="-120"/>
+                <a:cs typeface="Amiri" pitchFamily="2" charset="-78"/>
               </a:rPr>
               <a:t>Miftah Arabic · Progression P6 · IGCSE Bridge · P6-L05</a:t>
             </a:r>
@@ -5640,8 +5568,7 @@
                   <a:srgbClr val="FFFFFF"/>
                 </a:solidFill>
                 <a:latin typeface="Calibri" pitchFamily="34" charset="0"/>
-                <a:ea typeface="Calibri" pitchFamily="34" charset="-122"/>
-                <a:cs typeface="Calibri" pitchFamily="34" charset="-120"/>
+                <a:cs typeface="Amiri" pitchFamily="2" charset="-78"/>
               </a:rPr>
               <a:t>What the examiner looks for (website)</a:t>
             </a:r>
@@ -5679,8 +5606,7 @@
                   <a:srgbClr val="FFFFFF"/>
                 </a:solidFill>
                 <a:latin typeface="Calibri" pitchFamily="34" charset="0"/>
-                <a:ea typeface="Calibri" pitchFamily="34" charset="-122"/>
-                <a:cs typeface="Calibri" pitchFamily="34" charset="-120"/>
+                <a:cs typeface="Amiri" pitchFamily="2" charset="-78"/>
               </a:rPr>
               <a:t>Marks</a:t>
             </a:r>
@@ -5718,8 +5644,7 @@
                   <a:srgbClr val="FFFFFF"/>
                 </a:solidFill>
                 <a:latin typeface="Calibri" pitchFamily="34" charset="0"/>
-                <a:ea typeface="Calibri" pitchFamily="34" charset="-122"/>
-                <a:cs typeface="Calibri" pitchFamily="34" charset="-120"/>
+                <a:cs typeface="Amiri" pitchFamily="2" charset="-78"/>
               </a:rPr>
               <a:t>Criterion</a:t>
             </a:r>
@@ -5784,8 +5709,7 @@
                   <a:srgbClr val="5A6472"/>
                 </a:solidFill>
                 <a:latin typeface="Calibri" pitchFamily="34" charset="0"/>
-                <a:ea typeface="Calibri" pitchFamily="34" charset="-122"/>
-                <a:cs typeface="Calibri" pitchFamily="34" charset="-120"/>
+                <a:cs typeface="Amiri" pitchFamily="2" charset="-78"/>
               </a:rPr>
               <a:t>A clear thesis (a position, not just a topic) · cited evidence, a genuine concession and a clear refutation · a formal conclusion connector with a verb in -a.</a:t>
             </a:r>
@@ -5823,8 +5747,7 @@
                   <a:srgbClr val="5A6472"/>
                 </a:solidFill>
                 <a:latin typeface="Calibri" pitchFamily="34" charset="0"/>
-                <a:ea typeface="Calibri" pitchFamily="34" charset="-122"/>
-                <a:cs typeface="Calibri" pitchFamily="34" charset="-120"/>
+                <a:cs typeface="Amiri" pitchFamily="2" charset="-78"/>
               </a:rPr>
               <a:t>5</a:t>
             </a:r>
@@ -5862,8 +5785,7 @@
                   <a:srgbClr val="5A6472"/>
                 </a:solidFill>
                 <a:latin typeface="Calibri" pitchFamily="34" charset="0"/>
-                <a:ea typeface="Calibri" pitchFamily="34" charset="-122"/>
-                <a:cs typeface="Calibri" pitchFamily="34" charset="-120"/>
+                <a:cs typeface="Amiri" pitchFamily="2" charset="-78"/>
               </a:rPr>
               <a:t>Task Completion (TC)</a:t>
             </a:r>
@@ -5928,8 +5850,7 @@
                   <a:srgbClr val="FFFFFF"/>
                 </a:solidFill>
                 <a:latin typeface="Calibri" pitchFamily="34" charset="0"/>
-                <a:ea typeface="Calibri" pitchFamily="34" charset="-122"/>
-                <a:cs typeface="Calibri" pitchFamily="34" charset="-120"/>
+                <a:cs typeface="Amiri" pitchFamily="2" charset="-78"/>
               </a:rPr>
               <a:t>CORE</a:t>
             </a:r>
@@ -5994,8 +5915,7 @@
                   <a:srgbClr val="5A6472"/>
                 </a:solidFill>
                 <a:latin typeface="Calibri" pitchFamily="34" charset="0"/>
-                <a:ea typeface="Calibri" pitchFamily="34" charset="-122"/>
-                <a:cs typeface="Calibri" pitchFamily="34" charset="-120"/>
+                <a:cs typeface="Amiri" pitchFamily="2" charset="-78"/>
               </a:rPr>
               <a:t>At least three different tenses · one conditional and one subjunctive trigger · a concession structure and a formal connector.</a:t>
             </a:r>
@@ -6033,8 +5953,7 @@
                   <a:srgbClr val="5A6472"/>
                 </a:solidFill>
                 <a:latin typeface="Calibri" pitchFamily="34" charset="0"/>
-                <a:ea typeface="Calibri" pitchFamily="34" charset="-122"/>
-                <a:cs typeface="Calibri" pitchFamily="34" charset="-120"/>
+                <a:cs typeface="Amiri" pitchFamily="2" charset="-78"/>
               </a:rPr>
               <a:t>5</a:t>
             </a:r>
@@ -6072,8 +5991,7 @@
                   <a:srgbClr val="5A6472"/>
                 </a:solidFill>
                 <a:latin typeface="Calibri" pitchFamily="34" charset="0"/>
-                <a:ea typeface="Calibri" pitchFamily="34" charset="-122"/>
-                <a:cs typeface="Calibri" pitchFamily="34" charset="-120"/>
+                <a:cs typeface="Amiri" pitchFamily="2" charset="-78"/>
               </a:rPr>
               <a:t>Range</a:t>
             </a:r>
@@ -6138,8 +6056,7 @@
                   <a:srgbClr val="5A6472"/>
                 </a:solidFill>
                 <a:latin typeface="Calibri" pitchFamily="34" charset="0"/>
-                <a:ea typeface="Calibri" pitchFamily="34" charset="-122"/>
-                <a:cs typeface="Calibri" pitchFamily="34" charset="-120"/>
+                <a:cs typeface="Amiri" pitchFamily="2" charset="-78"/>
               </a:rPr>
               <a:t>Correct -a after triggers and the Type 2 la- · the indicative after ṣaḥīḥun anna · agreement and tense free of major errors.</a:t>
             </a:r>
@@ -6177,8 +6094,7 @@
                   <a:srgbClr val="5A6472"/>
                 </a:solidFill>
                 <a:latin typeface="Calibri" pitchFamily="34" charset="0"/>
-                <a:ea typeface="Calibri" pitchFamily="34" charset="-122"/>
-                <a:cs typeface="Calibri" pitchFamily="34" charset="-120"/>
+                <a:cs typeface="Amiri" pitchFamily="2" charset="-78"/>
               </a:rPr>
               <a:t>5</a:t>
             </a:r>
@@ -6216,8 +6132,7 @@
                   <a:srgbClr val="5A6472"/>
                 </a:solidFill>
                 <a:latin typeface="Calibri" pitchFamily="34" charset="0"/>
-                <a:ea typeface="Calibri" pitchFamily="34" charset="-122"/>
-                <a:cs typeface="Calibri" pitchFamily="34" charset="-120"/>
+                <a:cs typeface="Amiri" pitchFamily="2" charset="-78"/>
               </a:rPr>
               <a:t>Accuracy</a:t>
             </a:r>
@@ -6255,8 +6170,7 @@
                   <a:srgbClr val="1B3B6F"/>
                 </a:solidFill>
                 <a:latin typeface="Calibri" pitchFamily="34" charset="0"/>
-                <a:ea typeface="Calibri" pitchFamily="34" charset="-122"/>
-                <a:cs typeface="Calibri" pitchFamily="34" charset="-120"/>
+                <a:cs typeface="Amiri" pitchFamily="2" charset="-78"/>
               </a:rPr>
               <a:t>Three equal criteria. Length is capped at 130–150 words — choose the topic whose vocabulary you know best.</a:t>
             </a:r>
@@ -6294,8 +6208,7 @@
                   <a:srgbClr val="8A93A0"/>
                 </a:solidFill>
                 <a:latin typeface="Calibri" pitchFamily="34" charset="0"/>
-                <a:ea typeface="Calibri" pitchFamily="34" charset="-122"/>
-                <a:cs typeface="Calibri" pitchFamily="34" charset="-120"/>
+                <a:cs typeface="Amiri" pitchFamily="2" charset="-78"/>
               </a:rPr>
               <a:t>11 / 25</a:t>
             </a:r>
@@ -6389,9 +6302,8 @@
                 <a:solidFill>
                   <a:srgbClr val="D4AF37"/>
                 </a:solidFill>
-                <a:latin typeface="Amiri" pitchFamily="34" charset="0"/>
-                <a:ea typeface="Amiri" pitchFamily="34" charset="-122"/>
-                <a:cs typeface="Amiri" pitchFamily="34" charset="-120"/>
+                <a:latin typeface="Amiri" pitchFamily="2" charset="-78"/>
+                <a:cs typeface="Amiri" pitchFamily="2" charset="-78"/>
               </a:rPr>
               <a:t>م</a:t>
             </a:r>
@@ -6429,8 +6341,7 @@
                   <a:srgbClr val="1B3B6F"/>
                 </a:solidFill>
                 <a:latin typeface="Cambria" pitchFamily="34" charset="0"/>
-                <a:ea typeface="Cambria" pitchFamily="34" charset="-122"/>
-                <a:cs typeface="Cambria" pitchFamily="34" charset="-120"/>
+                <a:cs typeface="Amiri" pitchFamily="2" charset="-78"/>
               </a:rPr>
               <a:t>Al Madina Online School</a:t>
             </a:r>
@@ -6468,8 +6379,7 @@
                   <a:srgbClr val="8A6D1E"/>
                 </a:solidFill>
                 <a:latin typeface="Calibri" pitchFamily="34" charset="0"/>
-                <a:ea typeface="Calibri" pitchFamily="34" charset="-122"/>
-                <a:cs typeface="Calibri" pitchFamily="34" charset="-120"/>
+                <a:cs typeface="Amiri" pitchFamily="2" charset="-78"/>
               </a:rPr>
               <a:t>ARABIC DEPARTMENT · MIFTAH ARABIC · IGCSE 0544</a:t>
             </a:r>
@@ -6534,8 +6444,7 @@
                   <a:srgbClr val="FFFFFF"/>
                 </a:solidFill>
                 <a:latin typeface="Calibri" pitchFamily="34" charset="0"/>
-                <a:ea typeface="Calibri" pitchFamily="34" charset="-122"/>
-                <a:cs typeface="Calibri" pitchFamily="34" charset="-120"/>
+                <a:cs typeface="Amiri" pitchFamily="2" charset="-78"/>
               </a:rPr>
               <a:t>P6-L05 · IGCSE Bridge</a:t>
             </a:r>
@@ -6600,8 +6509,7 @@
                   <a:srgbClr val="FFFFFF"/>
                 </a:solidFill>
                 <a:latin typeface="Calibri" pitchFamily="34" charset="0"/>
-                <a:ea typeface="Calibri" pitchFamily="34" charset="-122"/>
-                <a:cs typeface="Calibri" pitchFamily="34" charset="-120"/>
+                <a:cs typeface="Amiri" pitchFamily="2" charset="-78"/>
               </a:rPr>
               <a:t>I DO · 4 MIN</a:t>
             </a:r>
@@ -6639,8 +6547,7 @@
                   <a:srgbClr val="6B4C9A"/>
                 </a:solidFill>
                 <a:latin typeface="Calibri" pitchFamily="34" charset="0"/>
-                <a:ea typeface="Calibri" pitchFamily="34" charset="-122"/>
-                <a:cs typeface="Calibri" pitchFamily="34" charset="-120"/>
+                <a:cs typeface="Amiri" pitchFamily="2" charset="-78"/>
               </a:rPr>
               <a:t>I DO · WATCH ME PLAN ESSAY 3 IN FOUR MINUTES</a:t>
             </a:r>
@@ -6678,8 +6585,7 @@
                   <a:srgbClr val="1B3B6F"/>
                 </a:solidFill>
                 <a:latin typeface="Cambria" pitchFamily="34" charset="0"/>
-                <a:ea typeface="Cambria" pitchFamily="34" charset="-122"/>
-                <a:cs typeface="Cambria" pitchFamily="34" charset="-120"/>
+                <a:cs typeface="Amiri" pitchFamily="2" charset="-78"/>
               </a:rPr>
               <a:t>A four-minute plan</a:t>
             </a:r>
@@ -6716,9 +6622,8 @@
                 <a:solidFill>
                   <a:srgbClr val="8A6D1E"/>
                 </a:solidFill>
-                <a:latin typeface="Amiri" pitchFamily="34" charset="0"/>
-                <a:ea typeface="Amiri" pitchFamily="34" charset="-122"/>
-                <a:cs typeface="Amiri" pitchFamily="34" charset="-120"/>
+                <a:latin typeface="Amiri" pitchFamily="2" charset="-78"/>
+                <a:cs typeface="Amiri" pitchFamily="2" charset="-78"/>
               </a:rPr>
               <a:t>خُطَّةُ أَرْبَعِ دَقَائِقَ</a:t>
             </a:r>
@@ -6756,8 +6661,7 @@
                   <a:srgbClr val="8A93A0"/>
                 </a:solidFill>
                 <a:latin typeface="Calibri" pitchFamily="34" charset="0"/>
-                <a:ea typeface="Calibri" pitchFamily="34" charset="-122"/>
-                <a:cs typeface="Calibri" pitchFamily="34" charset="-120"/>
+                <a:cs typeface="Amiri" pitchFamily="2" charset="-78"/>
               </a:rPr>
               <a:t>Miftah Arabic · Progression P6 · IGCSE Bridge · P6-L05</a:t>
             </a:r>
@@ -6820,8 +6724,7 @@
                   <a:srgbClr val="FFFFFF"/>
                 </a:solidFill>
                 <a:latin typeface="Calibri" pitchFamily="34" charset="0"/>
-                <a:ea typeface="Calibri" pitchFamily="34" charset="-122"/>
-                <a:cs typeface="Calibri" pitchFamily="34" charset="-120"/>
+                <a:cs typeface="Amiri" pitchFamily="2" charset="-78"/>
               </a:rPr>
               <a:t>Range ticks</a:t>
             </a:r>
@@ -6859,8 +6762,7 @@
                   <a:srgbClr val="FFFFFF"/>
                 </a:solidFill>
                 <a:latin typeface="Calibri" pitchFamily="34" charset="0"/>
-                <a:ea typeface="Calibri" pitchFamily="34" charset="-122"/>
-                <a:cs typeface="Calibri" pitchFamily="34" charset="-120"/>
+                <a:cs typeface="Amiri" pitchFamily="2" charset="-78"/>
               </a:rPr>
               <a:t>My plan (notes, not sentences)</a:t>
             </a:r>
@@ -6898,8 +6800,7 @@
                   <a:srgbClr val="FFFFFF"/>
                 </a:solidFill>
                 <a:latin typeface="Calibri" pitchFamily="34" charset="0"/>
-                <a:ea typeface="Calibri" pitchFamily="34" charset="-122"/>
-                <a:cs typeface="Calibri" pitchFamily="34" charset="-120"/>
+                <a:cs typeface="Amiri" pitchFamily="2" charset="-78"/>
               </a:rPr>
               <a:t>Job</a:t>
             </a:r>
@@ -6937,8 +6838,7 @@
                   <a:srgbClr val="FFFFFF"/>
                 </a:solidFill>
                 <a:latin typeface="Calibri" pitchFamily="34" charset="0"/>
-                <a:ea typeface="Calibri" pitchFamily="34" charset="-122"/>
-                <a:cs typeface="Calibri" pitchFamily="34" charset="-120"/>
+                <a:cs typeface="Amiri" pitchFamily="2" charset="-78"/>
               </a:rPr>
               <a:t>Para.</a:t>
             </a:r>
@@ -7003,8 +6903,7 @@
                   <a:srgbClr val="5A6472"/>
                 </a:solidFill>
                 <a:latin typeface="Calibri" pitchFamily="34" charset="0"/>
-                <a:ea typeface="Calibri" pitchFamily="34" charset="-122"/>
-                <a:cs typeface="Calibri" pitchFamily="34" charset="-120"/>
+                <a:cs typeface="Amiri" pitchFamily="2" charset="-78"/>
               </a:rPr>
               <a:t>yushāru ilā anna</a:t>
             </a:r>
@@ -7041,9 +6940,8 @@
                 <a:solidFill>
                   <a:srgbClr val="1B3B6F"/>
                 </a:solidFill>
-                <a:latin typeface="Amiri" pitchFamily="34" charset="0"/>
-                <a:ea typeface="Amiri" pitchFamily="34" charset="-122"/>
-                <a:cs typeface="Amiri" pitchFamily="34" charset="-120"/>
+                <a:latin typeface="Amiri" pitchFamily="2" charset="-78"/>
+                <a:cs typeface="Amiri" pitchFamily="2" charset="-78"/>
               </a:rPr>
               <a:t>سِلَاحٌ ذُو حَدَّيْنِ</a:t>
             </a:r>
@@ -7081,8 +6979,7 @@
                   <a:srgbClr val="5A6472"/>
                 </a:solidFill>
                 <a:latin typeface="Calibri" pitchFamily="34" charset="0"/>
-                <a:ea typeface="Calibri" pitchFamily="34" charset="-122"/>
-                <a:cs typeface="Calibri" pitchFamily="34" charset="-120"/>
+                <a:cs typeface="Amiri" pitchFamily="2" charset="-78"/>
               </a:rPr>
               <a:t>thesis</a:t>
             </a:r>
@@ -7120,8 +7017,7 @@
                   <a:srgbClr val="5A6472"/>
                 </a:solidFill>
                 <a:latin typeface="Calibri" pitchFamily="34" charset="0"/>
-                <a:ea typeface="Calibri" pitchFamily="34" charset="-122"/>
-                <a:cs typeface="Calibri" pitchFamily="34" charset="-120"/>
+                <a:cs typeface="Amiri" pitchFamily="2" charset="-78"/>
               </a:rPr>
               <a:t>1</a:t>
             </a:r>
@@ -7186,8 +7082,7 @@
                   <a:srgbClr val="FFFFFF"/>
                 </a:solidFill>
                 <a:latin typeface="Calibri" pitchFamily="34" charset="0"/>
-                <a:ea typeface="Calibri" pitchFamily="34" charset="-122"/>
-                <a:cs typeface="Calibri" pitchFamily="34" charset="-120"/>
+                <a:cs typeface="Amiri" pitchFamily="2" charset="-78"/>
               </a:rPr>
               <a:t>CORE</a:t>
             </a:r>
@@ -7252,8 +7147,7 @@
                   <a:srgbClr val="5A6472"/>
                 </a:solidFill>
                 <a:latin typeface="Calibri" pitchFamily="34" charset="0"/>
-                <a:ea typeface="Calibri" pitchFamily="34" charset="-122"/>
-                <a:cs typeface="Calibri" pitchFamily="34" charset="-120"/>
+                <a:cs typeface="Amiri" pitchFamily="2" charset="-78"/>
               </a:rPr>
               <a:t>akkada … anna · present</a:t>
             </a:r>
@@ -7290,9 +7184,8 @@
                 <a:solidFill>
                   <a:srgbClr val="1B3B6F"/>
                 </a:solidFill>
-                <a:latin typeface="Amiri" pitchFamily="34" charset="0"/>
-                <a:ea typeface="Amiri" pitchFamily="34" charset="-122"/>
-                <a:cs typeface="Amiri" pitchFamily="34" charset="-120"/>
+                <a:latin typeface="Amiri" pitchFamily="2" charset="-78"/>
+                <a:cs typeface="Amiri" pitchFamily="2" charset="-78"/>
               </a:rPr>
               <a:t>البَاحِثُونَ: الإِفْرَاطُ ← التَّرْكِيزُ</a:t>
             </a:r>
@@ -7330,8 +7223,7 @@
                   <a:srgbClr val="5A6472"/>
                 </a:solidFill>
                 <a:latin typeface="Calibri" pitchFamily="34" charset="0"/>
-                <a:ea typeface="Calibri" pitchFamily="34" charset="-122"/>
-                <a:cs typeface="Calibri" pitchFamily="34" charset="-120"/>
+                <a:cs typeface="Amiri" pitchFamily="2" charset="-78"/>
               </a:rPr>
               <a:t>evidence</a:t>
             </a:r>
@@ -7369,8 +7261,7 @@
                   <a:srgbClr val="5A6472"/>
                 </a:solidFill>
                 <a:latin typeface="Calibri" pitchFamily="34" charset="0"/>
-                <a:ea typeface="Calibri" pitchFamily="34" charset="-122"/>
-                <a:cs typeface="Calibri" pitchFamily="34" charset="-120"/>
+                <a:cs typeface="Amiri" pitchFamily="2" charset="-78"/>
               </a:rPr>
               <a:t>2</a:t>
             </a:r>
@@ -7435,8 +7326,7 @@
                   <a:srgbClr val="FFFFFF"/>
                 </a:solidFill>
                 <a:latin typeface="Calibri" pitchFamily="34" charset="0"/>
-                <a:ea typeface="Calibri" pitchFamily="34" charset="-122"/>
-                <a:cs typeface="Calibri" pitchFamily="34" charset="-120"/>
+                <a:cs typeface="Amiri" pitchFamily="2" charset="-78"/>
               </a:rPr>
               <a:t>CORE</a:t>
             </a:r>
@@ -7501,8 +7391,7 @@
                   <a:srgbClr val="5A6472"/>
                 </a:solidFill>
                 <a:latin typeface="Calibri" pitchFamily="34" charset="0"/>
-                <a:ea typeface="Calibri" pitchFamily="34" charset="-122"/>
-                <a:cs typeface="Calibri" pitchFamily="34" charset="-120"/>
+                <a:cs typeface="Amiri" pitchFamily="2" charset="-78"/>
               </a:rPr>
               <a:t>ṣaḥīḥun anna … ghayra anna</a:t>
             </a:r>
@@ -7539,9 +7428,8 @@
                 <a:solidFill>
                   <a:srgbClr val="1B3B6F"/>
                 </a:solidFill>
-                <a:latin typeface="Amiri" pitchFamily="34" charset="0"/>
-                <a:ea typeface="Amiri" pitchFamily="34" charset="-122"/>
-                <a:cs typeface="Amiri" pitchFamily="34" charset="-120"/>
+                <a:latin typeface="Amiri" pitchFamily="2" charset="-78"/>
+                <a:cs typeface="Amiri" pitchFamily="2" charset="-78"/>
               </a:rPr>
               <a:t>تُقَرِّبُ النَّاسَ ✗ ← تَنْشُرُ المَعْلُومَاتِ المُضَلِّلَةَ</a:t>
             </a:r>
@@ -7579,8 +7467,7 @@
                   <a:srgbClr val="5A6472"/>
                 </a:solidFill>
                 <a:latin typeface="Calibri" pitchFamily="34" charset="0"/>
-                <a:ea typeface="Calibri" pitchFamily="34" charset="-122"/>
-                <a:cs typeface="Calibri" pitchFamily="34" charset="-120"/>
+                <a:cs typeface="Amiri" pitchFamily="2" charset="-78"/>
               </a:rPr>
               <a:t>concession + refutation</a:t>
             </a:r>
@@ -7618,8 +7505,7 @@
                   <a:srgbClr val="5A6472"/>
                 </a:solidFill>
                 <a:latin typeface="Calibri" pitchFamily="34" charset="0"/>
-                <a:ea typeface="Calibri" pitchFamily="34" charset="-122"/>
-                <a:cs typeface="Calibri" pitchFamily="34" charset="-120"/>
+                <a:cs typeface="Amiri" pitchFamily="2" charset="-78"/>
               </a:rPr>
               <a:t>3</a:t>
             </a:r>
@@ -7684,8 +7570,7 @@
                   <a:srgbClr val="FFFFFF"/>
                 </a:solidFill>
                 <a:latin typeface="Calibri" pitchFamily="34" charset="0"/>
-                <a:ea typeface="Calibri" pitchFamily="34" charset="-122"/>
-                <a:cs typeface="Calibri" pitchFamily="34" charset="-120"/>
+                <a:cs typeface="Amiri" pitchFamily="2" charset="-78"/>
               </a:rPr>
               <a:t>CORE</a:t>
             </a:r>
@@ -7750,8 +7635,7 @@
                   <a:srgbClr val="5A6472"/>
                 </a:solidFill>
                 <a:latin typeface="Calibri" pitchFamily="34" charset="0"/>
-                <a:ea typeface="Calibri" pitchFamily="34" charset="-122"/>
-                <a:cs typeface="Calibri" pitchFamily="34" charset="-120"/>
+                <a:cs typeface="Amiri" pitchFamily="2" charset="-78"/>
               </a:rPr>
               <a:t>law … la- · idhā … sa-</a:t>
             </a:r>
@@ -7788,9 +7672,8 @@
                 <a:solidFill>
                   <a:srgbClr val="1B3B6F"/>
                 </a:solidFill>
-                <a:latin typeface="Amiri" pitchFamily="34" charset="0"/>
-                <a:ea typeface="Amiri" pitchFamily="34" charset="-122"/>
-                <a:cs typeface="Amiri" pitchFamily="34" charset="-120"/>
+                <a:latin typeface="Amiri" pitchFamily="2" charset="-78"/>
+                <a:cs typeface="Amiri" pitchFamily="2" charset="-78"/>
               </a:rPr>
               <a:t>ضَوَابِطُ حَكِيمَةٌ · اسْتِخْدَامٌ وَاعٍ</a:t>
             </a:r>
@@ -7828,8 +7711,7 @@
                   <a:srgbClr val="5A6472"/>
                 </a:solidFill>
                 <a:latin typeface="Calibri" pitchFamily="34" charset="0"/>
-                <a:ea typeface="Calibri" pitchFamily="34" charset="-122"/>
-                <a:cs typeface="Calibri" pitchFamily="34" charset="-120"/>
+                <a:cs typeface="Amiri" pitchFamily="2" charset="-78"/>
               </a:rPr>
               <a:t>analysis</a:t>
             </a:r>
@@ -7867,8 +7749,7 @@
                   <a:srgbClr val="5A6472"/>
                 </a:solidFill>
                 <a:latin typeface="Calibri" pitchFamily="34" charset="0"/>
-                <a:ea typeface="Calibri" pitchFamily="34" charset="-122"/>
-                <a:cs typeface="Calibri" pitchFamily="34" charset="-120"/>
+                <a:cs typeface="Amiri" pitchFamily="2" charset="-78"/>
               </a:rPr>
               <a:t>3</a:t>
             </a:r>
@@ -7933,8 +7814,7 @@
                   <a:srgbClr val="5A6472"/>
                 </a:solidFill>
                 <a:latin typeface="Calibri" pitchFamily="34" charset="0"/>
-                <a:ea typeface="Calibri" pitchFamily="34" charset="-122"/>
-                <a:cs typeface="Calibri" pitchFamily="34" charset="-120"/>
+                <a:cs typeface="Amiri" pitchFamily="2" charset="-78"/>
               </a:rPr>
               <a:t>wa-bināʾan + an / li-kay</a:t>
             </a:r>
@@ -7971,9 +7851,8 @@
                 <a:solidFill>
                   <a:srgbClr val="1B3B6F"/>
                 </a:solidFill>
-                <a:latin typeface="Amiri" pitchFamily="34" charset="0"/>
-                <a:ea typeface="Amiri" pitchFamily="34" charset="-122"/>
-                <a:cs typeface="Amiri" pitchFamily="34" charset="-120"/>
+                <a:latin typeface="Amiri" pitchFamily="2" charset="-78"/>
+                <a:cs typeface="Amiri" pitchFamily="2" charset="-78"/>
               </a:rPr>
               <a:t>تَرْبِيَةُ الأَجْيَالِ ← الفَوَائِدُ</a:t>
             </a:r>
@@ -8011,8 +7890,7 @@
                   <a:srgbClr val="5A6472"/>
                 </a:solidFill>
                 <a:latin typeface="Calibri" pitchFamily="34" charset="0"/>
-                <a:ea typeface="Calibri" pitchFamily="34" charset="-122"/>
-                <a:cs typeface="Calibri" pitchFamily="34" charset="-120"/>
+                <a:cs typeface="Amiri" pitchFamily="2" charset="-78"/>
               </a:rPr>
               <a:t>conclusion</a:t>
             </a:r>
@@ -8050,8 +7928,7 @@
                   <a:srgbClr val="5A6472"/>
                 </a:solidFill>
                 <a:latin typeface="Calibri" pitchFamily="34" charset="0"/>
-                <a:ea typeface="Calibri" pitchFamily="34" charset="-122"/>
-                <a:cs typeface="Calibri" pitchFamily="34" charset="-120"/>
+                <a:cs typeface="Amiri" pitchFamily="2" charset="-78"/>
               </a:rPr>
               <a:t>4</a:t>
             </a:r>
@@ -8116,8 +7993,7 @@
                   <a:srgbClr val="FFFFFF"/>
                 </a:solidFill>
                 <a:latin typeface="Calibri" pitchFamily="34" charset="0"/>
-                <a:ea typeface="Calibri" pitchFamily="34" charset="-122"/>
-                <a:cs typeface="Calibri" pitchFamily="34" charset="-120"/>
+                <a:cs typeface="Amiri" pitchFamily="2" charset="-78"/>
               </a:rPr>
               <a:t>CORE</a:t>
             </a:r>
@@ -8155,8 +8031,7 @@
                   <a:srgbClr val="1B3B6F"/>
                 </a:solidFill>
                 <a:latin typeface="Calibri" pitchFamily="34" charset="0"/>
-                <a:ea typeface="Calibri" pitchFamily="34" charset="-122"/>
-                <a:cs typeface="Calibri" pitchFamily="34" charset="-120"/>
+                <a:cs typeface="Amiri" pitchFamily="2" charset="-78"/>
               </a:rPr>
               <a:t>Notes, not sentences: four minutes. Then write paragraph by paragraph, ticking the Range column.</a:t>
             </a:r>
@@ -8194,8 +8069,7 @@
                   <a:srgbClr val="8A93A0"/>
                 </a:solidFill>
                 <a:latin typeface="Calibri" pitchFamily="34" charset="0"/>
-                <a:ea typeface="Calibri" pitchFamily="34" charset="-122"/>
-                <a:cs typeface="Calibri" pitchFamily="34" charset="-120"/>
+                <a:cs typeface="Amiri" pitchFamily="2" charset="-78"/>
               </a:rPr>
               <a:t>12 / 25</a:t>
             </a:r>
@@ -8289,9 +8163,8 @@
                 <a:solidFill>
                   <a:srgbClr val="D4AF37"/>
                 </a:solidFill>
-                <a:latin typeface="Amiri" pitchFamily="34" charset="0"/>
-                <a:ea typeface="Amiri" pitchFamily="34" charset="-122"/>
-                <a:cs typeface="Amiri" pitchFamily="34" charset="-120"/>
+                <a:latin typeface="Amiri" pitchFamily="2" charset="-78"/>
+                <a:cs typeface="Amiri" pitchFamily="2" charset="-78"/>
               </a:rPr>
               <a:t>م</a:t>
             </a:r>
@@ -8329,8 +8202,7 @@
                   <a:srgbClr val="1B3B6F"/>
                 </a:solidFill>
                 <a:latin typeface="Cambria" pitchFamily="34" charset="0"/>
-                <a:ea typeface="Cambria" pitchFamily="34" charset="-122"/>
-                <a:cs typeface="Cambria" pitchFamily="34" charset="-120"/>
+                <a:cs typeface="Amiri" pitchFamily="2" charset="-78"/>
               </a:rPr>
               <a:t>Al Madina Online School</a:t>
             </a:r>
@@ -8368,8 +8240,7 @@
                   <a:srgbClr val="8A6D1E"/>
                 </a:solidFill>
                 <a:latin typeface="Calibri" pitchFamily="34" charset="0"/>
-                <a:ea typeface="Calibri" pitchFamily="34" charset="-122"/>
-                <a:cs typeface="Calibri" pitchFamily="34" charset="-120"/>
+                <a:cs typeface="Amiri" pitchFamily="2" charset="-78"/>
               </a:rPr>
               <a:t>ARABIC DEPARTMENT · MIFTAH ARABIC · IGCSE 0544</a:t>
             </a:r>
@@ -8434,8 +8305,7 @@
                   <a:srgbClr val="FFFFFF"/>
                 </a:solidFill>
                 <a:latin typeface="Calibri" pitchFamily="34" charset="0"/>
-                <a:ea typeface="Calibri" pitchFamily="34" charset="-122"/>
-                <a:cs typeface="Calibri" pitchFamily="34" charset="-120"/>
+                <a:cs typeface="Amiri" pitchFamily="2" charset="-78"/>
               </a:rPr>
               <a:t>P6-L05 · IGCSE Bridge</a:t>
             </a:r>
@@ -8500,8 +8370,7 @@
                   <a:srgbClr val="FFFFFF"/>
                 </a:solidFill>
                 <a:latin typeface="Calibri" pitchFamily="34" charset="0"/>
-                <a:ea typeface="Calibri" pitchFamily="34" charset="-122"/>
-                <a:cs typeface="Calibri" pitchFamily="34" charset="-120"/>
+                <a:cs typeface="Amiri" pitchFamily="2" charset="-78"/>
               </a:rPr>
               <a:t>YOU DO · 2 MIN</a:t>
             </a:r>
@@ -8539,8 +8408,7 @@
                   <a:srgbClr val="1E6B52"/>
                 </a:solidFill>
                 <a:latin typeface="Calibri" pitchFamily="34" charset="0"/>
-                <a:ea typeface="Calibri" pitchFamily="34" charset="-122"/>
-                <a:cs typeface="Calibri" pitchFamily="34" charset="-120"/>
+                <a:cs typeface="Amiri" pitchFamily="2" charset="-78"/>
               </a:rPr>
               <a:t>YOU DO · CHOOSE YOUR ESSAY · PLAN 4 + WRITE 21 MINUTES</a:t>
             </a:r>
@@ -8578,8 +8446,7 @@
                   <a:srgbClr val="1B3B6F"/>
                 </a:solidFill>
                 <a:latin typeface="Cambria" pitchFamily="34" charset="0"/>
-                <a:ea typeface="Cambria" pitchFamily="34" charset="-122"/>
-                <a:cs typeface="Cambria" pitchFamily="34" charset="-120"/>
+                <a:cs typeface="Amiri" pitchFamily="2" charset="-78"/>
               </a:rPr>
               <a:t>Choose your essay and your route</a:t>
             </a:r>
@@ -8616,9 +8483,8 @@
                 <a:solidFill>
                   <a:srgbClr val="8A6D1E"/>
                 </a:solidFill>
-                <a:latin typeface="Amiri" pitchFamily="34" charset="0"/>
-                <a:ea typeface="Amiri" pitchFamily="34" charset="-122"/>
-                <a:cs typeface="Amiri" pitchFamily="34" charset="-120"/>
+                <a:latin typeface="Amiri" pitchFamily="2" charset="-78"/>
+                <a:cs typeface="Amiri" pitchFamily="2" charset="-78"/>
               </a:rPr>
               <a:t>اخْتَرْ مَقَالَكَ</a:t>
             </a:r>
@@ -8656,8 +8522,7 @@
                   <a:srgbClr val="8A93A0"/>
                 </a:solidFill>
                 <a:latin typeface="Calibri" pitchFamily="34" charset="0"/>
-                <a:ea typeface="Calibri" pitchFamily="34" charset="-122"/>
-                <a:cs typeface="Calibri" pitchFamily="34" charset="-120"/>
+                <a:cs typeface="Amiri" pitchFamily="2" charset="-78"/>
               </a:rPr>
               <a:t>Miftah Arabic · Progression P6 · IGCSE Bridge · P6-L05</a:t>
             </a:r>
@@ -8756,8 +8621,7 @@
                   <a:srgbClr val="FFFFFF"/>
                 </a:solidFill>
                 <a:latin typeface="Calibri" pitchFamily="34" charset="0"/>
-                <a:ea typeface="Calibri" pitchFamily="34" charset="-122"/>
-                <a:cs typeface="Calibri" pitchFamily="34" charset="-120"/>
+                <a:cs typeface="Amiri" pitchFamily="2" charset="-78"/>
               </a:rPr>
               <a:t>CORE</a:t>
             </a:r>
@@ -8794,9 +8658,8 @@
                 <a:solidFill>
                   <a:srgbClr val="2E8B57"/>
                 </a:solidFill>
-                <a:latin typeface="Amiri" pitchFamily="34" charset="0"/>
-                <a:ea typeface="Amiri" pitchFamily="34" charset="-122"/>
-                <a:cs typeface="Amiri" pitchFamily="34" charset="-120"/>
+                <a:latin typeface="Amiri" pitchFamily="2" charset="-78"/>
+                <a:cs typeface="Amiri" pitchFamily="2" charset="-78"/>
               </a:rPr>
               <a:t>الأَسَاسُ</a:t>
             </a:r>
@@ -8834,8 +8697,7 @@
                   <a:srgbClr val="2E8B57"/>
                 </a:solidFill>
                 <a:latin typeface="Cambria" pitchFamily="34" charset="0"/>
-                <a:ea typeface="Cambria" pitchFamily="34" charset="-122"/>
-                <a:cs typeface="Cambria" pitchFamily="34" charset="-120"/>
+                <a:cs typeface="Amiri" pitchFamily="2" charset="-78"/>
               </a:rPr>
               <a:t>90–110 words</a:t>
             </a:r>
@@ -8873,8 +8735,7 @@
                   <a:srgbClr val="1F2A37"/>
                 </a:solidFill>
                 <a:latin typeface="Calibri" pitchFamily="34" charset="0"/>
-                <a:ea typeface="Calibri" pitchFamily="34" charset="-122"/>
-                <a:cs typeface="Calibri" pitchFamily="34" charset="-120"/>
+                <a:cs typeface="Amiri" pitchFamily="2" charset="-78"/>
               </a:rPr>
               <a:t>Any essay, with the essay skeleton frames: thesis · evidence · concession–refutation · conclusion.</a:t>
             </a:r>
@@ -8939,8 +8800,7 @@
                   <a:srgbClr val="2E8B57"/>
                 </a:solidFill>
                 <a:latin typeface="Calibri" pitchFamily="34" charset="0"/>
-                <a:ea typeface="Calibri" pitchFamily="34" charset="-122"/>
-                <a:cs typeface="Calibri" pitchFamily="34" charset="-120"/>
+                <a:cs typeface="Amiri" pitchFamily="2" charset="-78"/>
               </a:rPr>
               <a:t>HOW</a:t>
             </a:r>
@@ -8956,8 +8816,7 @@
                   <a:srgbClr val="1F2A37"/>
                 </a:solidFill>
                 <a:latin typeface="Calibri" pitchFamily="34" charset="0"/>
-                <a:ea typeface="Calibri" pitchFamily="34" charset="-122"/>
-                <a:cs typeface="Calibri" pitchFamily="34" charset="-120"/>
+                <a:cs typeface="Amiri" pitchFamily="2" charset="-78"/>
               </a:rPr>
               <a:t>Fill the frames, then add one sentence of your own to each paragraph.</a:t>
             </a:r>
@@ -9056,8 +8915,7 @@
                   <a:srgbClr val="FFFFFF"/>
                 </a:solidFill>
                 <a:latin typeface="Calibri" pitchFamily="34" charset="0"/>
-                <a:ea typeface="Calibri" pitchFamily="34" charset="-122"/>
-                <a:cs typeface="Calibri" pitchFamily="34" charset="-120"/>
+                <a:cs typeface="Amiri" pitchFamily="2" charset="-78"/>
               </a:rPr>
               <a:t>DEVELOP</a:t>
             </a:r>
@@ -9094,9 +8952,8 @@
                 <a:solidFill>
                   <a:srgbClr val="C9780A"/>
                 </a:solidFill>
-                <a:latin typeface="Amiri" pitchFamily="34" charset="0"/>
-                <a:ea typeface="Amiri" pitchFamily="34" charset="-122"/>
-                <a:cs typeface="Amiri" pitchFamily="34" charset="-120"/>
+                <a:latin typeface="Amiri" pitchFamily="2" charset="-78"/>
+                <a:cs typeface="Amiri" pitchFamily="2" charset="-78"/>
               </a:rPr>
               <a:t>التَّطْوِيرُ</a:t>
             </a:r>
@@ -9134,8 +8991,7 @@
                   <a:srgbClr val="C9780A"/>
                 </a:solidFill>
                 <a:latin typeface="Cambria" pitchFamily="34" charset="0"/>
-                <a:ea typeface="Cambria" pitchFamily="34" charset="-122"/>
-                <a:cs typeface="Cambria" pitchFamily="34" charset="-120"/>
+                <a:cs typeface="Amiri" pitchFamily="2" charset="-78"/>
               </a:rPr>
               <a:t>130 words</a:t>
             </a:r>
@@ -9173,8 +9029,7 @@
                   <a:srgbClr val="1F2A37"/>
                 </a:solidFill>
                 <a:latin typeface="Calibri" pitchFamily="34" charset="0"/>
-                <a:ea typeface="Calibri" pitchFamily="34" charset="-122"/>
-                <a:cs typeface="Calibri" pitchFamily="34" charset="-120"/>
+                <a:cs typeface="Amiri" pitchFamily="2" charset="-78"/>
               </a:rPr>
               <a:t>Any essay with the full architecture and one conditional.</a:t>
             </a:r>
@@ -9239,8 +9094,7 @@
                   <a:srgbClr val="C9780A"/>
                 </a:solidFill>
                 <a:latin typeface="Calibri" pitchFamily="34" charset="0"/>
-                <a:ea typeface="Calibri" pitchFamily="34" charset="-122"/>
-                <a:cs typeface="Calibri" pitchFamily="34" charset="-120"/>
+                <a:cs typeface="Amiri" pitchFamily="2" charset="-78"/>
               </a:rPr>
               <a:t>HOW</a:t>
             </a:r>
@@ -9256,8 +9110,7 @@
                   <a:srgbClr val="1F2A37"/>
                 </a:solidFill>
                 <a:latin typeface="Calibri" pitchFamily="34" charset="0"/>
-                <a:ea typeface="Calibri" pitchFamily="34" charset="-122"/>
-                <a:cs typeface="Calibri" pitchFamily="34" charset="-120"/>
+                <a:cs typeface="Amiri" pitchFamily="2" charset="-78"/>
               </a:rPr>
               <a:t>Plan 4 min · write 21 min · leave 2 min to check every -a.</a:t>
             </a:r>
@@ -9356,8 +9209,7 @@
                   <a:srgbClr val="FFFFFF"/>
                 </a:solidFill>
                 <a:latin typeface="Calibri" pitchFamily="34" charset="0"/>
-                <a:ea typeface="Calibri" pitchFamily="34" charset="-122"/>
-                <a:cs typeface="Calibri" pitchFamily="34" charset="-120"/>
+                <a:cs typeface="Amiri" pitchFamily="2" charset="-78"/>
               </a:rPr>
               <a:t>STRETCH</a:t>
             </a:r>
@@ -9394,9 +9246,8 @@
                 <a:solidFill>
                   <a:srgbClr val="B83227"/>
                 </a:solidFill>
-                <a:latin typeface="Amiri" pitchFamily="34" charset="0"/>
-                <a:ea typeface="Amiri" pitchFamily="34" charset="-122"/>
-                <a:cs typeface="Amiri" pitchFamily="34" charset="-120"/>
+                <a:latin typeface="Amiri" pitchFamily="2" charset="-78"/>
+                <a:cs typeface="Amiri" pitchFamily="2" charset="-78"/>
               </a:rPr>
               <a:t>التَّحَدِّي</a:t>
             </a:r>
@@ -9434,8 +9285,7 @@
                   <a:srgbClr val="B83227"/>
                 </a:solidFill>
                 <a:latin typeface="Cambria" pitchFamily="34" charset="0"/>
-                <a:ea typeface="Cambria" pitchFamily="34" charset="-122"/>
-                <a:cs typeface="Cambria" pitchFamily="34" charset="-120"/>
+                <a:cs typeface="Amiri" pitchFamily="2" charset="-78"/>
               </a:rPr>
               <a:t>150 words</a:t>
             </a:r>
@@ -9473,8 +9323,7 @@
                   <a:srgbClr val="1F2A37"/>
                 </a:solidFill>
                 <a:latin typeface="Calibri" pitchFamily="34" charset="0"/>
-                <a:ea typeface="Calibri" pitchFamily="34" charset="-122"/>
-                <a:cs typeface="Calibri" pitchFamily="34" charset="-120"/>
+                <a:cs typeface="Amiri" pitchFamily="2" charset="-78"/>
               </a:rPr>
               <a:t>Any essay with the full architecture, BOTH conditionals and two triggers.</a:t>
             </a:r>
@@ -9539,8 +9388,7 @@
                   <a:srgbClr val="B83227"/>
                 </a:solidFill>
                 <a:latin typeface="Calibri" pitchFamily="34" charset="0"/>
-                <a:ea typeface="Calibri" pitchFamily="34" charset="-122"/>
-                <a:cs typeface="Calibri" pitchFamily="34" charset="-120"/>
+                <a:cs typeface="Amiri" pitchFamily="2" charset="-78"/>
               </a:rPr>
               <a:t>HOW</a:t>
             </a:r>
@@ -9556,8 +9404,7 @@
                   <a:srgbClr val="1F2A37"/>
                 </a:solidFill>
                 <a:latin typeface="Calibri" pitchFamily="34" charset="0"/>
-                <a:ea typeface="Calibri" pitchFamily="34" charset="-122"/>
-                <a:cs typeface="Calibri" pitchFamily="34" charset="-120"/>
+                <a:cs typeface="Amiri" pitchFamily="2" charset="-78"/>
               </a:rPr>
               <a:t>Choose the topic whose vocabulary you know best. Check ṣaḥīḥun anna + -u.</a:t>
             </a:r>
@@ -9595,8 +9442,7 @@
                   <a:srgbClr val="8A93A0"/>
                 </a:solidFill>
                 <a:latin typeface="Calibri" pitchFamily="34" charset="0"/>
-                <a:ea typeface="Calibri" pitchFamily="34" charset="-122"/>
-                <a:cs typeface="Calibri" pitchFamily="34" charset="-120"/>
+                <a:cs typeface="Amiri" pitchFamily="2" charset="-78"/>
               </a:rPr>
               <a:t>13 / 25</a:t>
             </a:r>
@@ -9690,9 +9536,8 @@
                 <a:solidFill>
                   <a:srgbClr val="D4AF37"/>
                 </a:solidFill>
-                <a:latin typeface="Amiri" pitchFamily="34" charset="0"/>
-                <a:ea typeface="Amiri" pitchFamily="34" charset="-122"/>
-                <a:cs typeface="Amiri" pitchFamily="34" charset="-120"/>
+                <a:latin typeface="Amiri" pitchFamily="2" charset="-78"/>
+                <a:cs typeface="Amiri" pitchFamily="2" charset="-78"/>
               </a:rPr>
               <a:t>م</a:t>
             </a:r>
@@ -9730,8 +9575,7 @@
                   <a:srgbClr val="1B3B6F"/>
                 </a:solidFill>
                 <a:latin typeface="Cambria" pitchFamily="34" charset="0"/>
-                <a:ea typeface="Cambria" pitchFamily="34" charset="-122"/>
-                <a:cs typeface="Cambria" pitchFamily="34" charset="-120"/>
+                <a:cs typeface="Amiri" pitchFamily="2" charset="-78"/>
               </a:rPr>
               <a:t>Al Madina Online School</a:t>
             </a:r>
@@ -9769,8 +9613,7 @@
                   <a:srgbClr val="8A6D1E"/>
                 </a:solidFill>
                 <a:latin typeface="Calibri" pitchFamily="34" charset="0"/>
-                <a:ea typeface="Calibri" pitchFamily="34" charset="-122"/>
-                <a:cs typeface="Calibri" pitchFamily="34" charset="-120"/>
+                <a:cs typeface="Amiri" pitchFamily="2" charset="-78"/>
               </a:rPr>
               <a:t>ARABIC DEPARTMENT · MIFTAH ARABIC · IGCSE 0544</a:t>
             </a:r>
@@ -9835,8 +9678,7 @@
                   <a:srgbClr val="FFFFFF"/>
                 </a:solidFill>
                 <a:latin typeface="Calibri" pitchFamily="34" charset="0"/>
-                <a:ea typeface="Calibri" pitchFamily="34" charset="-122"/>
-                <a:cs typeface="Calibri" pitchFamily="34" charset="-120"/>
+                <a:cs typeface="Amiri" pitchFamily="2" charset="-78"/>
               </a:rPr>
               <a:t>P6-L05 · IGCSE Bridge</a:t>
             </a:r>
@@ -9901,8 +9743,7 @@
                   <a:srgbClr val="FFFFFF"/>
                 </a:solidFill>
                 <a:latin typeface="Calibri" pitchFamily="34" charset="0"/>
-                <a:ea typeface="Calibri" pitchFamily="34" charset="-122"/>
-                <a:cs typeface="Calibri" pitchFamily="34" charset="-120"/>
+                <a:cs typeface="Amiri" pitchFamily="2" charset="-78"/>
               </a:rPr>
               <a:t>YOU DO</a:t>
             </a:r>
@@ -9940,8 +9781,7 @@
                   <a:srgbClr val="1E6B52"/>
                 </a:solidFill>
                 <a:latin typeface="Calibri" pitchFamily="34" charset="0"/>
-                <a:ea typeface="Calibri" pitchFamily="34" charset="-122"/>
-                <a:cs typeface="Calibri" pitchFamily="34" charset="-120"/>
+                <a:cs typeface="Amiri" pitchFamily="2" charset="-78"/>
               </a:rPr>
               <a:t>YOU DO · ESSAY 1 — HEALTH TOPIC (WEBSITE)</a:t>
             </a:r>
@@ -9979,8 +9819,7 @@
                   <a:srgbClr val="1B3B6F"/>
                 </a:solidFill>
                 <a:latin typeface="Cambria" pitchFamily="34" charset="0"/>
-                <a:ea typeface="Cambria" pitchFamily="34" charset="-122"/>
-                <a:cs typeface="Cambria" pitchFamily="34" charset="-120"/>
+                <a:cs typeface="Amiri" pitchFamily="2" charset="-78"/>
               </a:rPr>
               <a:t>Essay 1 — Mental vs physical health</a:t>
             </a:r>
@@ -10017,9 +9856,8 @@
                 <a:solidFill>
                   <a:srgbClr val="8A6D1E"/>
                 </a:solidFill>
-                <a:latin typeface="Amiri" pitchFamily="34" charset="0"/>
-                <a:ea typeface="Amiri" pitchFamily="34" charset="-122"/>
-                <a:cs typeface="Amiri" pitchFamily="34" charset="-120"/>
+                <a:latin typeface="Amiri" pitchFamily="2" charset="-78"/>
+                <a:cs typeface="Amiri" pitchFamily="2" charset="-78"/>
               </a:rPr>
               <a:t>الصِّحَّةُ النَّفْسِيَّةُ</a:t>
             </a:r>
@@ -10057,8 +9895,7 @@
                   <a:srgbClr val="8A93A0"/>
                 </a:solidFill>
                 <a:latin typeface="Calibri" pitchFamily="34" charset="0"/>
-                <a:ea typeface="Calibri" pitchFamily="34" charset="-122"/>
-                <a:cs typeface="Calibri" pitchFamily="34" charset="-120"/>
+                <a:cs typeface="Amiri" pitchFamily="2" charset="-78"/>
               </a:rPr>
               <a:t>Miftah Arabic · Progression P6 · IGCSE Bridge · P6-L05</a:t>
             </a:r>
@@ -10157,8 +9994,7 @@
                   <a:srgbClr val="FFFFFF"/>
                 </a:solidFill>
                 <a:latin typeface="Calibri" pitchFamily="34" charset="0"/>
-                <a:ea typeface="Calibri" pitchFamily="34" charset="-122"/>
-                <a:cs typeface="Calibri" pitchFamily="34" charset="-120"/>
+                <a:cs typeface="Amiri" pitchFamily="2" charset="-78"/>
               </a:rPr>
               <a:t>ESSAY 1 · HEALTH</a:t>
             </a:r>
@@ -10196,8 +10032,7 @@
                   <a:srgbClr val="1F2A37"/>
                 </a:solidFill>
                 <a:latin typeface="Calibri" pitchFamily="34" charset="0"/>
-                <a:ea typeface="Calibri" pitchFamily="34" charset="-122"/>
-                <a:cs typeface="Calibri" pitchFamily="34" charset="-120"/>
+                <a:cs typeface="Amiri" pitchFamily="2" charset="-78"/>
               </a:rPr>
               <a:t>Write an argumentative essay (130–150 words): “</a:t>
             </a:r>
@@ -10209,9 +10044,8 @@
                 <a:solidFill>
                   <a:srgbClr val="1F2A37"/>
                 </a:solidFill>
-                <a:latin typeface="Amiri" pitchFamily="34" charset="0"/>
-                <a:ea typeface="Amiri" pitchFamily="34" charset="-122"/>
-                <a:cs typeface="Amiri" pitchFamily="34" charset="-120"/>
+                <a:latin typeface="Amiri" pitchFamily="2" charset="-78"/>
+                <a:cs typeface="Amiri" pitchFamily="2" charset="-78"/>
               </a:rPr>
               <a:t>الصِّحَّةُ النَّفْسِيَّةُ أَهَمُّ مِنَ الصِّحَّةِ الجَسَدِيَّةِ</a:t>
             </a:r>
@@ -10224,8 +10058,7 @@
                   <a:srgbClr val="1F2A37"/>
                 </a:solidFill>
                 <a:latin typeface="Calibri" pitchFamily="34" charset="0"/>
-                <a:ea typeface="Calibri" pitchFamily="34" charset="-122"/>
-                <a:cs typeface="Calibri" pitchFamily="34" charset="-120"/>
+                <a:cs typeface="Amiri" pitchFamily="2" charset="-78"/>
               </a:rPr>
               <a:t> — </a:t>
             </a:r>
@@ -10237,9 +10070,8 @@
                 <a:solidFill>
                   <a:srgbClr val="1F2A37"/>
                 </a:solidFill>
-                <a:latin typeface="Amiri" pitchFamily="34" charset="0"/>
-                <a:ea typeface="Amiri" pitchFamily="34" charset="-122"/>
-                <a:cs typeface="Amiri" pitchFamily="34" charset="-120"/>
+                <a:latin typeface="Amiri" pitchFamily="2" charset="-78"/>
+                <a:cs typeface="Amiri" pitchFamily="2" charset="-78"/>
               </a:rPr>
               <a:t>هَلْ تُوَافِقُ؟</a:t>
             </a:r>
@@ -10252,8 +10084,7 @@
                   <a:srgbClr val="1F2A37"/>
                 </a:solidFill>
                 <a:latin typeface="Calibri" pitchFamily="34" charset="0"/>
-                <a:ea typeface="Calibri" pitchFamily="34" charset="-122"/>
-                <a:cs typeface="Calibri" pitchFamily="34" charset="-120"/>
+                <a:cs typeface="Amiri" pitchFamily="2" charset="-78"/>
               </a:rPr>
               <a:t>” Use the full architecture.</a:t>
             </a:r>
@@ -10291,8 +10122,7 @@
                   <a:srgbClr val="1F2A37"/>
                 </a:solidFill>
                 <a:latin typeface="Calibri" pitchFamily="34" charset="0"/>
-                <a:ea typeface="Calibri" pitchFamily="34" charset="-122"/>
-                <a:cs typeface="Calibri" pitchFamily="34" charset="-120"/>
+                <a:cs typeface="Amiri" pitchFamily="2" charset="-78"/>
               </a:rPr>
               <a:t>☐  A clear thesis stating your position.</a:t>
             </a:r>
@@ -10330,8 +10160,7 @@
                   <a:srgbClr val="1F2A37"/>
                 </a:solidFill>
                 <a:latin typeface="Calibri" pitchFamily="34" charset="0"/>
-                <a:ea typeface="Calibri" pitchFamily="34" charset="-122"/>
-                <a:cs typeface="Calibri" pitchFamily="34" charset="-120"/>
+                <a:cs typeface="Amiri" pitchFamily="2" charset="-78"/>
               </a:rPr>
               <a:t>☐  Cited evidence (</a:t>
             </a:r>
@@ -10343,9 +10172,8 @@
                 <a:solidFill>
                   <a:srgbClr val="1F2A37"/>
                 </a:solidFill>
-                <a:latin typeface="Amiri" pitchFamily="34" charset="0"/>
-                <a:ea typeface="Amiri" pitchFamily="34" charset="-122"/>
-                <a:cs typeface="Amiri" pitchFamily="34" charset="-120"/>
+                <a:latin typeface="Amiri" pitchFamily="2" charset="-78"/>
+                <a:cs typeface="Amiri" pitchFamily="2" charset="-78"/>
               </a:rPr>
               <a:t>أَكَّدَ … أَنَّ</a:t>
             </a:r>
@@ -10358,8 +10186,7 @@
                   <a:srgbClr val="1F2A37"/>
                 </a:solidFill>
                 <a:latin typeface="Calibri" pitchFamily="34" charset="0"/>
-                <a:ea typeface="Calibri" pitchFamily="34" charset="-122"/>
-                <a:cs typeface="Calibri" pitchFamily="34" charset="-120"/>
+                <a:cs typeface="Amiri" pitchFamily="2" charset="-78"/>
               </a:rPr>
               <a:t>) and a concession (</a:t>
             </a:r>
@@ -10371,9 +10198,8 @@
                 <a:solidFill>
                   <a:srgbClr val="1F2A37"/>
                 </a:solidFill>
-                <a:latin typeface="Amiri" pitchFamily="34" charset="0"/>
-                <a:ea typeface="Amiri" pitchFamily="34" charset="-122"/>
-                <a:cs typeface="Amiri" pitchFamily="34" charset="-120"/>
+                <a:latin typeface="Amiri" pitchFamily="2" charset="-78"/>
+                <a:cs typeface="Amiri" pitchFamily="2" charset="-78"/>
               </a:rPr>
               <a:t>صَحِيحٌ أَنَّ</a:t>
             </a:r>
@@ -10386,8 +10212,7 @@
                   <a:srgbClr val="1F2A37"/>
                 </a:solidFill>
                 <a:latin typeface="Calibri" pitchFamily="34" charset="0"/>
-                <a:ea typeface="Calibri" pitchFamily="34" charset="-122"/>
-                <a:cs typeface="Calibri" pitchFamily="34" charset="-120"/>
+                <a:cs typeface="Amiri" pitchFamily="2" charset="-78"/>
               </a:rPr>
               <a:t>).</a:t>
             </a:r>
@@ -10425,8 +10250,7 @@
                   <a:srgbClr val="1F2A37"/>
                 </a:solidFill>
                 <a:latin typeface="Calibri" pitchFamily="34" charset="0"/>
-                <a:ea typeface="Calibri" pitchFamily="34" charset="-122"/>
-                <a:cs typeface="Calibri" pitchFamily="34" charset="-120"/>
+                <a:cs typeface="Amiri" pitchFamily="2" charset="-78"/>
               </a:rPr>
               <a:t>☐  A refutation (</a:t>
             </a:r>
@@ -10438,9 +10262,8 @@
                 <a:solidFill>
                   <a:srgbClr val="1F2A37"/>
                 </a:solidFill>
-                <a:latin typeface="Amiri" pitchFamily="34" charset="0"/>
-                <a:ea typeface="Amiri" pitchFamily="34" charset="-122"/>
-                <a:cs typeface="Amiri" pitchFamily="34" charset="-120"/>
+                <a:latin typeface="Amiri" pitchFamily="2" charset="-78"/>
+                <a:cs typeface="Amiri" pitchFamily="2" charset="-78"/>
               </a:rPr>
               <a:t>غَيْرَ أَنَّ</a:t>
             </a:r>
@@ -10453,8 +10276,7 @@
                   <a:srgbClr val="1F2A37"/>
                 </a:solidFill>
                 <a:latin typeface="Calibri" pitchFamily="34" charset="0"/>
-                <a:ea typeface="Calibri" pitchFamily="34" charset="-122"/>
-                <a:cs typeface="Calibri" pitchFamily="34" charset="-120"/>
+                <a:cs typeface="Amiri" pitchFamily="2" charset="-78"/>
               </a:rPr>
               <a:t>) and a Type 2 conditional.</a:t>
             </a:r>
@@ -10492,8 +10314,7 @@
                   <a:srgbClr val="1F2A37"/>
                 </a:solidFill>
                 <a:latin typeface="Calibri" pitchFamily="34" charset="0"/>
-                <a:ea typeface="Calibri" pitchFamily="34" charset="-122"/>
-                <a:cs typeface="Calibri" pitchFamily="34" charset="-120"/>
+                <a:cs typeface="Amiri" pitchFamily="2" charset="-78"/>
               </a:rPr>
               <a:t>☐  A conclusion (</a:t>
             </a:r>
@@ -10505,9 +10326,8 @@
                 <a:solidFill>
                   <a:srgbClr val="1F2A37"/>
                 </a:solidFill>
-                <a:latin typeface="Amiri" pitchFamily="34" charset="0"/>
-                <a:ea typeface="Amiri" pitchFamily="34" charset="-122"/>
-                <a:cs typeface="Amiri" pitchFamily="34" charset="-120"/>
+                <a:latin typeface="Amiri" pitchFamily="2" charset="-78"/>
+                <a:cs typeface="Amiri" pitchFamily="2" charset="-78"/>
               </a:rPr>
               <a:t>وَبِنَاءً عَلَى مَا سَبَقَ</a:t>
             </a:r>
@@ -10520,8 +10340,7 @@
                   <a:srgbClr val="1F2A37"/>
                 </a:solidFill>
                 <a:latin typeface="Calibri" pitchFamily="34" charset="0"/>
-                <a:ea typeface="Calibri" pitchFamily="34" charset="-122"/>
-                <a:cs typeface="Calibri" pitchFamily="34" charset="-120"/>
+                <a:cs typeface="Amiri" pitchFamily="2" charset="-78"/>
               </a:rPr>
               <a:t>) with a subjunctive; 130–150 words.</a:t>
             </a:r>
@@ -10593,8 +10412,7 @@
                   <a:srgbClr val="8A6D1E"/>
                 </a:solidFill>
                 <a:latin typeface="Calibri" pitchFamily="34" charset="0"/>
-                <a:ea typeface="Calibri" pitchFamily="34" charset="-122"/>
-                <a:cs typeface="Calibri" pitchFamily="34" charset="-120"/>
+                <a:cs typeface="Amiri" pitchFamily="2" charset="-78"/>
               </a:rPr>
               <a:t>USEFUL LANGUAGE — FROM THE WEBSITE MODEL</a:t>
             </a:r>
@@ -10631,9 +10449,8 @@
                 <a:solidFill>
                   <a:srgbClr val="1B3B6F"/>
                 </a:solidFill>
-                <a:latin typeface="Amiri" pitchFamily="34" charset="0"/>
-                <a:ea typeface="Amiri" pitchFamily="34" charset="-122"/>
-                <a:cs typeface="Amiri" pitchFamily="34" charset="-120"/>
+                <a:latin typeface="Amiri" pitchFamily="2" charset="-78"/>
+                <a:cs typeface="Amiri" pitchFamily="2" charset="-78"/>
               </a:rPr>
               <a:t>لَا تَقِلُّ أَهَمِّيَّةً عَنِ</a:t>
             </a:r>
@@ -10671,8 +10488,7 @@
                   <a:srgbClr val="5A6472"/>
                 </a:solidFill>
                 <a:latin typeface="Calibri" pitchFamily="34" charset="0"/>
-                <a:ea typeface="Calibri" pitchFamily="34" charset="-122"/>
-                <a:cs typeface="Calibri" pitchFamily="34" charset="-120"/>
+                <a:cs typeface="Amiri" pitchFamily="2" charset="-78"/>
               </a:rPr>
               <a:t>is no less important than</a:t>
             </a:r>
@@ -10709,9 +10525,8 @@
                 <a:solidFill>
                   <a:srgbClr val="1B3B6F"/>
                 </a:solidFill>
-                <a:latin typeface="Amiri" pitchFamily="34" charset="0"/>
-                <a:ea typeface="Amiri" pitchFamily="34" charset="-122"/>
-                <a:cs typeface="Amiri" pitchFamily="34" charset="-120"/>
+                <a:latin typeface="Amiri" pitchFamily="2" charset="-78"/>
+                <a:cs typeface="Amiri" pitchFamily="2" charset="-78"/>
               </a:rPr>
               <a:t>التَّوَتُّرَ المُزْمِنَ يُضْعِفُ المَنَاعَةَ</a:t>
             </a:r>
@@ -10749,8 +10564,7 @@
                   <a:srgbClr val="5A6472"/>
                 </a:solidFill>
                 <a:latin typeface="Calibri" pitchFamily="34" charset="0"/>
-                <a:ea typeface="Calibri" pitchFamily="34" charset="-122"/>
-                <a:cs typeface="Calibri" pitchFamily="34" charset="-120"/>
+                <a:cs typeface="Amiri" pitchFamily="2" charset="-78"/>
               </a:rPr>
               <a:t>chronic stress weakens immunity</a:t>
             </a:r>
@@ -10787,9 +10601,8 @@
                 <a:solidFill>
                   <a:srgbClr val="1B3B6F"/>
                 </a:solidFill>
-                <a:latin typeface="Amiri" pitchFamily="34" charset="0"/>
-                <a:ea typeface="Amiri" pitchFamily="34" charset="-122"/>
-                <a:cs typeface="Amiri" pitchFamily="34" charset="-120"/>
+                <a:latin typeface="Amiri" pitchFamily="2" charset="-78"/>
+                <a:cs typeface="Amiri" pitchFamily="2" charset="-78"/>
               </a:rPr>
               <a:t>إِهْمَالَ النَّفْسِ</a:t>
             </a:r>
@@ -10827,8 +10640,7 @@
                   <a:srgbClr val="5A6472"/>
                 </a:solidFill>
                 <a:latin typeface="Calibri" pitchFamily="34" charset="0"/>
-                <a:ea typeface="Calibri" pitchFamily="34" charset="-122"/>
-                <a:cs typeface="Calibri" pitchFamily="34" charset="-120"/>
+                <a:cs typeface="Amiri" pitchFamily="2" charset="-78"/>
               </a:rPr>
               <a:t>neglecting the mind</a:t>
             </a:r>
@@ -10865,9 +10677,8 @@
                 <a:solidFill>
                   <a:srgbClr val="1B3B6F"/>
                 </a:solidFill>
-                <a:latin typeface="Amiri" pitchFamily="34" charset="0"/>
-                <a:ea typeface="Amiri" pitchFamily="34" charset="-122"/>
-                <a:cs typeface="Amiri" pitchFamily="34" charset="-120"/>
+                <a:latin typeface="Amiri" pitchFamily="2" charset="-78"/>
+                <a:cs typeface="Amiri" pitchFamily="2" charset="-78"/>
               </a:rPr>
               <a:t>لَقَلَّتْ حَالَاتُ الاحْتِرَاقِ</a:t>
             </a:r>
@@ -10905,8 +10716,7 @@
                   <a:srgbClr val="5A6472"/>
                 </a:solidFill>
                 <a:latin typeface="Calibri" pitchFamily="34" charset="0"/>
-                <a:ea typeface="Calibri" pitchFamily="34" charset="-122"/>
-                <a:cs typeface="Calibri" pitchFamily="34" charset="-120"/>
+                <a:cs typeface="Amiri" pitchFamily="2" charset="-78"/>
               </a:rPr>
               <a:t>burnout cases would have fallen</a:t>
             </a:r>
@@ -10943,9 +10753,8 @@
                 <a:solidFill>
                   <a:srgbClr val="1B3B6F"/>
                 </a:solidFill>
-                <a:latin typeface="Amiri" pitchFamily="34" charset="0"/>
-                <a:ea typeface="Amiri" pitchFamily="34" charset="-122"/>
-                <a:cs typeface="Amiri" pitchFamily="34" charset="-120"/>
+                <a:latin typeface="Amiri" pitchFamily="2" charset="-78"/>
+                <a:cs typeface="Amiri" pitchFamily="2" charset="-78"/>
               </a:rPr>
               <a:t>أَنْ نُولِيَ … العِنَايَةَ</a:t>
             </a:r>
@@ -10983,8 +10792,7 @@
                   <a:srgbClr val="5A6472"/>
                 </a:solidFill>
                 <a:latin typeface="Calibri" pitchFamily="34" charset="0"/>
-                <a:ea typeface="Calibri" pitchFamily="34" charset="-122"/>
-                <a:cs typeface="Calibri" pitchFamily="34" charset="-120"/>
+                <a:cs typeface="Amiri" pitchFamily="2" charset="-78"/>
               </a:rPr>
               <a:t>that we give … care</a:t>
             </a:r>
@@ -11022,8 +10830,7 @@
                   <a:srgbClr val="8A93A0"/>
                 </a:solidFill>
                 <a:latin typeface="Calibri" pitchFamily="34" charset="0"/>
-                <a:ea typeface="Calibri" pitchFamily="34" charset="-122"/>
-                <a:cs typeface="Calibri" pitchFamily="34" charset="-120"/>
+                <a:cs typeface="Amiri" pitchFamily="2" charset="-78"/>
               </a:rPr>
               <a:t>14 / 25</a:t>
             </a:r>
@@ -11117,9 +10924,8 @@
                 <a:solidFill>
                   <a:srgbClr val="D4AF37"/>
                 </a:solidFill>
-                <a:latin typeface="Amiri" pitchFamily="34" charset="0"/>
-                <a:ea typeface="Amiri" pitchFamily="34" charset="-122"/>
-                <a:cs typeface="Amiri" pitchFamily="34" charset="-120"/>
+                <a:latin typeface="Amiri" pitchFamily="2" charset="-78"/>
+                <a:cs typeface="Amiri" pitchFamily="2" charset="-78"/>
               </a:rPr>
               <a:t>م</a:t>
             </a:r>
@@ -11157,8 +10963,7 @@
                   <a:srgbClr val="1B3B6F"/>
                 </a:solidFill>
                 <a:latin typeface="Cambria" pitchFamily="34" charset="0"/>
-                <a:ea typeface="Cambria" pitchFamily="34" charset="-122"/>
-                <a:cs typeface="Cambria" pitchFamily="34" charset="-120"/>
+                <a:cs typeface="Amiri" pitchFamily="2" charset="-78"/>
               </a:rPr>
               <a:t>Al Madina Online School</a:t>
             </a:r>
@@ -11196,8 +11001,7 @@
                   <a:srgbClr val="8A6D1E"/>
                 </a:solidFill>
                 <a:latin typeface="Calibri" pitchFamily="34" charset="0"/>
-                <a:ea typeface="Calibri" pitchFamily="34" charset="-122"/>
-                <a:cs typeface="Calibri" pitchFamily="34" charset="-120"/>
+                <a:cs typeface="Amiri" pitchFamily="2" charset="-78"/>
               </a:rPr>
               <a:t>ARABIC DEPARTMENT · MIFTAH ARABIC · IGCSE 0544</a:t>
             </a:r>
@@ -11262,8 +11066,7 @@
                   <a:srgbClr val="FFFFFF"/>
                 </a:solidFill>
                 <a:latin typeface="Calibri" pitchFamily="34" charset="0"/>
-                <a:ea typeface="Calibri" pitchFamily="34" charset="-122"/>
-                <a:cs typeface="Calibri" pitchFamily="34" charset="-120"/>
+                <a:cs typeface="Amiri" pitchFamily="2" charset="-78"/>
               </a:rPr>
               <a:t>P6-L05 · IGCSE Bridge</a:t>
             </a:r>
@@ -11328,8 +11131,7 @@
                   <a:srgbClr val="FFFFFF"/>
                 </a:solidFill>
                 <a:latin typeface="Calibri" pitchFamily="34" charset="0"/>
-                <a:ea typeface="Calibri" pitchFamily="34" charset="-122"/>
-                <a:cs typeface="Calibri" pitchFamily="34" charset="-120"/>
+                <a:cs typeface="Amiri" pitchFamily="2" charset="-78"/>
               </a:rPr>
               <a:t>YOU DO</a:t>
             </a:r>
@@ -11367,8 +11169,7 @@
                   <a:srgbClr val="1E6B52"/>
                 </a:solidFill>
                 <a:latin typeface="Calibri" pitchFamily="34" charset="0"/>
-                <a:ea typeface="Calibri" pitchFamily="34" charset="-122"/>
-                <a:cs typeface="Calibri" pitchFamily="34" charset="-120"/>
+                <a:cs typeface="Amiri" pitchFamily="2" charset="-78"/>
               </a:rPr>
               <a:t>YOU DO · ESSAY 2 — EDUCATION TOPIC (WEBSITE)</a:t>
             </a:r>
@@ -11406,8 +11207,7 @@
                   <a:srgbClr val="1B3B6F"/>
                 </a:solidFill>
                 <a:latin typeface="Cambria" pitchFamily="34" charset="0"/>
-                <a:ea typeface="Cambria" pitchFamily="34" charset="-122"/>
-                <a:cs typeface="Cambria" pitchFamily="34" charset="-120"/>
+                <a:cs typeface="Amiri" pitchFamily="2" charset="-78"/>
               </a:rPr>
               <a:t>Essay 2 — Is university still necessary?</a:t>
             </a:r>
@@ -11444,9 +11244,8 @@
                 <a:solidFill>
                   <a:srgbClr val="8A6D1E"/>
                 </a:solidFill>
-                <a:latin typeface="Amiri" pitchFamily="34" charset="0"/>
-                <a:ea typeface="Amiri" pitchFamily="34" charset="-122"/>
-                <a:cs typeface="Amiri" pitchFamily="34" charset="-120"/>
+                <a:latin typeface="Amiri" pitchFamily="2" charset="-78"/>
+                <a:cs typeface="Amiri" pitchFamily="2" charset="-78"/>
               </a:rPr>
               <a:t>التَّعْلِيمُ الجَامِعِيُّ</a:t>
             </a:r>
@@ -11484,8 +11283,7 @@
                   <a:srgbClr val="8A93A0"/>
                 </a:solidFill>
                 <a:latin typeface="Calibri" pitchFamily="34" charset="0"/>
-                <a:ea typeface="Calibri" pitchFamily="34" charset="-122"/>
-                <a:cs typeface="Calibri" pitchFamily="34" charset="-120"/>
+                <a:cs typeface="Amiri" pitchFamily="2" charset="-78"/>
               </a:rPr>
               <a:t>Miftah Arabic · Progression P6 · IGCSE Bridge · P6-L05</a:t>
             </a:r>
@@ -11584,8 +11382,7 @@
                   <a:srgbClr val="FFFFFF"/>
                 </a:solidFill>
                 <a:latin typeface="Calibri" pitchFamily="34" charset="0"/>
-                <a:ea typeface="Calibri" pitchFamily="34" charset="-122"/>
-                <a:cs typeface="Calibri" pitchFamily="34" charset="-120"/>
+                <a:cs typeface="Amiri" pitchFamily="2" charset="-78"/>
               </a:rPr>
               <a:t>ESSAY 2 · EDUCATION</a:t>
             </a:r>
@@ -11623,8 +11420,7 @@
                   <a:srgbClr val="1F2A37"/>
                 </a:solidFill>
                 <a:latin typeface="Calibri" pitchFamily="34" charset="0"/>
-                <a:ea typeface="Calibri" pitchFamily="34" charset="-122"/>
-                <a:cs typeface="Calibri" pitchFamily="34" charset="-120"/>
+                <a:cs typeface="Amiri" pitchFamily="2" charset="-78"/>
               </a:rPr>
               <a:t>Write an argumentative essay (130–150 words): “</a:t>
             </a:r>
@@ -11636,9 +11432,8 @@
                 <a:solidFill>
                   <a:srgbClr val="1F2A37"/>
                 </a:solidFill>
-                <a:latin typeface="Amiri" pitchFamily="34" charset="0"/>
-                <a:ea typeface="Amiri" pitchFamily="34" charset="-122"/>
-                <a:cs typeface="Amiri" pitchFamily="34" charset="-120"/>
+                <a:latin typeface="Amiri" pitchFamily="2" charset="-78"/>
+                <a:cs typeface="Amiri" pitchFamily="2" charset="-78"/>
               </a:rPr>
               <a:t>التَّعْلِيمُ الجَامِعِيُّ لَمْ يَعُدْ ضَرُورِيًّا لِلنَّجَاحِ فِي عَالَمِ اليَوْمِ</a:t>
             </a:r>
@@ -11651,8 +11446,7 @@
                   <a:srgbClr val="1F2A37"/>
                 </a:solidFill>
                 <a:latin typeface="Calibri" pitchFamily="34" charset="0"/>
-                <a:ea typeface="Calibri" pitchFamily="34" charset="-122"/>
-                <a:cs typeface="Calibri" pitchFamily="34" charset="-120"/>
+                <a:cs typeface="Amiri" pitchFamily="2" charset="-78"/>
               </a:rPr>
               <a:t> — </a:t>
             </a:r>
@@ -11664,9 +11458,8 @@
                 <a:solidFill>
                   <a:srgbClr val="1F2A37"/>
                 </a:solidFill>
-                <a:latin typeface="Amiri" pitchFamily="34" charset="0"/>
-                <a:ea typeface="Amiri" pitchFamily="34" charset="-122"/>
-                <a:cs typeface="Amiri" pitchFamily="34" charset="-120"/>
+                <a:latin typeface="Amiri" pitchFamily="2" charset="-78"/>
+                <a:cs typeface="Amiri" pitchFamily="2" charset="-78"/>
               </a:rPr>
               <a:t>هَلْ تُوَافِقُ؟</a:t>
             </a:r>
@@ -11679,8 +11472,7 @@
                   <a:srgbClr val="1F2A37"/>
                 </a:solidFill>
                 <a:latin typeface="Calibri" pitchFamily="34" charset="0"/>
-                <a:ea typeface="Calibri" pitchFamily="34" charset="-122"/>
-                <a:cs typeface="Calibri" pitchFamily="34" charset="-120"/>
+                <a:cs typeface="Amiri" pitchFamily="2" charset="-78"/>
               </a:rPr>
               <a:t>”</a:t>
             </a:r>
@@ -11718,8 +11510,7 @@
                   <a:srgbClr val="1F2A37"/>
                 </a:solidFill>
                 <a:latin typeface="Calibri" pitchFamily="34" charset="0"/>
-                <a:ea typeface="Calibri" pitchFamily="34" charset="-122"/>
-                <a:cs typeface="Calibri" pitchFamily="34" charset="-120"/>
+                <a:cs typeface="Amiri" pitchFamily="2" charset="-78"/>
               </a:rPr>
               <a:t>☐  A clear thesis and cited evidence.</a:t>
             </a:r>
@@ -11757,8 +11548,7 @@
                   <a:srgbClr val="1F2A37"/>
                 </a:solidFill>
                 <a:latin typeface="Calibri" pitchFamily="34" charset="0"/>
-                <a:ea typeface="Calibri" pitchFamily="34" charset="-122"/>
-                <a:cs typeface="Calibri" pitchFamily="34" charset="-120"/>
+                <a:cs typeface="Amiri" pitchFamily="2" charset="-78"/>
               </a:rPr>
               <a:t>☐  A concession (</a:t>
             </a:r>
@@ -11770,9 +11560,8 @@
                 <a:solidFill>
                   <a:srgbClr val="1F2A37"/>
                 </a:solidFill>
-                <a:latin typeface="Amiri" pitchFamily="34" charset="0"/>
-                <a:ea typeface="Amiri" pitchFamily="34" charset="-122"/>
-                <a:cs typeface="Amiri" pitchFamily="34" charset="-120"/>
+                <a:latin typeface="Amiri" pitchFamily="2" charset="-78"/>
+                <a:cs typeface="Amiri" pitchFamily="2" charset="-78"/>
               </a:rPr>
               <a:t>صَحِيحٌ أَنَّ</a:t>
             </a:r>
@@ -11785,8 +11574,7 @@
                   <a:srgbClr val="1F2A37"/>
                 </a:solidFill>
                 <a:latin typeface="Calibri" pitchFamily="34" charset="0"/>
-                <a:ea typeface="Calibri" pitchFamily="34" charset="-122"/>
-                <a:cs typeface="Calibri" pitchFamily="34" charset="-120"/>
+                <a:cs typeface="Amiri" pitchFamily="2" charset="-78"/>
               </a:rPr>
               <a:t>) answered by a refutation (</a:t>
             </a:r>
@@ -11798,9 +11586,8 @@
                 <a:solidFill>
                   <a:srgbClr val="1F2A37"/>
                 </a:solidFill>
-                <a:latin typeface="Amiri" pitchFamily="34" charset="0"/>
-                <a:ea typeface="Amiri" pitchFamily="34" charset="-122"/>
-                <a:cs typeface="Amiri" pitchFamily="34" charset="-120"/>
+                <a:latin typeface="Amiri" pitchFamily="2" charset="-78"/>
+                <a:cs typeface="Amiri" pitchFamily="2" charset="-78"/>
               </a:rPr>
               <a:t>غَيْرَ أَنَّ</a:t>
             </a:r>
@@ -11813,8 +11600,7 @@
                   <a:srgbClr val="1F2A37"/>
                 </a:solidFill>
                 <a:latin typeface="Calibri" pitchFamily="34" charset="0"/>
-                <a:ea typeface="Calibri" pitchFamily="34" charset="-122"/>
-                <a:cs typeface="Calibri" pitchFamily="34" charset="-120"/>
+                <a:cs typeface="Amiri" pitchFamily="2" charset="-78"/>
               </a:rPr>
               <a:t>).</a:t>
             </a:r>
@@ -11852,8 +11638,7 @@
                   <a:srgbClr val="1F2A37"/>
                 </a:solidFill>
                 <a:latin typeface="Calibri" pitchFamily="34" charset="0"/>
-                <a:ea typeface="Calibri" pitchFamily="34" charset="-122"/>
-                <a:cs typeface="Calibri" pitchFamily="34" charset="-120"/>
+                <a:cs typeface="Amiri" pitchFamily="2" charset="-78"/>
               </a:rPr>
               <a:t>☐  Both a Type 1 and a Type 2 conditional if you can.</a:t>
             </a:r>
@@ -11891,8 +11676,7 @@
                   <a:srgbClr val="1F2A37"/>
                 </a:solidFill>
                 <a:latin typeface="Calibri" pitchFamily="34" charset="0"/>
-                <a:ea typeface="Calibri" pitchFamily="34" charset="-122"/>
-                <a:cs typeface="Calibri" pitchFamily="34" charset="-120"/>
+                <a:cs typeface="Amiri" pitchFamily="2" charset="-78"/>
               </a:rPr>
               <a:t>☐  A conclusion connector with a subjunctive; 130–150 words.</a:t>
             </a:r>
@@ -11964,8 +11748,7 @@
                   <a:srgbClr val="8A6D1E"/>
                 </a:solidFill>
                 <a:latin typeface="Calibri" pitchFamily="34" charset="0"/>
-                <a:ea typeface="Calibri" pitchFamily="34" charset="-122"/>
-                <a:cs typeface="Calibri" pitchFamily="34" charset="-120"/>
+                <a:cs typeface="Amiri" pitchFamily="2" charset="-78"/>
               </a:rPr>
               <a:t>USEFUL LANGUAGE — FROM THE WEBSITE MODEL</a:t>
             </a:r>
@@ -12002,9 +11785,8 @@
                 <a:solidFill>
                   <a:srgbClr val="1B3B6F"/>
                 </a:solidFill>
-                <a:latin typeface="Amiri" pitchFamily="34" charset="0"/>
-                <a:ea typeface="Amiri" pitchFamily="34" charset="-122"/>
-                <a:cs typeface="Amiri" pitchFamily="34" charset="-120"/>
+                <a:latin typeface="Amiri" pitchFamily="2" charset="-78"/>
+                <a:cs typeface="Amiri" pitchFamily="2" charset="-78"/>
               </a:rPr>
               <a:t>لَا يَزَالُ رَكِيزَةً مُهِمَّةً</a:t>
             </a:r>
@@ -12042,8 +11824,7 @@
                   <a:srgbClr val="5A6472"/>
                 </a:solidFill>
                 <a:latin typeface="Calibri" pitchFamily="34" charset="0"/>
-                <a:ea typeface="Calibri" pitchFamily="34" charset="-122"/>
-                <a:cs typeface="Calibri" pitchFamily="34" charset="-120"/>
+                <a:cs typeface="Amiri" pitchFamily="2" charset="-78"/>
               </a:rPr>
               <a:t>is still an important pillar</a:t>
             </a:r>
@@ -12080,9 +11861,8 @@
                 <a:solidFill>
                   <a:srgbClr val="1B3B6F"/>
                 </a:solidFill>
-                <a:latin typeface="Amiri" pitchFamily="34" charset="0"/>
-                <a:ea typeface="Amiri" pitchFamily="34" charset="-122"/>
-                <a:cs typeface="Amiri" pitchFamily="34" charset="-120"/>
+                <a:latin typeface="Amiri" pitchFamily="2" charset="-78"/>
+                <a:cs typeface="Amiri" pitchFamily="2" charset="-78"/>
               </a:rPr>
               <a:t>رُوَّادِ الأَعْمَالِ</a:t>
             </a:r>
@@ -12120,8 +11900,7 @@
                   <a:srgbClr val="5A6472"/>
                 </a:solidFill>
                 <a:latin typeface="Calibri" pitchFamily="34" charset="0"/>
-                <a:ea typeface="Calibri" pitchFamily="34" charset="-122"/>
-                <a:cs typeface="Calibri" pitchFamily="34" charset="-120"/>
+                <a:cs typeface="Amiri" pitchFamily="2" charset="-78"/>
               </a:rPr>
               <a:t>entrepreneurs</a:t>
             </a:r>
@@ -12158,9 +11937,8 @@
                 <a:solidFill>
                   <a:srgbClr val="1B3B6F"/>
                 </a:solidFill>
-                <a:latin typeface="Amiri" pitchFamily="34" charset="0"/>
-                <a:ea typeface="Amiri" pitchFamily="34" charset="-122"/>
-                <a:cs typeface="Amiri" pitchFamily="34" charset="-120"/>
+                <a:latin typeface="Amiri" pitchFamily="2" charset="-78"/>
+                <a:cs typeface="Amiri" pitchFamily="2" charset="-78"/>
               </a:rPr>
               <a:t>لَا تُبْنَى إِلَّا بِـ…</a:t>
             </a:r>
@@ -12198,8 +11976,7 @@
                   <a:srgbClr val="5A6472"/>
                 </a:solidFill>
                 <a:latin typeface="Calibri" pitchFamily="34" charset="0"/>
-                <a:ea typeface="Calibri" pitchFamily="34" charset="-122"/>
-                <a:cs typeface="Calibri" pitchFamily="34" charset="-120"/>
+                <a:cs typeface="Amiri" pitchFamily="2" charset="-78"/>
               </a:rPr>
               <a:t>are only built through …</a:t>
             </a:r>
@@ -12236,9 +12013,8 @@
                 <a:solidFill>
                   <a:srgbClr val="1B3B6F"/>
                 </a:solidFill>
-                <a:latin typeface="Amiri" pitchFamily="34" charset="0"/>
-                <a:ea typeface="Amiri" pitchFamily="34" charset="-122"/>
-                <a:cs typeface="Amiri" pitchFamily="34" charset="-120"/>
+                <a:latin typeface="Amiri" pitchFamily="2" charset="-78"/>
+                <a:cs typeface="Amiri" pitchFamily="2" charset="-78"/>
               </a:rPr>
               <a:t>تَرْفَعُ فُرَصَ التَّوْظِيفِ</a:t>
             </a:r>
@@ -12276,8 +12052,7 @@
                   <a:srgbClr val="5A6472"/>
                 </a:solidFill>
                 <a:latin typeface="Calibri" pitchFamily="34" charset="0"/>
-                <a:ea typeface="Calibri" pitchFamily="34" charset="-122"/>
-                <a:cs typeface="Calibri" pitchFamily="34" charset="-120"/>
+                <a:cs typeface="Amiri" pitchFamily="2" charset="-78"/>
               </a:rPr>
               <a:t>raises employment chances</a:t>
             </a:r>
@@ -12314,9 +12089,8 @@
                 <a:solidFill>
                   <a:srgbClr val="1B3B6F"/>
                 </a:solidFill>
-                <a:latin typeface="Amiri" pitchFamily="34" charset="0"/>
-                <a:ea typeface="Amiri" pitchFamily="34" charset="-122"/>
-                <a:cs typeface="Amiri" pitchFamily="34" charset="-120"/>
+                <a:latin typeface="Amiri" pitchFamily="2" charset="-78"/>
+                <a:cs typeface="Amiri" pitchFamily="2" charset="-78"/>
               </a:rPr>
               <a:t>لَا أَنْ نَسْتَغْنِيَ عَنْهُ</a:t>
             </a:r>
@@ -12354,8 +12128,7 @@
                   <a:srgbClr val="5A6472"/>
                 </a:solidFill>
                 <a:latin typeface="Calibri" pitchFamily="34" charset="0"/>
-                <a:ea typeface="Calibri" pitchFamily="34" charset="-122"/>
-                <a:cs typeface="Calibri" pitchFamily="34" charset="-120"/>
+                <a:cs typeface="Amiri" pitchFamily="2" charset="-78"/>
               </a:rPr>
               <a:t>not do without it</a:t>
             </a:r>
@@ -12393,8 +12166,7 @@
                   <a:srgbClr val="8A93A0"/>
                 </a:solidFill>
                 <a:latin typeface="Calibri" pitchFamily="34" charset="0"/>
-                <a:ea typeface="Calibri" pitchFamily="34" charset="-122"/>
-                <a:cs typeface="Calibri" pitchFamily="34" charset="-120"/>
+                <a:cs typeface="Amiri" pitchFamily="2" charset="-78"/>
               </a:rPr>
               <a:t>15 / 25</a:t>
             </a:r>
@@ -12488,9 +12260,8 @@
                 <a:solidFill>
                   <a:srgbClr val="D4AF37"/>
                 </a:solidFill>
-                <a:latin typeface="Amiri" pitchFamily="34" charset="0"/>
-                <a:ea typeface="Amiri" pitchFamily="34" charset="-122"/>
-                <a:cs typeface="Amiri" pitchFamily="34" charset="-120"/>
+                <a:latin typeface="Amiri" pitchFamily="2" charset="-78"/>
+                <a:cs typeface="Amiri" pitchFamily="2" charset="-78"/>
               </a:rPr>
               <a:t>م</a:t>
             </a:r>
@@ -12528,8 +12299,7 @@
                   <a:srgbClr val="1B3B6F"/>
                 </a:solidFill>
                 <a:latin typeface="Cambria" pitchFamily="34" charset="0"/>
-                <a:ea typeface="Cambria" pitchFamily="34" charset="-122"/>
-                <a:cs typeface="Cambria" pitchFamily="34" charset="-120"/>
+                <a:cs typeface="Amiri" pitchFamily="2" charset="-78"/>
               </a:rPr>
               <a:t>Al Madina Online School</a:t>
             </a:r>
@@ -12567,8 +12337,7 @@
                   <a:srgbClr val="8A6D1E"/>
                 </a:solidFill>
                 <a:latin typeface="Calibri" pitchFamily="34" charset="0"/>
-                <a:ea typeface="Calibri" pitchFamily="34" charset="-122"/>
-                <a:cs typeface="Calibri" pitchFamily="34" charset="-120"/>
+                <a:cs typeface="Amiri" pitchFamily="2" charset="-78"/>
               </a:rPr>
               <a:t>ARABIC DEPARTMENT · MIFTAH ARABIC · IGCSE 0544</a:t>
             </a:r>
@@ -12633,8 +12402,7 @@
                   <a:srgbClr val="FFFFFF"/>
                 </a:solidFill>
                 <a:latin typeface="Calibri" pitchFamily="34" charset="0"/>
-                <a:ea typeface="Calibri" pitchFamily="34" charset="-122"/>
-                <a:cs typeface="Calibri" pitchFamily="34" charset="-120"/>
+                <a:cs typeface="Amiri" pitchFamily="2" charset="-78"/>
               </a:rPr>
               <a:t>P6-L05 · IGCSE Bridge</a:t>
             </a:r>
@@ -12699,8 +12467,7 @@
                   <a:srgbClr val="FFFFFF"/>
                 </a:solidFill>
                 <a:latin typeface="Calibri" pitchFamily="34" charset="0"/>
-                <a:ea typeface="Calibri" pitchFamily="34" charset="-122"/>
-                <a:cs typeface="Calibri" pitchFamily="34" charset="-120"/>
+                <a:cs typeface="Amiri" pitchFamily="2" charset="-78"/>
               </a:rPr>
               <a:t>YOU DO</a:t>
             </a:r>
@@ -12738,8 +12505,7 @@
                   <a:srgbClr val="1E6B52"/>
                 </a:solidFill>
                 <a:latin typeface="Calibri" pitchFamily="34" charset="0"/>
-                <a:ea typeface="Calibri" pitchFamily="34" charset="-122"/>
-                <a:cs typeface="Calibri" pitchFamily="34" charset="-120"/>
+                <a:cs typeface="Amiri" pitchFamily="2" charset="-78"/>
               </a:rPr>
               <a:t>YOU DO · ESSAY 3 — SOCIAL ISSUES TOPIC (WEBSITE)</a:t>
             </a:r>
@@ -12777,8 +12543,7 @@
                   <a:srgbClr val="1B3B6F"/>
                 </a:solidFill>
                 <a:latin typeface="Cambria" pitchFamily="34" charset="0"/>
-                <a:ea typeface="Cambria" pitchFamily="34" charset="-122"/>
-                <a:cs typeface="Cambria" pitchFamily="34" charset="-120"/>
+                <a:cs typeface="Amiri" pitchFamily="2" charset="-78"/>
               </a:rPr>
               <a:t>Essay 3 — Social media: more good than harm?</a:t>
             </a:r>
@@ -12815,9 +12580,8 @@
                 <a:solidFill>
                   <a:srgbClr val="8A6D1E"/>
                 </a:solidFill>
-                <a:latin typeface="Amiri" pitchFamily="34" charset="0"/>
-                <a:ea typeface="Amiri" pitchFamily="34" charset="-122"/>
-                <a:cs typeface="Amiri" pitchFamily="34" charset="-120"/>
+                <a:latin typeface="Amiri" pitchFamily="2" charset="-78"/>
+                <a:cs typeface="Amiri" pitchFamily="2" charset="-78"/>
               </a:rPr>
               <a:t>وَسَائِلُ التَّوَاصُلِ</a:t>
             </a:r>
@@ -12855,8 +12619,7 @@
                   <a:srgbClr val="8A93A0"/>
                 </a:solidFill>
                 <a:latin typeface="Calibri" pitchFamily="34" charset="0"/>
-                <a:ea typeface="Calibri" pitchFamily="34" charset="-122"/>
-                <a:cs typeface="Calibri" pitchFamily="34" charset="-120"/>
+                <a:cs typeface="Amiri" pitchFamily="2" charset="-78"/>
               </a:rPr>
               <a:t>Miftah Arabic · Progression P6 · IGCSE Bridge · P6-L05</a:t>
             </a:r>
@@ -12955,8 +12718,7 @@
                   <a:srgbClr val="FFFFFF"/>
                 </a:solidFill>
                 <a:latin typeface="Calibri" pitchFamily="34" charset="0"/>
-                <a:ea typeface="Calibri" pitchFamily="34" charset="-122"/>
-                <a:cs typeface="Calibri" pitchFamily="34" charset="-120"/>
+                <a:cs typeface="Amiri" pitchFamily="2" charset="-78"/>
               </a:rPr>
               <a:t>ESSAY 3 · SOCIAL ISSUES</a:t>
             </a:r>
@@ -12994,8 +12756,7 @@
                   <a:srgbClr val="1F2A37"/>
                 </a:solidFill>
                 <a:latin typeface="Calibri" pitchFamily="34" charset="0"/>
-                <a:ea typeface="Calibri" pitchFamily="34" charset="-122"/>
-                <a:cs typeface="Calibri" pitchFamily="34" charset="-120"/>
+                <a:cs typeface="Amiri" pitchFamily="2" charset="-78"/>
               </a:rPr>
               <a:t>Write an argumentative essay (130–150 words): “</a:t>
             </a:r>
@@ -13007,9 +12768,8 @@
                 <a:solidFill>
                   <a:srgbClr val="1F2A37"/>
                 </a:solidFill>
-                <a:latin typeface="Amiri" pitchFamily="34" charset="0"/>
-                <a:ea typeface="Amiri" pitchFamily="34" charset="-122"/>
-                <a:cs typeface="Amiri" pitchFamily="34" charset="-120"/>
+                <a:latin typeface="Amiri" pitchFamily="2" charset="-78"/>
+                <a:cs typeface="Amiri" pitchFamily="2" charset="-78"/>
               </a:rPr>
               <a:t>وَسَائِلُ التَّوَاصُلِ الاجْتِمَاعِيِّ تُفِيدُ المُجْتَمَعَاتِ أَكْثَرَ مِمَّا تَضُرُّهَا</a:t>
             </a:r>
@@ -13022,8 +12782,7 @@
                   <a:srgbClr val="1F2A37"/>
                 </a:solidFill>
                 <a:latin typeface="Calibri" pitchFamily="34" charset="0"/>
-                <a:ea typeface="Calibri" pitchFamily="34" charset="-122"/>
-                <a:cs typeface="Calibri" pitchFamily="34" charset="-120"/>
+                <a:cs typeface="Amiri" pitchFamily="2" charset="-78"/>
               </a:rPr>
               <a:t> — </a:t>
             </a:r>
@@ -13035,9 +12794,8 @@
                 <a:solidFill>
                   <a:srgbClr val="1F2A37"/>
                 </a:solidFill>
-                <a:latin typeface="Amiri" pitchFamily="34" charset="0"/>
-                <a:ea typeface="Amiri" pitchFamily="34" charset="-122"/>
-                <a:cs typeface="Amiri" pitchFamily="34" charset="-120"/>
+                <a:latin typeface="Amiri" pitchFamily="2" charset="-78"/>
+                <a:cs typeface="Amiri" pitchFamily="2" charset="-78"/>
               </a:rPr>
               <a:t>هَلْ تُوَافِقُ؟</a:t>
             </a:r>
@@ -13050,8 +12808,7 @@
                   <a:srgbClr val="1F2A37"/>
                 </a:solidFill>
                 <a:latin typeface="Calibri" pitchFamily="34" charset="0"/>
-                <a:ea typeface="Calibri" pitchFamily="34" charset="-122"/>
-                <a:cs typeface="Calibri" pitchFamily="34" charset="-120"/>
+                <a:cs typeface="Amiri" pitchFamily="2" charset="-78"/>
               </a:rPr>
               <a:t>”</a:t>
             </a:r>
@@ -13089,8 +12846,7 @@
                   <a:srgbClr val="1F2A37"/>
                 </a:solidFill>
                 <a:latin typeface="Calibri" pitchFamily="34" charset="0"/>
-                <a:ea typeface="Calibri" pitchFamily="34" charset="-122"/>
-                <a:cs typeface="Calibri" pitchFamily="34" charset="-120"/>
+                <a:cs typeface="Amiri" pitchFamily="2" charset="-78"/>
               </a:rPr>
               <a:t>☐  A clear thesis and cited evidence.</a:t>
             </a:r>
@@ -13128,8 +12884,7 @@
                   <a:srgbClr val="1F2A37"/>
                 </a:solidFill>
                 <a:latin typeface="Calibri" pitchFamily="34" charset="0"/>
-                <a:ea typeface="Calibri" pitchFamily="34" charset="-122"/>
-                <a:cs typeface="Calibri" pitchFamily="34" charset="-120"/>
+                <a:cs typeface="Amiri" pitchFamily="2" charset="-78"/>
               </a:rPr>
               <a:t>☐  A concession (</a:t>
             </a:r>
@@ -13141,9 +12896,8 @@
                 <a:solidFill>
                   <a:srgbClr val="1F2A37"/>
                 </a:solidFill>
-                <a:latin typeface="Amiri" pitchFamily="34" charset="0"/>
-                <a:ea typeface="Amiri" pitchFamily="34" charset="-122"/>
-                <a:cs typeface="Amiri" pitchFamily="34" charset="-120"/>
+                <a:latin typeface="Amiri" pitchFamily="2" charset="-78"/>
+                <a:cs typeface="Amiri" pitchFamily="2" charset="-78"/>
               </a:rPr>
               <a:t>صَحِيحٌ أَنَّ</a:t>
             </a:r>
@@ -13156,8 +12910,7 @@
                   <a:srgbClr val="1F2A37"/>
                 </a:solidFill>
                 <a:latin typeface="Calibri" pitchFamily="34" charset="0"/>
-                <a:ea typeface="Calibri" pitchFamily="34" charset="-122"/>
-                <a:cs typeface="Calibri" pitchFamily="34" charset="-120"/>
+                <a:cs typeface="Amiri" pitchFamily="2" charset="-78"/>
               </a:rPr>
               <a:t>) and a refutation (</a:t>
             </a:r>
@@ -13169,9 +12922,8 @@
                 <a:solidFill>
                   <a:srgbClr val="1F2A37"/>
                 </a:solidFill>
-                <a:latin typeface="Amiri" pitchFamily="34" charset="0"/>
-                <a:ea typeface="Amiri" pitchFamily="34" charset="-122"/>
-                <a:cs typeface="Amiri" pitchFamily="34" charset="-120"/>
+                <a:latin typeface="Amiri" pitchFamily="2" charset="-78"/>
+                <a:cs typeface="Amiri" pitchFamily="2" charset="-78"/>
               </a:rPr>
               <a:t>غَيْرَ أَنَّ</a:t>
             </a:r>
@@ -13184,8 +12936,7 @@
                   <a:srgbClr val="1F2A37"/>
                 </a:solidFill>
                 <a:latin typeface="Calibri" pitchFamily="34" charset="0"/>
-                <a:ea typeface="Calibri" pitchFamily="34" charset="-122"/>
-                <a:cs typeface="Calibri" pitchFamily="34" charset="-120"/>
+                <a:cs typeface="Amiri" pitchFamily="2" charset="-78"/>
               </a:rPr>
               <a:t>).</a:t>
             </a:r>
@@ -13223,8 +12974,7 @@
                   <a:srgbClr val="1F2A37"/>
                 </a:solidFill>
                 <a:latin typeface="Calibri" pitchFamily="34" charset="0"/>
-                <a:ea typeface="Calibri" pitchFamily="34" charset="-122"/>
-                <a:cs typeface="Calibri" pitchFamily="34" charset="-120"/>
+                <a:cs typeface="Amiri" pitchFamily="2" charset="-78"/>
               </a:rPr>
               <a:t>☐  A subjunctive trigger and a Type 2 conditional.</a:t>
             </a:r>
@@ -13262,8 +13012,7 @@
                   <a:srgbClr val="1F2A37"/>
                 </a:solidFill>
                 <a:latin typeface="Calibri" pitchFamily="34" charset="0"/>
-                <a:ea typeface="Calibri" pitchFamily="34" charset="-122"/>
-                <a:cs typeface="Calibri" pitchFamily="34" charset="-120"/>
+                <a:cs typeface="Amiri" pitchFamily="2" charset="-78"/>
               </a:rPr>
               <a:t>☐  A conclusion connector with a subjunctive; 130–150 words.</a:t>
             </a:r>
@@ -13335,8 +13084,7 @@
                   <a:srgbClr val="8A6D1E"/>
                 </a:solidFill>
                 <a:latin typeface="Calibri" pitchFamily="34" charset="0"/>
-                <a:ea typeface="Calibri" pitchFamily="34" charset="-122"/>
-                <a:cs typeface="Calibri" pitchFamily="34" charset="-120"/>
+                <a:cs typeface="Amiri" pitchFamily="2" charset="-78"/>
               </a:rPr>
               <a:t>USEFUL LANGUAGE — FROM THE WEBSITE MODEL</a:t>
             </a:r>
@@ -13373,9 +13121,8 @@
                 <a:solidFill>
                   <a:srgbClr val="1B3B6F"/>
                 </a:solidFill>
-                <a:latin typeface="Amiri" pitchFamily="34" charset="0"/>
-                <a:ea typeface="Amiri" pitchFamily="34" charset="-122"/>
-                <a:cs typeface="Amiri" pitchFamily="34" charset="-120"/>
+                <a:latin typeface="Amiri" pitchFamily="2" charset="-78"/>
+                <a:cs typeface="Amiri" pitchFamily="2" charset="-78"/>
               </a:rPr>
               <a:t>سِلَاحٌ ذُو حَدَّيْنِ</a:t>
             </a:r>
@@ -13413,8 +13160,7 @@
                   <a:srgbClr val="5A6472"/>
                 </a:solidFill>
                 <a:latin typeface="Calibri" pitchFamily="34" charset="0"/>
-                <a:ea typeface="Calibri" pitchFamily="34" charset="-122"/>
-                <a:cs typeface="Calibri" pitchFamily="34" charset="-120"/>
+                <a:cs typeface="Amiri" pitchFamily="2" charset="-78"/>
               </a:rPr>
               <a:t>a double-edged sword</a:t>
             </a:r>
@@ -13451,9 +13197,8 @@
                 <a:solidFill>
                   <a:srgbClr val="1B3B6F"/>
                 </a:solidFill>
-                <a:latin typeface="Amiri" pitchFamily="34" charset="0"/>
-                <a:ea typeface="Amiri" pitchFamily="34" charset="-122"/>
-                <a:cs typeface="Amiri" pitchFamily="34" charset="-120"/>
+                <a:latin typeface="Amiri" pitchFamily="2" charset="-78"/>
+                <a:cs typeface="Amiri" pitchFamily="2" charset="-78"/>
               </a:rPr>
               <a:t>تُقَرِّبُ النَّاسَ</a:t>
             </a:r>
@@ -13491,8 +13236,7 @@
                   <a:srgbClr val="5A6472"/>
                 </a:solidFill>
                 <a:latin typeface="Calibri" pitchFamily="34" charset="0"/>
-                <a:ea typeface="Calibri" pitchFamily="34" charset="-122"/>
-                <a:cs typeface="Calibri" pitchFamily="34" charset="-120"/>
+                <a:cs typeface="Amiri" pitchFamily="2" charset="-78"/>
               </a:rPr>
               <a:t>brings people closer</a:t>
             </a:r>
@@ -13529,9 +13273,8 @@
                 <a:solidFill>
                   <a:srgbClr val="1B3B6F"/>
                 </a:solidFill>
-                <a:latin typeface="Amiri" pitchFamily="34" charset="0"/>
-                <a:ea typeface="Amiri" pitchFamily="34" charset="-122"/>
-                <a:cs typeface="Amiri" pitchFamily="34" charset="-120"/>
+                <a:latin typeface="Amiri" pitchFamily="2" charset="-78"/>
+                <a:cs typeface="Amiri" pitchFamily="2" charset="-78"/>
               </a:rPr>
               <a:t>المَعْلُومَاتِ المُضَلِّلَةَ</a:t>
             </a:r>
@@ -13569,8 +13312,7 @@
                   <a:srgbClr val="5A6472"/>
                 </a:solidFill>
                 <a:latin typeface="Calibri" pitchFamily="34" charset="0"/>
-                <a:ea typeface="Calibri" pitchFamily="34" charset="-122"/>
-                <a:cs typeface="Calibri" pitchFamily="34" charset="-120"/>
+                <a:cs typeface="Amiri" pitchFamily="2" charset="-78"/>
               </a:rPr>
               <a:t>misinformation</a:t>
             </a:r>
@@ -13607,9 +13349,8 @@
                 <a:solidFill>
                   <a:srgbClr val="1B3B6F"/>
                 </a:solidFill>
-                <a:latin typeface="Amiri" pitchFamily="34" charset="0"/>
-                <a:ea typeface="Amiri" pitchFamily="34" charset="-122"/>
-                <a:cs typeface="Amiri" pitchFamily="34" charset="-120"/>
+                <a:latin typeface="Amiri" pitchFamily="2" charset="-78"/>
+                <a:cs typeface="Amiri" pitchFamily="2" charset="-78"/>
               </a:rPr>
               <a:t>لَوْ وُضِعَتْ ضَوَابِطُ حَكِيمَةٌ</a:t>
             </a:r>
@@ -13647,8 +13388,7 @@
                   <a:srgbClr val="5A6472"/>
                 </a:solidFill>
                 <a:latin typeface="Calibri" pitchFamily="34" charset="0"/>
-                <a:ea typeface="Calibri" pitchFamily="34" charset="-122"/>
-                <a:cs typeface="Calibri" pitchFamily="34" charset="-120"/>
+                <a:cs typeface="Amiri" pitchFamily="2" charset="-78"/>
               </a:rPr>
               <a:t>had wise controls been set</a:t>
             </a:r>
@@ -13685,9 +13425,8 @@
                 <a:solidFill>
                   <a:srgbClr val="1B3B6F"/>
                 </a:solidFill>
-                <a:latin typeface="Amiri" pitchFamily="34" charset="0"/>
-                <a:ea typeface="Amiri" pitchFamily="34" charset="-122"/>
-                <a:cs typeface="Amiri" pitchFamily="34" charset="-120"/>
+                <a:latin typeface="Amiri" pitchFamily="2" charset="-78"/>
+                <a:cs typeface="Amiri" pitchFamily="2" charset="-78"/>
               </a:rPr>
               <a:t>لِكَيْ نَجْنِيَ فَوَائِدَهَا</a:t>
             </a:r>
@@ -13725,8 +13464,7 @@
                   <a:srgbClr val="5A6472"/>
                 </a:solidFill>
                 <a:latin typeface="Calibri" pitchFamily="34" charset="0"/>
-                <a:ea typeface="Calibri" pitchFamily="34" charset="-122"/>
-                <a:cs typeface="Calibri" pitchFamily="34" charset="-120"/>
+                <a:cs typeface="Amiri" pitchFamily="2" charset="-78"/>
               </a:rPr>
               <a:t>so that we reap its benefits</a:t>
             </a:r>
@@ -13764,8 +13502,7 @@
                   <a:srgbClr val="8A93A0"/>
                 </a:solidFill>
                 <a:latin typeface="Calibri" pitchFamily="34" charset="0"/>
-                <a:ea typeface="Calibri" pitchFamily="34" charset="-122"/>
-                <a:cs typeface="Calibri" pitchFamily="34" charset="-120"/>
+                <a:cs typeface="Amiri" pitchFamily="2" charset="-78"/>
               </a:rPr>
               <a:t>16 / 25</a:t>
             </a:r>
@@ -13859,9 +13596,8 @@
                 <a:solidFill>
                   <a:srgbClr val="D4AF37"/>
                 </a:solidFill>
-                <a:latin typeface="Amiri" pitchFamily="34" charset="0"/>
-                <a:ea typeface="Amiri" pitchFamily="34" charset="-122"/>
-                <a:cs typeface="Amiri" pitchFamily="34" charset="-120"/>
+                <a:latin typeface="Amiri" pitchFamily="2" charset="-78"/>
+                <a:cs typeface="Amiri" pitchFamily="2" charset="-78"/>
               </a:rPr>
               <a:t>م</a:t>
             </a:r>
@@ -13899,8 +13635,7 @@
                   <a:srgbClr val="1B3B6F"/>
                 </a:solidFill>
                 <a:latin typeface="Cambria" pitchFamily="34" charset="0"/>
-                <a:ea typeface="Cambria" pitchFamily="34" charset="-122"/>
-                <a:cs typeface="Cambria" pitchFamily="34" charset="-120"/>
+                <a:cs typeface="Amiri" pitchFamily="2" charset="-78"/>
               </a:rPr>
               <a:t>Al Madina Online School</a:t>
             </a:r>
@@ -13938,8 +13673,7 @@
                   <a:srgbClr val="8A6D1E"/>
                 </a:solidFill>
                 <a:latin typeface="Calibri" pitchFamily="34" charset="0"/>
-                <a:ea typeface="Calibri" pitchFamily="34" charset="-122"/>
-                <a:cs typeface="Calibri" pitchFamily="34" charset="-120"/>
+                <a:cs typeface="Amiri" pitchFamily="2" charset="-78"/>
               </a:rPr>
               <a:t>ARABIC DEPARTMENT · MIFTAH ARABIC · IGCSE 0544</a:t>
             </a:r>
@@ -14004,8 +13738,7 @@
                   <a:srgbClr val="FFFFFF"/>
                 </a:solidFill>
                 <a:latin typeface="Calibri" pitchFamily="34" charset="0"/>
-                <a:ea typeface="Calibri" pitchFamily="34" charset="-122"/>
-                <a:cs typeface="Calibri" pitchFamily="34" charset="-120"/>
+                <a:cs typeface="Amiri" pitchFamily="2" charset="-78"/>
               </a:rPr>
               <a:t>P6-L05 · IGCSE Bridge</a:t>
             </a:r>
@@ -14070,8 +13803,7 @@
                   <a:srgbClr val="FFFFFF"/>
                 </a:solidFill>
                 <a:latin typeface="Calibri" pitchFamily="34" charset="0"/>
-                <a:ea typeface="Calibri" pitchFamily="34" charset="-122"/>
-                <a:cs typeface="Calibri" pitchFamily="34" charset="-120"/>
+                <a:cs typeface="Amiri" pitchFamily="2" charset="-78"/>
               </a:rPr>
               <a:t>YOU DO</a:t>
             </a:r>
@@ -14109,8 +13841,7 @@
                   <a:srgbClr val="1E6B52"/>
                 </a:solidFill>
                 <a:latin typeface="Calibri" pitchFamily="34" charset="0"/>
-                <a:ea typeface="Calibri" pitchFamily="34" charset="-122"/>
-                <a:cs typeface="Calibri" pitchFamily="34" charset="-120"/>
+                <a:cs typeface="Amiri" pitchFamily="2" charset="-78"/>
               </a:rPr>
               <a:t>YOU DO · SUPPORT · THE ESSAY SKELETON (CORE) AND UPGRADES (DEVELOP)</a:t>
             </a:r>
@@ -14148,8 +13879,7 @@
                   <a:srgbClr val="1B3B6F"/>
                 </a:solidFill>
                 <a:latin typeface="Cambria" pitchFamily="34" charset="0"/>
-                <a:ea typeface="Cambria" pitchFamily="34" charset="-122"/>
-                <a:cs typeface="Cambria" pitchFamily="34" charset="-120"/>
+                <a:cs typeface="Amiri" pitchFamily="2" charset="-78"/>
               </a:rPr>
               <a:t>Essay skeleton and word bank</a:t>
             </a:r>
@@ -14186,9 +13916,8 @@
                 <a:solidFill>
                   <a:srgbClr val="8A6D1E"/>
                 </a:solidFill>
-                <a:latin typeface="Amiri" pitchFamily="34" charset="0"/>
-                <a:ea typeface="Amiri" pitchFamily="34" charset="-122"/>
-                <a:cs typeface="Amiri" pitchFamily="34" charset="-120"/>
+                <a:latin typeface="Amiri" pitchFamily="2" charset="-78"/>
+                <a:cs typeface="Amiri" pitchFamily="2" charset="-78"/>
               </a:rPr>
               <a:t>هَيْكَلُ المَقَالِ</a:t>
             </a:r>
@@ -14226,8 +13955,7 @@
                   <a:srgbClr val="8A93A0"/>
                 </a:solidFill>
                 <a:latin typeface="Calibri" pitchFamily="34" charset="0"/>
-                <a:ea typeface="Calibri" pitchFamily="34" charset="-122"/>
-                <a:cs typeface="Calibri" pitchFamily="34" charset="-120"/>
+                <a:cs typeface="Amiri" pitchFamily="2" charset="-78"/>
               </a:rPr>
               <a:t>Miftah Arabic · Progression P6 · IGCSE Bridge · P6-L05</a:t>
             </a:r>
@@ -14326,8 +14054,7 @@
                   <a:srgbClr val="FFFFFF"/>
                 </a:solidFill>
                 <a:latin typeface="Calibri" pitchFamily="34" charset="0"/>
-                <a:ea typeface="Calibri" pitchFamily="34" charset="-122"/>
-                <a:cs typeface="Calibri" pitchFamily="34" charset="-120"/>
+                <a:cs typeface="Amiri" pitchFamily="2" charset="-78"/>
               </a:rPr>
               <a:t>DEVELOP</a:t>
             </a:r>
@@ -14364,9 +14091,8 @@
                 <a:solidFill>
                   <a:srgbClr val="1B3B6F"/>
                 </a:solidFill>
-                <a:latin typeface="Amiri" pitchFamily="34" charset="0"/>
-                <a:ea typeface="Amiri" pitchFamily="34" charset="-122"/>
-                <a:cs typeface="Amiri" pitchFamily="34" charset="-120"/>
+                <a:latin typeface="Amiri" pitchFamily="2" charset="-78"/>
+                <a:cs typeface="Amiri" pitchFamily="2" charset="-78"/>
               </a:rPr>
               <a:t>لَوْ ______ مُبَكِّرًا، لَكَانَ ______ .</a:t>
             </a:r>
@@ -14404,8 +14130,7 @@
                   <a:srgbClr val="5A6472"/>
                 </a:solidFill>
                 <a:latin typeface="Calibri" pitchFamily="34" charset="0"/>
-                <a:ea typeface="Calibri" pitchFamily="34" charset="-122"/>
-                <a:cs typeface="Calibri" pitchFamily="34" charset="-120"/>
+                <a:cs typeface="Amiri" pitchFamily="2" charset="-78"/>
               </a:rPr>
               <a:t>Had … been …, … would have …</a:t>
             </a:r>
@@ -14442,9 +14167,8 @@
                 <a:solidFill>
                   <a:srgbClr val="1B3B6F"/>
                 </a:solidFill>
-                <a:latin typeface="Amiri" pitchFamily="34" charset="0"/>
-                <a:ea typeface="Amiri" pitchFamily="34" charset="-122"/>
-                <a:cs typeface="Amiri" pitchFamily="34" charset="-120"/>
+                <a:latin typeface="Amiri" pitchFamily="2" charset="-78"/>
+                <a:cs typeface="Amiri" pitchFamily="2" charset="-78"/>
               </a:rPr>
               <a:t>إِذَا ______ ، سَيَكُونُ ______ .</a:t>
             </a:r>
@@ -14482,8 +14206,7 @@
                   <a:srgbClr val="5A6472"/>
                 </a:solidFill>
                 <a:latin typeface="Calibri" pitchFamily="34" charset="0"/>
-                <a:ea typeface="Calibri" pitchFamily="34" charset="-122"/>
-                <a:cs typeface="Calibri" pitchFamily="34" charset="-120"/>
+                <a:cs typeface="Amiri" pitchFamily="2" charset="-78"/>
               </a:rPr>
               <a:t>If we …, … will …</a:t>
             </a:r>
@@ -14520,9 +14243,8 @@
                 <a:solidFill>
                   <a:srgbClr val="1B3B6F"/>
                 </a:solidFill>
-                <a:latin typeface="Amiri" pitchFamily="34" charset="0"/>
-                <a:ea typeface="Amiri" pitchFamily="34" charset="-122"/>
-                <a:cs typeface="Amiri" pitchFamily="34" charset="-120"/>
+                <a:latin typeface="Amiri" pitchFamily="2" charset="-78"/>
+                <a:cs typeface="Amiri" pitchFamily="2" charset="-78"/>
               </a:rPr>
               <a:t>______ لَا يَقِلُّ أَهَمِّيَّةً عَنْ ______ .</a:t>
             </a:r>
@@ -14560,8 +14282,7 @@
                   <a:srgbClr val="5A6472"/>
                 </a:solidFill>
                 <a:latin typeface="Calibri" pitchFamily="34" charset="0"/>
-                <a:ea typeface="Calibri" pitchFamily="34" charset="-122"/>
-                <a:cs typeface="Calibri" pitchFamily="34" charset="-120"/>
+                <a:cs typeface="Amiri" pitchFamily="2" charset="-78"/>
               </a:rPr>
               <a:t>… is no less important than …</a:t>
             </a:r>
@@ -14598,9 +14319,8 @@
                 <a:solidFill>
                   <a:srgbClr val="1B3B6F"/>
                 </a:solidFill>
-                <a:latin typeface="Amiri" pitchFamily="34" charset="0"/>
-                <a:ea typeface="Amiri" pitchFamily="34" charset="-122"/>
-                <a:cs typeface="Amiri" pitchFamily="34" charset="-120"/>
+                <a:latin typeface="Amiri" pitchFamily="2" charset="-78"/>
+                <a:cs typeface="Amiri" pitchFamily="2" charset="-78"/>
               </a:rPr>
               <a:t>______ لِكَيْ ______ .</a:t>
             </a:r>
@@ -14638,8 +14358,7 @@
                   <a:srgbClr val="5A6472"/>
                 </a:solidFill>
                 <a:latin typeface="Calibri" pitchFamily="34" charset="0"/>
-                <a:ea typeface="Calibri" pitchFamily="34" charset="-122"/>
-                <a:cs typeface="Calibri" pitchFamily="34" charset="-120"/>
+                <a:cs typeface="Amiri" pitchFamily="2" charset="-78"/>
               </a:rPr>
               <a:t>… so that we …</a:t>
             </a:r>
@@ -14738,8 +14457,7 @@
                   <a:srgbClr val="FFFFFF"/>
                 </a:solidFill>
                 <a:latin typeface="Calibri" pitchFamily="34" charset="0"/>
-                <a:ea typeface="Calibri" pitchFamily="34" charset="-122"/>
-                <a:cs typeface="Calibri" pitchFamily="34" charset="-120"/>
+                <a:cs typeface="Amiri" pitchFamily="2" charset="-78"/>
               </a:rPr>
               <a:t>CORE</a:t>
             </a:r>
@@ -14776,9 +14494,8 @@
                 <a:solidFill>
                   <a:srgbClr val="1B3B6F"/>
                 </a:solidFill>
-                <a:latin typeface="Amiri" pitchFamily="34" charset="0"/>
-                <a:ea typeface="Amiri" pitchFamily="34" charset="-122"/>
-                <a:cs typeface="Amiri" pitchFamily="34" charset="-120"/>
+                <a:latin typeface="Amiri" pitchFamily="2" charset="-78"/>
+                <a:cs typeface="Amiri" pitchFamily="2" charset="-78"/>
               </a:rPr>
               <a:t>يُشَارُ إِلَى أَنَّ ______ أَكْثَرَ مِمَّا ______ .</a:t>
             </a:r>
@@ -14816,8 +14533,7 @@
                   <a:srgbClr val="5A6472"/>
                 </a:solidFill>
                 <a:latin typeface="Calibri" pitchFamily="34" charset="0"/>
-                <a:ea typeface="Calibri" pitchFamily="34" charset="-122"/>
-                <a:cs typeface="Calibri" pitchFamily="34" charset="-120"/>
+                <a:cs typeface="Amiri" pitchFamily="2" charset="-78"/>
               </a:rPr>
               <a:t>P1 · It is noted that … more than …</a:t>
             </a:r>
@@ -14854,9 +14570,8 @@
                 <a:solidFill>
                   <a:srgbClr val="1B3B6F"/>
                 </a:solidFill>
-                <a:latin typeface="Amiri" pitchFamily="34" charset="0"/>
-                <a:ea typeface="Amiri" pitchFamily="34" charset="-122"/>
-                <a:cs typeface="Amiri" pitchFamily="34" charset="-120"/>
+                <a:latin typeface="Amiri" pitchFamily="2" charset="-78"/>
+                <a:cs typeface="Amiri" pitchFamily="2" charset="-78"/>
               </a:rPr>
               <a:t>أَكَّدَ البَاحِثُونَ أَنَّ ______ .</a:t>
             </a:r>
@@ -14894,8 +14609,7 @@
                   <a:srgbClr val="5A6472"/>
                 </a:solidFill>
                 <a:latin typeface="Calibri" pitchFamily="34" charset="0"/>
-                <a:ea typeface="Calibri" pitchFamily="34" charset="-122"/>
-                <a:cs typeface="Calibri" pitchFamily="34" charset="-120"/>
+                <a:cs typeface="Amiri" pitchFamily="2" charset="-78"/>
               </a:rPr>
               <a:t>P2 · Researchers confirmed that …</a:t>
             </a:r>
@@ -14932,9 +14646,8 @@
                 <a:solidFill>
                   <a:srgbClr val="1B3B6F"/>
                 </a:solidFill>
-                <a:latin typeface="Amiri" pitchFamily="34" charset="0"/>
-                <a:ea typeface="Amiri" pitchFamily="34" charset="-122"/>
-                <a:cs typeface="Amiri" pitchFamily="34" charset="-120"/>
+                <a:latin typeface="Amiri" pitchFamily="2" charset="-78"/>
+                <a:cs typeface="Amiri" pitchFamily="2" charset="-78"/>
               </a:rPr>
               <a:t>صَحِيحٌ أَنَّ ______ ، غَيْرَ أَنَّ ______ .</a:t>
             </a:r>
@@ -14972,8 +14685,7 @@
                   <a:srgbClr val="5A6472"/>
                 </a:solidFill>
                 <a:latin typeface="Calibri" pitchFamily="34" charset="0"/>
-                <a:ea typeface="Calibri" pitchFamily="34" charset="-122"/>
-                <a:cs typeface="Calibri" pitchFamily="34" charset="-120"/>
+                <a:cs typeface="Amiri" pitchFamily="2" charset="-78"/>
               </a:rPr>
               <a:t>P3 · It is true that …; however, …</a:t>
             </a:r>
@@ -15010,9 +14722,8 @@
                 <a:solidFill>
                   <a:srgbClr val="1B3B6F"/>
                 </a:solidFill>
-                <a:latin typeface="Amiri" pitchFamily="34" charset="0"/>
-                <a:ea typeface="Amiri" pitchFamily="34" charset="-122"/>
-                <a:cs typeface="Amiri" pitchFamily="34" charset="-120"/>
+                <a:latin typeface="Amiri" pitchFamily="2" charset="-78"/>
+                <a:cs typeface="Amiri" pitchFamily="2" charset="-78"/>
               </a:rPr>
               <a:t>وَبِنَاءً عَلَى مَا سَبَقَ، يَتَطَلَّبُ الأَمْرُ أَنْ ______ .</a:t>
             </a:r>
@@ -15050,8 +14761,7 @@
                   <a:srgbClr val="5A6472"/>
                 </a:solidFill>
                 <a:latin typeface="Calibri" pitchFamily="34" charset="0"/>
-                <a:ea typeface="Calibri" pitchFamily="34" charset="-122"/>
-                <a:cs typeface="Calibri" pitchFamily="34" charset="-120"/>
+                <a:cs typeface="Amiri" pitchFamily="2" charset="-78"/>
               </a:rPr>
               <a:t>P4 · Based on the above, … requires that …</a:t>
             </a:r>
@@ -15123,8 +14833,7 @@
                   <a:srgbClr val="8A6D1E"/>
                 </a:solidFill>
                 <a:latin typeface="Calibri" pitchFamily="34" charset="0"/>
-                <a:ea typeface="Calibri" pitchFamily="34" charset="-122"/>
-                <a:cs typeface="Calibri" pitchFamily="34" charset="-120"/>
+                <a:cs typeface="Amiri" pitchFamily="2" charset="-78"/>
               </a:rPr>
               <a:t>WORD BANK</a:t>
             </a:r>
@@ -15161,9 +14870,8 @@
                 <a:solidFill>
                   <a:srgbClr val="1B3B6F"/>
                 </a:solidFill>
-                <a:latin typeface="Amiri" pitchFamily="34" charset="0"/>
-                <a:ea typeface="Amiri" pitchFamily="34" charset="-122"/>
-                <a:cs typeface="Amiri" pitchFamily="34" charset="-120"/>
+                <a:latin typeface="Amiri" pitchFamily="2" charset="-78"/>
+                <a:cs typeface="Amiri" pitchFamily="2" charset="-78"/>
               </a:rPr>
               <a:t>الصِّحَّةَ النَّفْسِيَّةَ  ·  التَّعْلِيمَ الجَامِعِيَّ  ·  وَسَائِلَ التَّوَاصُلِ  ·  سِلَاحٌ ذُو حَدَّيْنِ  ·  يُضْعِفُ التَّرْكِيزَ  ·  فُرَصَ التَّوْظِيفِ  ·  الدَّعْمِ النَّفْسِيِّ  ·  المَعْلُومَاتِ المُضَلِّلَةَ  ·  نُطَوِّرَ  ·  نُولِيَ … العِنَايَةَ  ·  نَجْنِيَ فَوَائِدَهَا  ·  الاسْتِخْدَامِ المَسْؤُولِ</a:t>
             </a:r>
@@ -15201,8 +14909,7 @@
                   <a:srgbClr val="8A93A0"/>
                 </a:solidFill>
                 <a:latin typeface="Calibri" pitchFamily="34" charset="0"/>
-                <a:ea typeface="Calibri" pitchFamily="34" charset="-122"/>
-                <a:cs typeface="Calibri" pitchFamily="34" charset="-120"/>
+                <a:cs typeface="Amiri" pitchFamily="2" charset="-78"/>
               </a:rPr>
               <a:t>17 / 25</a:t>
             </a:r>
@@ -15296,9 +15003,8 @@
                 <a:solidFill>
                   <a:srgbClr val="D4AF37"/>
                 </a:solidFill>
-                <a:latin typeface="Amiri" pitchFamily="34" charset="0"/>
-                <a:ea typeface="Amiri" pitchFamily="34" charset="-122"/>
-                <a:cs typeface="Amiri" pitchFamily="34" charset="-120"/>
+                <a:latin typeface="Amiri" pitchFamily="2" charset="-78"/>
+                <a:cs typeface="Amiri" pitchFamily="2" charset="-78"/>
               </a:rPr>
               <a:t>م</a:t>
             </a:r>
@@ -15336,8 +15042,7 @@
                   <a:srgbClr val="1B3B6F"/>
                 </a:solidFill>
                 <a:latin typeface="Cambria" pitchFamily="34" charset="0"/>
-                <a:ea typeface="Cambria" pitchFamily="34" charset="-122"/>
-                <a:cs typeface="Cambria" pitchFamily="34" charset="-120"/>
+                <a:cs typeface="Amiri" pitchFamily="2" charset="-78"/>
               </a:rPr>
               <a:t>Al Madina Online School</a:t>
             </a:r>
@@ -15375,8 +15080,7 @@
                   <a:srgbClr val="8A6D1E"/>
                 </a:solidFill>
                 <a:latin typeface="Calibri" pitchFamily="34" charset="0"/>
-                <a:ea typeface="Calibri" pitchFamily="34" charset="-122"/>
-                <a:cs typeface="Calibri" pitchFamily="34" charset="-120"/>
+                <a:cs typeface="Amiri" pitchFamily="2" charset="-78"/>
               </a:rPr>
               <a:t>ARABIC DEPARTMENT · MIFTAH ARABIC · IGCSE 0544</a:t>
             </a:r>
@@ -15441,8 +15145,7 @@
                   <a:srgbClr val="FFFFFF"/>
                 </a:solidFill>
                 <a:latin typeface="Calibri" pitchFamily="34" charset="0"/>
-                <a:ea typeface="Calibri" pitchFamily="34" charset="-122"/>
-                <a:cs typeface="Calibri" pitchFamily="34" charset="-120"/>
+                <a:cs typeface="Amiri" pitchFamily="2" charset="-78"/>
               </a:rPr>
               <a:t>P6-L05 · IGCSE Bridge</a:t>
             </a:r>
@@ -15507,8 +15210,7 @@
                   <a:srgbClr val="FFFFFF"/>
                 </a:solidFill>
                 <a:latin typeface="Calibri" pitchFamily="34" charset="0"/>
-                <a:ea typeface="Calibri" pitchFamily="34" charset="-122"/>
-                <a:cs typeface="Calibri" pitchFamily="34" charset="-120"/>
+                <a:cs typeface="Amiri" pitchFamily="2" charset="-78"/>
               </a:rPr>
               <a:t>FEEDBACK · 1 MIN</a:t>
             </a:r>
@@ -15546,8 +15248,7 @@
                   <a:srgbClr val="8A6D1E"/>
                 </a:solidFill>
                 <a:latin typeface="Calibri" pitchFamily="34" charset="0"/>
-                <a:ea typeface="Calibri" pitchFamily="34" charset="-122"/>
-                <a:cs typeface="Calibri" pitchFamily="34" charset="-120"/>
+                <a:cs typeface="Amiri" pitchFamily="2" charset="-78"/>
               </a:rPr>
               <a:t>FEEDBACK · ESSAY 1 · THE WEBSITE MODEL</a:t>
             </a:r>
@@ -15585,8 +15286,7 @@
                   <a:srgbClr val="1B3B6F"/>
                 </a:solidFill>
                 <a:latin typeface="Cambria" pitchFamily="34" charset="0"/>
-                <a:ea typeface="Cambria" pitchFamily="34" charset="-122"/>
-                <a:cs typeface="Cambria" pitchFamily="34" charset="-120"/>
+                <a:cs typeface="Amiri" pitchFamily="2" charset="-78"/>
               </a:rPr>
               <a:t>What a full-mark answer looks like</a:t>
             </a:r>
@@ -15623,9 +15323,8 @@
                 <a:solidFill>
                   <a:srgbClr val="8A6D1E"/>
                 </a:solidFill>
-                <a:latin typeface="Amiri" pitchFamily="34" charset="0"/>
-                <a:ea typeface="Amiri" pitchFamily="34" charset="-122"/>
-                <a:cs typeface="Amiri" pitchFamily="34" charset="-120"/>
+                <a:latin typeface="Amiri" pitchFamily="2" charset="-78"/>
+                <a:cs typeface="Amiri" pitchFamily="2" charset="-78"/>
               </a:rPr>
               <a:t>نَمُوذَجُ الإِجَابَةِ</a:t>
             </a:r>
@@ -15663,8 +15362,7 @@
                   <a:srgbClr val="8A93A0"/>
                 </a:solidFill>
                 <a:latin typeface="Calibri" pitchFamily="34" charset="0"/>
-                <a:ea typeface="Calibri" pitchFamily="34" charset="-122"/>
-                <a:cs typeface="Calibri" pitchFamily="34" charset="-120"/>
+                <a:cs typeface="Amiri" pitchFamily="2" charset="-78"/>
               </a:rPr>
               <a:t>Miftah Arabic · Progression P6 · IGCSE Bridge · P6-L05</a:t>
             </a:r>
@@ -15738,9 +15436,8 @@
                 <a:solidFill>
                   <a:srgbClr val="1F2A37"/>
                 </a:solidFill>
-                <a:latin typeface="Amiri" pitchFamily="34" charset="0"/>
-                <a:ea typeface="Amiri" pitchFamily="34" charset="-122"/>
-                <a:cs typeface="Amiri" pitchFamily="34" charset="-120"/>
+                <a:latin typeface="Amiri" pitchFamily="2" charset="-78"/>
+                <a:cs typeface="Amiri" pitchFamily="2" charset="-78"/>
               </a:rPr>
               <a:t>يُشَارُ إِلَى أَنَّ الصِّحَّةَ النَّفْسِيَّةَ لَا تَقِلُّ أَهَمِّيَّةً عَنِ الصِّحَّةِ الجَسَدِيَّةِ. أَكَّدَ البَاحِثُونَ أَنَّ التَّوَتُّرَ المُزْمِنَ يُضْعِفُ المَنَاعَةَ وَيُؤَثِّرُ فِي الجَسَدِ. صَحِيحٌ أَنَّ الجَسَدَ يَحْتَاجُ إِلَى رِعَايَةٍ، غَيْرَ أَنَّ إِهْمَالَ النَّفْسِ يَهْدِمُ الصِّحَّةَ كُلَّهَا. وَلَوِ اهْتَمَّتِ المَدَارِسُ بِالدَّعْمِ النَّفْسِيِّ مُبَكِّرًا، لَقَلَّتْ حَالَاتُ الاحْتِرَاقِ. وَإِذَا وَازَنَ الإِنْسَانُ بَيْنَ الجَسَدِ وَالنَّفْسِ، عَاشَ حَيَاةً أَفْضَلَ. وَبِنَاءً عَلَى مَا سَبَقَ، يَتَطَلَّبُ الأَمْرُ أَنْ نُولِيَ الصِّحَّةَ النَّفْسِيَّةَ العِنَايَةَ الَّتِي تَسْتَحِقُّهَا.</a:t>
             </a:r>
@@ -15805,8 +15502,7 @@
                   <a:srgbClr val="5A6472"/>
                 </a:solidFill>
                 <a:latin typeface="Calibri" pitchFamily="34" charset="0"/>
-                <a:ea typeface="Calibri" pitchFamily="34" charset="-122"/>
-                <a:cs typeface="Calibri" pitchFamily="34" charset="-120"/>
+                <a:cs typeface="Amiri" pitchFamily="2" charset="-78"/>
               </a:rPr>
               <a:t>It is noted that mental health is no less important than physical health. Researchers have confirmed that chronic stress weakens immunity and affects the body. It is true that the body needs care; however, neglecting the mind destroys health as a whole. Had schools cared about psychological support early, cases of burnout would have fallen. When a person balances body and mind, they live a better life. Based on the above, the matter requires us to give mental health the care it deserves.</a:t>
             </a:r>
@@ -15844,8 +15540,7 @@
                   <a:srgbClr val="8A6D1E"/>
                 </a:solidFill>
                 <a:latin typeface="Calibri" pitchFamily="34" charset="0"/>
-                <a:ea typeface="Calibri" pitchFamily="34" charset="-122"/>
-                <a:cs typeface="Calibri" pitchFamily="34" charset="-120"/>
+                <a:cs typeface="Amiri" pitchFamily="2" charset="-78"/>
               </a:rPr>
               <a:t>FIND IN THE MODEL:</a:t>
             </a:r>
@@ -15910,8 +15605,7 @@
                   <a:srgbClr val="FFFFFF"/>
                 </a:solidFill>
                 <a:latin typeface="Calibri" pitchFamily="34" charset="0"/>
-                <a:ea typeface="Calibri" pitchFamily="34" charset="-122"/>
-                <a:cs typeface="Calibri" pitchFamily="34" charset="-120"/>
+                <a:cs typeface="Amiri" pitchFamily="2" charset="-78"/>
               </a:rPr>
               <a:t>thesis (yushāru ilā anna)</a:t>
             </a:r>
@@ -15976,8 +15670,7 @@
                   <a:srgbClr val="FFFFFF"/>
                 </a:solidFill>
                 <a:latin typeface="Calibri" pitchFamily="34" charset="0"/>
-                <a:ea typeface="Calibri" pitchFamily="34" charset="-122"/>
-                <a:cs typeface="Calibri" pitchFamily="34" charset="-120"/>
+                <a:cs typeface="Amiri" pitchFamily="2" charset="-78"/>
               </a:rPr>
               <a:t>evidence (akkada … anna)</a:t>
             </a:r>
@@ -16042,8 +15735,7 @@
                   <a:srgbClr val="FFFFFF"/>
                 </a:solidFill>
                 <a:latin typeface="Calibri" pitchFamily="34" charset="0"/>
-                <a:ea typeface="Calibri" pitchFamily="34" charset="-122"/>
-                <a:cs typeface="Calibri" pitchFamily="34" charset="-120"/>
+                <a:cs typeface="Amiri" pitchFamily="2" charset="-78"/>
               </a:rPr>
               <a:t>ṣaḥīḥun anna … ghayra anna</a:t>
             </a:r>
@@ -16108,8 +15800,7 @@
                   <a:srgbClr val="FFFFFF"/>
                 </a:solidFill>
                 <a:latin typeface="Calibri" pitchFamily="34" charset="0"/>
-                <a:ea typeface="Calibri" pitchFamily="34" charset="-122"/>
-                <a:cs typeface="Calibri" pitchFamily="34" charset="-120"/>
+                <a:cs typeface="Amiri" pitchFamily="2" charset="-78"/>
               </a:rPr>
               <a:t>law … la- · wa-bināʾan + -a</a:t>
             </a:r>
@@ -16147,8 +15838,7 @@
                   <a:srgbClr val="8A93A0"/>
                 </a:solidFill>
                 <a:latin typeface="Calibri" pitchFamily="34" charset="0"/>
-                <a:ea typeface="Calibri" pitchFamily="34" charset="-122"/>
-                <a:cs typeface="Calibri" pitchFamily="34" charset="-120"/>
+                <a:cs typeface="Amiri" pitchFamily="2" charset="-78"/>
               </a:rPr>
               <a:t>18 / 25</a:t>
             </a:r>
@@ -16242,9 +15932,8 @@
                 <a:solidFill>
                   <a:srgbClr val="D4AF37"/>
                 </a:solidFill>
-                <a:latin typeface="Amiri" pitchFamily="34" charset="0"/>
-                <a:ea typeface="Amiri" pitchFamily="34" charset="-122"/>
-                <a:cs typeface="Amiri" pitchFamily="34" charset="-120"/>
+                <a:latin typeface="Amiri" pitchFamily="2" charset="-78"/>
+                <a:cs typeface="Amiri" pitchFamily="2" charset="-78"/>
               </a:rPr>
               <a:t>م</a:t>
             </a:r>
@@ -16282,8 +15971,7 @@
                   <a:srgbClr val="1B3B6F"/>
                 </a:solidFill>
                 <a:latin typeface="Cambria" pitchFamily="34" charset="0"/>
-                <a:ea typeface="Cambria" pitchFamily="34" charset="-122"/>
-                <a:cs typeface="Cambria" pitchFamily="34" charset="-120"/>
+                <a:cs typeface="Amiri" pitchFamily="2" charset="-78"/>
               </a:rPr>
               <a:t>Al Madina Online School</a:t>
             </a:r>
@@ -16321,8 +16009,7 @@
                   <a:srgbClr val="8A6D1E"/>
                 </a:solidFill>
                 <a:latin typeface="Calibri" pitchFamily="34" charset="0"/>
-                <a:ea typeface="Calibri" pitchFamily="34" charset="-122"/>
-                <a:cs typeface="Calibri" pitchFamily="34" charset="-120"/>
+                <a:cs typeface="Amiri" pitchFamily="2" charset="-78"/>
               </a:rPr>
               <a:t>ARABIC DEPARTMENT · MIFTAH ARABIC · IGCSE 0544</a:t>
             </a:r>
@@ -16387,8 +16074,7 @@
                   <a:srgbClr val="FFFFFF"/>
                 </a:solidFill>
                 <a:latin typeface="Calibri" pitchFamily="34" charset="0"/>
-                <a:ea typeface="Calibri" pitchFamily="34" charset="-122"/>
-                <a:cs typeface="Calibri" pitchFamily="34" charset="-120"/>
+                <a:cs typeface="Amiri" pitchFamily="2" charset="-78"/>
               </a:rPr>
               <a:t>P6-L05 · IGCSE Bridge</a:t>
             </a:r>
@@ -16453,8 +16139,7 @@
                   <a:srgbClr val="FFFFFF"/>
                 </a:solidFill>
                 <a:latin typeface="Calibri" pitchFamily="34" charset="0"/>
-                <a:ea typeface="Calibri" pitchFamily="34" charset="-122"/>
-                <a:cs typeface="Calibri" pitchFamily="34" charset="-120"/>
+                <a:cs typeface="Amiri" pitchFamily="2" charset="-78"/>
               </a:rPr>
               <a:t>FEEDBACK · 1 MIN</a:t>
             </a:r>
@@ -16492,8 +16177,7 @@
                   <a:srgbClr val="8A6D1E"/>
                 </a:solidFill>
                 <a:latin typeface="Calibri" pitchFamily="34" charset="0"/>
-                <a:ea typeface="Calibri" pitchFamily="34" charset="-122"/>
-                <a:cs typeface="Calibri" pitchFamily="34" charset="-120"/>
+                <a:cs typeface="Amiri" pitchFamily="2" charset="-78"/>
               </a:rPr>
               <a:t>FEEDBACK · ESSAY 2 · THE WEBSITE MODEL</a:t>
             </a:r>
@@ -16531,8 +16215,7 @@
                   <a:srgbClr val="1B3B6F"/>
                 </a:solidFill>
                 <a:latin typeface="Cambria" pitchFamily="34" charset="0"/>
-                <a:ea typeface="Cambria" pitchFamily="34" charset="-122"/>
-                <a:cs typeface="Cambria" pitchFamily="34" charset="-120"/>
+                <a:cs typeface="Amiri" pitchFamily="2" charset="-78"/>
               </a:rPr>
               <a:t>What a full-mark answer looks like</a:t>
             </a:r>
@@ -16569,9 +16252,8 @@
                 <a:solidFill>
                   <a:srgbClr val="8A6D1E"/>
                 </a:solidFill>
-                <a:latin typeface="Amiri" pitchFamily="34" charset="0"/>
-                <a:ea typeface="Amiri" pitchFamily="34" charset="-122"/>
-                <a:cs typeface="Amiri" pitchFamily="34" charset="-120"/>
+                <a:latin typeface="Amiri" pitchFamily="2" charset="-78"/>
+                <a:cs typeface="Amiri" pitchFamily="2" charset="-78"/>
               </a:rPr>
               <a:t>نَمُوذَجُ الإِجَابَةِ</a:t>
             </a:r>
@@ -16609,8 +16291,7 @@
                   <a:srgbClr val="8A93A0"/>
                 </a:solidFill>
                 <a:latin typeface="Calibri" pitchFamily="34" charset="0"/>
-                <a:ea typeface="Calibri" pitchFamily="34" charset="-122"/>
-                <a:cs typeface="Calibri" pitchFamily="34" charset="-120"/>
+                <a:cs typeface="Amiri" pitchFamily="2" charset="-78"/>
               </a:rPr>
               <a:t>Miftah Arabic · Progression P6 · IGCSE Bridge · P6-L05</a:t>
             </a:r>
@@ -16684,9 +16365,8 @@
                 <a:solidFill>
                   <a:srgbClr val="1F2A37"/>
                 </a:solidFill>
-                <a:latin typeface="Amiri" pitchFamily="34" charset="0"/>
-                <a:ea typeface="Amiri" pitchFamily="34" charset="-122"/>
-                <a:cs typeface="Amiri" pitchFamily="34" charset="-120"/>
+                <a:latin typeface="Amiri" pitchFamily="2" charset="-78"/>
+                <a:cs typeface="Amiri" pitchFamily="2" charset="-78"/>
               </a:rPr>
               <a:t>يُشَارُ إِلَى أَنَّ التَّعْلِيمَ الجَامِعِيَّ لَا يَزَالُ رَكِيزَةً مُهِمَّةً لِلنَّجَاحِ. صَحِيحٌ أَنَّ بَعْضَ رُوَّادِ الأَعْمَالِ نَجَحُوا دُونَ شَهَادَةٍ، غَيْرَ أَنَّ الأَغْلَبِيَّةَ تَحْتَاجُ إِلَى مَهَارَاتٍ لَا تُبْنَى إِلَّا بِالتَّعَلُّمِ المُنَظَّمِ. أَكَّدَ خُبَرَاءُ سُوقِ العَمَلِ أَنَّ المَعْرِفَةَ المُتَخَصِّصَةَ تَرْفَعُ فُرَصَ التَّوْظِيفِ. وَإِذَا طَوَّرَتِ الجَامِعَاتُ مَنَاهِجَهَا، سَيَزْدَادُ ارْتِبَاطُهَا بِالوَاقِعِ. وَلَوِ اقْتَصَرْنَا عَلَى المَهَارَاتِ الذَّاتِيَّةِ وَحْدَهَا، لَحُرِمَ كَثِيرُونَ مِنْ فُرَصٍ عَادِلَةٍ. وَبِنَاءً عَلَى مَا سَبَقَ، يَنْبَغِي أَنْ نُطَوِّرَ التَّعْلِيمَ لَا أَنْ نَسْتَغْنِيَ عَنْهُ.</a:t>
             </a:r>
@@ -16751,8 +16431,7 @@
                   <a:srgbClr val="5A6472"/>
                 </a:solidFill>
                 <a:latin typeface="Calibri" pitchFamily="34" charset="0"/>
-                <a:ea typeface="Calibri" pitchFamily="34" charset="-122"/>
-                <a:cs typeface="Calibri" pitchFamily="34" charset="-120"/>
+                <a:cs typeface="Amiri" pitchFamily="2" charset="-78"/>
               </a:rPr>
               <a:t>It is noted that university education is still an important pillar of success. It is true that some entrepreneurs have succeeded without a degree; however, the majority need skills that are only built through organised learning. Labour-market experts have confirmed that specialised knowledge raises employment chances. If universities develop their curricula, their link with reality will grow. Had we relied on self-taught skills alone, many would have been deprived of fair opportunities. Based on the above, we should develop education, not do without it.</a:t>
             </a:r>
@@ -16790,8 +16469,7 @@
                   <a:srgbClr val="8A6D1E"/>
                 </a:solidFill>
                 <a:latin typeface="Calibri" pitchFamily="34" charset="0"/>
-                <a:ea typeface="Calibri" pitchFamily="34" charset="-122"/>
-                <a:cs typeface="Calibri" pitchFamily="34" charset="-120"/>
+                <a:cs typeface="Amiri" pitchFamily="2" charset="-78"/>
               </a:rPr>
               <a:t>FIND IN THE MODEL:</a:t>
             </a:r>
@@ -16856,8 +16534,7 @@
                   <a:srgbClr val="FFFFFF"/>
                 </a:solidFill>
                 <a:latin typeface="Calibri" pitchFamily="34" charset="0"/>
-                <a:ea typeface="Calibri" pitchFamily="34" charset="-122"/>
-                <a:cs typeface="Calibri" pitchFamily="34" charset="-120"/>
+                <a:cs typeface="Amiri" pitchFamily="2" charset="-78"/>
               </a:rPr>
               <a:t>thesis + concession</a:t>
             </a:r>
@@ -16922,8 +16599,7 @@
                   <a:srgbClr val="FFFFFF"/>
                 </a:solidFill>
                 <a:latin typeface="Calibri" pitchFamily="34" charset="0"/>
-                <a:ea typeface="Calibri" pitchFamily="34" charset="-122"/>
-                <a:cs typeface="Calibri" pitchFamily="34" charset="-120"/>
+                <a:cs typeface="Amiri" pitchFamily="2" charset="-78"/>
               </a:rPr>
               <a:t>expert evidence</a:t>
             </a:r>
@@ -16988,8 +16664,7 @@
                   <a:srgbClr val="FFFFFF"/>
                 </a:solidFill>
                 <a:latin typeface="Calibri" pitchFamily="34" charset="0"/>
-                <a:ea typeface="Calibri" pitchFamily="34" charset="-122"/>
-                <a:cs typeface="Calibri" pitchFamily="34" charset="-120"/>
+                <a:cs typeface="Amiri" pitchFamily="2" charset="-78"/>
               </a:rPr>
               <a:t>idhā … sa- · law … la-</a:t>
             </a:r>
@@ -17054,8 +16729,7 @@
                   <a:srgbClr val="FFFFFF"/>
                 </a:solidFill>
                 <a:latin typeface="Calibri" pitchFamily="34" charset="0"/>
-                <a:ea typeface="Calibri" pitchFamily="34" charset="-122"/>
-                <a:cs typeface="Calibri" pitchFamily="34" charset="-120"/>
+                <a:cs typeface="Amiri" pitchFamily="2" charset="-78"/>
               </a:rPr>
               <a:t>yanbaghī an … lā an …</a:t>
             </a:r>
@@ -17093,8 +16767,7 @@
                   <a:srgbClr val="8A93A0"/>
                 </a:solidFill>
                 <a:latin typeface="Calibri" pitchFamily="34" charset="0"/>
-                <a:ea typeface="Calibri" pitchFamily="34" charset="-122"/>
-                <a:cs typeface="Calibri" pitchFamily="34" charset="-120"/>
+                <a:cs typeface="Amiri" pitchFamily="2" charset="-78"/>
               </a:rPr>
               <a:t>19 / 25</a:t>
             </a:r>
@@ -17188,9 +16861,8 @@
                 <a:solidFill>
                   <a:srgbClr val="D4AF37"/>
                 </a:solidFill>
-                <a:latin typeface="Amiri" pitchFamily="34" charset="0"/>
-                <a:ea typeface="Amiri" pitchFamily="34" charset="-122"/>
-                <a:cs typeface="Amiri" pitchFamily="34" charset="-120"/>
+                <a:latin typeface="Amiri" pitchFamily="2" charset="-78"/>
+                <a:cs typeface="Amiri" pitchFamily="2" charset="-78"/>
               </a:rPr>
               <a:t>م</a:t>
             </a:r>
@@ -17228,8 +16900,7 @@
                   <a:srgbClr val="1B3B6F"/>
                 </a:solidFill>
                 <a:latin typeface="Cambria" pitchFamily="34" charset="0"/>
-                <a:ea typeface="Cambria" pitchFamily="34" charset="-122"/>
-                <a:cs typeface="Cambria" pitchFamily="34" charset="-120"/>
+                <a:cs typeface="Amiri" pitchFamily="2" charset="-78"/>
               </a:rPr>
               <a:t>Al Madina Online School</a:t>
             </a:r>
@@ -17267,8 +16938,7 @@
                   <a:srgbClr val="8A6D1E"/>
                 </a:solidFill>
                 <a:latin typeface="Calibri" pitchFamily="34" charset="0"/>
-                <a:ea typeface="Calibri" pitchFamily="34" charset="-122"/>
-                <a:cs typeface="Calibri" pitchFamily="34" charset="-120"/>
+                <a:cs typeface="Amiri" pitchFamily="2" charset="-78"/>
               </a:rPr>
               <a:t>ARABIC DEPARTMENT · MIFTAH ARABIC · IGCSE 0544</a:t>
             </a:r>
@@ -17333,8 +17003,7 @@
                   <a:srgbClr val="FFFFFF"/>
                 </a:solidFill>
                 <a:latin typeface="Calibri" pitchFamily="34" charset="0"/>
-                <a:ea typeface="Calibri" pitchFamily="34" charset="-122"/>
-                <a:cs typeface="Calibri" pitchFamily="34" charset="-120"/>
+                <a:cs typeface="Amiri" pitchFamily="2" charset="-78"/>
               </a:rPr>
               <a:t>P6-L05 · IGCSE Bridge</a:t>
             </a:r>
@@ -17399,8 +17068,7 @@
                   <a:srgbClr val="FFFFFF"/>
                 </a:solidFill>
                 <a:latin typeface="Calibri" pitchFamily="34" charset="0"/>
-                <a:ea typeface="Calibri" pitchFamily="34" charset="-122"/>
-                <a:cs typeface="Calibri" pitchFamily="34" charset="-120"/>
+                <a:cs typeface="Amiri" pitchFamily="2" charset="-78"/>
               </a:rPr>
               <a:t>WELCOME · 1 MIN</a:t>
             </a:r>
@@ -17438,8 +17106,7 @@
                   <a:srgbClr val="5A6472"/>
                 </a:solidFill>
                 <a:latin typeface="Calibri" pitchFamily="34" charset="0"/>
-                <a:ea typeface="Calibri" pitchFamily="34" charset="-122"/>
-                <a:cs typeface="Calibri" pitchFamily="34" charset="-120"/>
+                <a:cs typeface="Amiri" pitchFamily="2" charset="-78"/>
               </a:rPr>
               <a:t>BEFORE WE BEGIN</a:t>
             </a:r>
@@ -17477,8 +17144,7 @@
                   <a:srgbClr val="1B3B6F"/>
                 </a:solidFill>
                 <a:latin typeface="Cambria" pitchFamily="34" charset="0"/>
-                <a:ea typeface="Cambria" pitchFamily="34" charset="-122"/>
-                <a:cs typeface="Cambria" pitchFamily="34" charset="-120"/>
+                <a:cs typeface="Amiri" pitchFamily="2" charset="-78"/>
               </a:rPr>
               <a:t>Our online classroom</a:t>
             </a:r>
@@ -17515,9 +17181,8 @@
                 <a:solidFill>
                   <a:srgbClr val="8A6D1E"/>
                 </a:solidFill>
-                <a:latin typeface="Amiri" pitchFamily="34" charset="0"/>
-                <a:ea typeface="Amiri" pitchFamily="34" charset="-122"/>
-                <a:cs typeface="Amiri" pitchFamily="34" charset="-120"/>
+                <a:latin typeface="Amiri" pitchFamily="2" charset="-78"/>
+                <a:cs typeface="Amiri" pitchFamily="2" charset="-78"/>
               </a:rPr>
               <a:t>آدَابُ الصَّفِّ</a:t>
             </a:r>
@@ -17555,8 +17220,7 @@
                   <a:srgbClr val="8A93A0"/>
                 </a:solidFill>
                 <a:latin typeface="Calibri" pitchFamily="34" charset="0"/>
-                <a:ea typeface="Calibri" pitchFamily="34" charset="-122"/>
-                <a:cs typeface="Calibri" pitchFamily="34" charset="-120"/>
+                <a:cs typeface="Amiri" pitchFamily="2" charset="-78"/>
               </a:rPr>
               <a:t>Miftah Arabic · Progression P6 · IGCSE Bridge · P6-L05</a:t>
             </a:r>
@@ -17677,8 +17341,7 @@
                   <a:srgbClr val="1B3B6F"/>
                 </a:solidFill>
                 <a:latin typeface="Calibri" pitchFamily="34" charset="0"/>
-                <a:ea typeface="Calibri" pitchFamily="34" charset="-122"/>
-                <a:cs typeface="Calibri" pitchFamily="34" charset="-120"/>
+                <a:cs typeface="Amiri" pitchFamily="2" charset="-78"/>
               </a:rPr>
               <a:t>Camera on</a:t>
             </a:r>
@@ -17694,8 +17357,7 @@
                   <a:srgbClr val="5A6472"/>
                 </a:solidFill>
                 <a:latin typeface="Calibri" pitchFamily="34" charset="0"/>
-                <a:ea typeface="Calibri" pitchFamily="34" charset="-122"/>
-                <a:cs typeface="Calibri" pitchFamily="34" charset="-120"/>
+                <a:cs typeface="Amiri" pitchFamily="2" charset="-78"/>
               </a:rPr>
               <a:t>So I can see you learning and help you quickly.</a:t>
             </a:r>
@@ -17816,8 +17478,7 @@
                   <a:srgbClr val="1B3B6F"/>
                 </a:solidFill>
                 <a:latin typeface="Calibri" pitchFamily="34" charset="0"/>
-                <a:ea typeface="Calibri" pitchFamily="34" charset="-122"/>
-                <a:cs typeface="Calibri" pitchFamily="34" charset="-120"/>
+                <a:cs typeface="Amiri" pitchFamily="2" charset="-78"/>
               </a:rPr>
               <a:t>Mic muted</a:t>
             </a:r>
@@ -17833,8 +17494,7 @@
                   <a:srgbClr val="5A6472"/>
                 </a:solidFill>
                 <a:latin typeface="Calibri" pitchFamily="34" charset="0"/>
-                <a:ea typeface="Calibri" pitchFamily="34" charset="-122"/>
-                <a:cs typeface="Calibri" pitchFamily="34" charset="-120"/>
+                <a:cs typeface="Amiri" pitchFamily="2" charset="-78"/>
               </a:rPr>
               <a:t>Unmute only when invited to speak.</a:t>
             </a:r>
@@ -17955,8 +17615,7 @@
                   <a:srgbClr val="1B3B6F"/>
                 </a:solidFill>
                 <a:latin typeface="Calibri" pitchFamily="34" charset="0"/>
-                <a:ea typeface="Calibri" pitchFamily="34" charset="-122"/>
-                <a:cs typeface="Calibri" pitchFamily="34" charset="-120"/>
+                <a:cs typeface="Amiri" pitchFamily="2" charset="-78"/>
               </a:rPr>
               <a:t>Chat for learning</a:t>
             </a:r>
@@ -17972,8 +17631,7 @@
                   <a:srgbClr val="5A6472"/>
                 </a:solidFill>
                 <a:latin typeface="Calibri" pitchFamily="34" charset="0"/>
-                <a:ea typeface="Calibri" pitchFamily="34" charset="-122"/>
-                <a:cs typeface="Calibri" pitchFamily="34" charset="-120"/>
+                <a:cs typeface="Amiri" pitchFamily="2" charset="-78"/>
               </a:rPr>
               <a:t>Answers, questions and Arabic only.</a:t>
             </a:r>
@@ -18094,8 +17752,7 @@
                   <a:srgbClr val="1B3B6F"/>
                 </a:solidFill>
                 <a:latin typeface="Calibri" pitchFamily="34" charset="0"/>
-                <a:ea typeface="Calibri" pitchFamily="34" charset="-122"/>
-                <a:cs typeface="Calibri" pitchFamily="34" charset="-120"/>
+                <a:cs typeface="Amiri" pitchFamily="2" charset="-78"/>
               </a:rPr>
               <a:t>Raise your hand</a:t>
             </a:r>
@@ -18111,8 +17768,7 @@
                   <a:srgbClr val="5A6472"/>
                 </a:solidFill>
                 <a:latin typeface="Calibri" pitchFamily="34" charset="0"/>
-                <a:ea typeface="Calibri" pitchFamily="34" charset="-122"/>
-                <a:cs typeface="Calibri" pitchFamily="34" charset="-120"/>
+                <a:cs typeface="Amiri" pitchFamily="2" charset="-78"/>
               </a:rPr>
               <a:t>Use the hand button to ask for help.</a:t>
             </a:r>
@@ -18184,8 +17840,7 @@
                   <a:srgbClr val="1B3B6F"/>
                 </a:solidFill>
                 <a:latin typeface="Calibri" pitchFamily="34" charset="0"/>
-                <a:ea typeface="Calibri" pitchFamily="34" charset="-122"/>
-                <a:cs typeface="Calibri" pitchFamily="34" charset="-120"/>
+                <a:cs typeface="Amiri" pitchFamily="2" charset="-78"/>
               </a:rPr>
               <a:t>HOW WE TALK — THE ORACY CODE</a:t>
             </a:r>
@@ -18248,8 +17903,7 @@
                   <a:srgbClr val="D4AF37"/>
                 </a:solidFill>
                 <a:latin typeface="Arial" pitchFamily="34" charset="0"/>
-                <a:ea typeface="Arial" pitchFamily="34" charset="-122"/>
-                <a:cs typeface="Arial" pitchFamily="34" charset="-120"/>
+                <a:cs typeface="Amiri" pitchFamily="2" charset="-78"/>
               </a:rPr>
               <a:t>●</a:t>
             </a:r>
@@ -18287,8 +17941,7 @@
                   <a:srgbClr val="1B3B6F"/>
                 </a:solidFill>
                 <a:latin typeface="Calibri" pitchFamily="34" charset="0"/>
-                <a:ea typeface="Calibri" pitchFamily="34" charset="-122"/>
-                <a:cs typeface="Calibri" pitchFamily="34" charset="-120"/>
+                <a:cs typeface="Amiri" pitchFamily="2" charset="-78"/>
               </a:rPr>
               <a:t>Think</a:t>
             </a:r>
@@ -18304,8 +17957,7 @@
                   <a:srgbClr val="5A6472"/>
                 </a:solidFill>
                 <a:latin typeface="Calibri" pitchFamily="34" charset="0"/>
-                <a:ea typeface="Calibri" pitchFamily="34" charset="-122"/>
-                <a:cs typeface="Calibri" pitchFamily="34" charset="-120"/>
+                <a:cs typeface="Amiri" pitchFamily="2" charset="-78"/>
               </a:rPr>
               <a:t>silent preparation</a:t>
             </a:r>
@@ -18368,8 +18020,7 @@
                   <a:srgbClr val="D4AF37"/>
                 </a:solidFill>
                 <a:latin typeface="Arial" pitchFamily="34" charset="0"/>
-                <a:ea typeface="Arial" pitchFamily="34" charset="-122"/>
-                <a:cs typeface="Arial" pitchFamily="34" charset="-120"/>
+                <a:cs typeface="Amiri" pitchFamily="2" charset="-78"/>
               </a:rPr>
               <a:t>↔</a:t>
             </a:r>
@@ -18407,8 +18058,7 @@
                   <a:srgbClr val="1B3B6F"/>
                 </a:solidFill>
                 <a:latin typeface="Calibri" pitchFamily="34" charset="0"/>
-                <a:ea typeface="Calibri" pitchFamily="34" charset="-122"/>
-                <a:cs typeface="Calibri" pitchFamily="34" charset="-120"/>
+                <a:cs typeface="Amiri" pitchFamily="2" charset="-78"/>
               </a:rPr>
               <a:t>Rehearse</a:t>
             </a:r>
@@ -18424,8 +18074,7 @@
                   <a:srgbClr val="5A6472"/>
                 </a:solidFill>
                 <a:latin typeface="Calibri" pitchFamily="34" charset="0"/>
-                <a:ea typeface="Calibri" pitchFamily="34" charset="-122"/>
-                <a:cs typeface="Calibri" pitchFamily="34" charset="-120"/>
+                <a:cs typeface="Amiri" pitchFamily="2" charset="-78"/>
               </a:rPr>
               <a:t>both partners speak</a:t>
             </a:r>
@@ -18488,8 +18137,7 @@
                   <a:srgbClr val="D4AF37"/>
                 </a:solidFill>
                 <a:latin typeface="Arial" pitchFamily="34" charset="0"/>
-                <a:ea typeface="Arial" pitchFamily="34" charset="-122"/>
-                <a:cs typeface="Arial" pitchFamily="34" charset="-120"/>
+                <a:cs typeface="Amiri" pitchFamily="2" charset="-78"/>
               </a:rPr>
               <a:t>+</a:t>
             </a:r>
@@ -18527,8 +18175,7 @@
                   <a:srgbClr val="1B3B6F"/>
                 </a:solidFill>
                 <a:latin typeface="Calibri" pitchFamily="34" charset="0"/>
-                <a:ea typeface="Calibri" pitchFamily="34" charset="-122"/>
-                <a:cs typeface="Calibri" pitchFamily="34" charset="-120"/>
+                <a:cs typeface="Amiri" pitchFamily="2" charset="-78"/>
               </a:rPr>
               <a:t>Build</a:t>
             </a:r>
@@ -18544,8 +18191,7 @@
                   <a:srgbClr val="5A6472"/>
                 </a:solidFill>
                 <a:latin typeface="Calibri" pitchFamily="34" charset="0"/>
-                <a:ea typeface="Calibri" pitchFamily="34" charset="-122"/>
-                <a:cs typeface="Calibri" pitchFamily="34" charset="-120"/>
+                <a:cs typeface="Amiri" pitchFamily="2" charset="-78"/>
               </a:rPr>
               <a:t>add a reason or detail</a:t>
             </a:r>
@@ -18608,8 +18254,7 @@
                   <a:srgbClr val="D4AF37"/>
                 </a:solidFill>
                 <a:latin typeface="Arial" pitchFamily="34" charset="0"/>
-                <a:ea typeface="Arial" pitchFamily="34" charset="-122"/>
-                <a:cs typeface="Arial" pitchFamily="34" charset="-120"/>
+                <a:cs typeface="Amiri" pitchFamily="2" charset="-78"/>
               </a:rPr>
               <a:t>?</a:t>
             </a:r>
@@ -18647,8 +18292,7 @@
                   <a:srgbClr val="1B3B6F"/>
                 </a:solidFill>
                 <a:latin typeface="Calibri" pitchFamily="34" charset="0"/>
-                <a:ea typeface="Calibri" pitchFamily="34" charset="-122"/>
-                <a:cs typeface="Calibri" pitchFamily="34" charset="-120"/>
+                <a:cs typeface="Amiri" pitchFamily="2" charset="-78"/>
               </a:rPr>
               <a:t>Challenge</a:t>
             </a:r>
@@ -18664,8 +18308,7 @@
                   <a:srgbClr val="5A6472"/>
                 </a:solidFill>
                 <a:latin typeface="Calibri" pitchFamily="34" charset="0"/>
-                <a:ea typeface="Calibri" pitchFamily="34" charset="-122"/>
-                <a:cs typeface="Calibri" pitchFamily="34" charset="-120"/>
+                <a:cs typeface="Amiri" pitchFamily="2" charset="-78"/>
               </a:rPr>
               <a:t>question respectfully</a:t>
             </a:r>
@@ -18728,8 +18371,7 @@
                   <a:srgbClr val="D4AF37"/>
                 </a:solidFill>
                 <a:latin typeface="Arial" pitchFamily="34" charset="0"/>
-                <a:ea typeface="Arial" pitchFamily="34" charset="-122"/>
-                <a:cs typeface="Arial" pitchFamily="34" charset="-120"/>
+                <a:cs typeface="Amiri" pitchFamily="2" charset="-78"/>
               </a:rPr>
               <a:t>◎</a:t>
             </a:r>
@@ -18767,8 +18409,7 @@
                   <a:srgbClr val="1B3B6F"/>
                 </a:solidFill>
                 <a:latin typeface="Calibri" pitchFamily="34" charset="0"/>
-                <a:ea typeface="Calibri" pitchFamily="34" charset="-122"/>
-                <a:cs typeface="Calibri" pitchFamily="34" charset="-120"/>
+                <a:cs typeface="Amiri" pitchFamily="2" charset="-78"/>
               </a:rPr>
               <a:t>Share</a:t>
             </a:r>
@@ -18784,8 +18425,7 @@
                   <a:srgbClr val="5A6472"/>
                 </a:solidFill>
                 <a:latin typeface="Calibri" pitchFamily="34" charset="0"/>
-                <a:ea typeface="Calibri" pitchFamily="34" charset="-122"/>
-                <a:cs typeface="Calibri" pitchFamily="34" charset="-120"/>
+                <a:cs typeface="Amiri" pitchFamily="2" charset="-78"/>
               </a:rPr>
               <a:t>anyone may be invited</a:t>
             </a:r>
@@ -18848,8 +18488,7 @@
                   <a:srgbClr val="D4AF37"/>
                 </a:solidFill>
                 <a:latin typeface="Arial" pitchFamily="34" charset="0"/>
-                <a:ea typeface="Arial" pitchFamily="34" charset="-122"/>
-                <a:cs typeface="Arial" pitchFamily="34" charset="-120"/>
+                <a:cs typeface="Amiri" pitchFamily="2" charset="-78"/>
               </a:rPr>
               <a:t>↺</a:t>
             </a:r>
@@ -18887,8 +18526,7 @@
                   <a:srgbClr val="1B3B6F"/>
                 </a:solidFill>
                 <a:latin typeface="Calibri" pitchFamily="34" charset="0"/>
-                <a:ea typeface="Calibri" pitchFamily="34" charset="-122"/>
-                <a:cs typeface="Calibri" pitchFamily="34" charset="-120"/>
+                <a:cs typeface="Amiri" pitchFamily="2" charset="-78"/>
               </a:rPr>
               <a:t>Summarise</a:t>
             </a:r>
@@ -18904,8 +18542,7 @@
                   <a:srgbClr val="5A6472"/>
                 </a:solidFill>
                 <a:latin typeface="Calibri" pitchFamily="34" charset="0"/>
-                <a:ea typeface="Calibri" pitchFamily="34" charset="-122"/>
-                <a:cs typeface="Calibri" pitchFamily="34" charset="-120"/>
+                <a:cs typeface="Amiri" pitchFamily="2" charset="-78"/>
               </a:rPr>
               <a:t>say it more precisely</a:t>
             </a:r>
@@ -18943,8 +18580,7 @@
                   <a:srgbClr val="8A6D1E"/>
                 </a:solidFill>
                 <a:latin typeface="Calibri" pitchFamily="34" charset="0"/>
-                <a:ea typeface="Calibri" pitchFamily="34" charset="-122"/>
-                <a:cs typeface="Calibri" pitchFamily="34" charset="-120"/>
+                <a:cs typeface="Amiri" pitchFamily="2" charset="-78"/>
               </a:rPr>
               <a:t>I will always give you thinking and practice time before I ask anyone. Reading aloud is by invitation — you can always say “pass, please come back to me”.</a:t>
             </a:r>
@@ -18982,8 +18618,7 @@
                   <a:srgbClr val="8A93A0"/>
                 </a:solidFill>
                 <a:latin typeface="Calibri" pitchFamily="34" charset="0"/>
-                <a:ea typeface="Calibri" pitchFamily="34" charset="-122"/>
-                <a:cs typeface="Calibri" pitchFamily="34" charset="-120"/>
+                <a:cs typeface="Amiri" pitchFamily="2" charset="-78"/>
               </a:rPr>
               <a:t>2 / 25</a:t>
             </a:r>
@@ -19077,9 +18712,8 @@
                 <a:solidFill>
                   <a:srgbClr val="D4AF37"/>
                 </a:solidFill>
-                <a:latin typeface="Amiri" pitchFamily="34" charset="0"/>
-                <a:ea typeface="Amiri" pitchFamily="34" charset="-122"/>
-                <a:cs typeface="Amiri" pitchFamily="34" charset="-120"/>
+                <a:latin typeface="Amiri" pitchFamily="2" charset="-78"/>
+                <a:cs typeface="Amiri" pitchFamily="2" charset="-78"/>
               </a:rPr>
               <a:t>م</a:t>
             </a:r>
@@ -19117,8 +18751,7 @@
                   <a:srgbClr val="1B3B6F"/>
                 </a:solidFill>
                 <a:latin typeface="Cambria" pitchFamily="34" charset="0"/>
-                <a:ea typeface="Cambria" pitchFamily="34" charset="-122"/>
-                <a:cs typeface="Cambria" pitchFamily="34" charset="-120"/>
+                <a:cs typeface="Amiri" pitchFamily="2" charset="-78"/>
               </a:rPr>
               <a:t>Al Madina Online School</a:t>
             </a:r>
@@ -19156,8 +18789,7 @@
                   <a:srgbClr val="8A6D1E"/>
                 </a:solidFill>
                 <a:latin typeface="Calibri" pitchFamily="34" charset="0"/>
-                <a:ea typeface="Calibri" pitchFamily="34" charset="-122"/>
-                <a:cs typeface="Calibri" pitchFamily="34" charset="-120"/>
+                <a:cs typeface="Amiri" pitchFamily="2" charset="-78"/>
               </a:rPr>
               <a:t>ARABIC DEPARTMENT · MIFTAH ARABIC · IGCSE 0544</a:t>
             </a:r>
@@ -19222,8 +18854,7 @@
                   <a:srgbClr val="FFFFFF"/>
                 </a:solidFill>
                 <a:latin typeface="Calibri" pitchFamily="34" charset="0"/>
-                <a:ea typeface="Calibri" pitchFamily="34" charset="-122"/>
-                <a:cs typeface="Calibri" pitchFamily="34" charset="-120"/>
+                <a:cs typeface="Amiri" pitchFamily="2" charset="-78"/>
               </a:rPr>
               <a:t>P6-L05 · IGCSE Bridge</a:t>
             </a:r>
@@ -19288,8 +18919,7 @@
                   <a:srgbClr val="FFFFFF"/>
                 </a:solidFill>
                 <a:latin typeface="Calibri" pitchFamily="34" charset="0"/>
-                <a:ea typeface="Calibri" pitchFamily="34" charset="-122"/>
-                <a:cs typeface="Calibri" pitchFamily="34" charset="-120"/>
+                <a:cs typeface="Amiri" pitchFamily="2" charset="-78"/>
               </a:rPr>
               <a:t>FEEDBACK · 1 MIN</a:t>
             </a:r>
@@ -19327,8 +18957,7 @@
                   <a:srgbClr val="8A6D1E"/>
                 </a:solidFill>
                 <a:latin typeface="Calibri" pitchFamily="34" charset="0"/>
-                <a:ea typeface="Calibri" pitchFamily="34" charset="-122"/>
-                <a:cs typeface="Calibri" pitchFamily="34" charset="-120"/>
+                <a:cs typeface="Amiri" pitchFamily="2" charset="-78"/>
               </a:rPr>
               <a:t>FEEDBACK · ESSAY 3 · THE WEBSITE MODEL</a:t>
             </a:r>
@@ -19366,8 +18995,7 @@
                   <a:srgbClr val="1B3B6F"/>
                 </a:solidFill>
                 <a:latin typeface="Cambria" pitchFamily="34" charset="0"/>
-                <a:ea typeface="Cambria" pitchFamily="34" charset="-122"/>
-                <a:cs typeface="Cambria" pitchFamily="34" charset="-120"/>
+                <a:cs typeface="Amiri" pitchFamily="2" charset="-78"/>
               </a:rPr>
               <a:t>What a full-mark answer looks like</a:t>
             </a:r>
@@ -19404,9 +19032,8 @@
                 <a:solidFill>
                   <a:srgbClr val="8A6D1E"/>
                 </a:solidFill>
-                <a:latin typeface="Amiri" pitchFamily="34" charset="0"/>
-                <a:ea typeface="Amiri" pitchFamily="34" charset="-122"/>
-                <a:cs typeface="Amiri" pitchFamily="34" charset="-120"/>
+                <a:latin typeface="Amiri" pitchFamily="2" charset="-78"/>
+                <a:cs typeface="Amiri" pitchFamily="2" charset="-78"/>
               </a:rPr>
               <a:t>نَمُوذَجُ الإِجَابَةِ</a:t>
             </a:r>
@@ -19444,8 +19071,7 @@
                   <a:srgbClr val="8A93A0"/>
                 </a:solidFill>
                 <a:latin typeface="Calibri" pitchFamily="34" charset="0"/>
-                <a:ea typeface="Calibri" pitchFamily="34" charset="-122"/>
-                <a:cs typeface="Calibri" pitchFamily="34" charset="-120"/>
+                <a:cs typeface="Amiri" pitchFamily="2" charset="-78"/>
               </a:rPr>
               <a:t>Miftah Arabic · Progression P6 · IGCSE Bridge · P6-L05</a:t>
             </a:r>
@@ -19519,9 +19145,8 @@
                 <a:solidFill>
                   <a:srgbClr val="1F2A37"/>
                 </a:solidFill>
-                <a:latin typeface="Amiri" pitchFamily="34" charset="0"/>
-                <a:ea typeface="Amiri" pitchFamily="34" charset="-122"/>
-                <a:cs typeface="Amiri" pitchFamily="34" charset="-120"/>
+                <a:latin typeface="Amiri" pitchFamily="2" charset="-78"/>
+                <a:cs typeface="Amiri" pitchFamily="2" charset="-78"/>
               </a:rPr>
               <a:t>يُشَارُ إِلَى أَنَّ وَسَائِلَ التَّوَاصُلِ الاجْتِمَاعِيِّ سِلَاحٌ ذُو حَدَّيْنِ. صَحِيحٌ أَنَّهَا تُقَرِّبُ النَّاسَ وَتَنْشُرُ المَعْرِفَةَ، غَيْرَ أَنَّهَا تُعَمِّقُ الفَجْوَةَ وَتَنْشُرُ المَعْلُومَاتِ المُضَلِّلَةَ. أَكَّدَ البَاحِثُونَ أَنَّ الإِفْرَاطَ فِيهَا يُضْعِفُ التَّرْكِيزَ. وَلَوْ وُضِعَتْ ضَوَابِطُ حَكِيمَةٌ، لَتَقَلَّصَتِ الأَضْرَارُ. وَإِذَا اسْتَخْدَمْنَاهَا بِوَعْيٍ، سَتُصْبِحُ أَدَاةً لِلْبِنَاءِ. وَبِنَاءً عَلَى مَا سَبَقَ، يَتَطَلَّبُ الأَمْرُ أَنْ نُرَبِّيَ الأَجْيَالَ عَلَى الاسْتِخْدَامِ المَسْؤُولِ لِكَيْ نَجْنِيَ فَوَائِدَهَا وَنَتَجَنَّبَ مَخَاطِرَهَا.</a:t>
             </a:r>
@@ -19586,8 +19211,7 @@
                   <a:srgbClr val="5A6472"/>
                 </a:solidFill>
                 <a:latin typeface="Calibri" pitchFamily="34" charset="0"/>
-                <a:ea typeface="Calibri" pitchFamily="34" charset="-122"/>
-                <a:cs typeface="Calibri" pitchFamily="34" charset="-120"/>
+                <a:cs typeface="Amiri" pitchFamily="2" charset="-78"/>
               </a:rPr>
               <a:t>It is noted that social media is a double-edged sword. It is true that it brings people closer and spreads knowledge; however, it deepens the gap and spreads misinformation. Researchers have confirmed that excessive use weakens concentration. Had wise controls been put in place, the harm would have shrunk. If we use it consciously, it will become a tool for building. Based on the above, the matter requires us to raise generations on responsible use so that we reap its benefits and avoid its dangers.</a:t>
             </a:r>
@@ -19625,8 +19249,7 @@
                   <a:srgbClr val="8A6D1E"/>
                 </a:solidFill>
                 <a:latin typeface="Calibri" pitchFamily="34" charset="0"/>
-                <a:ea typeface="Calibri" pitchFamily="34" charset="-122"/>
-                <a:cs typeface="Calibri" pitchFamily="34" charset="-120"/>
+                <a:cs typeface="Amiri" pitchFamily="2" charset="-78"/>
               </a:rPr>
               <a:t>FIND IN THE MODEL:</a:t>
             </a:r>
@@ -19691,8 +19314,7 @@
                   <a:srgbClr val="FFFFFF"/>
                 </a:solidFill>
                 <a:latin typeface="Calibri" pitchFamily="34" charset="0"/>
-                <a:ea typeface="Calibri" pitchFamily="34" charset="-122"/>
-                <a:cs typeface="Calibri" pitchFamily="34" charset="-120"/>
+                <a:cs typeface="Amiri" pitchFamily="2" charset="-78"/>
               </a:rPr>
               <a:t>a thesis image</a:t>
             </a:r>
@@ -19757,8 +19379,7 @@
                   <a:srgbClr val="FFFFFF"/>
                 </a:solidFill>
                 <a:latin typeface="Calibri" pitchFamily="34" charset="0"/>
-                <a:ea typeface="Calibri" pitchFamily="34" charset="-122"/>
-                <a:cs typeface="Calibri" pitchFamily="34" charset="-120"/>
+                <a:cs typeface="Amiri" pitchFamily="2" charset="-78"/>
               </a:rPr>
               <a:t>ṣaḥīḥun anna-hā … ghayra anna-hā</a:t>
             </a:r>
@@ -19823,8 +19444,7 @@
                   <a:srgbClr val="FFFFFF"/>
                 </a:solidFill>
                 <a:latin typeface="Calibri" pitchFamily="34" charset="0"/>
-                <a:ea typeface="Calibri" pitchFamily="34" charset="-122"/>
-                <a:cs typeface="Calibri" pitchFamily="34" charset="-120"/>
+                <a:cs typeface="Amiri" pitchFamily="2" charset="-78"/>
               </a:rPr>
               <a:t>passive law wuḍiʿat … la-</a:t>
             </a:r>
@@ -19889,8 +19509,7 @@
                   <a:srgbClr val="FFFFFF"/>
                 </a:solidFill>
                 <a:latin typeface="Calibri" pitchFamily="34" charset="0"/>
-                <a:ea typeface="Calibri" pitchFamily="34" charset="-122"/>
-                <a:cs typeface="Calibri" pitchFamily="34" charset="-120"/>
+                <a:cs typeface="Amiri" pitchFamily="2" charset="-78"/>
               </a:rPr>
               <a:t>an + li-kay: three verbs in -a</a:t>
             </a:r>
@@ -19928,8 +19547,7 @@
                   <a:srgbClr val="8A93A0"/>
                 </a:solidFill>
                 <a:latin typeface="Calibri" pitchFamily="34" charset="0"/>
-                <a:ea typeface="Calibri" pitchFamily="34" charset="-122"/>
-                <a:cs typeface="Calibri" pitchFamily="34" charset="-120"/>
+                <a:cs typeface="Amiri" pitchFamily="2" charset="-78"/>
               </a:rPr>
               <a:t>20 / 25</a:t>
             </a:r>
@@ -20023,9 +19641,8 @@
                 <a:solidFill>
                   <a:srgbClr val="D4AF37"/>
                 </a:solidFill>
-                <a:latin typeface="Amiri" pitchFamily="34" charset="0"/>
-                <a:ea typeface="Amiri" pitchFamily="34" charset="-122"/>
-                <a:cs typeface="Amiri" pitchFamily="34" charset="-120"/>
+                <a:latin typeface="Amiri" pitchFamily="2" charset="-78"/>
+                <a:cs typeface="Amiri" pitchFamily="2" charset="-78"/>
               </a:rPr>
               <a:t>م</a:t>
             </a:r>
@@ -20063,8 +19680,7 @@
                   <a:srgbClr val="1B3B6F"/>
                 </a:solidFill>
                 <a:latin typeface="Cambria" pitchFamily="34" charset="0"/>
-                <a:ea typeface="Cambria" pitchFamily="34" charset="-122"/>
-                <a:cs typeface="Cambria" pitchFamily="34" charset="-120"/>
+                <a:cs typeface="Amiri" pitchFamily="2" charset="-78"/>
               </a:rPr>
               <a:t>Al Madina Online School</a:t>
             </a:r>
@@ -20102,8 +19718,7 @@
                   <a:srgbClr val="8A6D1E"/>
                 </a:solidFill>
                 <a:latin typeface="Calibri" pitchFamily="34" charset="0"/>
-                <a:ea typeface="Calibri" pitchFamily="34" charset="-122"/>
-                <a:cs typeface="Calibri" pitchFamily="34" charset="-120"/>
+                <a:cs typeface="Amiri" pitchFamily="2" charset="-78"/>
               </a:rPr>
               <a:t>ARABIC DEPARTMENT · MIFTAH ARABIC · IGCSE 0544</a:t>
             </a:r>
@@ -20168,8 +19783,7 @@
                   <a:srgbClr val="FFFFFF"/>
                 </a:solidFill>
                 <a:latin typeface="Calibri" pitchFamily="34" charset="0"/>
-                <a:ea typeface="Calibri" pitchFamily="34" charset="-122"/>
-                <a:cs typeface="Calibri" pitchFamily="34" charset="-120"/>
+                <a:cs typeface="Amiri" pitchFamily="2" charset="-78"/>
               </a:rPr>
               <a:t>P6-L05 · IGCSE Bridge</a:t>
             </a:r>
@@ -20234,8 +19848,7 @@
                   <a:srgbClr val="FFFFFF"/>
                 </a:solidFill>
                 <a:latin typeface="Calibri" pitchFamily="34" charset="0"/>
-                <a:ea typeface="Calibri" pitchFamily="34" charset="-122"/>
-                <a:cs typeface="Calibri" pitchFamily="34" charset="-120"/>
+                <a:cs typeface="Amiri" pitchFamily="2" charset="-78"/>
               </a:rPr>
               <a:t>YOU DO · 2 MIN</a:t>
             </a:r>
@@ -20273,8 +19886,7 @@
                   <a:srgbClr val="1E6B52"/>
                 </a:solidFill>
                 <a:latin typeface="Calibri" pitchFamily="34" charset="0"/>
-                <a:ea typeface="Calibri" pitchFamily="34" charset="-122"/>
-                <a:cs typeface="Calibri" pitchFamily="34" charset="-120"/>
+                <a:cs typeface="Amiri" pitchFamily="2" charset="-78"/>
               </a:rPr>
               <a:t>YOU DO · WRITING PERFORMANCE PROFILE (WEBSITE)</a:t>
             </a:r>
@@ -20312,8 +19924,7 @@
                   <a:srgbClr val="1B3B6F"/>
                 </a:solidFill>
                 <a:latin typeface="Cambria" pitchFamily="34" charset="0"/>
-                <a:ea typeface="Cambria" pitchFamily="34" charset="-122"/>
-                <a:cs typeface="Cambria" pitchFamily="34" charset="-120"/>
+                <a:cs typeface="Amiri" pitchFamily="2" charset="-78"/>
               </a:rPr>
               <a:t>Writing performance profile</a:t>
             </a:r>
@@ -20350,9 +19961,8 @@
                 <a:solidFill>
                   <a:srgbClr val="8A6D1E"/>
                 </a:solidFill>
-                <a:latin typeface="Amiri" pitchFamily="34" charset="0"/>
-                <a:ea typeface="Amiri" pitchFamily="34" charset="-122"/>
-                <a:cs typeface="Amiri" pitchFamily="34" charset="-120"/>
+                <a:latin typeface="Amiri" pitchFamily="2" charset="-78"/>
+                <a:cs typeface="Amiri" pitchFamily="2" charset="-78"/>
               </a:rPr>
               <a:t>مِلَفُّ الكِتَابَةِ</a:t>
             </a:r>
@@ -20390,8 +20000,7 @@
                   <a:srgbClr val="8A93A0"/>
                 </a:solidFill>
                 <a:latin typeface="Calibri" pitchFamily="34" charset="0"/>
-                <a:ea typeface="Calibri" pitchFamily="34" charset="-122"/>
-                <a:cs typeface="Calibri" pitchFamily="34" charset="-120"/>
+                <a:cs typeface="Amiri" pitchFamily="2" charset="-78"/>
               </a:rPr>
               <a:t>Miftah Arabic · Progression P6 · IGCSE Bridge · P6-L05</a:t>
             </a:r>
@@ -20454,8 +20063,7 @@
                   <a:srgbClr val="FFFFFF"/>
                 </a:solidFill>
                 <a:latin typeface="Calibri" pitchFamily="34" charset="0"/>
-                <a:ea typeface="Calibri" pitchFamily="34" charset="-122"/>
-                <a:cs typeface="Calibri" pitchFamily="34" charset="-120"/>
+                <a:cs typeface="Amiri" pitchFamily="2" charset="-78"/>
               </a:rPr>
               <a:t>Yours</a:t>
             </a:r>
@@ -20493,8 +20101,7 @@
                   <a:srgbClr val="FFFFFF"/>
                 </a:solidFill>
                 <a:latin typeface="Calibri" pitchFamily="34" charset="0"/>
-                <a:ea typeface="Calibri" pitchFamily="34" charset="-122"/>
-                <a:cs typeface="Calibri" pitchFamily="34" charset="-120"/>
+                <a:cs typeface="Amiri" pitchFamily="2" charset="-78"/>
               </a:rPr>
               <a:t>Example</a:t>
             </a:r>
@@ -20532,8 +20139,7 @@
                   <a:srgbClr val="FFFFFF"/>
                 </a:solidFill>
                 <a:latin typeface="Calibri" pitchFamily="34" charset="0"/>
-                <a:ea typeface="Calibri" pitchFamily="34" charset="-122"/>
-                <a:cs typeface="Calibri" pitchFamily="34" charset="-120"/>
+                <a:cs typeface="Amiri" pitchFamily="2" charset="-78"/>
               </a:rPr>
               <a:t>Record</a:t>
             </a:r>
@@ -20598,8 +20204,7 @@
                   <a:srgbClr val="5A6472"/>
                 </a:solidFill>
                 <a:latin typeface="Calibri" pitchFamily="34" charset="0"/>
-                <a:ea typeface="Calibri" pitchFamily="34" charset="-122"/>
-                <a:cs typeface="Calibri" pitchFamily="34" charset="-120"/>
+                <a:cs typeface="Amiri" pitchFamily="2" charset="-78"/>
               </a:rPr>
               <a:t>______________</a:t>
             </a:r>
@@ -20637,8 +20242,7 @@
                   <a:srgbClr val="5A6472"/>
                 </a:solidFill>
                 <a:latin typeface="Calibri" pitchFamily="34" charset="0"/>
-                <a:ea typeface="Calibri" pitchFamily="34" charset="-122"/>
-                <a:cs typeface="Calibri" pitchFamily="34" charset="-120"/>
+                <a:cs typeface="Amiri" pitchFamily="2" charset="-78"/>
               </a:rPr>
               <a:t>TC 4/5 · Range 3/5 · Accuracy 3/5</a:t>
             </a:r>
@@ -20676,8 +20280,7 @@
                   <a:srgbClr val="5A6472"/>
                 </a:solidFill>
                 <a:latin typeface="Calibri" pitchFamily="34" charset="0"/>
-                <a:ea typeface="Calibri" pitchFamily="34" charset="-122"/>
-                <a:cs typeface="Calibri" pitchFamily="34" charset="-120"/>
+                <a:cs typeface="Amiri" pitchFamily="2" charset="-78"/>
               </a:rPr>
               <a:t>My best essay today (TC / Range / Accuracy out of 5 each)</a:t>
             </a:r>
@@ -20742,8 +20345,7 @@
                   <a:srgbClr val="5A6472"/>
                 </a:solidFill>
                 <a:latin typeface="Calibri" pitchFamily="34" charset="0"/>
-                <a:ea typeface="Calibri" pitchFamily="34" charset="-122"/>
-                <a:cs typeface="Calibri" pitchFamily="34" charset="-120"/>
+                <a:cs typeface="Amiri" pitchFamily="2" charset="-78"/>
               </a:rPr>
               <a:t>______________</a:t>
             </a:r>
@@ -20781,8 +20383,7 @@
                   <a:srgbClr val="5A6472"/>
                 </a:solidFill>
                 <a:latin typeface="Calibri" pitchFamily="34" charset="0"/>
-                <a:ea typeface="Calibri" pitchFamily="34" charset="-122"/>
-                <a:cs typeface="Calibri" pitchFamily="34" charset="-120"/>
+                <a:cs typeface="Amiri" pitchFamily="2" charset="-78"/>
               </a:rPr>
               <a:t>my concession–refutation</a:t>
             </a:r>
@@ -20820,8 +20421,7 @@
                   <a:srgbClr val="5A6472"/>
                 </a:solidFill>
                 <a:latin typeface="Calibri" pitchFamily="34" charset="0"/>
-                <a:ea typeface="Calibri" pitchFamily="34" charset="-122"/>
-                <a:cs typeface="Calibri" pitchFamily="34" charset="-120"/>
+                <a:cs typeface="Amiri" pitchFamily="2" charset="-78"/>
               </a:rPr>
               <a:t>My strongest TC element</a:t>
             </a:r>
@@ -20886,8 +20486,7 @@
                   <a:srgbClr val="5A6472"/>
                 </a:solidFill>
                 <a:latin typeface="Calibri" pitchFamily="34" charset="0"/>
-                <a:ea typeface="Calibri" pitchFamily="34" charset="-122"/>
-                <a:cs typeface="Calibri" pitchFamily="34" charset="-120"/>
+                <a:cs typeface="Amiri" pitchFamily="2" charset="-78"/>
               </a:rPr>
               <a:t>______________</a:t>
             </a:r>
@@ -20925,8 +20524,7 @@
                   <a:srgbClr val="5A6472"/>
                 </a:solidFill>
                 <a:latin typeface="Calibri" pitchFamily="34" charset="0"/>
-                <a:ea typeface="Calibri" pitchFamily="34" charset="-122"/>
-                <a:cs typeface="Calibri" pitchFamily="34" charset="-120"/>
+                <a:cs typeface="Amiri" pitchFamily="2" charset="-78"/>
               </a:rPr>
               <a:t>a second conditional</a:t>
             </a:r>
@@ -20964,8 +20562,7 @@
                   <a:srgbClr val="5A6472"/>
                 </a:solidFill>
                 <a:latin typeface="Calibri" pitchFamily="34" charset="0"/>
-                <a:ea typeface="Calibri" pitchFamily="34" charset="-122"/>
-                <a:cs typeface="Calibri" pitchFamily="34" charset="-120"/>
+                <a:cs typeface="Amiri" pitchFamily="2" charset="-78"/>
               </a:rPr>
               <a:t>My weakest Range marker</a:t>
             </a:r>
@@ -21030,8 +20627,7 @@
                   <a:srgbClr val="5A6472"/>
                 </a:solidFill>
                 <a:latin typeface="Calibri" pitchFamily="34" charset="0"/>
-                <a:ea typeface="Calibri" pitchFamily="34" charset="-122"/>
-                <a:cs typeface="Calibri" pitchFamily="34" charset="-120"/>
+                <a:cs typeface="Amiri" pitchFamily="2" charset="-78"/>
               </a:rPr>
               <a:t>______________</a:t>
             </a:r>
@@ -21069,8 +20665,7 @@
                   <a:srgbClr val="5A6472"/>
                 </a:solidFill>
                 <a:latin typeface="Calibri" pitchFamily="34" charset="0"/>
-                <a:ea typeface="Calibri" pitchFamily="34" charset="-122"/>
-                <a:cs typeface="Calibri" pitchFamily="34" charset="-120"/>
+                <a:cs typeface="Amiri" pitchFamily="2" charset="-78"/>
               </a:rPr>
               <a:t>the -a after an</a:t>
             </a:r>
@@ -21108,8 +20703,7 @@
                   <a:srgbClr val="5A6472"/>
                 </a:solidFill>
                 <a:latin typeface="Calibri" pitchFamily="34" charset="0"/>
-                <a:ea typeface="Calibri" pitchFamily="34" charset="-122"/>
-                <a:cs typeface="Calibri" pitchFamily="34" charset="-120"/>
+                <a:cs typeface="Amiri" pitchFamily="2" charset="-78"/>
               </a:rPr>
               <a:t>My most common Accuracy error</a:t>
             </a:r>
@@ -21147,8 +20741,7 @@
                   <a:srgbClr val="1B3B6F"/>
                 </a:solidFill>
                 <a:latin typeface="Calibri" pitchFamily="34" charset="0"/>
-                <a:ea typeface="Calibri" pitchFamily="34" charset="-122"/>
-                <a:cs typeface="Calibri" pitchFamily="34" charset="-120"/>
+                <a:cs typeface="Amiri" pitchFamily="2" charset="-78"/>
               </a:rPr>
               <a:t>Copy your weakest Range marker and your most common Accuracy error under your Paper 4 target.</a:t>
             </a:r>
@@ -21186,8 +20779,7 @@
                   <a:srgbClr val="8A93A0"/>
                 </a:solidFill>
                 <a:latin typeface="Calibri" pitchFamily="34" charset="0"/>
-                <a:ea typeface="Calibri" pitchFamily="34" charset="-122"/>
-                <a:cs typeface="Calibri" pitchFamily="34" charset="-120"/>
+                <a:cs typeface="Amiri" pitchFamily="2" charset="-78"/>
               </a:rPr>
               <a:t>21 / 25</a:t>
             </a:r>
@@ -21281,9 +20873,8 @@
                 <a:solidFill>
                   <a:srgbClr val="D4AF37"/>
                 </a:solidFill>
-                <a:latin typeface="Amiri" pitchFamily="34" charset="0"/>
-                <a:ea typeface="Amiri" pitchFamily="34" charset="-122"/>
-                <a:cs typeface="Amiri" pitchFamily="34" charset="-120"/>
+                <a:latin typeface="Amiri" pitchFamily="2" charset="-78"/>
+                <a:cs typeface="Amiri" pitchFamily="2" charset="-78"/>
               </a:rPr>
               <a:t>م</a:t>
             </a:r>
@@ -21321,8 +20912,7 @@
                   <a:srgbClr val="1B3B6F"/>
                 </a:solidFill>
                 <a:latin typeface="Cambria" pitchFamily="34" charset="0"/>
-                <a:ea typeface="Cambria" pitchFamily="34" charset="-122"/>
-                <a:cs typeface="Cambria" pitchFamily="34" charset="-120"/>
+                <a:cs typeface="Amiri" pitchFamily="2" charset="-78"/>
               </a:rPr>
               <a:t>Al Madina Online School</a:t>
             </a:r>
@@ -21360,8 +20950,7 @@
                   <a:srgbClr val="8A6D1E"/>
                 </a:solidFill>
                 <a:latin typeface="Calibri" pitchFamily="34" charset="0"/>
-                <a:ea typeface="Calibri" pitchFamily="34" charset="-122"/>
-                <a:cs typeface="Calibri" pitchFamily="34" charset="-120"/>
+                <a:cs typeface="Amiri" pitchFamily="2" charset="-78"/>
               </a:rPr>
               <a:t>ARABIC DEPARTMENT · MIFTAH ARABIC · IGCSE 0544</a:t>
             </a:r>
@@ -21426,8 +21015,7 @@
                   <a:srgbClr val="FFFFFF"/>
                 </a:solidFill>
                 <a:latin typeface="Calibri" pitchFamily="34" charset="0"/>
-                <a:ea typeface="Calibri" pitchFamily="34" charset="-122"/>
-                <a:cs typeface="Calibri" pitchFamily="34" charset="-120"/>
+                <a:cs typeface="Amiri" pitchFamily="2" charset="-78"/>
               </a:rPr>
               <a:t>P6-L05 · IGCSE Bridge</a:t>
             </a:r>
@@ -21492,8 +21080,7 @@
                   <a:srgbClr val="FFFFFF"/>
                 </a:solidFill>
                 <a:latin typeface="Calibri" pitchFamily="34" charset="0"/>
-                <a:ea typeface="Calibri" pitchFamily="34" charset="-122"/>
-                <a:cs typeface="Calibri" pitchFamily="34" charset="-120"/>
+                <a:cs typeface="Amiri" pitchFamily="2" charset="-78"/>
               </a:rPr>
               <a:t>FEEDBACK · 2 MIN</a:t>
             </a:r>
@@ -21531,8 +21118,7 @@
                   <a:srgbClr val="8A6D1E"/>
                 </a:solidFill>
                 <a:latin typeface="Calibri" pitchFamily="34" charset="0"/>
-                <a:ea typeface="Calibri" pitchFamily="34" charset="-122"/>
-                <a:cs typeface="Calibri" pitchFamily="34" charset="-120"/>
+                <a:cs typeface="Amiri" pitchFamily="2" charset="-78"/>
               </a:rPr>
               <a:t>FEEDBACK · THE EXAM GIVES YOU MORE TIME (WEBSITE)</a:t>
             </a:r>
@@ -21570,8 +21156,7 @@
                   <a:srgbClr val="1B3B6F"/>
                 </a:solidFill>
                 <a:latin typeface="Cambria" pitchFamily="34" charset="0"/>
-                <a:ea typeface="Cambria" pitchFamily="34" charset="-122"/>
-                <a:cs typeface="Cambria" pitchFamily="34" charset="-120"/>
+                <a:cs typeface="Amiri" pitchFamily="2" charset="-78"/>
               </a:rPr>
               <a:t>Extended-writing reflection</a:t>
             </a:r>
@@ -21608,9 +21193,8 @@
                 <a:solidFill>
                   <a:srgbClr val="8A6D1E"/>
                 </a:solidFill>
-                <a:latin typeface="Amiri" pitchFamily="34" charset="0"/>
-                <a:ea typeface="Amiri" pitchFamily="34" charset="-122"/>
-                <a:cs typeface="Amiri" pitchFamily="34" charset="-120"/>
+                <a:latin typeface="Amiri" pitchFamily="2" charset="-78"/>
+                <a:cs typeface="Amiri" pitchFamily="2" charset="-78"/>
               </a:rPr>
               <a:t>التَّأَمُّلُ</a:t>
             </a:r>
@@ -21648,8 +21232,7 @@
                   <a:srgbClr val="8A93A0"/>
                 </a:solidFill>
                 <a:latin typeface="Calibri" pitchFamily="34" charset="0"/>
-                <a:ea typeface="Calibri" pitchFamily="34" charset="-122"/>
-                <a:cs typeface="Calibri" pitchFamily="34" charset="-120"/>
+                <a:cs typeface="Amiri" pitchFamily="2" charset="-78"/>
               </a:rPr>
               <a:t>Miftah Arabic · Progression P6 · IGCSE Bridge · P6-L05</a:t>
             </a:r>
@@ -21712,8 +21295,7 @@
                   <a:srgbClr val="FFFFFF"/>
                 </a:solidFill>
                 <a:latin typeface="Calibri" pitchFamily="34" charset="0"/>
-                <a:ea typeface="Calibri" pitchFamily="34" charset="-122"/>
-                <a:cs typeface="Calibri" pitchFamily="34" charset="-120"/>
+                <a:cs typeface="Amiri" pitchFamily="2" charset="-78"/>
               </a:rPr>
               <a:t>Model ending</a:t>
             </a:r>
@@ -21751,8 +21333,7 @@
                   <a:srgbClr val="FFFFFF"/>
                 </a:solidFill>
                 <a:latin typeface="Calibri" pitchFamily="34" charset="0"/>
-                <a:ea typeface="Calibri" pitchFamily="34" charset="-122"/>
-                <a:cs typeface="Calibri" pitchFamily="34" charset="-120"/>
+                <a:cs typeface="Amiri" pitchFamily="2" charset="-78"/>
               </a:rPr>
               <a:t>Meaning</a:t>
             </a:r>
@@ -21790,8 +21371,7 @@
                   <a:srgbClr val="FFFFFF"/>
                 </a:solidFill>
                 <a:latin typeface="Calibri" pitchFamily="34" charset="0"/>
-                <a:ea typeface="Calibri" pitchFamily="34" charset="-122"/>
-                <a:cs typeface="Calibri" pitchFamily="34" charset="-120"/>
+                <a:cs typeface="Amiri" pitchFamily="2" charset="-78"/>
               </a:rPr>
               <a:t>Reflection frame (website)</a:t>
             </a:r>
@@ -21856,8 +21436,7 @@
                   <a:srgbClr val="5A6472"/>
                 </a:solidFill>
                 <a:latin typeface="Calibri" pitchFamily="34" charset="0"/>
-                <a:ea typeface="Calibri" pitchFamily="34" charset="-122"/>
-                <a:cs typeface="Calibri" pitchFamily="34" charset="-120"/>
+                <a:cs typeface="Amiri" pitchFamily="2" charset="-78"/>
               </a:rPr>
               <a:t>the concession–refutation pair</a:t>
             </a:r>
@@ -21895,8 +21474,7 @@
                   <a:srgbClr val="5A6472"/>
                 </a:solidFill>
                 <a:latin typeface="Calibri" pitchFamily="34" charset="0"/>
-                <a:ea typeface="Calibri" pitchFamily="34" charset="-122"/>
-                <a:cs typeface="Calibri" pitchFamily="34" charset="-120"/>
+                <a:cs typeface="Amiri" pitchFamily="2" charset="-78"/>
               </a:rPr>
               <a:t>the element I write confidently</a:t>
             </a:r>
@@ -21934,8 +21512,7 @@
                   <a:srgbClr val="5A6472"/>
                 </a:solidFill>
                 <a:latin typeface="Calibri" pitchFamily="34" charset="0"/>
-                <a:ea typeface="Calibri" pitchFamily="34" charset="-122"/>
-                <a:cs typeface="Calibri" pitchFamily="34" charset="-120"/>
+                <a:cs typeface="Amiri" pitchFamily="2" charset="-78"/>
               </a:rPr>
               <a:t>The architecture element I now write confidently is…</a:t>
             </a:r>
@@ -22000,8 +21577,7 @@
                   <a:srgbClr val="5A6472"/>
                 </a:solidFill>
                 <a:latin typeface="Calibri" pitchFamily="34" charset="0"/>
-                <a:ea typeface="Calibri" pitchFamily="34" charset="-122"/>
-                <a:cs typeface="Calibri" pitchFamily="34" charset="-120"/>
+                <a:cs typeface="Amiri" pitchFamily="2" charset="-78"/>
               </a:rPr>
               <a:t>the Type 2 la- result</a:t>
             </a:r>
@@ -22039,8 +21615,7 @@
                   <a:srgbClr val="5A6472"/>
                 </a:solidFill>
                 <a:latin typeface="Calibri" pitchFamily="34" charset="0"/>
-                <a:ea typeface="Calibri" pitchFamily="34" charset="-122"/>
-                <a:cs typeface="Calibri" pitchFamily="34" charset="-120"/>
+                <a:cs typeface="Amiri" pitchFamily="2" charset="-78"/>
               </a:rPr>
               <a:t>my practice before the mock</a:t>
             </a:r>
@@ -22078,8 +21653,7 @@
                   <a:srgbClr val="5A6472"/>
                 </a:solidFill>
                 <a:latin typeface="Calibri" pitchFamily="34" charset="0"/>
-                <a:ea typeface="Calibri" pitchFamily="34" charset="-122"/>
-                <a:cs typeface="Calibri" pitchFamily="34" charset="-120"/>
+                <a:cs typeface="Amiri" pitchFamily="2" charset="-78"/>
               </a:rPr>
               <a:t>Before the mock I will practise…</a:t>
             </a:r>
@@ -22143,9 +21717,8 @@
                 <a:solidFill>
                   <a:srgbClr val="1B3B6F"/>
                 </a:solidFill>
-                <a:latin typeface="Amiri" pitchFamily="34" charset="0"/>
-                <a:ea typeface="Amiri" pitchFamily="34" charset="-122"/>
-                <a:cs typeface="Amiri" pitchFamily="34" charset="-120"/>
+                <a:latin typeface="Amiri" pitchFamily="2" charset="-78"/>
+                <a:cs typeface="Amiri" pitchFamily="2" charset="-78"/>
               </a:rPr>
               <a:t>بِنْيَةَ المَقَالِ</a:t>
             </a:r>
@@ -22183,8 +21756,7 @@
                   <a:srgbClr val="5A6472"/>
                 </a:solidFill>
                 <a:latin typeface="Calibri" pitchFamily="34" charset="0"/>
-                <a:ea typeface="Calibri" pitchFamily="34" charset="-122"/>
-                <a:cs typeface="Calibri" pitchFamily="34" charset="-120"/>
+                <a:cs typeface="Amiri" pitchFamily="2" charset="-78"/>
               </a:rPr>
               <a:t>I have now mastered …</a:t>
             </a:r>
@@ -22221,9 +21793,8 @@
                 <a:solidFill>
                   <a:srgbClr val="1B3B6F"/>
                 </a:solidFill>
-                <a:latin typeface="Amiri" pitchFamily="34" charset="0"/>
-                <a:ea typeface="Amiri" pitchFamily="34" charset="-122"/>
-                <a:cs typeface="Amiri" pitchFamily="34" charset="-120"/>
+                <a:latin typeface="Amiri" pitchFamily="2" charset="-78"/>
+                <a:cs typeface="Amiri" pitchFamily="2" charset="-78"/>
               </a:rPr>
               <a:t>أُتْقِنُ الآنَ ______ .</a:t>
             </a:r>
@@ -22261,8 +21832,7 @@
                   <a:srgbClr val="1B3B6F"/>
                 </a:solidFill>
                 <a:latin typeface="Calibri" pitchFamily="34" charset="0"/>
-                <a:ea typeface="Calibri" pitchFamily="34" charset="-122"/>
-                <a:cs typeface="Calibri" pitchFamily="34" charset="-120"/>
+                <a:cs typeface="Amiri" pitchFamily="2" charset="-78"/>
               </a:rPr>
               <a:t>In the real exam you have about 35 minutes for Q2 — today’s 25 minutes was the harder version.</a:t>
             </a:r>
@@ -22300,8 +21870,7 @@
                   <a:srgbClr val="8A93A0"/>
                 </a:solidFill>
                 <a:latin typeface="Calibri" pitchFamily="34" charset="0"/>
-                <a:ea typeface="Calibri" pitchFamily="34" charset="-122"/>
-                <a:cs typeface="Calibri" pitchFamily="34" charset="-120"/>
+                <a:cs typeface="Amiri" pitchFamily="2" charset="-78"/>
               </a:rPr>
               <a:t>22 / 25</a:t>
             </a:r>
@@ -22395,9 +21964,8 @@
                 <a:solidFill>
                   <a:srgbClr val="D4AF37"/>
                 </a:solidFill>
-                <a:latin typeface="Amiri" pitchFamily="34" charset="0"/>
-                <a:ea typeface="Amiri" pitchFamily="34" charset="-122"/>
-                <a:cs typeface="Amiri" pitchFamily="34" charset="-120"/>
+                <a:latin typeface="Amiri" pitchFamily="2" charset="-78"/>
+                <a:cs typeface="Amiri" pitchFamily="2" charset="-78"/>
               </a:rPr>
               <a:t>م</a:t>
             </a:r>
@@ -22435,8 +22003,7 @@
                   <a:srgbClr val="1B3B6F"/>
                 </a:solidFill>
                 <a:latin typeface="Cambria" pitchFamily="34" charset="0"/>
-                <a:ea typeface="Cambria" pitchFamily="34" charset="-122"/>
-                <a:cs typeface="Cambria" pitchFamily="34" charset="-120"/>
+                <a:cs typeface="Amiri" pitchFamily="2" charset="-78"/>
               </a:rPr>
               <a:t>Al Madina Online School</a:t>
             </a:r>
@@ -22474,8 +22041,7 @@
                   <a:srgbClr val="8A6D1E"/>
                 </a:solidFill>
                 <a:latin typeface="Calibri" pitchFamily="34" charset="0"/>
-                <a:ea typeface="Calibri" pitchFamily="34" charset="-122"/>
-                <a:cs typeface="Calibri" pitchFamily="34" charset="-120"/>
+                <a:cs typeface="Amiri" pitchFamily="2" charset="-78"/>
               </a:rPr>
               <a:t>ARABIC DEPARTMENT · MIFTAH ARABIC · IGCSE 0544</a:t>
             </a:r>
@@ -22540,8 +22106,7 @@
                   <a:srgbClr val="FFFFFF"/>
                 </a:solidFill>
                 <a:latin typeface="Calibri" pitchFamily="34" charset="0"/>
-                <a:ea typeface="Calibri" pitchFamily="34" charset="-122"/>
-                <a:cs typeface="Calibri" pitchFamily="34" charset="-120"/>
+                <a:cs typeface="Amiri" pitchFamily="2" charset="-78"/>
               </a:rPr>
               <a:t>P6-L05 · IGCSE Bridge</a:t>
             </a:r>
@@ -22606,8 +22171,7 @@
                   <a:srgbClr val="FFFFFF"/>
                 </a:solidFill>
                 <a:latin typeface="Calibri" pitchFamily="34" charset="0"/>
-                <a:ea typeface="Calibri" pitchFamily="34" charset="-122"/>
-                <a:cs typeface="Calibri" pitchFamily="34" charset="-120"/>
+                <a:cs typeface="Amiri" pitchFamily="2" charset="-78"/>
               </a:rPr>
               <a:t>FEEDBACK · 1 MIN</a:t>
             </a:r>
@@ -22645,8 +22209,7 @@
                   <a:srgbClr val="8A6D1E"/>
                 </a:solidFill>
                 <a:latin typeface="Calibri" pitchFamily="34" charset="0"/>
-                <a:ea typeface="Calibri" pitchFamily="34" charset="-122"/>
-                <a:cs typeface="Calibri" pitchFamily="34" charset="-120"/>
+                <a:cs typeface="Amiri" pitchFamily="2" charset="-78"/>
               </a:rPr>
               <a:t>FEEDBACK · SUCCESS CRITERIA</a:t>
             </a:r>
@@ -22684,8 +22247,7 @@
                   <a:srgbClr val="1B3B6F"/>
                 </a:solidFill>
                 <a:latin typeface="Cambria" pitchFamily="34" charset="0"/>
-                <a:ea typeface="Cambria" pitchFamily="34" charset="-122"/>
-                <a:cs typeface="Cambria" pitchFamily="34" charset="-120"/>
+                <a:cs typeface="Amiri" pitchFamily="2" charset="-78"/>
               </a:rPr>
               <a:t>Check your work</a:t>
             </a:r>
@@ -22722,9 +22284,8 @@
                 <a:solidFill>
                   <a:srgbClr val="8A6D1E"/>
                 </a:solidFill>
-                <a:latin typeface="Amiri" pitchFamily="34" charset="0"/>
-                <a:ea typeface="Amiri" pitchFamily="34" charset="-122"/>
-                <a:cs typeface="Amiri" pitchFamily="34" charset="-120"/>
+                <a:latin typeface="Amiri" pitchFamily="2" charset="-78"/>
+                <a:cs typeface="Amiri" pitchFamily="2" charset="-78"/>
               </a:rPr>
               <a:t>قَيِّمْ عَمَلَكَ</a:t>
             </a:r>
@@ -22762,8 +22323,7 @@
                   <a:srgbClr val="8A93A0"/>
                 </a:solidFill>
                 <a:latin typeface="Calibri" pitchFamily="34" charset="0"/>
-                <a:ea typeface="Calibri" pitchFamily="34" charset="-122"/>
-                <a:cs typeface="Calibri" pitchFamily="34" charset="-120"/>
+                <a:cs typeface="Amiri" pitchFamily="2" charset="-78"/>
               </a:rPr>
               <a:t>Miftah Arabic · Progression P6 · IGCSE Bridge · P6-L05</a:t>
             </a:r>
@@ -22860,8 +22420,7 @@
                   <a:srgbClr val="1F2A37"/>
                 </a:solidFill>
                 <a:latin typeface="Calibri" pitchFamily="34" charset="0"/>
-                <a:ea typeface="Calibri" pitchFamily="34" charset="-122"/>
-                <a:cs typeface="Calibri" pitchFamily="34" charset="-120"/>
+                <a:cs typeface="Amiri" pitchFamily="2" charset="-78"/>
               </a:rPr>
               <a:t>I opened with a clear thesis and supported it with cited evidence.</a:t>
             </a:r>
@@ -22926,8 +22485,7 @@
                   <a:srgbClr val="FFFFFF"/>
                 </a:solidFill>
                 <a:latin typeface="Calibri" pitchFamily="34" charset="0"/>
-                <a:ea typeface="Calibri" pitchFamily="34" charset="-122"/>
-                <a:cs typeface="Calibri" pitchFamily="34" charset="-120"/>
+                <a:cs typeface="Amiri" pitchFamily="2" charset="-78"/>
               </a:rPr>
               <a:t>CORE</a:t>
             </a:r>
@@ -23024,8 +22582,7 @@
                   <a:srgbClr val="1F2A37"/>
                 </a:solidFill>
                 <a:latin typeface="Calibri" pitchFamily="34" charset="0"/>
-                <a:ea typeface="Calibri" pitchFamily="34" charset="-122"/>
-                <a:cs typeface="Calibri" pitchFamily="34" charset="-120"/>
+                <a:cs typeface="Amiri" pitchFamily="2" charset="-78"/>
               </a:rPr>
               <a:t>I conceded with ṣaḥīḥun anna and refuted with ghayra anna.</a:t>
             </a:r>
@@ -23090,8 +22647,7 @@
                   <a:srgbClr val="FFFFFF"/>
                 </a:solidFill>
                 <a:latin typeface="Calibri" pitchFamily="34" charset="0"/>
-                <a:ea typeface="Calibri" pitchFamily="34" charset="-122"/>
-                <a:cs typeface="Calibri" pitchFamily="34" charset="-120"/>
+                <a:cs typeface="Amiri" pitchFamily="2" charset="-78"/>
               </a:rPr>
               <a:t>CORE</a:t>
             </a:r>
@@ -23188,8 +22744,7 @@
                   <a:srgbClr val="1F2A37"/>
                 </a:solidFill>
                 <a:latin typeface="Calibri" pitchFamily="34" charset="0"/>
-                <a:ea typeface="Calibri" pitchFamily="34" charset="-122"/>
-                <a:cs typeface="Calibri" pitchFamily="34" charset="-120"/>
+                <a:cs typeface="Amiri" pitchFamily="2" charset="-78"/>
               </a:rPr>
               <a:t>I closed with wa-bināʾan ʿalā mā sabaqa and a verb in -a.</a:t>
             </a:r>
@@ -23254,8 +22809,7 @@
                   <a:srgbClr val="FFFFFF"/>
                 </a:solidFill>
                 <a:latin typeface="Calibri" pitchFamily="34" charset="0"/>
-                <a:ea typeface="Calibri" pitchFamily="34" charset="-122"/>
-                <a:cs typeface="Calibri" pitchFamily="34" charset="-120"/>
+                <a:cs typeface="Amiri" pitchFamily="2" charset="-78"/>
               </a:rPr>
               <a:t>DEVELOP</a:t>
             </a:r>
@@ -23352,8 +22906,7 @@
                   <a:srgbClr val="1F2A37"/>
                 </a:solidFill>
                 <a:latin typeface="Calibri" pitchFamily="34" charset="0"/>
-                <a:ea typeface="Calibri" pitchFamily="34" charset="-122"/>
-                <a:cs typeface="Calibri" pitchFamily="34" charset="-120"/>
+                <a:cs typeface="Amiri" pitchFamily="2" charset="-78"/>
               </a:rPr>
               <a:t>I kept to 130–150 words and checked accuracy before submitting.</a:t>
             </a:r>
@@ -23418,8 +22971,7 @@
                   <a:srgbClr val="FFFFFF"/>
                 </a:solidFill>
                 <a:latin typeface="Calibri" pitchFamily="34" charset="0"/>
-                <a:ea typeface="Calibri" pitchFamily="34" charset="-122"/>
-                <a:cs typeface="Calibri" pitchFamily="34" charset="-120"/>
+                <a:cs typeface="Amiri" pitchFamily="2" charset="-78"/>
               </a:rPr>
               <a:t>DEVELOP</a:t>
             </a:r>
@@ -23516,8 +23068,7 @@
                   <a:srgbClr val="1F2A37"/>
                 </a:solidFill>
                 <a:latin typeface="Calibri" pitchFamily="34" charset="0"/>
-                <a:ea typeface="Calibri" pitchFamily="34" charset="-122"/>
-                <a:cs typeface="Calibri" pitchFamily="34" charset="-120"/>
+                <a:cs typeface="Amiri" pitchFamily="2" charset="-78"/>
               </a:rPr>
               <a:t>I used both conditionals and self-marked against TC, Range and Accuracy.</a:t>
             </a:r>
@@ -23582,8 +23133,7 @@
                   <a:srgbClr val="FFFFFF"/>
                 </a:solidFill>
                 <a:latin typeface="Calibri" pitchFamily="34" charset="0"/>
-                <a:ea typeface="Calibri" pitchFamily="34" charset="-122"/>
-                <a:cs typeface="Calibri" pitchFamily="34" charset="-120"/>
+                <a:cs typeface="Amiri" pitchFamily="2" charset="-78"/>
               </a:rPr>
               <a:t>STRETCH</a:t>
             </a:r>
@@ -23655,8 +23205,7 @@
                   <a:srgbClr val="2E8B57"/>
                 </a:solidFill>
                 <a:latin typeface="Calibri" pitchFamily="34" charset="0"/>
-                <a:ea typeface="Calibri" pitchFamily="34" charset="-122"/>
-                <a:cs typeface="Calibri" pitchFamily="34" charset="-120"/>
+                <a:cs typeface="Amiri" pitchFamily="2" charset="-78"/>
               </a:rPr>
               <a:t>WWW</a:t>
             </a:r>
@@ -23672,8 +23221,7 @@
                   <a:srgbClr val="1F2A37"/>
                 </a:solidFill>
                 <a:latin typeface="Calibri" pitchFamily="34" charset="0"/>
-                <a:ea typeface="Calibri" pitchFamily="34" charset="-122"/>
-                <a:cs typeface="Calibri" pitchFamily="34" charset="-120"/>
+                <a:cs typeface="Amiri" pitchFamily="2" charset="-78"/>
               </a:rPr>
               <a:t>What went well? One thing you did accurately.</a:t>
             </a:r>
@@ -23745,8 +23293,7 @@
                   <a:srgbClr val="C9780A"/>
                 </a:solidFill>
                 <a:latin typeface="Calibri" pitchFamily="34" charset="0"/>
-                <a:ea typeface="Calibri" pitchFamily="34" charset="-122"/>
-                <a:cs typeface="Calibri" pitchFamily="34" charset="-120"/>
+                <a:cs typeface="Amiri" pitchFamily="2" charset="-78"/>
               </a:rPr>
               <a:t>EBI</a:t>
             </a:r>
@@ -23762,8 +23309,7 @@
                   <a:srgbClr val="1F2A37"/>
                 </a:solidFill>
                 <a:latin typeface="Calibri" pitchFamily="34" charset="0"/>
-                <a:ea typeface="Calibri" pitchFamily="34" charset="-122"/>
-                <a:cs typeface="Calibri" pitchFamily="34" charset="-120"/>
+                <a:cs typeface="Amiri" pitchFamily="2" charset="-78"/>
               </a:rPr>
               <a:t>Even better if… One thing you will fix or add.</a:t>
             </a:r>
@@ -23801,8 +23347,7 @@
                   <a:srgbClr val="8A93A0"/>
                 </a:solidFill>
                 <a:latin typeface="Calibri" pitchFamily="34" charset="0"/>
-                <a:ea typeface="Calibri" pitchFamily="34" charset="-122"/>
-                <a:cs typeface="Calibri" pitchFamily="34" charset="-120"/>
+                <a:cs typeface="Amiri" pitchFamily="2" charset="-78"/>
               </a:rPr>
               <a:t>23 / 25</a:t>
             </a:r>
@@ -23896,9 +23441,8 @@
                 <a:solidFill>
                   <a:srgbClr val="D4AF37"/>
                 </a:solidFill>
-                <a:latin typeface="Amiri" pitchFamily="34" charset="0"/>
-                <a:ea typeface="Amiri" pitchFamily="34" charset="-122"/>
-                <a:cs typeface="Amiri" pitchFamily="34" charset="-120"/>
+                <a:latin typeface="Amiri" pitchFamily="2" charset="-78"/>
+                <a:cs typeface="Amiri" pitchFamily="2" charset="-78"/>
               </a:rPr>
               <a:t>م</a:t>
             </a:r>
@@ -23936,8 +23480,7 @@
                   <a:srgbClr val="1B3B6F"/>
                 </a:solidFill>
                 <a:latin typeface="Cambria" pitchFamily="34" charset="0"/>
-                <a:ea typeface="Cambria" pitchFamily="34" charset="-122"/>
-                <a:cs typeface="Cambria" pitchFamily="34" charset="-120"/>
+                <a:cs typeface="Amiri" pitchFamily="2" charset="-78"/>
               </a:rPr>
               <a:t>Al Madina Online School</a:t>
             </a:r>
@@ -23975,8 +23518,7 @@
                   <a:srgbClr val="8A6D1E"/>
                 </a:solidFill>
                 <a:latin typeface="Calibri" pitchFamily="34" charset="0"/>
-                <a:ea typeface="Calibri" pitchFamily="34" charset="-122"/>
-                <a:cs typeface="Calibri" pitchFamily="34" charset="-120"/>
+                <a:cs typeface="Amiri" pitchFamily="2" charset="-78"/>
               </a:rPr>
               <a:t>ARABIC DEPARTMENT · MIFTAH ARABIC · IGCSE 0544</a:t>
             </a:r>
@@ -24041,8 +23583,7 @@
                   <a:srgbClr val="FFFFFF"/>
                 </a:solidFill>
                 <a:latin typeface="Calibri" pitchFamily="34" charset="0"/>
-                <a:ea typeface="Calibri" pitchFamily="34" charset="-122"/>
-                <a:cs typeface="Calibri" pitchFamily="34" charset="-120"/>
+                <a:cs typeface="Amiri" pitchFamily="2" charset="-78"/>
               </a:rPr>
               <a:t>P6-L05 · IGCSE Bridge</a:t>
             </a:r>
@@ -24107,8 +23648,7 @@
                   <a:srgbClr val="FFFFFF"/>
                 </a:solidFill>
                 <a:latin typeface="Calibri" pitchFamily="34" charset="0"/>
-                <a:ea typeface="Calibri" pitchFamily="34" charset="-122"/>
-                <a:cs typeface="Calibri" pitchFamily="34" charset="-120"/>
+                <a:cs typeface="Amiri" pitchFamily="2" charset="-78"/>
               </a:rPr>
               <a:t>PREPARATION · 2 MIN</a:t>
             </a:r>
@@ -24146,8 +23686,7 @@
                   <a:srgbClr val="C45A3C"/>
                 </a:solidFill>
                 <a:latin typeface="Calibri" pitchFamily="34" charset="0"/>
-                <a:ea typeface="Calibri" pitchFamily="34" charset="-122"/>
-                <a:cs typeface="Calibri" pitchFamily="34" charset="-120"/>
+                <a:cs typeface="Amiri" pitchFamily="2" charset="-78"/>
               </a:rPr>
               <a:t>PREPARATION FOR NEXT LESSON · ABOUT 10 MINUTES</a:t>
             </a:r>
@@ -24185,8 +23724,7 @@
                   <a:srgbClr val="1B3B6F"/>
                 </a:solidFill>
                 <a:latin typeface="Cambria" pitchFamily="34" charset="0"/>
-                <a:ea typeface="Cambria" pitchFamily="34" charset="-122"/>
-                <a:cs typeface="Cambria" pitchFamily="34" charset="-120"/>
+                <a:cs typeface="Amiri" pitchFamily="2" charset="-78"/>
               </a:rPr>
               <a:t>Before P6-L06: get ready at home</a:t>
             </a:r>
@@ -24223,9 +23761,8 @@
                 <a:solidFill>
                   <a:srgbClr val="8A6D1E"/>
                 </a:solidFill>
-                <a:latin typeface="Amiri" pitchFamily="34" charset="0"/>
-                <a:ea typeface="Amiri" pitchFamily="34" charset="-122"/>
-                <a:cs typeface="Amiri" pitchFamily="34" charset="-120"/>
+                <a:latin typeface="Amiri" pitchFamily="2" charset="-78"/>
+                <a:cs typeface="Amiri" pitchFamily="2" charset="-78"/>
               </a:rPr>
               <a:t>التَّحْضِيرُ لِلدَّرْسِ القَادِمِ</a:t>
             </a:r>
@@ -24263,8 +23800,7 @@
                   <a:srgbClr val="8A93A0"/>
                 </a:solidFill>
                 <a:latin typeface="Calibri" pitchFamily="34" charset="0"/>
-                <a:ea typeface="Calibri" pitchFamily="34" charset="-122"/>
-                <a:cs typeface="Calibri" pitchFamily="34" charset="-120"/>
+                <a:cs typeface="Amiri" pitchFamily="2" charset="-78"/>
               </a:rPr>
               <a:t>Miftah Arabic · Progression P6 · IGCSE Bridge · P6-L05</a:t>
             </a:r>
@@ -24385,8 +23921,7 @@
                   <a:srgbClr val="C45A3C"/>
                 </a:solidFill>
                 <a:latin typeface="Calibri" pitchFamily="34" charset="0"/>
-                <a:ea typeface="Calibri" pitchFamily="34" charset="-122"/>
-                <a:cs typeface="Calibri" pitchFamily="34" charset="-120"/>
+                <a:cs typeface="Amiri" pitchFamily="2" charset="-78"/>
               </a:rPr>
               <a:t>LEARN THESE 5 WORDS</a:t>
             </a:r>
@@ -24402,8 +23937,7 @@
                   <a:srgbClr val="5A6472"/>
                 </a:solidFill>
                 <a:latin typeface="Calibri" pitchFamily="34" charset="0"/>
-                <a:ea typeface="Calibri" pitchFamily="34" charset="-122"/>
-                <a:cs typeface="Calibri" pitchFamily="34" charset="-120"/>
+                <a:cs typeface="Amiri" pitchFamily="2" charset="-78"/>
               </a:rPr>
               <a:t>for P6-L06 · Paper 3 Role Play — Transactional Language at IGCSE Standard</a:t>
             </a:r>
@@ -24440,9 +23974,8 @@
                 <a:solidFill>
                   <a:srgbClr val="1B3B6F"/>
                 </a:solidFill>
-                <a:latin typeface="Amiri" pitchFamily="34" charset="0"/>
-                <a:ea typeface="Amiri" pitchFamily="34" charset="-122"/>
-                <a:cs typeface="Amiri" pitchFamily="34" charset="-120"/>
+                <a:latin typeface="Amiri" pitchFamily="2" charset="-78"/>
+                <a:cs typeface="Amiri" pitchFamily="2" charset="-78"/>
               </a:rPr>
               <a:t>تَمْثِيلُ الدَّوْرِ</a:t>
             </a:r>
@@ -24480,8 +24013,7 @@
                   <a:srgbClr val="1F2A37"/>
                 </a:solidFill>
                 <a:latin typeface="Calibri" pitchFamily="34" charset="0"/>
-                <a:ea typeface="Calibri" pitchFamily="34" charset="-122"/>
-                <a:cs typeface="Calibri" pitchFamily="34" charset="-120"/>
+                <a:cs typeface="Amiri" pitchFamily="2" charset="-78"/>
               </a:rPr>
               <a:t>role play</a:t>
             </a:r>
@@ -24494,8 +24026,7 @@
                   <a:srgbClr val="5A6472"/>
                 </a:solidFill>
                 <a:latin typeface="Calibri" pitchFamily="34" charset="0"/>
-                <a:ea typeface="Calibri" pitchFamily="34" charset="-122"/>
-                <a:cs typeface="Calibri" pitchFamily="34" charset="-120"/>
+                <a:cs typeface="Amiri" pitchFamily="2" charset="-78"/>
               </a:rPr>
               <a:t>  —</a:t>
             </a:r>
@@ -24532,9 +24063,8 @@
                 <a:solidFill>
                   <a:srgbClr val="1B3B6F"/>
                 </a:solidFill>
-                <a:latin typeface="Amiri" pitchFamily="34" charset="0"/>
-                <a:ea typeface="Amiri" pitchFamily="34" charset="-122"/>
-                <a:cs typeface="Amiri" pitchFamily="34" charset="-120"/>
+                <a:latin typeface="Amiri" pitchFamily="2" charset="-78"/>
+                <a:cs typeface="Amiri" pitchFamily="2" charset="-78"/>
               </a:rPr>
               <a:t>الاسْتِجَابَةُ لِلْمُحَفِّزَاتِ</a:t>
             </a:r>
@@ -24572,8 +24102,7 @@
                   <a:srgbClr val="1F2A37"/>
                 </a:solidFill>
                 <a:latin typeface="Calibri" pitchFamily="34" charset="0"/>
-                <a:ea typeface="Calibri" pitchFamily="34" charset="-122"/>
-                <a:cs typeface="Calibri" pitchFamily="34" charset="-120"/>
+                <a:cs typeface="Amiri" pitchFamily="2" charset="-78"/>
               </a:rPr>
               <a:t>responding to prompts</a:t>
             </a:r>
@@ -24586,8 +24115,7 @@
                   <a:srgbClr val="5A6472"/>
                 </a:solidFill>
                 <a:latin typeface="Calibri" pitchFamily="34" charset="0"/>
-                <a:ea typeface="Calibri" pitchFamily="34" charset="-122"/>
-                <a:cs typeface="Calibri" pitchFamily="34" charset="-120"/>
+                <a:cs typeface="Amiri" pitchFamily="2" charset="-78"/>
               </a:rPr>
               <a:t>  —</a:t>
             </a:r>
@@ -24624,9 +24152,8 @@
                 <a:solidFill>
                   <a:srgbClr val="1B3B6F"/>
                 </a:solidFill>
-                <a:latin typeface="Amiri" pitchFamily="34" charset="0"/>
-                <a:ea typeface="Amiri" pitchFamily="34" charset="-122"/>
-                <a:cs typeface="Amiri" pitchFamily="34" charset="-120"/>
+                <a:latin typeface="Amiri" pitchFamily="2" charset="-78"/>
+                <a:cs typeface="Amiri" pitchFamily="2" charset="-78"/>
               </a:rPr>
               <a:t>طَلَبُ المَعْلُومَاتِ</a:t>
             </a:r>
@@ -24664,8 +24191,7 @@
                   <a:srgbClr val="1F2A37"/>
                 </a:solidFill>
                 <a:latin typeface="Calibri" pitchFamily="34" charset="0"/>
-                <a:ea typeface="Calibri" pitchFamily="34" charset="-122"/>
-                <a:cs typeface="Calibri" pitchFamily="34" charset="-120"/>
+                <a:cs typeface="Amiri" pitchFamily="2" charset="-78"/>
               </a:rPr>
               <a:t>requesting information</a:t>
             </a:r>
@@ -24678,8 +24204,7 @@
                   <a:srgbClr val="5A6472"/>
                 </a:solidFill>
                 <a:latin typeface="Calibri" pitchFamily="34" charset="0"/>
-                <a:ea typeface="Calibri" pitchFamily="34" charset="-122"/>
-                <a:cs typeface="Calibri" pitchFamily="34" charset="-120"/>
+                <a:cs typeface="Amiri" pitchFamily="2" charset="-78"/>
               </a:rPr>
               <a:t>  —</a:t>
             </a:r>
@@ -24716,9 +24241,8 @@
                 <a:solidFill>
                   <a:srgbClr val="1B3B6F"/>
                 </a:solidFill>
-                <a:latin typeface="Amiri" pitchFamily="34" charset="0"/>
-                <a:ea typeface="Amiri" pitchFamily="34" charset="-122"/>
-                <a:cs typeface="Amiri" pitchFamily="34" charset="-120"/>
+                <a:latin typeface="Amiri" pitchFamily="2" charset="-78"/>
+                <a:cs typeface="Amiri" pitchFamily="2" charset="-78"/>
               </a:rPr>
               <a:t>التَّفَاوُضُ</a:t>
             </a:r>
@@ -24756,8 +24280,7 @@
                   <a:srgbClr val="1F2A37"/>
                 </a:solidFill>
                 <a:latin typeface="Calibri" pitchFamily="34" charset="0"/>
-                <a:ea typeface="Calibri" pitchFamily="34" charset="-122"/>
-                <a:cs typeface="Calibri" pitchFamily="34" charset="-120"/>
+                <a:cs typeface="Amiri" pitchFamily="2" charset="-78"/>
               </a:rPr>
               <a:t>negotiation</a:t>
             </a:r>
@@ -24770,8 +24293,7 @@
                   <a:srgbClr val="5A6472"/>
                 </a:solidFill>
                 <a:latin typeface="Calibri" pitchFamily="34" charset="0"/>
-                <a:ea typeface="Calibri" pitchFamily="34" charset="-122"/>
-                <a:cs typeface="Calibri" pitchFamily="34" charset="-120"/>
+                <a:cs typeface="Amiri" pitchFamily="2" charset="-78"/>
               </a:rPr>
               <a:t>  —</a:t>
             </a:r>
@@ -24808,9 +24330,8 @@
                 <a:solidFill>
                   <a:srgbClr val="1B3B6F"/>
                 </a:solidFill>
-                <a:latin typeface="Amiri" pitchFamily="34" charset="0"/>
-                <a:ea typeface="Amiri" pitchFamily="34" charset="-122"/>
-                <a:cs typeface="Amiri" pitchFamily="34" charset="-120"/>
+                <a:latin typeface="Amiri" pitchFamily="2" charset="-78"/>
+                <a:cs typeface="Amiri" pitchFamily="2" charset="-78"/>
               </a:rPr>
               <a:t>حَلُّ المُشْكِلَةِ</a:t>
             </a:r>
@@ -24848,8 +24369,7 @@
                   <a:srgbClr val="1F2A37"/>
                 </a:solidFill>
                 <a:latin typeface="Calibri" pitchFamily="34" charset="0"/>
-                <a:ea typeface="Calibri" pitchFamily="34" charset="-122"/>
-                <a:cs typeface="Calibri" pitchFamily="34" charset="-120"/>
+                <a:cs typeface="Amiri" pitchFamily="2" charset="-78"/>
               </a:rPr>
               <a:t>problem-solving</a:t>
             </a:r>
@@ -24862,8 +24382,7 @@
                   <a:srgbClr val="5A6472"/>
                 </a:solidFill>
                 <a:latin typeface="Calibri" pitchFamily="34" charset="0"/>
-                <a:ea typeface="Calibri" pitchFamily="34" charset="-122"/>
-                <a:cs typeface="Calibri" pitchFamily="34" charset="-120"/>
+                <a:cs typeface="Amiri" pitchFamily="2" charset="-78"/>
               </a:rPr>
               <a:t>  pl. حُلُولٌ</a:t>
             </a:r>
@@ -24901,8 +24420,7 @@
                   <a:srgbClr val="C45A3C"/>
                 </a:solidFill>
                 <a:latin typeface="Calibri" pitchFamily="34" charset="0"/>
-                <a:ea typeface="Calibri" pitchFamily="34" charset="-122"/>
-                <a:cs typeface="Calibri" pitchFamily="34" charset="-120"/>
+                <a:cs typeface="Amiri" pitchFamily="2" charset="-78"/>
               </a:rPr>
               <a:t>AND ANSWER ONE QUESTION</a:t>
             </a:r>
@@ -24940,8 +24458,7 @@
                   <a:srgbClr val="1F2A37"/>
                 </a:solidFill>
                 <a:latin typeface="Calibri" pitchFamily="34" charset="0"/>
-                <a:ea typeface="Calibri" pitchFamily="34" charset="-122"/>
-                <a:cs typeface="Calibri" pitchFamily="34" charset="-120"/>
+                <a:cs typeface="Amiri" pitchFamily="2" charset="-78"/>
               </a:rPr>
               <a:t>How would you ask politely for an appointment at a health centre?</a:t>
             </a:r>
@@ -24978,9 +24495,8 @@
                 <a:solidFill>
                   <a:srgbClr val="1B3B6F"/>
                 </a:solidFill>
-                <a:latin typeface="Amiri" pitchFamily="34" charset="0"/>
-                <a:ea typeface="Amiri" pitchFamily="34" charset="-122"/>
-                <a:cs typeface="Amiri" pitchFamily="34" charset="-120"/>
+                <a:latin typeface="Amiri" pitchFamily="2" charset="-78"/>
+                <a:cs typeface="Amiri" pitchFamily="2" charset="-78"/>
               </a:rPr>
               <a:t>مِنْ فَضْلِكَ، أُرِيدُ أَنْ ______ .</a:t>
             </a:r>
@@ -25018,8 +24534,7 @@
                   <a:srgbClr val="1B3B6F"/>
                 </a:solidFill>
                 <a:latin typeface="Calibri" pitchFamily="34" charset="0"/>
-                <a:ea typeface="Calibri" pitchFamily="34" charset="-122"/>
-                <a:cs typeface="Calibri" pitchFamily="34" charset="-120"/>
+                <a:cs typeface="Amiri" pitchFamily="2" charset="-78"/>
               </a:rPr>
               <a:t>HOMEWORK — CHOOSE YOUR ROUTE</a:t>
             </a:r>
@@ -25118,8 +24633,7 @@
                   <a:srgbClr val="FFFFFF"/>
                 </a:solidFill>
                 <a:latin typeface="Calibri" pitchFamily="34" charset="0"/>
-                <a:ea typeface="Calibri" pitchFamily="34" charset="-122"/>
-                <a:cs typeface="Calibri" pitchFamily="34" charset="-120"/>
+                <a:cs typeface="Amiri" pitchFamily="2" charset="-78"/>
               </a:rPr>
               <a:t>CORE</a:t>
             </a:r>
@@ -25157,8 +24671,7 @@
                   <a:srgbClr val="1F2A37"/>
                 </a:solidFill>
                 <a:latin typeface="Calibri" pitchFamily="34" charset="0"/>
-                <a:ea typeface="Calibri" pitchFamily="34" charset="-122"/>
-                <a:cs typeface="Calibri" pitchFamily="34" charset="-120"/>
+                <a:cs typeface="Amiri" pitchFamily="2" charset="-78"/>
               </a:rPr>
               <a:t>Redraft your essay with the model’s phrases; learn the five words.</a:t>
             </a:r>
@@ -25257,8 +24770,7 @@
                   <a:srgbClr val="FFFFFF"/>
                 </a:solidFill>
                 <a:latin typeface="Calibri" pitchFamily="34" charset="0"/>
-                <a:ea typeface="Calibri" pitchFamily="34" charset="-122"/>
-                <a:cs typeface="Calibri" pitchFamily="34" charset="-120"/>
+                <a:cs typeface="Amiri" pitchFamily="2" charset="-78"/>
               </a:rPr>
               <a:t>DEVELOP</a:t>
             </a:r>
@@ -25296,8 +24808,7 @@
                   <a:srgbClr val="1F2A37"/>
                 </a:solidFill>
                 <a:latin typeface="Calibri" pitchFamily="34" charset="0"/>
-                <a:ea typeface="Calibri" pitchFamily="34" charset="-122"/>
-                <a:cs typeface="Calibri" pitchFamily="34" charset="-120"/>
+                <a:cs typeface="Amiri" pitchFamily="2" charset="-78"/>
               </a:rPr>
               <a:t>Write a second essay plan (4 minutes) for another topic; learn the five words.</a:t>
             </a:r>
@@ -25396,8 +24907,7 @@
                   <a:srgbClr val="FFFFFF"/>
                 </a:solidFill>
                 <a:latin typeface="Calibri" pitchFamily="34" charset="0"/>
-                <a:ea typeface="Calibri" pitchFamily="34" charset="-122"/>
-                <a:cs typeface="Calibri" pitchFamily="34" charset="-120"/>
+                <a:cs typeface="Amiri" pitchFamily="2" charset="-78"/>
               </a:rPr>
               <a:t>STRETCH</a:t>
             </a:r>
@@ -25435,8 +24945,7 @@
                   <a:srgbClr val="1F2A37"/>
                 </a:solidFill>
                 <a:latin typeface="Calibri" pitchFamily="34" charset="0"/>
-                <a:ea typeface="Calibri" pitchFamily="34" charset="-122"/>
-                <a:cs typeface="Calibri" pitchFamily="34" charset="-120"/>
+                <a:cs typeface="Amiri" pitchFamily="2" charset="-78"/>
               </a:rPr>
               <a:t>Write a second essay in 25 minutes; learn the five words.</a:t>
             </a:r>
@@ -25474,8 +24983,7 @@
                   <a:srgbClr val="8A93A0"/>
                 </a:solidFill>
                 <a:latin typeface="Calibri" pitchFamily="34" charset="0"/>
-                <a:ea typeface="Calibri" pitchFamily="34" charset="-122"/>
-                <a:cs typeface="Calibri" pitchFamily="34" charset="-120"/>
+                <a:cs typeface="Amiri" pitchFamily="2" charset="-78"/>
               </a:rPr>
               <a:t>24 / 25</a:t>
             </a:r>
@@ -25619,8 +25127,7 @@
                   <a:srgbClr val="D4AF37"/>
                 </a:solidFill>
                 <a:latin typeface="Calibri" pitchFamily="34" charset="0"/>
-                <a:ea typeface="Calibri" pitchFamily="34" charset="-122"/>
-                <a:cs typeface="Calibri" pitchFamily="34" charset="-120"/>
+                <a:cs typeface="Amiri" pitchFamily="2" charset="-78"/>
               </a:rPr>
               <a:t>P6-L05 COMPLETE</a:t>
             </a:r>
@@ -25657,9 +25164,8 @@
                 <a:solidFill>
                   <a:srgbClr val="FFFFFF"/>
                 </a:solidFill>
-                <a:latin typeface="Amiri" pitchFamily="34" charset="0"/>
-                <a:ea typeface="Amiri" pitchFamily="34" charset="-122"/>
-                <a:cs typeface="Amiri" pitchFamily="34" charset="-120"/>
+                <a:latin typeface="Amiri" pitchFamily="2" charset="-78"/>
+                <a:cs typeface="Amiri" pitchFamily="2" charset="-78"/>
               </a:rPr>
               <a:t>أَحْسَنْتُمْ! إِلَى اللِّقَاءِ</a:t>
             </a:r>
@@ -25697,8 +25203,7 @@
                   <a:srgbClr val="C6D2E6"/>
                 </a:solidFill>
                 <a:latin typeface="Calibri" pitchFamily="34" charset="0"/>
-                <a:ea typeface="Calibri" pitchFamily="34" charset="-122"/>
-                <a:cs typeface="Calibri" pitchFamily="34" charset="-120"/>
+                <a:cs typeface="Amiri" pitchFamily="2" charset="-78"/>
               </a:rPr>
               <a:t>Well done — see you next lesson.</a:t>
             </a:r>
@@ -25736,8 +25241,7 @@
                   <a:srgbClr val="D4AF37"/>
                 </a:solidFill>
                 <a:latin typeface="Calibri" pitchFamily="34" charset="0"/>
-                <a:ea typeface="Calibri" pitchFamily="34" charset="-122"/>
-                <a:cs typeface="Calibri" pitchFamily="34" charset="-120"/>
+                <a:cs typeface="Amiri" pitchFamily="2" charset="-78"/>
               </a:rPr>
               <a:t>NEXT LESSON</a:t>
             </a:r>
@@ -25775,8 +25279,7 @@
                   <a:srgbClr val="FFFFFF"/>
                 </a:solidFill>
                 <a:latin typeface="Cambria" pitchFamily="34" charset="0"/>
-                <a:ea typeface="Cambria" pitchFamily="34" charset="-122"/>
-                <a:cs typeface="Cambria" pitchFamily="34" charset="-120"/>
+                <a:cs typeface="Amiri" pitchFamily="2" charset="-78"/>
               </a:rPr>
               <a:t>P6-L06 · Paper 3 Role Play — Transactional Language at IGCSE Standard</a:t>
             </a:r>
@@ -25813,9 +25316,8 @@
                 <a:solidFill>
                   <a:srgbClr val="D4AF37"/>
                 </a:solidFill>
-                <a:latin typeface="Amiri" pitchFamily="34" charset="0"/>
-                <a:ea typeface="Amiri" pitchFamily="34" charset="-122"/>
-                <a:cs typeface="Amiri" pitchFamily="34" charset="-120"/>
+                <a:latin typeface="Amiri" pitchFamily="2" charset="-78"/>
+                <a:cs typeface="Amiri" pitchFamily="2" charset="-78"/>
               </a:rPr>
               <a:t>الوَرَقَةُ الثَّالِثَةُ — تَمْثِيلُ الدَّوْرِ</a:t>
             </a:r>
@@ -25853,8 +25355,7 @@
                   <a:srgbClr val="FFFFFF"/>
                 </a:solidFill>
                 <a:latin typeface="Calibri" pitchFamily="34" charset="0"/>
-                <a:ea typeface="Calibri" pitchFamily="34" charset="-122"/>
-                <a:cs typeface="Calibri" pitchFamily="34" charset="-120"/>
+                <a:cs typeface="Amiri" pitchFamily="2" charset="-78"/>
               </a:rPr>
               <a:t>Remember: plan for four minutes — then thesis → evidence → ṣaḥīḥun anna … ghayra anna → law … la- → wa-bināʾan + -a. 130–150 words; Range without risk.</a:t>
             </a:r>
@@ -25948,9 +25449,8 @@
                 <a:solidFill>
                   <a:srgbClr val="D4AF37"/>
                 </a:solidFill>
-                <a:latin typeface="Amiri" pitchFamily="34" charset="0"/>
-                <a:ea typeface="Amiri" pitchFamily="34" charset="-122"/>
-                <a:cs typeface="Amiri" pitchFamily="34" charset="-120"/>
+                <a:latin typeface="Amiri" pitchFamily="2" charset="-78"/>
+                <a:cs typeface="Amiri" pitchFamily="2" charset="-78"/>
               </a:rPr>
               <a:t>م</a:t>
             </a:r>
@@ -25988,8 +25488,7 @@
                   <a:srgbClr val="1B3B6F"/>
                 </a:solidFill>
                 <a:latin typeface="Cambria" pitchFamily="34" charset="0"/>
-                <a:ea typeface="Cambria" pitchFamily="34" charset="-122"/>
-                <a:cs typeface="Cambria" pitchFamily="34" charset="-120"/>
+                <a:cs typeface="Amiri" pitchFamily="2" charset="-78"/>
               </a:rPr>
               <a:t>Al Madina Online School</a:t>
             </a:r>
@@ -26027,8 +25526,7 @@
                   <a:srgbClr val="8A6D1E"/>
                 </a:solidFill>
                 <a:latin typeface="Calibri" pitchFamily="34" charset="0"/>
-                <a:ea typeface="Calibri" pitchFamily="34" charset="-122"/>
-                <a:cs typeface="Calibri" pitchFamily="34" charset="-120"/>
+                <a:cs typeface="Amiri" pitchFamily="2" charset="-78"/>
               </a:rPr>
               <a:t>ARABIC DEPARTMENT · MIFTAH ARABIC · IGCSE 0544</a:t>
             </a:r>
@@ -26093,8 +25591,7 @@
                   <a:srgbClr val="FFFFFF"/>
                 </a:solidFill>
                 <a:latin typeface="Calibri" pitchFamily="34" charset="0"/>
-                <a:ea typeface="Calibri" pitchFamily="34" charset="-122"/>
-                <a:cs typeface="Calibri" pitchFamily="34" charset="-120"/>
+                <a:cs typeface="Amiri" pitchFamily="2" charset="-78"/>
               </a:rPr>
               <a:t>P6-L05 · IGCSE Bridge</a:t>
             </a:r>
@@ -26159,8 +25656,7 @@
                   <a:srgbClr val="FFFFFF"/>
                 </a:solidFill>
                 <a:latin typeface="Calibri" pitchFamily="34" charset="0"/>
-                <a:ea typeface="Calibri" pitchFamily="34" charset="-122"/>
-                <a:cs typeface="Calibri" pitchFamily="34" charset="-120"/>
+                <a:cs typeface="Amiri" pitchFamily="2" charset="-78"/>
               </a:rPr>
               <a:t>WELCOME</a:t>
             </a:r>
@@ -26198,8 +25694,7 @@
                   <a:srgbClr val="5A6472"/>
                 </a:solidFill>
                 <a:latin typeface="Calibri" pitchFamily="34" charset="0"/>
-                <a:ea typeface="Calibri" pitchFamily="34" charset="-122"/>
-                <a:cs typeface="Calibri" pitchFamily="34" charset="-120"/>
+                <a:cs typeface="Amiri" pitchFamily="2" charset="-78"/>
               </a:rPr>
               <a:t>TODAY’S LESSON MAP</a:t>
             </a:r>
@@ -26237,8 +25732,7 @@
                   <a:srgbClr val="1B3B6F"/>
                 </a:solidFill>
                 <a:latin typeface="Cambria" pitchFamily="34" charset="0"/>
-                <a:ea typeface="Cambria" pitchFamily="34" charset="-122"/>
-                <a:cs typeface="Cambria" pitchFamily="34" charset="-120"/>
+                <a:cs typeface="Amiri" pitchFamily="2" charset="-78"/>
               </a:rPr>
               <a:t>Our lesson today, step by step</a:t>
             </a:r>
@@ -26275,9 +25769,8 @@
                 <a:solidFill>
                   <a:srgbClr val="8A6D1E"/>
                 </a:solidFill>
-                <a:latin typeface="Amiri" pitchFamily="34" charset="0"/>
-                <a:ea typeface="Amiri" pitchFamily="34" charset="-122"/>
-                <a:cs typeface="Amiri" pitchFamily="34" charset="-120"/>
+                <a:latin typeface="Amiri" pitchFamily="2" charset="-78"/>
+                <a:cs typeface="Amiri" pitchFamily="2" charset="-78"/>
               </a:rPr>
               <a:t>خَرِيطَةُ الدَّرْسِ</a:t>
             </a:r>
@@ -26315,8 +25808,7 @@
                   <a:srgbClr val="8A93A0"/>
                 </a:solidFill>
                 <a:latin typeface="Calibri" pitchFamily="34" charset="0"/>
-                <a:ea typeface="Calibri" pitchFamily="34" charset="-122"/>
-                <a:cs typeface="Calibri" pitchFamily="34" charset="-120"/>
+                <a:cs typeface="Amiri" pitchFamily="2" charset="-78"/>
               </a:rPr>
               <a:t>Miftah Arabic · Progression P6 · IGCSE Bridge · P6-L05</a:t>
             </a:r>
@@ -26415,8 +25907,7 @@
                   <a:srgbClr val="FFFFFF"/>
                 </a:solidFill>
                 <a:latin typeface="Calibri" pitchFamily="34" charset="0"/>
-                <a:ea typeface="Calibri" pitchFamily="34" charset="-122"/>
-                <a:cs typeface="Calibri" pitchFamily="34" charset="-120"/>
+                <a:cs typeface="Amiri" pitchFamily="2" charset="-78"/>
               </a:rPr>
               <a:t>DO NOW</a:t>
             </a:r>
@@ -26454,8 +25945,7 @@
                   <a:srgbClr val="E8EDF5"/>
                 </a:solidFill>
                 <a:latin typeface="Calibri" pitchFamily="34" charset="0"/>
-                <a:ea typeface="Calibri" pitchFamily="34" charset="-122"/>
-                <a:cs typeface="Calibri" pitchFamily="34" charset="-120"/>
+                <a:cs typeface="Amiri" pitchFamily="2" charset="-78"/>
               </a:rPr>
               <a:t>6 min</a:t>
             </a:r>
@@ -26518,8 +26008,7 @@
                   <a:srgbClr val="1B3B6F"/>
                 </a:solidFill>
                 <a:latin typeface="Calibri" pitchFamily="34" charset="0"/>
-                <a:ea typeface="Calibri" pitchFamily="34" charset="-122"/>
-                <a:cs typeface="Calibri" pitchFamily="34" charset="-120"/>
+                <a:cs typeface="Amiri" pitchFamily="2" charset="-78"/>
               </a:rPr>
               <a:t>1</a:t>
             </a:r>
@@ -26557,8 +26046,7 @@
                   <a:srgbClr val="1F2A37"/>
                 </a:solidFill>
                 <a:latin typeface="Calibri" pitchFamily="34" charset="0"/>
-                <a:ea typeface="Calibri" pitchFamily="34" charset="-122"/>
-                <a:cs typeface="Calibri" pitchFamily="34" charset="-120"/>
+                <a:cs typeface="Amiri" pitchFamily="2" charset="-78"/>
               </a:rPr>
               <a:t>Retrieval: essay words and P5 accuracy.</a:t>
             </a:r>
@@ -26595,9 +26083,8 @@
                 <a:solidFill>
                   <a:srgbClr val="0E7C86"/>
                 </a:solidFill>
-                <a:latin typeface="Amiri" pitchFamily="34" charset="0"/>
-                <a:ea typeface="Amiri" pitchFamily="34" charset="-122"/>
-                <a:cs typeface="Amiri" pitchFamily="34" charset="-120"/>
+                <a:latin typeface="Amiri" pitchFamily="2" charset="-78"/>
+                <a:cs typeface="Amiri" pitchFamily="2" charset="-78"/>
               </a:rPr>
               <a:t>اِبْدَأِ الآنَ</a:t>
             </a:r>
@@ -26696,8 +26183,7 @@
                   <a:srgbClr val="FFFFFF"/>
                 </a:solidFill>
                 <a:latin typeface="Calibri" pitchFamily="34" charset="0"/>
-                <a:ea typeface="Calibri" pitchFamily="34" charset="-122"/>
-                <a:cs typeface="Calibri" pitchFamily="34" charset="-120"/>
+                <a:cs typeface="Amiri" pitchFamily="2" charset="-78"/>
               </a:rPr>
               <a:t>TEACHER INSTRUCTION</a:t>
             </a:r>
@@ -26735,8 +26221,7 @@
                   <a:srgbClr val="E8EDF5"/>
                 </a:solidFill>
                 <a:latin typeface="Calibri" pitchFamily="34" charset="0"/>
-                <a:ea typeface="Calibri" pitchFamily="34" charset="-122"/>
-                <a:cs typeface="Calibri" pitchFamily="34" charset="-120"/>
+                <a:cs typeface="Amiri" pitchFamily="2" charset="-78"/>
               </a:rPr>
               <a:t>8 min</a:t>
             </a:r>
@@ -26799,8 +26284,7 @@
                   <a:srgbClr val="1B3B6F"/>
                 </a:solidFill>
                 <a:latin typeface="Calibri" pitchFamily="34" charset="0"/>
-                <a:ea typeface="Calibri" pitchFamily="34" charset="-122"/>
-                <a:cs typeface="Calibri" pitchFamily="34" charset="-120"/>
+                <a:cs typeface="Amiri" pitchFamily="2" charset="-78"/>
               </a:rPr>
               <a:t>2</a:t>
             </a:r>
@@ -26838,8 +26322,7 @@
                   <a:srgbClr val="1F2A37"/>
                 </a:solidFill>
                 <a:latin typeface="Calibri" pitchFamily="34" charset="0"/>
-                <a:ea typeface="Calibri" pitchFamily="34" charset="-122"/>
-                <a:cs typeface="Calibri" pitchFamily="34" charset="-120"/>
+                <a:cs typeface="Amiri" pitchFamily="2" charset="-78"/>
               </a:rPr>
               <a:t>Time, architecture and the Q2 mark scheme.</a:t>
             </a:r>
@@ -26876,9 +26359,8 @@
                 <a:solidFill>
                   <a:srgbClr val="1B3B6F"/>
                 </a:solidFill>
-                <a:latin typeface="Amiri" pitchFamily="34" charset="0"/>
-                <a:ea typeface="Amiri" pitchFamily="34" charset="-122"/>
-                <a:cs typeface="Amiri" pitchFamily="34" charset="-120"/>
+                <a:latin typeface="Amiri" pitchFamily="2" charset="-78"/>
+                <a:cs typeface="Amiri" pitchFamily="2" charset="-78"/>
               </a:rPr>
               <a:t>الهَيْكَلُ</a:t>
             </a:r>
@@ -26977,8 +26459,7 @@
                   <a:srgbClr val="FFFFFF"/>
                 </a:solidFill>
                 <a:latin typeface="Calibri" pitchFamily="34" charset="0"/>
-                <a:ea typeface="Calibri" pitchFamily="34" charset="-122"/>
-                <a:cs typeface="Calibri" pitchFamily="34" charset="-120"/>
+                <a:cs typeface="Amiri" pitchFamily="2" charset="-78"/>
               </a:rPr>
               <a:t>I DO</a:t>
             </a:r>
@@ -27016,8 +26497,7 @@
                   <a:srgbClr val="E8EDF5"/>
                 </a:solidFill>
                 <a:latin typeface="Calibri" pitchFamily="34" charset="0"/>
-                <a:ea typeface="Calibri" pitchFamily="34" charset="-122"/>
-                <a:cs typeface="Calibri" pitchFamily="34" charset="-120"/>
+                <a:cs typeface="Amiri" pitchFamily="2" charset="-78"/>
               </a:rPr>
               <a:t>4 min</a:t>
             </a:r>
@@ -27080,8 +26560,7 @@
                   <a:srgbClr val="1B3B6F"/>
                 </a:solidFill>
                 <a:latin typeface="Calibri" pitchFamily="34" charset="0"/>
-                <a:ea typeface="Calibri" pitchFamily="34" charset="-122"/>
-                <a:cs typeface="Calibri" pitchFamily="34" charset="-120"/>
+                <a:cs typeface="Amiri" pitchFamily="2" charset="-78"/>
               </a:rPr>
               <a:t>3</a:t>
             </a:r>
@@ -27119,8 +26598,7 @@
                   <a:srgbClr val="1F2A37"/>
                 </a:solidFill>
                 <a:latin typeface="Calibri" pitchFamily="34" charset="0"/>
-                <a:ea typeface="Calibri" pitchFamily="34" charset="-122"/>
-                <a:cs typeface="Calibri" pitchFamily="34" charset="-120"/>
+                <a:cs typeface="Amiri" pitchFamily="2" charset="-78"/>
               </a:rPr>
               <a:t>Watch me plan in four minutes.</a:t>
             </a:r>
@@ -27157,9 +26635,8 @@
                 <a:solidFill>
                   <a:srgbClr val="6B4C9A"/>
                 </a:solidFill>
-                <a:latin typeface="Amiri" pitchFamily="34" charset="0"/>
-                <a:ea typeface="Amiri" pitchFamily="34" charset="-122"/>
-                <a:cs typeface="Amiri" pitchFamily="34" charset="-120"/>
+                <a:latin typeface="Amiri" pitchFamily="2" charset="-78"/>
+                <a:cs typeface="Amiri" pitchFamily="2" charset="-78"/>
               </a:rPr>
               <a:t>شَاهِدْ</a:t>
             </a:r>
@@ -27258,8 +26735,7 @@
                   <a:srgbClr val="FFFFFF"/>
                 </a:solidFill>
                 <a:latin typeface="Calibri" pitchFamily="34" charset="0"/>
-                <a:ea typeface="Calibri" pitchFamily="34" charset="-122"/>
-                <a:cs typeface="Calibri" pitchFamily="34" charset="-120"/>
+                <a:cs typeface="Amiri" pitchFamily="2" charset="-78"/>
               </a:rPr>
               <a:t>YOU DO</a:t>
             </a:r>
@@ -27297,8 +26773,7 @@
                   <a:srgbClr val="E8EDF5"/>
                 </a:solidFill>
                 <a:latin typeface="Calibri" pitchFamily="34" charset="0"/>
-                <a:ea typeface="Calibri" pitchFamily="34" charset="-122"/>
-                <a:cs typeface="Calibri" pitchFamily="34" charset="-120"/>
+                <a:cs typeface="Amiri" pitchFamily="2" charset="-78"/>
               </a:rPr>
               <a:t>27 min</a:t>
             </a:r>
@@ -27361,8 +26836,7 @@
                   <a:srgbClr val="1B3B6F"/>
                 </a:solidFill>
                 <a:latin typeface="Calibri" pitchFamily="34" charset="0"/>
-                <a:ea typeface="Calibri" pitchFamily="34" charset="-122"/>
-                <a:cs typeface="Calibri" pitchFamily="34" charset="-120"/>
+                <a:cs typeface="Amiri" pitchFamily="2" charset="-78"/>
               </a:rPr>
               <a:t>4</a:t>
             </a:r>
@@ -27400,8 +26874,7 @@
                   <a:srgbClr val="1F2A37"/>
                 </a:solidFill>
                 <a:latin typeface="Calibri" pitchFamily="34" charset="0"/>
-                <a:ea typeface="Calibri" pitchFamily="34" charset="-122"/>
-                <a:cs typeface="Calibri" pitchFamily="34" charset="-120"/>
+                <a:cs typeface="Amiri" pitchFamily="2" charset="-78"/>
               </a:rPr>
               <a:t>Choose your essay · plan · write (exam conditions).</a:t>
             </a:r>
@@ -27438,9 +26911,8 @@
                 <a:solidFill>
                   <a:srgbClr val="1E6B52"/>
                 </a:solidFill>
-                <a:latin typeface="Amiri" pitchFamily="34" charset="0"/>
-                <a:ea typeface="Amiri" pitchFamily="34" charset="-122"/>
-                <a:cs typeface="Amiri" pitchFamily="34" charset="-120"/>
+                <a:latin typeface="Amiri" pitchFamily="2" charset="-78"/>
+                <a:cs typeface="Amiri" pitchFamily="2" charset="-78"/>
               </a:rPr>
               <a:t>اُكْتُبْ</a:t>
             </a:r>
@@ -27539,8 +27011,7 @@
                   <a:srgbClr val="FFFFFF"/>
                 </a:solidFill>
                 <a:latin typeface="Calibri" pitchFamily="34" charset="0"/>
-                <a:ea typeface="Calibri" pitchFamily="34" charset="-122"/>
-                <a:cs typeface="Calibri" pitchFamily="34" charset="-120"/>
+                <a:cs typeface="Amiri" pitchFamily="2" charset="-78"/>
               </a:rPr>
               <a:t>FEEDBACK</a:t>
             </a:r>
@@ -27578,8 +27049,7 @@
                   <a:srgbClr val="E8EDF5"/>
                 </a:solidFill>
                 <a:latin typeface="Calibri" pitchFamily="34" charset="0"/>
-                <a:ea typeface="Calibri" pitchFamily="34" charset="-122"/>
-                <a:cs typeface="Calibri" pitchFamily="34" charset="-120"/>
+                <a:cs typeface="Amiri" pitchFamily="2" charset="-78"/>
               </a:rPr>
               <a:t>10 min</a:t>
             </a:r>
@@ -27642,8 +27112,7 @@
                   <a:srgbClr val="1B3B6F"/>
                 </a:solidFill>
                 <a:latin typeface="Calibri" pitchFamily="34" charset="0"/>
-                <a:ea typeface="Calibri" pitchFamily="34" charset="-122"/>
-                <a:cs typeface="Calibri" pitchFamily="34" charset="-120"/>
+                <a:cs typeface="Amiri" pitchFamily="2" charset="-78"/>
               </a:rPr>
               <a:t>5</a:t>
             </a:r>
@@ -27681,8 +27150,7 @@
                   <a:srgbClr val="1F2A37"/>
                 </a:solidFill>
                 <a:latin typeface="Calibri" pitchFamily="34" charset="0"/>
-                <a:ea typeface="Calibri" pitchFamily="34" charset="-122"/>
-                <a:cs typeface="Calibri" pitchFamily="34" charset="-120"/>
+                <a:cs typeface="Amiri" pitchFamily="2" charset="-78"/>
               </a:rPr>
               <a:t>Models, self-marking, profile, reflection.</a:t>
             </a:r>
@@ -27719,9 +27187,8 @@
                 <a:solidFill>
                   <a:srgbClr val="8A6D1E"/>
                 </a:solidFill>
-                <a:latin typeface="Amiri" pitchFamily="34" charset="0"/>
-                <a:ea typeface="Amiri" pitchFamily="34" charset="-122"/>
-                <a:cs typeface="Amiri" pitchFamily="34" charset="-120"/>
+                <a:latin typeface="Amiri" pitchFamily="2" charset="-78"/>
+                <a:cs typeface="Amiri" pitchFamily="2" charset="-78"/>
               </a:rPr>
               <a:t>قَيِّمْ</a:t>
             </a:r>
@@ -27820,8 +27287,7 @@
                   <a:srgbClr val="FFFFFF"/>
                 </a:solidFill>
                 <a:latin typeface="Calibri" pitchFamily="34" charset="0"/>
-                <a:ea typeface="Calibri" pitchFamily="34" charset="-122"/>
-                <a:cs typeface="Calibri" pitchFamily="34" charset="-120"/>
+                <a:cs typeface="Amiri" pitchFamily="2" charset="-78"/>
               </a:rPr>
               <a:t>PREPARATION</a:t>
             </a:r>
@@ -27859,8 +27325,7 @@
                   <a:srgbClr val="E8EDF5"/>
                 </a:solidFill>
                 <a:latin typeface="Calibri" pitchFamily="34" charset="0"/>
-                <a:ea typeface="Calibri" pitchFamily="34" charset="-122"/>
-                <a:cs typeface="Calibri" pitchFamily="34" charset="-120"/>
+                <a:cs typeface="Amiri" pitchFamily="2" charset="-78"/>
               </a:rPr>
               <a:t>2 min</a:t>
             </a:r>
@@ -27923,8 +27388,7 @@
                   <a:srgbClr val="1B3B6F"/>
                 </a:solidFill>
                 <a:latin typeface="Calibri" pitchFamily="34" charset="0"/>
-                <a:ea typeface="Calibri" pitchFamily="34" charset="-122"/>
-                <a:cs typeface="Calibri" pitchFamily="34" charset="-120"/>
+                <a:cs typeface="Amiri" pitchFamily="2" charset="-78"/>
               </a:rPr>
               <a:t>6</a:t>
             </a:r>
@@ -27962,8 +27426,7 @@
                   <a:srgbClr val="1F2A37"/>
                 </a:solidFill>
                 <a:latin typeface="Calibri" pitchFamily="34" charset="0"/>
-                <a:ea typeface="Calibri" pitchFamily="34" charset="-122"/>
-                <a:cs typeface="Calibri" pitchFamily="34" charset="-120"/>
+                <a:cs typeface="Amiri" pitchFamily="2" charset="-78"/>
               </a:rPr>
               <a:t>Get ready for the role play.</a:t>
             </a:r>
@@ -28000,9 +27463,8 @@
                 <a:solidFill>
                   <a:srgbClr val="C45A3C"/>
                 </a:solidFill>
-                <a:latin typeface="Amiri" pitchFamily="34" charset="0"/>
-                <a:ea typeface="Amiri" pitchFamily="34" charset="-122"/>
-                <a:cs typeface="Amiri" pitchFamily="34" charset="-120"/>
+                <a:latin typeface="Amiri" pitchFamily="2" charset="-78"/>
+                <a:cs typeface="Amiri" pitchFamily="2" charset="-78"/>
               </a:rPr>
               <a:t>اِسْتَعِدَّ</a:t>
             </a:r>
@@ -28074,8 +27536,7 @@
                   <a:srgbClr val="1E6B52"/>
                 </a:solidFill>
                 <a:latin typeface="Calibri" pitchFamily="34" charset="0"/>
-                <a:ea typeface="Calibri" pitchFamily="34" charset="-122"/>
-                <a:cs typeface="Calibri" pitchFamily="34" charset="-120"/>
+                <a:cs typeface="Amiri" pitchFamily="2" charset="-78"/>
               </a:rPr>
               <a:t>IF ARABIC FEELS HARD TODAY</a:t>
             </a:r>
@@ -28113,8 +27574,7 @@
                   <a:srgbClr val="1F2A37"/>
                 </a:solidFill>
                 <a:latin typeface="Calibri" pitchFamily="34" charset="0"/>
-                <a:ea typeface="Calibri" pitchFamily="34" charset="-122"/>
-                <a:cs typeface="Calibri" pitchFamily="34" charset="-120"/>
+                <a:cs typeface="Amiri" pitchFamily="2" charset="-78"/>
               </a:rPr>
               <a:t>This is an exam-preparation lesson. Every task uses the real IGCSE format — Core students use the green boxes, frames and English support; nobody is expected to get everything right first time.</a:t>
             </a:r>
@@ -28152,8 +27612,7 @@
                   <a:srgbClr val="8A93A0"/>
                 </a:solidFill>
                 <a:latin typeface="Calibri" pitchFamily="34" charset="0"/>
-                <a:ea typeface="Calibri" pitchFamily="34" charset="-122"/>
-                <a:cs typeface="Calibri" pitchFamily="34" charset="-120"/>
+                <a:cs typeface="Amiri" pitchFamily="2" charset="-78"/>
               </a:rPr>
               <a:t>3 / 25</a:t>
             </a:r>
@@ -28247,9 +27706,8 @@
                 <a:solidFill>
                   <a:srgbClr val="D4AF37"/>
                 </a:solidFill>
-                <a:latin typeface="Amiri" pitchFamily="34" charset="0"/>
-                <a:ea typeface="Amiri" pitchFamily="34" charset="-122"/>
-                <a:cs typeface="Amiri" pitchFamily="34" charset="-120"/>
+                <a:latin typeface="Amiri" pitchFamily="2" charset="-78"/>
+                <a:cs typeface="Amiri" pitchFamily="2" charset="-78"/>
               </a:rPr>
               <a:t>م</a:t>
             </a:r>
@@ -28287,8 +27745,7 @@
                   <a:srgbClr val="1B3B6F"/>
                 </a:solidFill>
                 <a:latin typeface="Cambria" pitchFamily="34" charset="0"/>
-                <a:ea typeface="Cambria" pitchFamily="34" charset="-122"/>
-                <a:cs typeface="Cambria" pitchFamily="34" charset="-120"/>
+                <a:cs typeface="Amiri" pitchFamily="2" charset="-78"/>
               </a:rPr>
               <a:t>Al Madina Online School</a:t>
             </a:r>
@@ -28326,8 +27783,7 @@
                   <a:srgbClr val="8A6D1E"/>
                 </a:solidFill>
                 <a:latin typeface="Calibri" pitchFamily="34" charset="0"/>
-                <a:ea typeface="Calibri" pitchFamily="34" charset="-122"/>
-                <a:cs typeface="Calibri" pitchFamily="34" charset="-120"/>
+                <a:cs typeface="Amiri" pitchFamily="2" charset="-78"/>
               </a:rPr>
               <a:t>ARABIC DEPARTMENT · MIFTAH ARABIC · IGCSE 0544</a:t>
             </a:r>
@@ -28392,8 +27848,7 @@
                   <a:srgbClr val="FFFFFF"/>
                 </a:solidFill>
                 <a:latin typeface="Calibri" pitchFamily="34" charset="0"/>
-                <a:ea typeface="Calibri" pitchFamily="34" charset="-122"/>
-                <a:cs typeface="Calibri" pitchFamily="34" charset="-120"/>
+                <a:cs typeface="Amiri" pitchFamily="2" charset="-78"/>
               </a:rPr>
               <a:t>P6-L05 · IGCSE Bridge</a:t>
             </a:r>
@@ -28458,8 +27913,7 @@
                   <a:srgbClr val="FFFFFF"/>
                 </a:solidFill>
                 <a:latin typeface="Calibri" pitchFamily="34" charset="0"/>
-                <a:ea typeface="Calibri" pitchFamily="34" charset="-122"/>
-                <a:cs typeface="Calibri" pitchFamily="34" charset="-120"/>
+                <a:cs typeface="Amiri" pitchFamily="2" charset="-78"/>
               </a:rPr>
               <a:t>DO NOW · 5 MIN</a:t>
             </a:r>
@@ -28497,8 +27951,7 @@
                   <a:srgbClr val="0E7C86"/>
                 </a:solidFill>
                 <a:latin typeface="Calibri" pitchFamily="34" charset="0"/>
-                <a:ea typeface="Calibri" pitchFamily="34" charset="-122"/>
-                <a:cs typeface="Calibri" pitchFamily="34" charset="-120"/>
+                <a:cs typeface="Amiri" pitchFamily="2" charset="-78"/>
               </a:rPr>
               <a:t>DO NOW · ON YOUR OWN · 5 MINUTES</a:t>
             </a:r>
@@ -28536,8 +27989,7 @@
                   <a:srgbClr val="1B3B6F"/>
                 </a:solidFill>
                 <a:latin typeface="Cambria" pitchFamily="34" charset="0"/>
-                <a:ea typeface="Cambria" pitchFamily="34" charset="-122"/>
-                <a:cs typeface="Cambria" pitchFamily="34" charset="-120"/>
+                <a:cs typeface="Amiri" pitchFamily="2" charset="-78"/>
               </a:rPr>
               <a:t>Retrieval: what do you remember?</a:t>
             </a:r>
@@ -28574,9 +28026,8 @@
                 <a:solidFill>
                   <a:srgbClr val="8A6D1E"/>
                 </a:solidFill>
-                <a:latin typeface="Amiri" pitchFamily="34" charset="0"/>
-                <a:ea typeface="Amiri" pitchFamily="34" charset="-122"/>
-                <a:cs typeface="Amiri" pitchFamily="34" charset="-120"/>
+                <a:latin typeface="Amiri" pitchFamily="2" charset="-78"/>
+                <a:cs typeface="Amiri" pitchFamily="2" charset="-78"/>
               </a:rPr>
               <a:t>اِبْدَأِ الآنَ</a:t>
             </a:r>
@@ -28614,8 +28065,7 @@
                   <a:srgbClr val="8A93A0"/>
                 </a:solidFill>
                 <a:latin typeface="Calibri" pitchFamily="34" charset="0"/>
-                <a:ea typeface="Calibri" pitchFamily="34" charset="-122"/>
-                <a:cs typeface="Calibri" pitchFamily="34" charset="-120"/>
+                <a:cs typeface="Amiri" pitchFamily="2" charset="-78"/>
               </a:rPr>
               <a:t>Miftah Arabic · Progression P6 · IGCSE Bridge · P6-L05</a:t>
             </a:r>
@@ -28712,8 +28162,7 @@
                   <a:srgbClr val="FFFFFF"/>
                 </a:solidFill>
                 <a:latin typeface="Calibri" pitchFamily="34" charset="0"/>
-                <a:ea typeface="Calibri" pitchFamily="34" charset="-122"/>
-                <a:cs typeface="Calibri" pitchFamily="34" charset="-120"/>
+                <a:cs typeface="Amiri" pitchFamily="2" charset="-78"/>
               </a:rPr>
               <a:t>1</a:t>
             </a:r>
@@ -28751,8 +28200,7 @@
                   <a:srgbClr val="1B3B6F"/>
                 </a:solidFill>
                 <a:latin typeface="Calibri" pitchFamily="34" charset="0"/>
-                <a:ea typeface="Calibri" pitchFamily="34" charset="-122"/>
-                <a:cs typeface="Calibri" pitchFamily="34" charset="-120"/>
+                <a:cs typeface="Amiri" pitchFamily="2" charset="-78"/>
               </a:rPr>
               <a:t>What does </a:t>
             </a:r>
@@ -28764,9 +28212,8 @@
                 <a:solidFill>
                   <a:srgbClr val="1B3B6F"/>
                 </a:solidFill>
-                <a:latin typeface="Amiri" pitchFamily="34" charset="0"/>
-                <a:ea typeface="Amiri" pitchFamily="34" charset="-122"/>
-                <a:cs typeface="Amiri" pitchFamily="34" charset="-120"/>
+                <a:latin typeface="Amiri" pitchFamily="2" charset="-78"/>
+                <a:cs typeface="Amiri" pitchFamily="2" charset="-78"/>
               </a:rPr>
               <a:t>هَيْكَلُ المَقَالِ</a:t>
             </a:r>
@@ -28779,8 +28226,7 @@
                   <a:srgbClr val="1B3B6F"/>
                 </a:solidFill>
                 <a:latin typeface="Calibri" pitchFamily="34" charset="0"/>
-                <a:ea typeface="Calibri" pitchFamily="34" charset="-122"/>
-                <a:cs typeface="Calibri" pitchFamily="34" charset="-120"/>
+                <a:cs typeface="Amiri" pitchFamily="2" charset="-78"/>
               </a:rPr>
               <a:t> mean?</a:t>
             </a:r>
@@ -28843,8 +28289,7 @@
                   <a:srgbClr val="1B3B6F"/>
                 </a:solidFill>
                 <a:latin typeface="Calibri" pitchFamily="34" charset="0"/>
-                <a:ea typeface="Calibri" pitchFamily="34" charset="-122"/>
-                <a:cs typeface="Calibri" pitchFamily="34" charset="-120"/>
+                <a:cs typeface="Amiri" pitchFamily="2" charset="-78"/>
               </a:rPr>
               <a:t>A</a:t>
             </a:r>
@@ -28882,8 +28327,7 @@
                   <a:srgbClr val="1F2A37"/>
                 </a:solidFill>
                 <a:latin typeface="Calibri" pitchFamily="34" charset="0"/>
-                <a:ea typeface="Calibri" pitchFamily="34" charset="-122"/>
-                <a:cs typeface="Calibri" pitchFamily="34" charset="-120"/>
+                <a:cs typeface="Amiri" pitchFamily="2" charset="-78"/>
               </a:rPr>
               <a:t>essay title</a:t>
             </a:r>
@@ -28946,8 +28390,7 @@
                   <a:srgbClr val="1B3B6F"/>
                 </a:solidFill>
                 <a:latin typeface="Calibri" pitchFamily="34" charset="0"/>
-                <a:ea typeface="Calibri" pitchFamily="34" charset="-122"/>
-                <a:cs typeface="Calibri" pitchFamily="34" charset="-120"/>
+                <a:cs typeface="Amiri" pitchFamily="2" charset="-78"/>
               </a:rPr>
               <a:t>B</a:t>
             </a:r>
@@ -28985,8 +28428,7 @@
                   <a:srgbClr val="1F2A37"/>
                 </a:solidFill>
                 <a:latin typeface="Calibri" pitchFamily="34" charset="0"/>
-                <a:ea typeface="Calibri" pitchFamily="34" charset="-122"/>
-                <a:cs typeface="Calibri" pitchFamily="34" charset="-120"/>
+                <a:cs typeface="Amiri" pitchFamily="2" charset="-78"/>
               </a:rPr>
               <a:t>essay structure</a:t>
             </a:r>
@@ -29049,8 +28491,7 @@
                   <a:srgbClr val="1B3B6F"/>
                 </a:solidFill>
                 <a:latin typeface="Calibri" pitchFamily="34" charset="0"/>
-                <a:ea typeface="Calibri" pitchFamily="34" charset="-122"/>
-                <a:cs typeface="Calibri" pitchFamily="34" charset="-120"/>
+                <a:cs typeface="Amiri" pitchFamily="2" charset="-78"/>
               </a:rPr>
               <a:t>C</a:t>
             </a:r>
@@ -29088,8 +28529,7 @@
                   <a:srgbClr val="1F2A37"/>
                 </a:solidFill>
                 <a:latin typeface="Calibri" pitchFamily="34" charset="0"/>
-                <a:ea typeface="Calibri" pitchFamily="34" charset="-122"/>
-                <a:cs typeface="Calibri" pitchFamily="34" charset="-120"/>
+                <a:cs typeface="Amiri" pitchFamily="2" charset="-78"/>
               </a:rPr>
               <a:t>essay length</a:t>
             </a:r>
@@ -29186,8 +28626,7 @@
                   <a:srgbClr val="FFFFFF"/>
                 </a:solidFill>
                 <a:latin typeface="Calibri" pitchFamily="34" charset="0"/>
-                <a:ea typeface="Calibri" pitchFamily="34" charset="-122"/>
-                <a:cs typeface="Calibri" pitchFamily="34" charset="-120"/>
+                <a:cs typeface="Amiri" pitchFamily="2" charset="-78"/>
               </a:rPr>
               <a:t>2</a:t>
             </a:r>
@@ -29225,8 +28664,7 @@
                   <a:srgbClr val="1B3B6F"/>
                 </a:solidFill>
                 <a:latin typeface="Calibri" pitchFamily="34" charset="0"/>
-                <a:ea typeface="Calibri" pitchFamily="34" charset="-122"/>
-                <a:cs typeface="Calibri" pitchFamily="34" charset="-120"/>
+                <a:cs typeface="Amiri" pitchFamily="2" charset="-78"/>
               </a:rPr>
               <a:t>What does </a:t>
             </a:r>
@@ -29238,9 +28676,8 @@
                 <a:solidFill>
                   <a:srgbClr val="1B3B6F"/>
                 </a:solidFill>
-                <a:latin typeface="Amiri" pitchFamily="34" charset="0"/>
-                <a:ea typeface="Amiri" pitchFamily="34" charset="-122"/>
-                <a:cs typeface="Amiri" pitchFamily="34" charset="-120"/>
+                <a:latin typeface="Amiri" pitchFamily="2" charset="-78"/>
+                <a:cs typeface="Amiri" pitchFamily="2" charset="-78"/>
               </a:rPr>
               <a:t>التَّنَوُّعُ المَعْجَمِيُّ</a:t>
             </a:r>
@@ -29253,8 +28690,7 @@
                   <a:srgbClr val="1B3B6F"/>
                 </a:solidFill>
                 <a:latin typeface="Calibri" pitchFamily="34" charset="0"/>
-                <a:ea typeface="Calibri" pitchFamily="34" charset="-122"/>
-                <a:cs typeface="Calibri" pitchFamily="34" charset="-120"/>
+                <a:cs typeface="Amiri" pitchFamily="2" charset="-78"/>
               </a:rPr>
               <a:t> mean?</a:t>
             </a:r>
@@ -29317,8 +28753,7 @@
                   <a:srgbClr val="1B3B6F"/>
                 </a:solidFill>
                 <a:latin typeface="Calibri" pitchFamily="34" charset="0"/>
-                <a:ea typeface="Calibri" pitchFamily="34" charset="-122"/>
-                <a:cs typeface="Calibri" pitchFamily="34" charset="-120"/>
+                <a:cs typeface="Amiri" pitchFamily="2" charset="-78"/>
               </a:rPr>
               <a:t>A</a:t>
             </a:r>
@@ -29356,8 +28791,7 @@
                   <a:srgbClr val="1F2A37"/>
                 </a:solidFill>
                 <a:latin typeface="Calibri" pitchFamily="34" charset="0"/>
-                <a:ea typeface="Calibri" pitchFamily="34" charset="-122"/>
-                <a:cs typeface="Calibri" pitchFamily="34" charset="-120"/>
+                <a:cs typeface="Amiri" pitchFamily="2" charset="-78"/>
               </a:rPr>
               <a:t>lexical variety</a:t>
             </a:r>
@@ -29420,8 +28854,7 @@
                   <a:srgbClr val="1B3B6F"/>
                 </a:solidFill>
                 <a:latin typeface="Calibri" pitchFamily="34" charset="0"/>
-                <a:ea typeface="Calibri" pitchFamily="34" charset="-122"/>
-                <a:cs typeface="Calibri" pitchFamily="34" charset="-120"/>
+                <a:cs typeface="Amiri" pitchFamily="2" charset="-78"/>
               </a:rPr>
               <a:t>B</a:t>
             </a:r>
@@ -29459,8 +28892,7 @@
                   <a:srgbClr val="1F2A37"/>
                 </a:solidFill>
                 <a:latin typeface="Calibri" pitchFamily="34" charset="0"/>
-                <a:ea typeface="Calibri" pitchFamily="34" charset="-122"/>
-                <a:cs typeface="Calibri" pitchFamily="34" charset="-120"/>
+                <a:cs typeface="Amiri" pitchFamily="2" charset="-78"/>
               </a:rPr>
               <a:t>a dictionary</a:t>
             </a:r>
@@ -29523,8 +28955,7 @@
                   <a:srgbClr val="1B3B6F"/>
                 </a:solidFill>
                 <a:latin typeface="Calibri" pitchFamily="34" charset="0"/>
-                <a:ea typeface="Calibri" pitchFamily="34" charset="-122"/>
-                <a:cs typeface="Calibri" pitchFamily="34" charset="-120"/>
+                <a:cs typeface="Amiri" pitchFamily="2" charset="-78"/>
               </a:rPr>
               <a:t>C</a:t>
             </a:r>
@@ -29562,8 +28993,7 @@
                   <a:srgbClr val="1F2A37"/>
                 </a:solidFill>
                 <a:latin typeface="Calibri" pitchFamily="34" charset="0"/>
-                <a:ea typeface="Calibri" pitchFamily="34" charset="-122"/>
-                <a:cs typeface="Calibri" pitchFamily="34" charset="-120"/>
+                <a:cs typeface="Amiri" pitchFamily="2" charset="-78"/>
               </a:rPr>
               <a:t>spelling</a:t>
             </a:r>
@@ -29660,8 +29090,7 @@
                   <a:srgbClr val="FFFFFF"/>
                 </a:solidFill>
                 <a:latin typeface="Calibri" pitchFamily="34" charset="0"/>
-                <a:ea typeface="Calibri" pitchFamily="34" charset="-122"/>
-                <a:cs typeface="Calibri" pitchFamily="34" charset="-120"/>
+                <a:cs typeface="Amiri" pitchFamily="2" charset="-78"/>
               </a:rPr>
               <a:t>3</a:t>
             </a:r>
@@ -29699,8 +29128,7 @@
                   <a:srgbClr val="1B3B6F"/>
                 </a:solidFill>
                 <a:latin typeface="Calibri" pitchFamily="34" charset="0"/>
-                <a:ea typeface="Calibri" pitchFamily="34" charset="-122"/>
-                <a:cs typeface="Calibri" pitchFamily="34" charset="-120"/>
+                <a:cs typeface="Amiri" pitchFamily="2" charset="-78"/>
               </a:rPr>
               <a:t>What does </a:t>
             </a:r>
@@ -29712,9 +29140,8 @@
                 <a:solidFill>
                   <a:srgbClr val="1B3B6F"/>
                 </a:solidFill>
-                <a:latin typeface="Amiri" pitchFamily="34" charset="0"/>
-                <a:ea typeface="Amiri" pitchFamily="34" charset="-122"/>
-                <a:cs typeface="Amiri" pitchFamily="34" charset="-120"/>
+                <a:latin typeface="Amiri" pitchFamily="2" charset="-78"/>
+                <a:cs typeface="Amiri" pitchFamily="2" charset="-78"/>
               </a:rPr>
               <a:t>الدِّقَّةُ تَحْتَ ضَغْطِ الوَقْتِ</a:t>
             </a:r>
@@ -29727,8 +29154,7 @@
                   <a:srgbClr val="1B3B6F"/>
                 </a:solidFill>
                 <a:latin typeface="Calibri" pitchFamily="34" charset="0"/>
-                <a:ea typeface="Calibri" pitchFamily="34" charset="-122"/>
-                <a:cs typeface="Calibri" pitchFamily="34" charset="-120"/>
+                <a:cs typeface="Amiri" pitchFamily="2" charset="-78"/>
               </a:rPr>
               <a:t> mean?</a:t>
             </a:r>
@@ -29791,8 +29217,7 @@
                   <a:srgbClr val="1B3B6F"/>
                 </a:solidFill>
                 <a:latin typeface="Calibri" pitchFamily="34" charset="0"/>
-                <a:ea typeface="Calibri" pitchFamily="34" charset="-122"/>
-                <a:cs typeface="Calibri" pitchFamily="34" charset="-120"/>
+                <a:cs typeface="Amiri" pitchFamily="2" charset="-78"/>
               </a:rPr>
               <a:t>A</a:t>
             </a:r>
@@ -29830,8 +29255,7 @@
                   <a:srgbClr val="1F2A37"/>
                 </a:solidFill>
                 <a:latin typeface="Calibri" pitchFamily="34" charset="0"/>
-                <a:ea typeface="Calibri" pitchFamily="34" charset="-122"/>
-                <a:cs typeface="Calibri" pitchFamily="34" charset="-120"/>
+                <a:cs typeface="Amiri" pitchFamily="2" charset="-78"/>
               </a:rPr>
               <a:t>a time limit</a:t>
             </a:r>
@@ -29894,8 +29318,7 @@
                   <a:srgbClr val="1B3B6F"/>
                 </a:solidFill>
                 <a:latin typeface="Calibri" pitchFamily="34" charset="0"/>
-                <a:ea typeface="Calibri" pitchFamily="34" charset="-122"/>
-                <a:cs typeface="Calibri" pitchFamily="34" charset="-120"/>
+                <a:cs typeface="Amiri" pitchFamily="2" charset="-78"/>
               </a:rPr>
               <a:t>B</a:t>
             </a:r>
@@ -29933,8 +29356,7 @@
                   <a:srgbClr val="1F2A37"/>
                 </a:solidFill>
                 <a:latin typeface="Calibri" pitchFamily="34" charset="0"/>
-                <a:ea typeface="Calibri" pitchFamily="34" charset="-122"/>
-                <a:cs typeface="Calibri" pitchFamily="34" charset="-120"/>
+                <a:cs typeface="Amiri" pitchFamily="2" charset="-78"/>
               </a:rPr>
               <a:t>pressure at work</a:t>
             </a:r>
@@ -29997,8 +29419,7 @@
                   <a:srgbClr val="1B3B6F"/>
                 </a:solidFill>
                 <a:latin typeface="Calibri" pitchFamily="34" charset="0"/>
-                <a:ea typeface="Calibri" pitchFamily="34" charset="-122"/>
-                <a:cs typeface="Calibri" pitchFamily="34" charset="-120"/>
+                <a:cs typeface="Amiri" pitchFamily="2" charset="-78"/>
               </a:rPr>
               <a:t>C</a:t>
             </a:r>
@@ -30036,8 +29457,7 @@
                   <a:srgbClr val="1F2A37"/>
                 </a:solidFill>
                 <a:latin typeface="Calibri" pitchFamily="34" charset="0"/>
-                <a:ea typeface="Calibri" pitchFamily="34" charset="-122"/>
-                <a:cs typeface="Calibri" pitchFamily="34" charset="-120"/>
+                <a:cs typeface="Amiri" pitchFamily="2" charset="-78"/>
               </a:rPr>
               <a:t>accuracy under time pressure</a:t>
             </a:r>
@@ -30134,8 +29554,7 @@
                   <a:srgbClr val="FFFFFF"/>
                 </a:solidFill>
                 <a:latin typeface="Calibri" pitchFamily="34" charset="0"/>
-                <a:ea typeface="Calibri" pitchFamily="34" charset="-122"/>
-                <a:cs typeface="Calibri" pitchFamily="34" charset="-120"/>
+                <a:cs typeface="Amiri" pitchFamily="2" charset="-78"/>
               </a:rPr>
               <a:t>4</a:t>
             </a:r>
@@ -30173,8 +29592,7 @@
                   <a:srgbClr val="1B3B6F"/>
                 </a:solidFill>
                 <a:latin typeface="Calibri" pitchFamily="34" charset="0"/>
-                <a:ea typeface="Calibri" pitchFamily="34" charset="-122"/>
-                <a:cs typeface="Calibri" pitchFamily="34" charset="-120"/>
+                <a:cs typeface="Amiri" pitchFamily="2" charset="-78"/>
               </a:rPr>
               <a:t>Which opens the conclusion?</a:t>
             </a:r>
@@ -30237,8 +29655,7 @@
                   <a:srgbClr val="1B3B6F"/>
                 </a:solidFill>
                 <a:latin typeface="Calibri" pitchFamily="34" charset="0"/>
-                <a:ea typeface="Calibri" pitchFamily="34" charset="-122"/>
-                <a:cs typeface="Calibri" pitchFamily="34" charset="-120"/>
+                <a:cs typeface="Amiri" pitchFamily="2" charset="-78"/>
               </a:rPr>
               <a:t>A</a:t>
             </a:r>
@@ -30275,9 +29692,8 @@
                 <a:solidFill>
                   <a:srgbClr val="1F2A37"/>
                 </a:solidFill>
-                <a:latin typeface="Amiri" pitchFamily="34" charset="0"/>
-                <a:ea typeface="Amiri" pitchFamily="34" charset="-122"/>
-                <a:cs typeface="Amiri" pitchFamily="34" charset="-120"/>
+                <a:latin typeface="Amiri" pitchFamily="2" charset="-78"/>
+                <a:cs typeface="Amiri" pitchFamily="2" charset="-78"/>
               </a:rPr>
               <a:t>صَحِيحٌ أَنَّ</a:t>
             </a:r>
@@ -30340,8 +29756,7 @@
                   <a:srgbClr val="1B3B6F"/>
                 </a:solidFill>
                 <a:latin typeface="Calibri" pitchFamily="34" charset="0"/>
-                <a:ea typeface="Calibri" pitchFamily="34" charset="-122"/>
-                <a:cs typeface="Calibri" pitchFamily="34" charset="-120"/>
+                <a:cs typeface="Amiri" pitchFamily="2" charset="-78"/>
               </a:rPr>
               <a:t>B</a:t>
             </a:r>
@@ -30378,9 +29793,8 @@
                 <a:solidFill>
                   <a:srgbClr val="1F2A37"/>
                 </a:solidFill>
-                <a:latin typeface="Amiri" pitchFamily="34" charset="0"/>
-                <a:ea typeface="Amiri" pitchFamily="34" charset="-122"/>
-                <a:cs typeface="Amiri" pitchFamily="34" charset="-120"/>
+                <a:latin typeface="Amiri" pitchFamily="2" charset="-78"/>
+                <a:cs typeface="Amiri" pitchFamily="2" charset="-78"/>
               </a:rPr>
               <a:t>أَكَّدَ البَاحِثُونَ أَنَّ</a:t>
             </a:r>
@@ -30443,8 +29857,7 @@
                   <a:srgbClr val="1B3B6F"/>
                 </a:solidFill>
                 <a:latin typeface="Calibri" pitchFamily="34" charset="0"/>
-                <a:ea typeface="Calibri" pitchFamily="34" charset="-122"/>
-                <a:cs typeface="Calibri" pitchFamily="34" charset="-120"/>
+                <a:cs typeface="Amiri" pitchFamily="2" charset="-78"/>
               </a:rPr>
               <a:t>C</a:t>
             </a:r>
@@ -30481,9 +29894,8 @@
                 <a:solidFill>
                   <a:srgbClr val="1F2A37"/>
                 </a:solidFill>
-                <a:latin typeface="Amiri" pitchFamily="34" charset="0"/>
-                <a:ea typeface="Amiri" pitchFamily="34" charset="-122"/>
-                <a:cs typeface="Amiri" pitchFamily="34" charset="-120"/>
+                <a:latin typeface="Amiri" pitchFamily="2" charset="-78"/>
+                <a:cs typeface="Amiri" pitchFamily="2" charset="-78"/>
               </a:rPr>
               <a:t>وَبِنَاءً عَلَى مَا سَبَقَ</a:t>
             </a:r>
@@ -30580,8 +29992,7 @@
                   <a:srgbClr val="FFFFFF"/>
                 </a:solidFill>
                 <a:latin typeface="Calibri" pitchFamily="34" charset="0"/>
-                <a:ea typeface="Calibri" pitchFamily="34" charset="-122"/>
-                <a:cs typeface="Calibri" pitchFamily="34" charset="-120"/>
+                <a:cs typeface="Amiri" pitchFamily="2" charset="-78"/>
               </a:rPr>
               <a:t>5</a:t>
             </a:r>
@@ -30619,8 +30030,7 @@
                   <a:srgbClr val="1B3B6F"/>
                 </a:solidFill>
                 <a:latin typeface="Calibri" pitchFamily="34" charset="0"/>
-                <a:ea typeface="Calibri" pitchFamily="34" charset="-122"/>
-                <a:cs typeface="Calibri" pitchFamily="34" charset="-120"/>
+                <a:cs typeface="Amiri" pitchFamily="2" charset="-78"/>
               </a:rPr>
               <a:t>Complete: </a:t>
             </a:r>
@@ -30632,9 +30042,8 @@
                 <a:solidFill>
                   <a:srgbClr val="1B3B6F"/>
                 </a:solidFill>
-                <a:latin typeface="Amiri" pitchFamily="34" charset="0"/>
-                <a:ea typeface="Amiri" pitchFamily="34" charset="-122"/>
-                <a:cs typeface="Amiri" pitchFamily="34" charset="-120"/>
+                <a:latin typeface="Amiri" pitchFamily="2" charset="-78"/>
+                <a:cs typeface="Amiri" pitchFamily="2" charset="-78"/>
               </a:rPr>
               <a:t>يَتَطَلَّبُ الأَمْرُ أَنْ</a:t>
             </a:r>
@@ -30647,8 +30056,7 @@
                   <a:srgbClr val="1B3B6F"/>
                 </a:solidFill>
                 <a:latin typeface="Calibri" pitchFamily="34" charset="0"/>
-                <a:ea typeface="Calibri" pitchFamily="34" charset="-122"/>
-                <a:cs typeface="Calibri" pitchFamily="34" charset="-120"/>
+                <a:cs typeface="Amiri" pitchFamily="2" charset="-78"/>
               </a:rPr>
               <a:t> ___ </a:t>
             </a:r>
@@ -30660,9 +30068,8 @@
                 <a:solidFill>
                   <a:srgbClr val="1B3B6F"/>
                 </a:solidFill>
-                <a:latin typeface="Amiri" pitchFamily="34" charset="0"/>
-                <a:ea typeface="Amiri" pitchFamily="34" charset="-122"/>
-                <a:cs typeface="Amiri" pitchFamily="34" charset="-120"/>
+                <a:latin typeface="Amiri" pitchFamily="2" charset="-78"/>
+                <a:cs typeface="Amiri" pitchFamily="2" charset="-78"/>
               </a:rPr>
               <a:t>الأَجْيَالَ عَلَى الاسْتِخْدَامِ المَسْؤُولِ</a:t>
             </a:r>
@@ -30675,8 +30082,7 @@
                   <a:srgbClr val="1B3B6F"/>
                 </a:solidFill>
                 <a:latin typeface="Calibri" pitchFamily="34" charset="0"/>
-                <a:ea typeface="Calibri" pitchFamily="34" charset="-122"/>
-                <a:cs typeface="Calibri" pitchFamily="34" charset="-120"/>
+                <a:cs typeface="Amiri" pitchFamily="2" charset="-78"/>
               </a:rPr>
               <a:t>.</a:t>
             </a:r>
@@ -30739,8 +30145,7 @@
                   <a:srgbClr val="1B3B6F"/>
                 </a:solidFill>
                 <a:latin typeface="Calibri" pitchFamily="34" charset="0"/>
-                <a:ea typeface="Calibri" pitchFamily="34" charset="-122"/>
-                <a:cs typeface="Calibri" pitchFamily="34" charset="-120"/>
+                <a:cs typeface="Amiri" pitchFamily="2" charset="-78"/>
               </a:rPr>
               <a:t>A</a:t>
             </a:r>
@@ -30777,9 +30182,8 @@
                 <a:solidFill>
                   <a:srgbClr val="1F2A37"/>
                 </a:solidFill>
-                <a:latin typeface="Amiri" pitchFamily="34" charset="0"/>
-                <a:ea typeface="Amiri" pitchFamily="34" charset="-122"/>
-                <a:cs typeface="Amiri" pitchFamily="34" charset="-120"/>
+                <a:latin typeface="Amiri" pitchFamily="2" charset="-78"/>
+                <a:cs typeface="Amiri" pitchFamily="2" charset="-78"/>
               </a:rPr>
               <a:t>نُرَبِّيَ</a:t>
             </a:r>
@@ -30842,8 +30246,7 @@
                   <a:srgbClr val="1B3B6F"/>
                 </a:solidFill>
                 <a:latin typeface="Calibri" pitchFamily="34" charset="0"/>
-                <a:ea typeface="Calibri" pitchFamily="34" charset="-122"/>
-                <a:cs typeface="Calibri" pitchFamily="34" charset="-120"/>
+                <a:cs typeface="Amiri" pitchFamily="2" charset="-78"/>
               </a:rPr>
               <a:t>B</a:t>
             </a:r>
@@ -30880,9 +30283,8 @@
                 <a:solidFill>
                   <a:srgbClr val="1F2A37"/>
                 </a:solidFill>
-                <a:latin typeface="Amiri" pitchFamily="34" charset="0"/>
-                <a:ea typeface="Amiri" pitchFamily="34" charset="-122"/>
-                <a:cs typeface="Amiri" pitchFamily="34" charset="-120"/>
+                <a:latin typeface="Amiri" pitchFamily="2" charset="-78"/>
+                <a:cs typeface="Amiri" pitchFamily="2" charset="-78"/>
               </a:rPr>
               <a:t>نُرَبِّي</a:t>
             </a:r>
@@ -30945,8 +30347,7 @@
                   <a:srgbClr val="1B3B6F"/>
                 </a:solidFill>
                 <a:latin typeface="Calibri" pitchFamily="34" charset="0"/>
-                <a:ea typeface="Calibri" pitchFamily="34" charset="-122"/>
-                <a:cs typeface="Calibri" pitchFamily="34" charset="-120"/>
+                <a:cs typeface="Amiri" pitchFamily="2" charset="-78"/>
               </a:rPr>
               <a:t>C</a:t>
             </a:r>
@@ -30983,9 +30384,8 @@
                 <a:solidFill>
                   <a:srgbClr val="1F2A37"/>
                 </a:solidFill>
-                <a:latin typeface="Amiri" pitchFamily="34" charset="0"/>
-                <a:ea typeface="Amiri" pitchFamily="34" charset="-122"/>
-                <a:cs typeface="Amiri" pitchFamily="34" charset="-120"/>
+                <a:latin typeface="Amiri" pitchFamily="2" charset="-78"/>
+                <a:cs typeface="Amiri" pitchFamily="2" charset="-78"/>
               </a:rPr>
               <a:t>رَبَّيْنَا</a:t>
             </a:r>
@@ -31057,8 +30457,7 @@
                   <a:srgbClr val="0E7C86"/>
                 </a:solidFill>
                 <a:latin typeface="Calibri" pitchFamily="34" charset="0"/>
-                <a:ea typeface="Calibri" pitchFamily="34" charset="-122"/>
-                <a:cs typeface="Calibri" pitchFamily="34" charset="-120"/>
+                <a:cs typeface="Amiri" pitchFamily="2" charset="-78"/>
               </a:rPr>
               <a:t>HOW TO ANSWER</a:t>
             </a:r>
@@ -31096,8 +30495,7 @@
                   <a:srgbClr val="1F2A37"/>
                 </a:solidFill>
                 <a:latin typeface="Calibri" pitchFamily="34" charset="0"/>
-                <a:ea typeface="Calibri" pitchFamily="34" charset="-122"/>
-                <a:cs typeface="Calibri" pitchFamily="34" charset="-120"/>
+                <a:cs typeface="Amiri" pitchFamily="2" charset="-78"/>
               </a:rPr>
               <a:t>Work on your own in silence.</a:t>
             </a:r>
@@ -31113,8 +30511,7 @@
                   <a:srgbClr val="1F2A37"/>
                 </a:solidFill>
                 <a:latin typeface="Calibri" pitchFamily="34" charset="0"/>
-                <a:ea typeface="Calibri" pitchFamily="34" charset="-122"/>
-                <a:cs typeface="Calibri" pitchFamily="34" charset="-120"/>
+                <a:cs typeface="Amiri" pitchFamily="2" charset="-78"/>
               </a:rPr>
               <a:t>When the timer ends, type in the chat:</a:t>
             </a:r>
@@ -31152,8 +30549,7 @@
                   <a:srgbClr val="1B3B6F"/>
                 </a:solidFill>
                 <a:latin typeface="Consolas" pitchFamily="34" charset="0"/>
-                <a:ea typeface="Consolas" pitchFamily="34" charset="-122"/>
-                <a:cs typeface="Consolas" pitchFamily="34" charset="-120"/>
+                <a:cs typeface="Amiri" pitchFamily="2" charset="-78"/>
               </a:rPr>
               <a:t>1_  2_  3_  4_  5_</a:t>
             </a:r>
@@ -31191,8 +30587,7 @@
                   <a:srgbClr val="0E7C86"/>
                 </a:solidFill>
                 <a:latin typeface="Calibri" pitchFamily="34" charset="0"/>
-                <a:ea typeface="Calibri" pitchFamily="34" charset="-122"/>
-                <a:cs typeface="Calibri" pitchFamily="34" charset="-120"/>
+                <a:cs typeface="Amiri" pitchFamily="2" charset="-78"/>
               </a:rPr>
               <a:t>⏱  5 : 00</a:t>
             </a:r>
@@ -31230,8 +30625,7 @@
                   <a:srgbClr val="8A93A0"/>
                 </a:solidFill>
                 <a:latin typeface="Calibri" pitchFamily="34" charset="0"/>
-                <a:ea typeface="Calibri" pitchFamily="34" charset="-122"/>
-                <a:cs typeface="Calibri" pitchFamily="34" charset="-120"/>
+                <a:cs typeface="Amiri" pitchFamily="2" charset="-78"/>
               </a:rPr>
               <a:t>4 / 25</a:t>
             </a:r>
@@ -31325,9 +30719,8 @@
                 <a:solidFill>
                   <a:srgbClr val="D4AF37"/>
                 </a:solidFill>
-                <a:latin typeface="Amiri" pitchFamily="34" charset="0"/>
-                <a:ea typeface="Amiri" pitchFamily="34" charset="-122"/>
-                <a:cs typeface="Amiri" pitchFamily="34" charset="-120"/>
+                <a:latin typeface="Amiri" pitchFamily="2" charset="-78"/>
+                <a:cs typeface="Amiri" pitchFamily="2" charset="-78"/>
               </a:rPr>
               <a:t>م</a:t>
             </a:r>
@@ -31365,8 +30758,7 @@
                   <a:srgbClr val="1B3B6F"/>
                 </a:solidFill>
                 <a:latin typeface="Cambria" pitchFamily="34" charset="0"/>
-                <a:ea typeface="Cambria" pitchFamily="34" charset="-122"/>
-                <a:cs typeface="Cambria" pitchFamily="34" charset="-120"/>
+                <a:cs typeface="Amiri" pitchFamily="2" charset="-78"/>
               </a:rPr>
               <a:t>Al Madina Online School</a:t>
             </a:r>
@@ -31404,8 +30796,7 @@
                   <a:srgbClr val="8A6D1E"/>
                 </a:solidFill>
                 <a:latin typeface="Calibri" pitchFamily="34" charset="0"/>
-                <a:ea typeface="Calibri" pitchFamily="34" charset="-122"/>
-                <a:cs typeface="Calibri" pitchFamily="34" charset="-120"/>
+                <a:cs typeface="Amiri" pitchFamily="2" charset="-78"/>
               </a:rPr>
               <a:t>ARABIC DEPARTMENT · MIFTAH ARABIC · IGCSE 0544</a:t>
             </a:r>
@@ -31470,8 +30861,7 @@
                   <a:srgbClr val="FFFFFF"/>
                 </a:solidFill>
                 <a:latin typeface="Calibri" pitchFamily="34" charset="0"/>
-                <a:ea typeface="Calibri" pitchFamily="34" charset="-122"/>
-                <a:cs typeface="Calibri" pitchFamily="34" charset="-120"/>
+                <a:cs typeface="Amiri" pitchFamily="2" charset="-78"/>
               </a:rPr>
               <a:t>P6-L05 · IGCSE Bridge</a:t>
             </a:r>
@@ -31536,8 +30926,7 @@
                   <a:srgbClr val="FFFFFF"/>
                 </a:solidFill>
                 <a:latin typeface="Calibri" pitchFamily="34" charset="0"/>
-                <a:ea typeface="Calibri" pitchFamily="34" charset="-122"/>
-                <a:cs typeface="Calibri" pitchFamily="34" charset="-120"/>
+                <a:cs typeface="Amiri" pitchFamily="2" charset="-78"/>
               </a:rPr>
               <a:t>DO NOW · 2 MIN</a:t>
             </a:r>
@@ -31575,8 +30964,7 @@
                   <a:srgbClr val="0E7C86"/>
                 </a:solidFill>
                 <a:latin typeface="Calibri" pitchFamily="34" charset="0"/>
-                <a:ea typeface="Calibri" pitchFamily="34" charset="-122"/>
-                <a:cs typeface="Calibri" pitchFamily="34" charset="-120"/>
+                <a:cs typeface="Amiri" pitchFamily="2" charset="-78"/>
               </a:rPr>
               <a:t>DO NOW · ANSWERS AND REASONS</a:t>
             </a:r>
@@ -31614,8 +31002,7 @@
                   <a:srgbClr val="1B3B6F"/>
                 </a:solidFill>
                 <a:latin typeface="Cambria" pitchFamily="34" charset="0"/>
-                <a:ea typeface="Cambria" pitchFamily="34" charset="-122"/>
-                <a:cs typeface="Cambria" pitchFamily="34" charset="-120"/>
+                <a:cs typeface="Amiri" pitchFamily="2" charset="-78"/>
               </a:rPr>
               <a:t>Let’s check — and explain why</a:t>
             </a:r>
@@ -31652,9 +31039,8 @@
                 <a:solidFill>
                   <a:srgbClr val="8A6D1E"/>
                 </a:solidFill>
-                <a:latin typeface="Amiri" pitchFamily="34" charset="0"/>
-                <a:ea typeface="Amiri" pitchFamily="34" charset="-122"/>
-                <a:cs typeface="Amiri" pitchFamily="34" charset="-120"/>
+                <a:latin typeface="Amiri" pitchFamily="2" charset="-78"/>
+                <a:cs typeface="Amiri" pitchFamily="2" charset="-78"/>
               </a:rPr>
               <a:t>الإِجَابَاتُ وَالتَّعْلِيلُ</a:t>
             </a:r>
@@ -31692,8 +31078,7 @@
                   <a:srgbClr val="8A93A0"/>
                 </a:solidFill>
                 <a:latin typeface="Calibri" pitchFamily="34" charset="0"/>
-                <a:ea typeface="Calibri" pitchFamily="34" charset="-122"/>
-                <a:cs typeface="Calibri" pitchFamily="34" charset="-120"/>
+                <a:cs typeface="Amiri" pitchFamily="2" charset="-78"/>
               </a:rPr>
               <a:t>Miftah Arabic · Progression P6 · IGCSE Bridge · P6-L05</a:t>
             </a:r>
@@ -31790,8 +31175,7 @@
                   <a:srgbClr val="FFFFFF"/>
                 </a:solidFill>
                 <a:latin typeface="Calibri" pitchFamily="34" charset="0"/>
-                <a:ea typeface="Calibri" pitchFamily="34" charset="-122"/>
-                <a:cs typeface="Calibri" pitchFamily="34" charset="-120"/>
+                <a:cs typeface="Amiri" pitchFamily="2" charset="-78"/>
               </a:rPr>
               <a:t>1</a:t>
             </a:r>
@@ -31829,8 +31213,7 @@
                   <a:srgbClr val="1B3B6F"/>
                 </a:solidFill>
                 <a:latin typeface="Calibri" pitchFamily="34" charset="0"/>
-                <a:ea typeface="Calibri" pitchFamily="34" charset="-122"/>
-                <a:cs typeface="Calibri" pitchFamily="34" charset="-120"/>
+                <a:cs typeface="Amiri" pitchFamily="2" charset="-78"/>
               </a:rPr>
               <a:t>What does </a:t>
             </a:r>
@@ -31842,9 +31225,8 @@
                 <a:solidFill>
                   <a:srgbClr val="1B3B6F"/>
                 </a:solidFill>
-                <a:latin typeface="Amiri" pitchFamily="34" charset="0"/>
-                <a:ea typeface="Amiri" pitchFamily="34" charset="-122"/>
-                <a:cs typeface="Amiri" pitchFamily="34" charset="-120"/>
+                <a:latin typeface="Amiri" pitchFamily="2" charset="-78"/>
+                <a:cs typeface="Amiri" pitchFamily="2" charset="-78"/>
               </a:rPr>
               <a:t>هَيْكَلُ المَقَالِ</a:t>
             </a:r>
@@ -31857,8 +31239,7 @@
                   <a:srgbClr val="1B3B6F"/>
                 </a:solidFill>
                 <a:latin typeface="Calibri" pitchFamily="34" charset="0"/>
-                <a:ea typeface="Calibri" pitchFamily="34" charset="-122"/>
-                <a:cs typeface="Calibri" pitchFamily="34" charset="-120"/>
+                <a:cs typeface="Amiri" pitchFamily="2" charset="-78"/>
               </a:rPr>
               <a:t> mean?</a:t>
             </a:r>
@@ -31921,8 +31302,7 @@
                   <a:srgbClr val="1B3B6F"/>
                 </a:solidFill>
                 <a:latin typeface="Calibri" pitchFamily="34" charset="0"/>
-                <a:ea typeface="Calibri" pitchFamily="34" charset="-122"/>
-                <a:cs typeface="Calibri" pitchFamily="34" charset="-120"/>
+                <a:cs typeface="Amiri" pitchFamily="2" charset="-78"/>
               </a:rPr>
               <a:t>A</a:t>
             </a:r>
@@ -31960,8 +31340,7 @@
                   <a:srgbClr val="9AA1AB"/>
                 </a:solidFill>
                 <a:latin typeface="Calibri" pitchFamily="34" charset="0"/>
-                <a:ea typeface="Calibri" pitchFamily="34" charset="-122"/>
-                <a:cs typeface="Calibri" pitchFamily="34" charset="-120"/>
+                <a:cs typeface="Amiri" pitchFamily="2" charset="-78"/>
               </a:rPr>
               <a:t>essay title</a:t>
             </a:r>
@@ -32051,8 +31430,7 @@
                   <a:srgbClr val="FFFFFF"/>
                 </a:solidFill>
                 <a:latin typeface="Calibri" pitchFamily="34" charset="0"/>
-                <a:ea typeface="Calibri" pitchFamily="34" charset="-122"/>
-                <a:cs typeface="Calibri" pitchFamily="34" charset="-120"/>
+                <a:cs typeface="Amiri" pitchFamily="2" charset="-78"/>
               </a:rPr>
               <a:t>B</a:t>
             </a:r>
@@ -32090,8 +31468,7 @@
                   <a:srgbClr val="1F2A37"/>
                 </a:solidFill>
                 <a:latin typeface="Calibri" pitchFamily="34" charset="0"/>
-                <a:ea typeface="Calibri" pitchFamily="34" charset="-122"/>
-                <a:cs typeface="Calibri" pitchFamily="34" charset="-120"/>
+                <a:cs typeface="Amiri" pitchFamily="2" charset="-78"/>
               </a:rPr>
               <a:t>essay structure</a:t>
             </a:r>
@@ -32154,8 +31531,7 @@
                   <a:srgbClr val="1B3B6F"/>
                 </a:solidFill>
                 <a:latin typeface="Calibri" pitchFamily="34" charset="0"/>
-                <a:ea typeface="Calibri" pitchFamily="34" charset="-122"/>
-                <a:cs typeface="Calibri" pitchFamily="34" charset="-120"/>
+                <a:cs typeface="Amiri" pitchFamily="2" charset="-78"/>
               </a:rPr>
               <a:t>C</a:t>
             </a:r>
@@ -32193,8 +31569,7 @@
                   <a:srgbClr val="9AA1AB"/>
                 </a:solidFill>
                 <a:latin typeface="Calibri" pitchFamily="34" charset="0"/>
-                <a:ea typeface="Calibri" pitchFamily="34" charset="-122"/>
-                <a:cs typeface="Calibri" pitchFamily="34" charset="-120"/>
+                <a:cs typeface="Amiri" pitchFamily="2" charset="-78"/>
               </a:rPr>
               <a:t>essay length</a:t>
             </a:r>
@@ -32232,8 +31607,7 @@
                   <a:srgbClr val="8A6D1E"/>
                 </a:solidFill>
                 <a:latin typeface="Calibri" pitchFamily="34" charset="0"/>
-                <a:ea typeface="Calibri" pitchFamily="34" charset="-122"/>
-                <a:cs typeface="Calibri" pitchFamily="34" charset="-120"/>
+                <a:cs typeface="Amiri" pitchFamily="2" charset="-78"/>
               </a:rPr>
               <a:t>Prepared at home (P6-L04).</a:t>
             </a:r>
@@ -32330,8 +31704,7 @@
                   <a:srgbClr val="FFFFFF"/>
                 </a:solidFill>
                 <a:latin typeface="Calibri" pitchFamily="34" charset="0"/>
-                <a:ea typeface="Calibri" pitchFamily="34" charset="-122"/>
-                <a:cs typeface="Calibri" pitchFamily="34" charset="-120"/>
+                <a:cs typeface="Amiri" pitchFamily="2" charset="-78"/>
               </a:rPr>
               <a:t>2</a:t>
             </a:r>
@@ -32369,8 +31742,7 @@
                   <a:srgbClr val="1B3B6F"/>
                 </a:solidFill>
                 <a:latin typeface="Calibri" pitchFamily="34" charset="0"/>
-                <a:ea typeface="Calibri" pitchFamily="34" charset="-122"/>
-                <a:cs typeface="Calibri" pitchFamily="34" charset="-120"/>
+                <a:cs typeface="Amiri" pitchFamily="2" charset="-78"/>
               </a:rPr>
               <a:t>What does </a:t>
             </a:r>
@@ -32382,9 +31754,8 @@
                 <a:solidFill>
                   <a:srgbClr val="1B3B6F"/>
                 </a:solidFill>
-                <a:latin typeface="Amiri" pitchFamily="34" charset="0"/>
-                <a:ea typeface="Amiri" pitchFamily="34" charset="-122"/>
-                <a:cs typeface="Amiri" pitchFamily="34" charset="-120"/>
+                <a:latin typeface="Amiri" pitchFamily="2" charset="-78"/>
+                <a:cs typeface="Amiri" pitchFamily="2" charset="-78"/>
               </a:rPr>
               <a:t>التَّنَوُّعُ المَعْجَمِيُّ</a:t>
             </a:r>
@@ -32397,8 +31768,7 @@
                   <a:srgbClr val="1B3B6F"/>
                 </a:solidFill>
                 <a:latin typeface="Calibri" pitchFamily="34" charset="0"/>
-                <a:ea typeface="Calibri" pitchFamily="34" charset="-122"/>
-                <a:cs typeface="Calibri" pitchFamily="34" charset="-120"/>
+                <a:cs typeface="Amiri" pitchFamily="2" charset="-78"/>
               </a:rPr>
               <a:t> mean?</a:t>
             </a:r>
@@ -32488,8 +31858,7 @@
                   <a:srgbClr val="FFFFFF"/>
                 </a:solidFill>
                 <a:latin typeface="Calibri" pitchFamily="34" charset="0"/>
-                <a:ea typeface="Calibri" pitchFamily="34" charset="-122"/>
-                <a:cs typeface="Calibri" pitchFamily="34" charset="-120"/>
+                <a:cs typeface="Amiri" pitchFamily="2" charset="-78"/>
               </a:rPr>
               <a:t>A</a:t>
             </a:r>
@@ -32527,8 +31896,7 @@
                   <a:srgbClr val="1F2A37"/>
                 </a:solidFill>
                 <a:latin typeface="Calibri" pitchFamily="34" charset="0"/>
-                <a:ea typeface="Calibri" pitchFamily="34" charset="-122"/>
-                <a:cs typeface="Calibri" pitchFamily="34" charset="-120"/>
+                <a:cs typeface="Amiri" pitchFamily="2" charset="-78"/>
               </a:rPr>
               <a:t>lexical variety</a:t>
             </a:r>
@@ -32591,8 +31959,7 @@
                   <a:srgbClr val="1B3B6F"/>
                 </a:solidFill>
                 <a:latin typeface="Calibri" pitchFamily="34" charset="0"/>
-                <a:ea typeface="Calibri" pitchFamily="34" charset="-122"/>
-                <a:cs typeface="Calibri" pitchFamily="34" charset="-120"/>
+                <a:cs typeface="Amiri" pitchFamily="2" charset="-78"/>
               </a:rPr>
               <a:t>B</a:t>
             </a:r>
@@ -32630,8 +31997,7 @@
                   <a:srgbClr val="9AA1AB"/>
                 </a:solidFill>
                 <a:latin typeface="Calibri" pitchFamily="34" charset="0"/>
-                <a:ea typeface="Calibri" pitchFamily="34" charset="-122"/>
-                <a:cs typeface="Calibri" pitchFamily="34" charset="-120"/>
+                <a:cs typeface="Amiri" pitchFamily="2" charset="-78"/>
               </a:rPr>
               <a:t>a dictionary</a:t>
             </a:r>
@@ -32694,8 +32060,7 @@
                   <a:srgbClr val="1B3B6F"/>
                 </a:solidFill>
                 <a:latin typeface="Calibri" pitchFamily="34" charset="0"/>
-                <a:ea typeface="Calibri" pitchFamily="34" charset="-122"/>
-                <a:cs typeface="Calibri" pitchFamily="34" charset="-120"/>
+                <a:cs typeface="Amiri" pitchFamily="2" charset="-78"/>
               </a:rPr>
               <a:t>C</a:t>
             </a:r>
@@ -32733,8 +32098,7 @@
                   <a:srgbClr val="9AA1AB"/>
                 </a:solidFill>
                 <a:latin typeface="Calibri" pitchFamily="34" charset="0"/>
-                <a:ea typeface="Calibri" pitchFamily="34" charset="-122"/>
-                <a:cs typeface="Calibri" pitchFamily="34" charset="-120"/>
+                <a:cs typeface="Amiri" pitchFamily="2" charset="-78"/>
               </a:rPr>
               <a:t>spelling</a:t>
             </a:r>
@@ -32772,8 +32136,7 @@
                   <a:srgbClr val="8A6D1E"/>
                 </a:solidFill>
                 <a:latin typeface="Calibri" pitchFamily="34" charset="0"/>
-                <a:ea typeface="Calibri" pitchFamily="34" charset="-122"/>
-                <a:cs typeface="Calibri" pitchFamily="34" charset="-120"/>
+                <a:cs typeface="Amiri" pitchFamily="2" charset="-78"/>
               </a:rPr>
               <a:t>Prepared at home (P6-L04).</a:t>
             </a:r>
@@ -32870,8 +32233,7 @@
                   <a:srgbClr val="FFFFFF"/>
                 </a:solidFill>
                 <a:latin typeface="Calibri" pitchFamily="34" charset="0"/>
-                <a:ea typeface="Calibri" pitchFamily="34" charset="-122"/>
-                <a:cs typeface="Calibri" pitchFamily="34" charset="-120"/>
+                <a:cs typeface="Amiri" pitchFamily="2" charset="-78"/>
               </a:rPr>
               <a:t>3</a:t>
             </a:r>
@@ -32909,8 +32271,7 @@
                   <a:srgbClr val="1B3B6F"/>
                 </a:solidFill>
                 <a:latin typeface="Calibri" pitchFamily="34" charset="0"/>
-                <a:ea typeface="Calibri" pitchFamily="34" charset="-122"/>
-                <a:cs typeface="Calibri" pitchFamily="34" charset="-120"/>
+                <a:cs typeface="Amiri" pitchFamily="2" charset="-78"/>
               </a:rPr>
               <a:t>What does </a:t>
             </a:r>
@@ -32922,9 +32283,8 @@
                 <a:solidFill>
                   <a:srgbClr val="1B3B6F"/>
                 </a:solidFill>
-                <a:latin typeface="Amiri" pitchFamily="34" charset="0"/>
-                <a:ea typeface="Amiri" pitchFamily="34" charset="-122"/>
-                <a:cs typeface="Amiri" pitchFamily="34" charset="-120"/>
+                <a:latin typeface="Amiri" pitchFamily="2" charset="-78"/>
+                <a:cs typeface="Amiri" pitchFamily="2" charset="-78"/>
               </a:rPr>
               <a:t>الدِّقَّةُ تَحْتَ ضَغْطِ الوَقْتِ</a:t>
             </a:r>
@@ -32937,8 +32297,7 @@
                   <a:srgbClr val="1B3B6F"/>
                 </a:solidFill>
                 <a:latin typeface="Calibri" pitchFamily="34" charset="0"/>
-                <a:ea typeface="Calibri" pitchFamily="34" charset="-122"/>
-                <a:cs typeface="Calibri" pitchFamily="34" charset="-120"/>
+                <a:cs typeface="Amiri" pitchFamily="2" charset="-78"/>
               </a:rPr>
               <a:t> mean?</a:t>
             </a:r>
@@ -33001,8 +32360,7 @@
                   <a:srgbClr val="1B3B6F"/>
                 </a:solidFill>
                 <a:latin typeface="Calibri" pitchFamily="34" charset="0"/>
-                <a:ea typeface="Calibri" pitchFamily="34" charset="-122"/>
-                <a:cs typeface="Calibri" pitchFamily="34" charset="-120"/>
+                <a:cs typeface="Amiri" pitchFamily="2" charset="-78"/>
               </a:rPr>
               <a:t>A</a:t>
             </a:r>
@@ -33040,8 +32398,7 @@
                   <a:srgbClr val="9AA1AB"/>
                 </a:solidFill>
                 <a:latin typeface="Calibri" pitchFamily="34" charset="0"/>
-                <a:ea typeface="Calibri" pitchFamily="34" charset="-122"/>
-                <a:cs typeface="Calibri" pitchFamily="34" charset="-120"/>
+                <a:cs typeface="Amiri" pitchFamily="2" charset="-78"/>
               </a:rPr>
               <a:t>a time limit</a:t>
             </a:r>
@@ -33104,8 +32461,7 @@
                   <a:srgbClr val="1B3B6F"/>
                 </a:solidFill>
                 <a:latin typeface="Calibri" pitchFamily="34" charset="0"/>
-                <a:ea typeface="Calibri" pitchFamily="34" charset="-122"/>
-                <a:cs typeface="Calibri" pitchFamily="34" charset="-120"/>
+                <a:cs typeface="Amiri" pitchFamily="2" charset="-78"/>
               </a:rPr>
               <a:t>B</a:t>
             </a:r>
@@ -33143,8 +32499,7 @@
                   <a:srgbClr val="9AA1AB"/>
                 </a:solidFill>
                 <a:latin typeface="Calibri" pitchFamily="34" charset="0"/>
-                <a:ea typeface="Calibri" pitchFamily="34" charset="-122"/>
-                <a:cs typeface="Calibri" pitchFamily="34" charset="-120"/>
+                <a:cs typeface="Amiri" pitchFamily="2" charset="-78"/>
               </a:rPr>
               <a:t>pressure at work</a:t>
             </a:r>
@@ -33234,8 +32589,7 @@
                   <a:srgbClr val="FFFFFF"/>
                 </a:solidFill>
                 <a:latin typeface="Calibri" pitchFamily="34" charset="0"/>
-                <a:ea typeface="Calibri" pitchFamily="34" charset="-122"/>
-                <a:cs typeface="Calibri" pitchFamily="34" charset="-120"/>
+                <a:cs typeface="Amiri" pitchFamily="2" charset="-78"/>
               </a:rPr>
               <a:t>C</a:t>
             </a:r>
@@ -33273,8 +32627,7 @@
                   <a:srgbClr val="1F2A37"/>
                 </a:solidFill>
                 <a:latin typeface="Calibri" pitchFamily="34" charset="0"/>
-                <a:ea typeface="Calibri" pitchFamily="34" charset="-122"/>
-                <a:cs typeface="Calibri" pitchFamily="34" charset="-120"/>
+                <a:cs typeface="Amiri" pitchFamily="2" charset="-78"/>
               </a:rPr>
               <a:t>accuracy under time pressure</a:t>
             </a:r>
@@ -33312,8 +32665,7 @@
                   <a:srgbClr val="8A6D1E"/>
                 </a:solidFill>
                 <a:latin typeface="Calibri" pitchFamily="34" charset="0"/>
-                <a:ea typeface="Calibri" pitchFamily="34" charset="-122"/>
-                <a:cs typeface="Calibri" pitchFamily="34" charset="-120"/>
+                <a:cs typeface="Amiri" pitchFamily="2" charset="-78"/>
               </a:rPr>
               <a:t>Prepared at home (P6-L04).</a:t>
             </a:r>
@@ -33410,8 +32762,7 @@
                   <a:srgbClr val="FFFFFF"/>
                 </a:solidFill>
                 <a:latin typeface="Calibri" pitchFamily="34" charset="0"/>
-                <a:ea typeface="Calibri" pitchFamily="34" charset="-122"/>
-                <a:cs typeface="Calibri" pitchFamily="34" charset="-120"/>
+                <a:cs typeface="Amiri" pitchFamily="2" charset="-78"/>
               </a:rPr>
               <a:t>4</a:t>
             </a:r>
@@ -33449,8 +32800,7 @@
                   <a:srgbClr val="1B3B6F"/>
                 </a:solidFill>
                 <a:latin typeface="Calibri" pitchFamily="34" charset="0"/>
-                <a:ea typeface="Calibri" pitchFamily="34" charset="-122"/>
-                <a:cs typeface="Calibri" pitchFamily="34" charset="-120"/>
+                <a:cs typeface="Amiri" pitchFamily="2" charset="-78"/>
               </a:rPr>
               <a:t>Which opens the conclusion?</a:t>
             </a:r>
@@ -33513,8 +32863,7 @@
                   <a:srgbClr val="1B3B6F"/>
                 </a:solidFill>
                 <a:latin typeface="Calibri" pitchFamily="34" charset="0"/>
-                <a:ea typeface="Calibri" pitchFamily="34" charset="-122"/>
-                <a:cs typeface="Calibri" pitchFamily="34" charset="-120"/>
+                <a:cs typeface="Amiri" pitchFamily="2" charset="-78"/>
               </a:rPr>
               <a:t>A</a:t>
             </a:r>
@@ -33551,9 +32900,8 @@
                 <a:solidFill>
                   <a:srgbClr val="9AA1AB"/>
                 </a:solidFill>
-                <a:latin typeface="Amiri" pitchFamily="34" charset="0"/>
-                <a:ea typeface="Amiri" pitchFamily="34" charset="-122"/>
-                <a:cs typeface="Amiri" pitchFamily="34" charset="-120"/>
+                <a:latin typeface="Amiri" pitchFamily="2" charset="-78"/>
+                <a:cs typeface="Amiri" pitchFamily="2" charset="-78"/>
               </a:rPr>
               <a:t>صَحِيحٌ أَنَّ</a:t>
             </a:r>
@@ -33616,8 +32964,7 @@
                   <a:srgbClr val="1B3B6F"/>
                 </a:solidFill>
                 <a:latin typeface="Calibri" pitchFamily="34" charset="0"/>
-                <a:ea typeface="Calibri" pitchFamily="34" charset="-122"/>
-                <a:cs typeface="Calibri" pitchFamily="34" charset="-120"/>
+                <a:cs typeface="Amiri" pitchFamily="2" charset="-78"/>
               </a:rPr>
               <a:t>B</a:t>
             </a:r>
@@ -33654,9 +33001,8 @@
                 <a:solidFill>
                   <a:srgbClr val="9AA1AB"/>
                 </a:solidFill>
-                <a:latin typeface="Amiri" pitchFamily="34" charset="0"/>
-                <a:ea typeface="Amiri" pitchFamily="34" charset="-122"/>
-                <a:cs typeface="Amiri" pitchFamily="34" charset="-120"/>
+                <a:latin typeface="Amiri" pitchFamily="2" charset="-78"/>
+                <a:cs typeface="Amiri" pitchFamily="2" charset="-78"/>
               </a:rPr>
               <a:t>أَكَّدَ البَاحِثُونَ أَنَّ</a:t>
             </a:r>
@@ -33746,8 +33092,7 @@
                   <a:srgbClr val="FFFFFF"/>
                 </a:solidFill>
                 <a:latin typeface="Calibri" pitchFamily="34" charset="0"/>
-                <a:ea typeface="Calibri" pitchFamily="34" charset="-122"/>
-                <a:cs typeface="Calibri" pitchFamily="34" charset="-120"/>
+                <a:cs typeface="Amiri" pitchFamily="2" charset="-78"/>
               </a:rPr>
               <a:t>C</a:t>
             </a:r>
@@ -33784,9 +33129,8 @@
                 <a:solidFill>
                   <a:srgbClr val="1F2A37"/>
                 </a:solidFill>
-                <a:latin typeface="Amiri" pitchFamily="34" charset="0"/>
-                <a:ea typeface="Amiri" pitchFamily="34" charset="-122"/>
-                <a:cs typeface="Amiri" pitchFamily="34" charset="-120"/>
+                <a:latin typeface="Amiri" pitchFamily="2" charset="-78"/>
+                <a:cs typeface="Amiri" pitchFamily="2" charset="-78"/>
               </a:rPr>
               <a:t>وَبِنَاءً عَلَى مَا سَبَقَ</a:t>
             </a:r>
@@ -33824,8 +33168,7 @@
                   <a:srgbClr val="8A6D1E"/>
                 </a:solidFill>
                 <a:latin typeface="Calibri" pitchFamily="34" charset="0"/>
-                <a:ea typeface="Calibri" pitchFamily="34" charset="-122"/>
-                <a:cs typeface="Calibri" pitchFamily="34" charset="-120"/>
+                <a:cs typeface="Amiri" pitchFamily="2" charset="-78"/>
               </a:rPr>
               <a:t>P5-L07: the formal conclusion connector.</a:t>
             </a:r>
@@ -33922,8 +33265,7 @@
                   <a:srgbClr val="FFFFFF"/>
                 </a:solidFill>
                 <a:latin typeface="Calibri" pitchFamily="34" charset="0"/>
-                <a:ea typeface="Calibri" pitchFamily="34" charset="-122"/>
-                <a:cs typeface="Calibri" pitchFamily="34" charset="-120"/>
+                <a:cs typeface="Amiri" pitchFamily="2" charset="-78"/>
               </a:rPr>
               <a:t>5</a:t>
             </a:r>
@@ -33961,8 +33303,7 @@
                   <a:srgbClr val="1B3B6F"/>
                 </a:solidFill>
                 <a:latin typeface="Calibri" pitchFamily="34" charset="0"/>
-                <a:ea typeface="Calibri" pitchFamily="34" charset="-122"/>
-                <a:cs typeface="Calibri" pitchFamily="34" charset="-120"/>
+                <a:cs typeface="Amiri" pitchFamily="2" charset="-78"/>
               </a:rPr>
               <a:t>Complete: </a:t>
             </a:r>
@@ -33974,9 +33315,8 @@
                 <a:solidFill>
                   <a:srgbClr val="1B3B6F"/>
                 </a:solidFill>
-                <a:latin typeface="Amiri" pitchFamily="34" charset="0"/>
-                <a:ea typeface="Amiri" pitchFamily="34" charset="-122"/>
-                <a:cs typeface="Amiri" pitchFamily="34" charset="-120"/>
+                <a:latin typeface="Amiri" pitchFamily="2" charset="-78"/>
+                <a:cs typeface="Amiri" pitchFamily="2" charset="-78"/>
               </a:rPr>
               <a:t>يَتَطَلَّبُ الأَمْرُ أَنْ</a:t>
             </a:r>
@@ -33989,8 +33329,7 @@
                   <a:srgbClr val="1B3B6F"/>
                 </a:solidFill>
                 <a:latin typeface="Calibri" pitchFamily="34" charset="0"/>
-                <a:ea typeface="Calibri" pitchFamily="34" charset="-122"/>
-                <a:cs typeface="Calibri" pitchFamily="34" charset="-120"/>
+                <a:cs typeface="Amiri" pitchFamily="2" charset="-78"/>
               </a:rPr>
               <a:t> ___ </a:t>
             </a:r>
@@ -34002,9 +33341,8 @@
                 <a:solidFill>
                   <a:srgbClr val="1B3B6F"/>
                 </a:solidFill>
-                <a:latin typeface="Amiri" pitchFamily="34" charset="0"/>
-                <a:ea typeface="Amiri" pitchFamily="34" charset="-122"/>
-                <a:cs typeface="Amiri" pitchFamily="34" charset="-120"/>
+                <a:latin typeface="Amiri" pitchFamily="2" charset="-78"/>
+                <a:cs typeface="Amiri" pitchFamily="2" charset="-78"/>
               </a:rPr>
               <a:t>الأَجْيَالَ عَلَى الاسْتِخْدَامِ المَسْؤُولِ</a:t>
             </a:r>
@@ -34017,8 +33355,7 @@
                   <a:srgbClr val="1B3B6F"/>
                 </a:solidFill>
                 <a:latin typeface="Calibri" pitchFamily="34" charset="0"/>
-                <a:ea typeface="Calibri" pitchFamily="34" charset="-122"/>
-                <a:cs typeface="Calibri" pitchFamily="34" charset="-120"/>
+                <a:cs typeface="Amiri" pitchFamily="2" charset="-78"/>
               </a:rPr>
               <a:t>.</a:t>
             </a:r>
@@ -34108,8 +33445,7 @@
                   <a:srgbClr val="FFFFFF"/>
                 </a:solidFill>
                 <a:latin typeface="Calibri" pitchFamily="34" charset="0"/>
-                <a:ea typeface="Calibri" pitchFamily="34" charset="-122"/>
-                <a:cs typeface="Calibri" pitchFamily="34" charset="-120"/>
+                <a:cs typeface="Amiri" pitchFamily="2" charset="-78"/>
               </a:rPr>
               <a:t>A</a:t>
             </a:r>
@@ -34146,9 +33482,8 @@
                 <a:solidFill>
                   <a:srgbClr val="1F2A37"/>
                 </a:solidFill>
-                <a:latin typeface="Amiri" pitchFamily="34" charset="0"/>
-                <a:ea typeface="Amiri" pitchFamily="34" charset="-122"/>
-                <a:cs typeface="Amiri" pitchFamily="34" charset="-120"/>
+                <a:latin typeface="Amiri" pitchFamily="2" charset="-78"/>
+                <a:cs typeface="Amiri" pitchFamily="2" charset="-78"/>
               </a:rPr>
               <a:t>نُرَبِّيَ</a:t>
             </a:r>
@@ -34211,8 +33546,7 @@
                   <a:srgbClr val="1B3B6F"/>
                 </a:solidFill>
                 <a:latin typeface="Calibri" pitchFamily="34" charset="0"/>
-                <a:ea typeface="Calibri" pitchFamily="34" charset="-122"/>
-                <a:cs typeface="Calibri" pitchFamily="34" charset="-120"/>
+                <a:cs typeface="Amiri" pitchFamily="2" charset="-78"/>
               </a:rPr>
               <a:t>B</a:t>
             </a:r>
@@ -34249,9 +33583,8 @@
                 <a:solidFill>
                   <a:srgbClr val="9AA1AB"/>
                 </a:solidFill>
-                <a:latin typeface="Amiri" pitchFamily="34" charset="0"/>
-                <a:ea typeface="Amiri" pitchFamily="34" charset="-122"/>
-                <a:cs typeface="Amiri" pitchFamily="34" charset="-120"/>
+                <a:latin typeface="Amiri" pitchFamily="2" charset="-78"/>
+                <a:cs typeface="Amiri" pitchFamily="2" charset="-78"/>
               </a:rPr>
               <a:t>نُرَبِّي</a:t>
             </a:r>
@@ -34314,8 +33647,7 @@
                   <a:srgbClr val="1B3B6F"/>
                 </a:solidFill>
                 <a:latin typeface="Calibri" pitchFamily="34" charset="0"/>
-                <a:ea typeface="Calibri" pitchFamily="34" charset="-122"/>
-                <a:cs typeface="Calibri" pitchFamily="34" charset="-120"/>
+                <a:cs typeface="Amiri" pitchFamily="2" charset="-78"/>
               </a:rPr>
               <a:t>C</a:t>
             </a:r>
@@ -34352,9 +33684,8 @@
                 <a:solidFill>
                   <a:srgbClr val="9AA1AB"/>
                 </a:solidFill>
-                <a:latin typeface="Amiri" pitchFamily="34" charset="0"/>
-                <a:ea typeface="Amiri" pitchFamily="34" charset="-122"/>
-                <a:cs typeface="Amiri" pitchFamily="34" charset="-120"/>
+                <a:latin typeface="Amiri" pitchFamily="2" charset="-78"/>
+                <a:cs typeface="Amiri" pitchFamily="2" charset="-78"/>
               </a:rPr>
               <a:t>رَبَّيْنَا</a:t>
             </a:r>
@@ -34392,8 +33723,7 @@
                   <a:srgbClr val="8A6D1E"/>
                 </a:solidFill>
                 <a:latin typeface="Calibri" pitchFamily="34" charset="0"/>
-                <a:ea typeface="Calibri" pitchFamily="34" charset="-122"/>
-                <a:cs typeface="Calibri" pitchFamily="34" charset="-120"/>
+                <a:cs typeface="Amiri" pitchFamily="2" charset="-78"/>
               </a:rPr>
               <a:t>P5: an + -a (hidden in -ī verbs: nurabbiya).</a:t>
             </a:r>
@@ -34465,8 +33795,7 @@
                   <a:srgbClr val="8A6D1E"/>
                 </a:solidFill>
                 <a:latin typeface="Calibri" pitchFamily="34" charset="0"/>
-                <a:ea typeface="Calibri" pitchFamily="34" charset="-122"/>
-                <a:cs typeface="Calibri" pitchFamily="34" charset="-120"/>
+                <a:cs typeface="Amiri" pitchFamily="2" charset="-78"/>
               </a:rPr>
               <a:t>THE KEY IDEA FOR TODAY</a:t>
             </a:r>
@@ -34504,8 +33833,7 @@
                   <a:srgbClr val="1F2A37"/>
                 </a:solidFill>
                 <a:latin typeface="Calibri" pitchFamily="34" charset="0"/>
-                <a:ea typeface="Calibri" pitchFamily="34" charset="-122"/>
-                <a:cs typeface="Calibri" pitchFamily="34" charset="-120"/>
+                <a:cs typeface="Amiri" pitchFamily="2" charset="-78"/>
               </a:rPr>
               <a:t>Q2 is the P5 essay under exam conditions — four minutes of planning buys you the whole architecture.</a:t>
             </a:r>
@@ -34545,9 +33873,8 @@
                 <a:solidFill>
                   <a:srgbClr val="1B3B6F"/>
                 </a:solidFill>
-                <a:latin typeface="Amiri" pitchFamily="34" charset="0"/>
-                <a:ea typeface="Amiri" pitchFamily="34" charset="-122"/>
-                <a:cs typeface="Amiri" pitchFamily="34" charset="-120"/>
+                <a:latin typeface="Amiri" pitchFamily="2" charset="-78"/>
+                <a:cs typeface="Amiri" pitchFamily="2" charset="-78"/>
               </a:rPr>
               <a:t>أُطْرُوحَةٌ ← دَلِيلٌ ← صَحِيحٌ أَنَّ … غَيْرَ أَنَّ ← وَبِنَاءً عَلَى مَا سَبَقَ</a:t>
             </a:r>
@@ -34585,8 +33912,7 @@
                   <a:srgbClr val="8A93A0"/>
                 </a:solidFill>
                 <a:latin typeface="Calibri" pitchFamily="34" charset="0"/>
-                <a:ea typeface="Calibri" pitchFamily="34" charset="-122"/>
-                <a:cs typeface="Calibri" pitchFamily="34" charset="-120"/>
+                <a:cs typeface="Amiri" pitchFamily="2" charset="-78"/>
               </a:rPr>
               <a:t>5 / 25</a:t>
             </a:r>
@@ -34680,9 +34006,8 @@
                 <a:solidFill>
                   <a:srgbClr val="D4AF37"/>
                 </a:solidFill>
-                <a:latin typeface="Amiri" pitchFamily="34" charset="0"/>
-                <a:ea typeface="Amiri" pitchFamily="34" charset="-122"/>
-                <a:cs typeface="Amiri" pitchFamily="34" charset="-120"/>
+                <a:latin typeface="Amiri" pitchFamily="2" charset="-78"/>
+                <a:cs typeface="Amiri" pitchFamily="2" charset="-78"/>
               </a:rPr>
               <a:t>م</a:t>
             </a:r>
@@ -34720,8 +34045,7 @@
                   <a:srgbClr val="1B3B6F"/>
                 </a:solidFill>
                 <a:latin typeface="Cambria" pitchFamily="34" charset="0"/>
-                <a:ea typeface="Cambria" pitchFamily="34" charset="-122"/>
-                <a:cs typeface="Cambria" pitchFamily="34" charset="-120"/>
+                <a:cs typeface="Amiri" pitchFamily="2" charset="-78"/>
               </a:rPr>
               <a:t>Al Madina Online School</a:t>
             </a:r>
@@ -34759,8 +34083,7 @@
                   <a:srgbClr val="8A6D1E"/>
                 </a:solidFill>
                 <a:latin typeface="Calibri" pitchFamily="34" charset="0"/>
-                <a:ea typeface="Calibri" pitchFamily="34" charset="-122"/>
-                <a:cs typeface="Calibri" pitchFamily="34" charset="-120"/>
+                <a:cs typeface="Amiri" pitchFamily="2" charset="-78"/>
               </a:rPr>
               <a:t>ARABIC DEPARTMENT · MIFTAH ARABIC · IGCSE 0544</a:t>
             </a:r>
@@ -34825,8 +34148,7 @@
                   <a:srgbClr val="FFFFFF"/>
                 </a:solidFill>
                 <a:latin typeface="Calibri" pitchFamily="34" charset="0"/>
-                <a:ea typeface="Calibri" pitchFamily="34" charset="-122"/>
-                <a:cs typeface="Calibri" pitchFamily="34" charset="-120"/>
+                <a:cs typeface="Amiri" pitchFamily="2" charset="-78"/>
               </a:rPr>
               <a:t>P6-L05 · IGCSE Bridge</a:t>
             </a:r>
@@ -34891,8 +34213,7 @@
                   <a:srgbClr val="FFFFFF"/>
                 </a:solidFill>
                 <a:latin typeface="Calibri" pitchFamily="34" charset="0"/>
-                <a:ea typeface="Calibri" pitchFamily="34" charset="-122"/>
-                <a:cs typeface="Calibri" pitchFamily="34" charset="-120"/>
+                <a:cs typeface="Amiri" pitchFamily="2" charset="-78"/>
               </a:rPr>
               <a:t>WELCOME · 1 MIN</a:t>
             </a:r>
@@ -34930,8 +34251,7 @@
                   <a:srgbClr val="5A6472"/>
                 </a:solidFill>
                 <a:latin typeface="Calibri" pitchFamily="34" charset="0"/>
-                <a:ea typeface="Calibri" pitchFamily="34" charset="-122"/>
-                <a:cs typeface="Calibri" pitchFamily="34" charset="-120"/>
+                <a:cs typeface="Amiri" pitchFamily="2" charset="-78"/>
               </a:rPr>
               <a:t>LESSON OBJECTIVES</a:t>
             </a:r>
@@ -34969,8 +34289,7 @@
                   <a:srgbClr val="1B3B6F"/>
                 </a:solidFill>
                 <a:latin typeface="Cambria" pitchFamily="34" charset="0"/>
-                <a:ea typeface="Cambria" pitchFamily="34" charset="-122"/>
-                <a:cs typeface="Cambria" pitchFamily="34" charset="-120"/>
+                <a:cs typeface="Amiri" pitchFamily="2" charset="-78"/>
               </a:rPr>
               <a:t>Objectives and success criteria</a:t>
             </a:r>
@@ -35007,9 +34326,8 @@
                 <a:solidFill>
                   <a:srgbClr val="8A6D1E"/>
                 </a:solidFill>
-                <a:latin typeface="Amiri" pitchFamily="34" charset="0"/>
-                <a:ea typeface="Amiri" pitchFamily="34" charset="-122"/>
-                <a:cs typeface="Amiri" pitchFamily="34" charset="-120"/>
+                <a:latin typeface="Amiri" pitchFamily="2" charset="-78"/>
+                <a:cs typeface="Amiri" pitchFamily="2" charset="-78"/>
               </a:rPr>
               <a:t>الأَهْدَافُ وَمَعَايِيرُ النَّجَاحِ</a:t>
             </a:r>
@@ -35047,8 +34365,7 @@
                   <a:srgbClr val="8A93A0"/>
                 </a:solidFill>
                 <a:latin typeface="Calibri" pitchFamily="34" charset="0"/>
-                <a:ea typeface="Calibri" pitchFamily="34" charset="-122"/>
-                <a:cs typeface="Calibri" pitchFamily="34" charset="-120"/>
+                <a:cs typeface="Amiri" pitchFamily="2" charset="-78"/>
               </a:rPr>
               <a:t>Miftah Arabic · Progression P6 · IGCSE Bridge · P6-L05</a:t>
             </a:r>
@@ -35120,8 +34437,7 @@
                   <a:srgbClr val="1B3B6F"/>
                 </a:solidFill>
                 <a:latin typeface="Calibri" pitchFamily="34" charset="0"/>
-                <a:ea typeface="Calibri" pitchFamily="34" charset="-122"/>
-                <a:cs typeface="Calibri" pitchFamily="34" charset="-120"/>
+                <a:cs typeface="Amiri" pitchFamily="2" charset="-78"/>
               </a:rPr>
               <a:t>TODAY YOU WILL</a:t>
             </a:r>
@@ -35158,9 +34474,8 @@
                 <a:solidFill>
                   <a:srgbClr val="8A6D1E"/>
                 </a:solidFill>
-                <a:latin typeface="Amiri" pitchFamily="34" charset="0"/>
-                <a:ea typeface="Amiri" pitchFamily="34" charset="-122"/>
-                <a:cs typeface="Amiri" pitchFamily="34" charset="-120"/>
+                <a:latin typeface="Amiri" pitchFamily="2" charset="-78"/>
+                <a:cs typeface="Amiri" pitchFamily="2" charset="-78"/>
               </a:rPr>
               <a:t>سَتَتَعَلَّمُ اليَوْمَ</a:t>
             </a:r>
@@ -35223,8 +34538,7 @@
                   <a:srgbClr val="D4AF37"/>
                 </a:solidFill>
                 <a:latin typeface="Calibri" pitchFamily="34" charset="0"/>
-                <a:ea typeface="Calibri" pitchFamily="34" charset="-122"/>
-                <a:cs typeface="Calibri" pitchFamily="34" charset="-120"/>
+                <a:cs typeface="Amiri" pitchFamily="2" charset="-78"/>
               </a:rPr>
               <a:t>1</a:t>
             </a:r>
@@ -35262,8 +34576,7 @@
                   <a:srgbClr val="1F2A37"/>
                 </a:solidFill>
                 <a:latin typeface="Calibri" pitchFamily="34" charset="0"/>
-                <a:ea typeface="Calibri" pitchFamily="34" charset="-122"/>
-                <a:cs typeface="Calibri" pitchFamily="34" charset="-120"/>
+                <a:cs typeface="Amiri" pitchFamily="2" charset="-78"/>
               </a:rPr>
               <a:t>Write a full argumentative essay (130–150 words) under timed conditions.</a:t>
             </a:r>
@@ -35326,8 +34639,7 @@
                   <a:srgbClr val="D4AF37"/>
                 </a:solidFill>
                 <a:latin typeface="Calibri" pitchFamily="34" charset="0"/>
-                <a:ea typeface="Calibri" pitchFamily="34" charset="-122"/>
-                <a:cs typeface="Calibri" pitchFamily="34" charset="-120"/>
+                <a:cs typeface="Amiri" pitchFamily="2" charset="-78"/>
               </a:rPr>
               <a:t>2</a:t>
             </a:r>
@@ -35365,8 +34677,7 @@
                   <a:srgbClr val="1F2A37"/>
                 </a:solidFill>
                 <a:latin typeface="Calibri" pitchFamily="34" charset="0"/>
-                <a:ea typeface="Calibri" pitchFamily="34" charset="-122"/>
-                <a:cs typeface="Calibri" pitchFamily="34" charset="-120"/>
+                <a:cs typeface="Amiri" pitchFamily="2" charset="-78"/>
               </a:rPr>
               <a:t>Show the complete architecture: thesis, evidence, concession, refutation, conclusion.</a:t>
             </a:r>
@@ -35429,8 +34740,7 @@
                   <a:srgbClr val="D4AF37"/>
                 </a:solidFill>
                 <a:latin typeface="Calibri" pitchFamily="34" charset="0"/>
-                <a:ea typeface="Calibri" pitchFamily="34" charset="-122"/>
-                <a:cs typeface="Calibri" pitchFamily="34" charset="-120"/>
+                <a:cs typeface="Amiri" pitchFamily="2" charset="-78"/>
               </a:rPr>
               <a:t>3</a:t>
             </a:r>
@@ -35468,8 +34778,7 @@
                   <a:srgbClr val="1F2A37"/>
                 </a:solidFill>
                 <a:latin typeface="Calibri" pitchFamily="34" charset="0"/>
-                <a:ea typeface="Calibri" pitchFamily="34" charset="-122"/>
-                <a:cs typeface="Calibri" pitchFamily="34" charset="-120"/>
+                <a:cs typeface="Amiri" pitchFamily="2" charset="-78"/>
               </a:rPr>
               <a:t>Balance quantity and quality — enough Range without losing Accuracy.</a:t>
             </a:r>
@@ -35532,8 +34841,7 @@
                   <a:srgbClr val="D4AF37"/>
                 </a:solidFill>
                 <a:latin typeface="Calibri" pitchFamily="34" charset="0"/>
-                <a:ea typeface="Calibri" pitchFamily="34" charset="-122"/>
-                <a:cs typeface="Calibri" pitchFamily="34" charset="-120"/>
+                <a:cs typeface="Amiri" pitchFamily="2" charset="-78"/>
               </a:rPr>
               <a:t>4</a:t>
             </a:r>
@@ -35571,8 +34879,7 @@
                   <a:srgbClr val="1F2A37"/>
                 </a:solidFill>
                 <a:latin typeface="Calibri" pitchFamily="34" charset="0"/>
-                <a:ea typeface="Calibri" pitchFamily="34" charset="-122"/>
-                <a:cs typeface="Calibri" pitchFamily="34" charset="-120"/>
+                <a:cs typeface="Amiri" pitchFamily="2" charset="-78"/>
               </a:rPr>
               <a:t>Apply the Q2 mark scheme to identify your writing strengths and weaknesses.</a:t>
             </a:r>
@@ -35664,8 +34971,7 @@
                   <a:srgbClr val="FFFFFF"/>
                 </a:solidFill>
                 <a:latin typeface="Calibri" pitchFamily="34" charset="0"/>
-                <a:ea typeface="Calibri" pitchFamily="34" charset="-122"/>
-                <a:cs typeface="Calibri" pitchFamily="34" charset="-120"/>
+                <a:cs typeface="Amiri" pitchFamily="2" charset="-78"/>
               </a:rPr>
               <a:t>CORE</a:t>
             </a:r>
@@ -35703,8 +35009,7 @@
                   <a:srgbClr val="2E8B57"/>
                 </a:solidFill>
                 <a:latin typeface="Calibri" pitchFamily="34" charset="0"/>
-                <a:ea typeface="Calibri" pitchFamily="34" charset="-122"/>
-                <a:cs typeface="Calibri" pitchFamily="34" charset="-120"/>
+                <a:cs typeface="Amiri" pitchFamily="2" charset="-78"/>
               </a:rPr>
               <a:t>Everyone</a:t>
             </a:r>
@@ -35742,8 +35047,7 @@
                   <a:srgbClr val="2E8B57"/>
                 </a:solidFill>
                 <a:latin typeface="Calibri" pitchFamily="34" charset="0"/>
-                <a:ea typeface="Calibri" pitchFamily="34" charset="-122"/>
-                <a:cs typeface="Calibri" pitchFamily="34" charset="-120"/>
+                <a:cs typeface="Amiri" pitchFamily="2" charset="-78"/>
               </a:rPr>
               <a:t>☐  I can plan the four paragraphs before writing.</a:t>
             </a:r>
@@ -35781,8 +35085,7 @@
                   <a:srgbClr val="2E8B57"/>
                 </a:solidFill>
                 <a:latin typeface="Calibri" pitchFamily="34" charset="0"/>
-                <a:ea typeface="Calibri" pitchFamily="34" charset="-122"/>
-                <a:cs typeface="Calibri" pitchFamily="34" charset="-120"/>
+                <a:cs typeface="Amiri" pitchFamily="2" charset="-78"/>
               </a:rPr>
               <a:t>☐  I can write a thesis and one concession–refutation.</a:t>
             </a:r>
@@ -35874,8 +35177,7 @@
                   <a:srgbClr val="FFFFFF"/>
                 </a:solidFill>
                 <a:latin typeface="Calibri" pitchFamily="34" charset="0"/>
-                <a:ea typeface="Calibri" pitchFamily="34" charset="-122"/>
-                <a:cs typeface="Calibri" pitchFamily="34" charset="-120"/>
+                <a:cs typeface="Amiri" pitchFamily="2" charset="-78"/>
               </a:rPr>
               <a:t>DEVELOP</a:t>
             </a:r>
@@ -35913,8 +35215,7 @@
                   <a:srgbClr val="C9780A"/>
                 </a:solidFill>
                 <a:latin typeface="Calibri" pitchFamily="34" charset="0"/>
-                <a:ea typeface="Calibri" pitchFamily="34" charset="-122"/>
-                <a:cs typeface="Calibri" pitchFamily="34" charset="-120"/>
+                <a:cs typeface="Amiri" pitchFamily="2" charset="-78"/>
               </a:rPr>
               <a:t>Most of us</a:t>
             </a:r>
@@ -35952,8 +35253,7 @@
                   <a:srgbClr val="C9780A"/>
                 </a:solidFill>
                 <a:latin typeface="Calibri" pitchFamily="34" charset="0"/>
-                <a:ea typeface="Calibri" pitchFamily="34" charset="-122"/>
-                <a:cs typeface="Calibri" pitchFamily="34" charset="-120"/>
+                <a:cs typeface="Amiri" pitchFamily="2" charset="-78"/>
               </a:rPr>
               <a:t>☐  I can write 130 words with the full architecture.</a:t>
             </a:r>
@@ -35991,8 +35291,7 @@
                   <a:srgbClr val="C9780A"/>
                 </a:solidFill>
                 <a:latin typeface="Calibri" pitchFamily="34" charset="0"/>
-                <a:ea typeface="Calibri" pitchFamily="34" charset="-122"/>
-                <a:cs typeface="Calibri" pitchFamily="34" charset="-120"/>
+                <a:cs typeface="Amiri" pitchFamily="2" charset="-78"/>
               </a:rPr>
               <a:t>☐  I can close with a connector + a verb in -a.</a:t>
             </a:r>
@@ -36084,8 +35383,7 @@
                   <a:srgbClr val="FFFFFF"/>
                 </a:solidFill>
                 <a:latin typeface="Calibri" pitchFamily="34" charset="0"/>
-                <a:ea typeface="Calibri" pitchFamily="34" charset="-122"/>
-                <a:cs typeface="Calibri" pitchFamily="34" charset="-120"/>
+                <a:cs typeface="Amiri" pitchFamily="2" charset="-78"/>
               </a:rPr>
               <a:t>STRETCH</a:t>
             </a:r>
@@ -36123,8 +35421,7 @@
                   <a:srgbClr val="B83227"/>
                 </a:solidFill>
                 <a:latin typeface="Calibri" pitchFamily="34" charset="0"/>
-                <a:ea typeface="Calibri" pitchFamily="34" charset="-122"/>
-                <a:cs typeface="Calibri" pitchFamily="34" charset="-120"/>
+                <a:cs typeface="Amiri" pitchFamily="2" charset="-78"/>
               </a:rPr>
               <a:t>Aim high</a:t>
             </a:r>
@@ -36162,8 +35459,7 @@
                   <a:srgbClr val="B83227"/>
                 </a:solidFill>
                 <a:latin typeface="Calibri" pitchFamily="34" charset="0"/>
-                <a:ea typeface="Calibri" pitchFamily="34" charset="-122"/>
-                <a:cs typeface="Calibri" pitchFamily="34" charset="-120"/>
+                <a:cs typeface="Amiri" pitchFamily="2" charset="-78"/>
               </a:rPr>
               <a:t>☐  I can write 150 words with both conditionals.</a:t>
             </a:r>
@@ -36201,8 +35497,7 @@
                   <a:srgbClr val="B83227"/>
                 </a:solidFill>
                 <a:latin typeface="Calibri" pitchFamily="34" charset="0"/>
-                <a:ea typeface="Calibri" pitchFamily="34" charset="-122"/>
-                <a:cs typeface="Calibri" pitchFamily="34" charset="-120"/>
+                <a:cs typeface="Amiri" pitchFamily="2" charset="-78"/>
               </a:rPr>
               <a:t>☐  I can self-mark against TC, Range and Accuracy.</a:t>
             </a:r>
@@ -36240,8 +35535,7 @@
                   <a:srgbClr val="8A93A0"/>
                 </a:solidFill>
                 <a:latin typeface="Calibri" pitchFamily="34" charset="0"/>
-                <a:ea typeface="Calibri" pitchFamily="34" charset="-122"/>
-                <a:cs typeface="Calibri" pitchFamily="34" charset="-120"/>
+                <a:cs typeface="Amiri" pitchFamily="2" charset="-78"/>
               </a:rPr>
               <a:t>6 / 25</a:t>
             </a:r>
@@ -36363,8 +35657,7 @@
                   <a:srgbClr val="0D1F3C"/>
                 </a:solidFill>
                 <a:latin typeface="Calibri" pitchFamily="34" charset="0"/>
-                <a:ea typeface="Calibri" pitchFamily="34" charset="-122"/>
-                <a:cs typeface="Calibri" pitchFamily="34" charset="-120"/>
+                <a:cs typeface="Amiri" pitchFamily="2" charset="-78"/>
               </a:rPr>
               <a:t>TEACHER INSTRUCTION · 7 MIN</a:t>
             </a:r>
@@ -36402,8 +35695,7 @@
                   <a:srgbClr val="FFFFFF"/>
                 </a:solidFill>
                 <a:latin typeface="Cambria" pitchFamily="34" charset="0"/>
-                <a:ea typeface="Cambria" pitchFamily="34" charset="-122"/>
-                <a:cs typeface="Cambria" pitchFamily="34" charset="-120"/>
+                <a:cs typeface="Amiri" pitchFamily="2" charset="-78"/>
               </a:rPr>
               <a:t>Key words for today</a:t>
             </a:r>
@@ -36440,9 +35732,8 @@
                 <a:solidFill>
                   <a:srgbClr val="D4AF37"/>
                 </a:solidFill>
-                <a:latin typeface="Amiri" pitchFamily="34" charset="0"/>
-                <a:ea typeface="Amiri" pitchFamily="34" charset="-122"/>
-                <a:cs typeface="Amiri" pitchFamily="34" charset="-120"/>
+                <a:latin typeface="Amiri" pitchFamily="2" charset="-78"/>
+                <a:cs typeface="Amiri" pitchFamily="2" charset="-78"/>
               </a:rPr>
               <a:t>كَلِمَاتُ الدَّرْسِ</a:t>
             </a:r>
@@ -36480,8 +35771,7 @@
                   <a:srgbClr val="C6D2E6"/>
                 </a:solidFill>
                 <a:latin typeface="Calibri" pitchFamily="34" charset="0"/>
-                <a:ea typeface="Calibri" pitchFamily="34" charset="-122"/>
-                <a:cs typeface="Calibri" pitchFamily="34" charset="-120"/>
+                <a:cs typeface="Amiri" pitchFamily="2" charset="-78"/>
               </a:rPr>
               <a:t>8 exam words from the website in one group. </a:t>
             </a:r>
@@ -36546,8 +35836,7 @@
                   <a:srgbClr val="D4AF37"/>
                 </a:solidFill>
                 <a:latin typeface="Calibri" pitchFamily="34" charset="0"/>
-                <a:ea typeface="Calibri" pitchFamily="34" charset="-122"/>
-                <a:cs typeface="Calibri" pitchFamily="34" charset="-120"/>
+                <a:cs typeface="Amiri" pitchFamily="2" charset="-78"/>
               </a:rPr>
               <a:t>GROUP 1</a:t>
             </a:r>
@@ -36563,8 +35852,7 @@
                   <a:srgbClr val="FFFFFF"/>
                 </a:solidFill>
                 <a:latin typeface="Calibri" pitchFamily="34" charset="0"/>
-                <a:ea typeface="Calibri" pitchFamily="34" charset="-122"/>
-                <a:cs typeface="Calibri" pitchFamily="34" charset="-120"/>
+                <a:cs typeface="Amiri" pitchFamily="2" charset="-78"/>
               </a:rPr>
               <a:t>Essay and exam craft · 8</a:t>
             </a:r>
@@ -36629,8 +35917,7 @@
                   <a:srgbClr val="2E8B57"/>
                 </a:solidFill>
                 <a:latin typeface="Calibri" pitchFamily="34" charset="0"/>
-                <a:ea typeface="Calibri" pitchFamily="34" charset="-122"/>
-                <a:cs typeface="Calibri" pitchFamily="34" charset="-120"/>
+                <a:cs typeface="Amiri" pitchFamily="2" charset="-78"/>
               </a:rPr>
               <a:t>BRIDGE FROM URDU</a:t>
             </a:r>
@@ -36667,9 +35954,8 @@
                 <a:solidFill>
                   <a:srgbClr val="1B3B6F"/>
                 </a:solidFill>
-                <a:latin typeface="Amiri" pitchFamily="34" charset="0"/>
-                <a:ea typeface="Amiri" pitchFamily="34" charset="-122"/>
-                <a:cs typeface="Amiri" pitchFamily="34" charset="-120"/>
+                <a:latin typeface="Amiri" pitchFamily="2" charset="-78"/>
+                <a:cs typeface="Amiri" pitchFamily="2" charset="-78"/>
               </a:rPr>
               <a:t>وَقْتٌ</a:t>
             </a:r>
@@ -36706,9 +35992,8 @@
                 <a:solidFill>
                   <a:srgbClr val="2E8B57"/>
                 </a:solidFill>
-                <a:latin typeface="Amiri" pitchFamily="34" charset="0"/>
-                <a:ea typeface="Amiri" pitchFamily="34" charset="-122"/>
-                <a:cs typeface="Amiri" pitchFamily="34" charset="-120"/>
+                <a:latin typeface="Amiri" pitchFamily="2" charset="-78"/>
+                <a:cs typeface="Amiri" pitchFamily="2" charset="-78"/>
               </a:rPr>
               <a:t>‎وقت‎ </a:t>
             </a:r>
@@ -36721,8 +36006,7 @@
                   <a:srgbClr val="2E8B57"/>
                 </a:solidFill>
                 <a:latin typeface="Calibri" pitchFamily="34" charset="0"/>
-                <a:ea typeface="Calibri" pitchFamily="34" charset="-122"/>
-                <a:cs typeface="Calibri" pitchFamily="34" charset="-120"/>
+                <a:cs typeface="Amiri" pitchFamily="2" charset="-78"/>
               </a:rPr>
               <a:t> waqt · time</a:t>
             </a:r>
@@ -36759,9 +36043,8 @@
                 <a:solidFill>
                   <a:srgbClr val="1B3B6F"/>
                 </a:solidFill>
-                <a:latin typeface="Amiri" pitchFamily="34" charset="0"/>
-                <a:ea typeface="Amiri" pitchFamily="34" charset="-122"/>
-                <a:cs typeface="Amiri" pitchFamily="34" charset="-120"/>
+                <a:latin typeface="Amiri" pitchFamily="2" charset="-78"/>
+                <a:cs typeface="Amiri" pitchFamily="2" charset="-78"/>
               </a:rPr>
               <a:t>نَقِيضٌ</a:t>
             </a:r>
@@ -36798,9 +36081,8 @@
                 <a:solidFill>
                   <a:srgbClr val="2E8B57"/>
                 </a:solidFill>
-                <a:latin typeface="Amiri" pitchFamily="34" charset="0"/>
-                <a:ea typeface="Amiri" pitchFamily="34" charset="-122"/>
-                <a:cs typeface="Amiri" pitchFamily="34" charset="-120"/>
+                <a:latin typeface="Amiri" pitchFamily="2" charset="-78"/>
+                <a:cs typeface="Amiri" pitchFamily="2" charset="-78"/>
               </a:rPr>
               <a:t>‎نقیض‎ </a:t>
             </a:r>
@@ -36813,8 +36095,7 @@
                   <a:srgbClr val="2E8B57"/>
                 </a:solidFill>
                 <a:latin typeface="Calibri" pitchFamily="34" charset="0"/>
-                <a:ea typeface="Calibri" pitchFamily="34" charset="-122"/>
-                <a:cs typeface="Calibri" pitchFamily="34" charset="-120"/>
+                <a:cs typeface="Amiri" pitchFamily="2" charset="-78"/>
               </a:rPr>
               <a:t> naqīz · the opposite, the counter</a:t>
             </a:r>
@@ -36851,9 +36132,8 @@
                 <a:solidFill>
                   <a:srgbClr val="1B3B6F"/>
                 </a:solidFill>
-                <a:latin typeface="Amiri" pitchFamily="34" charset="0"/>
-                <a:ea typeface="Amiri" pitchFamily="34" charset="-122"/>
-                <a:cs typeface="Amiri" pitchFamily="34" charset="-120"/>
+                <a:latin typeface="Amiri" pitchFamily="2" charset="-78"/>
+                <a:cs typeface="Amiri" pitchFamily="2" charset="-78"/>
               </a:rPr>
               <a:t>خَاتِمَةٌ</a:t>
             </a:r>
@@ -36890,9 +36170,8 @@
                 <a:solidFill>
                   <a:srgbClr val="2E8B57"/>
                 </a:solidFill>
-                <a:latin typeface="Amiri" pitchFamily="34" charset="0"/>
-                <a:ea typeface="Amiri" pitchFamily="34" charset="-122"/>
-                <a:cs typeface="Amiri" pitchFamily="34" charset="-120"/>
+                <a:latin typeface="Amiri" pitchFamily="2" charset="-78"/>
+                <a:cs typeface="Amiri" pitchFamily="2" charset="-78"/>
               </a:rPr>
               <a:t>‎خاتمہ‎ </a:t>
             </a:r>
@@ -36905,8 +36184,7 @@
                   <a:srgbClr val="2E8B57"/>
                 </a:solidFill>
                 <a:latin typeface="Calibri" pitchFamily="34" charset="0"/>
-                <a:ea typeface="Calibri" pitchFamily="34" charset="-122"/>
-                <a:cs typeface="Calibri" pitchFamily="34" charset="-120"/>
+                <a:cs typeface="Amiri" pitchFamily="2" charset="-78"/>
               </a:rPr>
               <a:t> khātima · Arabic: a conclusion · Urdu: an end</a:t>
             </a:r>
@@ -36943,9 +36221,8 @@
                 <a:solidFill>
                   <a:srgbClr val="1B3B6F"/>
                 </a:solidFill>
-                <a:latin typeface="Amiri" pitchFamily="34" charset="0"/>
-                <a:ea typeface="Amiri" pitchFamily="34" charset="-122"/>
-                <a:cs typeface="Amiri" pitchFamily="34" charset="-120"/>
+                <a:latin typeface="Amiri" pitchFamily="2" charset="-78"/>
+                <a:cs typeface="Amiri" pitchFamily="2" charset="-78"/>
               </a:rPr>
               <a:t>دِقَّةٌ</a:t>
             </a:r>
@@ -36982,9 +36259,8 @@
                 <a:solidFill>
                   <a:srgbClr val="2E8B57"/>
                 </a:solidFill>
-                <a:latin typeface="Amiri" pitchFamily="34" charset="0"/>
-                <a:ea typeface="Amiri" pitchFamily="34" charset="-122"/>
-                <a:cs typeface="Amiri" pitchFamily="34" charset="-120"/>
+                <a:latin typeface="Amiri" pitchFamily="2" charset="-78"/>
+                <a:cs typeface="Amiri" pitchFamily="2" charset="-78"/>
               </a:rPr>
               <a:t>‎دقت‎ </a:t>
             </a:r>
@@ -36997,8 +36273,7 @@
                   <a:srgbClr val="2E8B57"/>
                 </a:solidFill>
                 <a:latin typeface="Calibri" pitchFamily="34" charset="0"/>
-                <a:ea typeface="Calibri" pitchFamily="34" charset="-122"/>
-                <a:cs typeface="Calibri" pitchFamily="34" charset="-120"/>
+                <a:cs typeface="Amiri" pitchFamily="2" charset="-78"/>
               </a:rPr>
               <a:t> diqqat · Arabic: accuracy · Urdu: difficulty</a:t>
             </a:r>
@@ -37035,9 +36310,8 @@
                 <a:solidFill>
                   <a:srgbClr val="1B3B6F"/>
                 </a:solidFill>
-                <a:latin typeface="Amiri" pitchFamily="34" charset="0"/>
-                <a:ea typeface="Amiri" pitchFamily="34" charset="-122"/>
-                <a:cs typeface="Amiri" pitchFamily="34" charset="-120"/>
+                <a:latin typeface="Amiri" pitchFamily="2" charset="-78"/>
+                <a:cs typeface="Amiri" pitchFamily="2" charset="-78"/>
               </a:rPr>
               <a:t>ضَغْطٌ</a:t>
             </a:r>
@@ -37074,9 +36348,8 @@
                 <a:solidFill>
                   <a:srgbClr val="2E8B57"/>
                 </a:solidFill>
-                <a:latin typeface="Amiri" pitchFamily="34" charset="0"/>
-                <a:ea typeface="Amiri" pitchFamily="34" charset="-122"/>
-                <a:cs typeface="Amiri" pitchFamily="34" charset="-120"/>
+                <a:latin typeface="Amiri" pitchFamily="2" charset="-78"/>
+                <a:cs typeface="Amiri" pitchFamily="2" charset="-78"/>
               </a:rPr>
               <a:t>‎دباؤ‎ </a:t>
             </a:r>
@@ -37089,8 +36362,7 @@
                   <a:srgbClr val="2E8B57"/>
                 </a:solidFill>
                 <a:latin typeface="Calibri" pitchFamily="34" charset="0"/>
-                <a:ea typeface="Calibri" pitchFamily="34" charset="-122"/>
-                <a:cs typeface="Calibri" pitchFamily="34" charset="-120"/>
+                <a:cs typeface="Amiri" pitchFamily="2" charset="-78"/>
               </a:rPr>
               <a:t> dabāo · pressure (Arabic ضَغْطٌ, Urdu دباؤ)</a:t>
             </a:r>
@@ -37128,8 +36400,7 @@
                   <a:srgbClr val="8A93A0"/>
                 </a:solidFill>
                 <a:latin typeface="Calibri" pitchFamily="34" charset="0"/>
-                <a:ea typeface="Calibri" pitchFamily="34" charset="-122"/>
-                <a:cs typeface="Calibri" pitchFamily="34" charset="-120"/>
+                <a:cs typeface="Amiri" pitchFamily="2" charset="-78"/>
               </a:rPr>
               <a:t>7 / 25</a:t>
             </a:r>
@@ -37223,9 +36494,8 @@
                 <a:solidFill>
                   <a:srgbClr val="D4AF37"/>
                 </a:solidFill>
-                <a:latin typeface="Amiri" pitchFamily="34" charset="0"/>
-                <a:ea typeface="Amiri" pitchFamily="34" charset="-122"/>
-                <a:cs typeface="Amiri" pitchFamily="34" charset="-120"/>
+                <a:latin typeface="Amiri" pitchFamily="2" charset="-78"/>
+                <a:cs typeface="Amiri" pitchFamily="2" charset="-78"/>
               </a:rPr>
               <a:t>م</a:t>
             </a:r>
@@ -37263,8 +36533,7 @@
                   <a:srgbClr val="1B3B6F"/>
                 </a:solidFill>
                 <a:latin typeface="Cambria" pitchFamily="34" charset="0"/>
-                <a:ea typeface="Cambria" pitchFamily="34" charset="-122"/>
-                <a:cs typeface="Cambria" pitchFamily="34" charset="-120"/>
+                <a:cs typeface="Amiri" pitchFamily="2" charset="-78"/>
               </a:rPr>
               <a:t>Al Madina Online School</a:t>
             </a:r>
@@ -37302,8 +36571,7 @@
                   <a:srgbClr val="8A6D1E"/>
                 </a:solidFill>
                 <a:latin typeface="Calibri" pitchFamily="34" charset="0"/>
-                <a:ea typeface="Calibri" pitchFamily="34" charset="-122"/>
-                <a:cs typeface="Calibri" pitchFamily="34" charset="-120"/>
+                <a:cs typeface="Amiri" pitchFamily="2" charset="-78"/>
               </a:rPr>
               <a:t>ARABIC DEPARTMENT · MIFTAH ARABIC · IGCSE 0544</a:t>
             </a:r>
@@ -37368,8 +36636,7 @@
                   <a:srgbClr val="FFFFFF"/>
                 </a:solidFill>
                 <a:latin typeface="Calibri" pitchFamily="34" charset="0"/>
-                <a:ea typeface="Calibri" pitchFamily="34" charset="-122"/>
-                <a:cs typeface="Calibri" pitchFamily="34" charset="-120"/>
+                <a:cs typeface="Amiri" pitchFamily="2" charset="-78"/>
               </a:rPr>
               <a:t>P6-L05 · IGCSE Bridge</a:t>
             </a:r>
@@ -37434,8 +36701,7 @@
                   <a:srgbClr val="FFFFFF"/>
                 </a:solidFill>
                 <a:latin typeface="Calibri" pitchFamily="34" charset="0"/>
-                <a:ea typeface="Calibri" pitchFamily="34" charset="-122"/>
-                <a:cs typeface="Calibri" pitchFamily="34" charset="-120"/>
+                <a:cs typeface="Amiri" pitchFamily="2" charset="-78"/>
               </a:rPr>
               <a:t>TEACHER INSTRUCTION · 2 MIN</a:t>
             </a:r>
@@ -37473,8 +36739,7 @@
                   <a:srgbClr val="1B3B6F"/>
                 </a:solidFill>
                 <a:latin typeface="Calibri" pitchFamily="34" charset="0"/>
-                <a:ea typeface="Calibri" pitchFamily="34" charset="-122"/>
-                <a:cs typeface="Calibri" pitchFamily="34" charset="-120"/>
+                <a:cs typeface="Amiri" pitchFamily="2" charset="-78"/>
               </a:rPr>
               <a:t>KEY WORDS · GROUP 1</a:t>
             </a:r>
@@ -37512,8 +36777,7 @@
                   <a:srgbClr val="1B3B6F"/>
                 </a:solidFill>
                 <a:latin typeface="Cambria" pitchFamily="34" charset="0"/>
-                <a:ea typeface="Cambria" pitchFamily="34" charset="-122"/>
-                <a:cs typeface="Cambria" pitchFamily="34" charset="-120"/>
+                <a:cs typeface="Amiri" pitchFamily="2" charset="-78"/>
               </a:rPr>
               <a:t>Essay and exam craft (1 of 2)</a:t>
             </a:r>
@@ -37550,9 +36814,8 @@
                 <a:solidFill>
                   <a:srgbClr val="8A6D1E"/>
                 </a:solidFill>
-                <a:latin typeface="Amiri" pitchFamily="34" charset="0"/>
-                <a:ea typeface="Amiri" pitchFamily="34" charset="-122"/>
-                <a:cs typeface="Amiri" pitchFamily="34" charset="-120"/>
+                <a:latin typeface="Amiri" pitchFamily="2" charset="-78"/>
+                <a:cs typeface="Amiri" pitchFamily="2" charset="-78"/>
               </a:rPr>
               <a:t>كَلِمَاتُ الدَّرْسِ</a:t>
             </a:r>
@@ -37590,8 +36853,7 @@
                   <a:srgbClr val="8A93A0"/>
                 </a:solidFill>
                 <a:latin typeface="Calibri" pitchFamily="34" charset="0"/>
-                <a:ea typeface="Calibri" pitchFamily="34" charset="-122"/>
-                <a:cs typeface="Calibri" pitchFamily="34" charset="-120"/>
+                <a:cs typeface="Amiri" pitchFamily="2" charset="-78"/>
               </a:rPr>
               <a:t>Miftah Arabic · Progression P6 · IGCSE Bridge · P6-L05</a:t>
             </a:r>
@@ -37688,8 +36950,7 @@
                   <a:srgbClr val="1B3B6F"/>
                 </a:solidFill>
                 <a:latin typeface="Calibri" pitchFamily="34" charset="0"/>
-                <a:ea typeface="Calibri" pitchFamily="34" charset="-122"/>
-                <a:cs typeface="Calibri" pitchFamily="34" charset="-120"/>
+                <a:cs typeface="Amiri" pitchFamily="2" charset="-78"/>
               </a:rPr>
               <a:t>1</a:t>
             </a:r>
@@ -37754,8 +37015,7 @@
                   <a:srgbClr val="FFFFFF"/>
                 </a:solidFill>
                 <a:latin typeface="Calibri" pitchFamily="34" charset="0"/>
-                <a:ea typeface="Calibri" pitchFamily="34" charset="-122"/>
-                <a:cs typeface="Calibri" pitchFamily="34" charset="-120"/>
+                <a:cs typeface="Amiri" pitchFamily="2" charset="-78"/>
               </a:rPr>
               <a:t>CORE</a:t>
             </a:r>
@@ -37792,9 +37052,8 @@
                 <a:solidFill>
                   <a:srgbClr val="1B3B6F"/>
                 </a:solidFill>
-                <a:latin typeface="Amiri" pitchFamily="34" charset="0"/>
-                <a:ea typeface="Amiri" pitchFamily="34" charset="-122"/>
-                <a:cs typeface="Amiri" pitchFamily="34" charset="-120"/>
+                <a:latin typeface="Amiri" pitchFamily="2" charset="-78"/>
+                <a:cs typeface="Amiri" pitchFamily="2" charset="-78"/>
               </a:rPr>
               <a:t>الكِتَابَةُ المُوَسَّعَةُ</a:t>
             </a:r>
@@ -37832,8 +37091,7 @@
                   <a:srgbClr val="1F2A37"/>
                 </a:solidFill>
                 <a:latin typeface="Calibri" pitchFamily="34" charset="0"/>
-                <a:ea typeface="Calibri" pitchFamily="34" charset="-122"/>
-                <a:cs typeface="Calibri" pitchFamily="34" charset="-120"/>
+                <a:cs typeface="Amiri" pitchFamily="2" charset="-78"/>
               </a:rPr>
               <a:t>extended writing</a:t>
             </a:r>
@@ -37849,8 +37107,7 @@
                   <a:srgbClr val="5A6472"/>
                 </a:solidFill>
                 <a:latin typeface="Calibri" pitchFamily="34" charset="0"/>
-                <a:ea typeface="Calibri" pitchFamily="34" charset="-122"/>
-                <a:cs typeface="Calibri" pitchFamily="34" charset="-120"/>
+                <a:cs typeface="Amiri" pitchFamily="2" charset="-78"/>
               </a:rPr>
               <a:t>al-ki-tā-ba-tu al-mu-was-sa-ʿa-tu</a:t>
             </a:r>
@@ -37947,8 +37204,7 @@
                   <a:srgbClr val="1B3B6F"/>
                 </a:solidFill>
                 <a:latin typeface="Calibri" pitchFamily="34" charset="0"/>
-                <a:ea typeface="Calibri" pitchFamily="34" charset="-122"/>
-                <a:cs typeface="Calibri" pitchFamily="34" charset="-120"/>
+                <a:cs typeface="Amiri" pitchFamily="2" charset="-78"/>
               </a:rPr>
               <a:t>2</a:t>
             </a:r>
@@ -38013,8 +37269,7 @@
                   <a:srgbClr val="8A6D1E"/>
                 </a:solidFill>
                 <a:latin typeface="Calibri" pitchFamily="34" charset="0"/>
-                <a:ea typeface="Calibri" pitchFamily="34" charset="-122"/>
-                <a:cs typeface="Calibri" pitchFamily="34" charset="-120"/>
+                <a:cs typeface="Amiri" pitchFamily="2" charset="-78"/>
               </a:rPr>
               <a:t>sg · pl</a:t>
             </a:r>
@@ -38079,8 +37334,7 @@
                   <a:srgbClr val="FFFFFF"/>
                 </a:solidFill>
                 <a:latin typeface="Calibri" pitchFamily="34" charset="0"/>
-                <a:ea typeface="Calibri" pitchFamily="34" charset="-122"/>
-                <a:cs typeface="Calibri" pitchFamily="34" charset="-120"/>
+                <a:cs typeface="Amiri" pitchFamily="2" charset="-78"/>
               </a:rPr>
               <a:t>CORE</a:t>
             </a:r>
@@ -38117,9 +37371,8 @@
                 <a:solidFill>
                   <a:srgbClr val="1B3B6F"/>
                 </a:solidFill>
-                <a:latin typeface="Amiri" pitchFamily="34" charset="0"/>
-                <a:ea typeface="Amiri" pitchFamily="34" charset="-122"/>
-                <a:cs typeface="Amiri" pitchFamily="34" charset="-120"/>
+                <a:latin typeface="Amiri" pitchFamily="2" charset="-78"/>
+                <a:cs typeface="Amiri" pitchFamily="2" charset="-78"/>
               </a:rPr>
               <a:t>هَيْكَلُ المَقَالِ</a:t>
             </a:r>
@@ -38157,8 +37410,7 @@
                   <a:srgbClr val="1F2A37"/>
                 </a:solidFill>
                 <a:latin typeface="Calibri" pitchFamily="34" charset="0"/>
-                <a:ea typeface="Calibri" pitchFamily="34" charset="-122"/>
-                <a:cs typeface="Calibri" pitchFamily="34" charset="-120"/>
+                <a:cs typeface="Amiri" pitchFamily="2" charset="-78"/>
               </a:rPr>
               <a:t>essay structure</a:t>
             </a:r>
@@ -38174,8 +37426,7 @@
                   <a:srgbClr val="5A6472"/>
                 </a:solidFill>
                 <a:latin typeface="Calibri" pitchFamily="34" charset="0"/>
-                <a:ea typeface="Calibri" pitchFamily="34" charset="-122"/>
-                <a:cs typeface="Calibri" pitchFamily="34" charset="-120"/>
+                <a:cs typeface="Amiri" pitchFamily="2" charset="-78"/>
               </a:rPr>
               <a:t>hay-ka-lu al-ma-qā-li</a:t>
             </a:r>
@@ -38240,8 +37491,7 @@
                   <a:srgbClr val="8A6D1E"/>
                 </a:solidFill>
                 <a:latin typeface="Calibri" pitchFamily="34" charset="0"/>
-                <a:ea typeface="Calibri" pitchFamily="34" charset="-122"/>
-                <a:cs typeface="Calibri" pitchFamily="34" charset="-120"/>
+                <a:cs typeface="Amiri" pitchFamily="2" charset="-78"/>
               </a:rPr>
               <a:t>pl.</a:t>
             </a:r>
@@ -38278,9 +37528,8 @@
                 <a:solidFill>
                   <a:srgbClr val="1B3B6F"/>
                 </a:solidFill>
-                <a:latin typeface="Amiri" pitchFamily="34" charset="0"/>
-                <a:ea typeface="Amiri" pitchFamily="34" charset="-122"/>
-                <a:cs typeface="Amiri" pitchFamily="34" charset="-120"/>
+                <a:latin typeface="Amiri" pitchFamily="2" charset="-78"/>
+                <a:cs typeface="Amiri" pitchFamily="2" charset="-78"/>
               </a:rPr>
               <a:t>هَيَاكِلُ</a:t>
             </a:r>
@@ -38377,8 +37626,7 @@
                   <a:srgbClr val="1B3B6F"/>
                 </a:solidFill>
                 <a:latin typeface="Calibri" pitchFamily="34" charset="0"/>
-                <a:ea typeface="Calibri" pitchFamily="34" charset="-122"/>
-                <a:cs typeface="Calibri" pitchFamily="34" charset="-120"/>
+                <a:cs typeface="Amiri" pitchFamily="2" charset="-78"/>
               </a:rPr>
               <a:t>3</a:t>
             </a:r>
@@ -38443,8 +37691,7 @@
                   <a:srgbClr val="8A6D1E"/>
                 </a:solidFill>
                 <a:latin typeface="Calibri" pitchFamily="34" charset="0"/>
-                <a:ea typeface="Calibri" pitchFamily="34" charset="-122"/>
-                <a:cs typeface="Calibri" pitchFamily="34" charset="-120"/>
+                <a:cs typeface="Amiri" pitchFamily="2" charset="-78"/>
               </a:rPr>
               <a:t>sg · pl</a:t>
             </a:r>
@@ -38509,8 +37756,7 @@
                   <a:srgbClr val="FFFFFF"/>
                 </a:solidFill>
                 <a:latin typeface="Calibri" pitchFamily="34" charset="0"/>
-                <a:ea typeface="Calibri" pitchFamily="34" charset="-122"/>
-                <a:cs typeface="Calibri" pitchFamily="34" charset="-120"/>
+                <a:cs typeface="Amiri" pitchFamily="2" charset="-78"/>
               </a:rPr>
               <a:t>CORE</a:t>
             </a:r>
@@ -38547,9 +37793,8 @@
                 <a:solidFill>
                   <a:srgbClr val="1B3B6F"/>
                 </a:solidFill>
-                <a:latin typeface="Amiri" pitchFamily="34" charset="0"/>
-                <a:ea typeface="Amiri" pitchFamily="34" charset="-122"/>
-                <a:cs typeface="Amiri" pitchFamily="34" charset="-120"/>
+                <a:latin typeface="Amiri" pitchFamily="2" charset="-78"/>
+                <a:cs typeface="Amiri" pitchFamily="2" charset="-78"/>
               </a:rPr>
               <a:t>الأُطْرُوحَةُ</a:t>
             </a:r>
@@ -38587,8 +37832,7 @@
                   <a:srgbClr val="1F2A37"/>
                 </a:solidFill>
                 <a:latin typeface="Calibri" pitchFamily="34" charset="0"/>
-                <a:ea typeface="Calibri" pitchFamily="34" charset="-122"/>
-                <a:cs typeface="Calibri" pitchFamily="34" charset="-120"/>
+                <a:cs typeface="Amiri" pitchFamily="2" charset="-78"/>
               </a:rPr>
               <a:t>the thesis</a:t>
             </a:r>
@@ -38604,8 +37848,7 @@
                   <a:srgbClr val="5A6472"/>
                 </a:solidFill>
                 <a:latin typeface="Calibri" pitchFamily="34" charset="0"/>
-                <a:ea typeface="Calibri" pitchFamily="34" charset="-122"/>
-                <a:cs typeface="Calibri" pitchFamily="34" charset="-120"/>
+                <a:cs typeface="Amiri" pitchFamily="2" charset="-78"/>
               </a:rPr>
               <a:t>al-uṭ-rū-ḥa-tu</a:t>
             </a:r>
@@ -38670,8 +37913,7 @@
                   <a:srgbClr val="8A6D1E"/>
                 </a:solidFill>
                 <a:latin typeface="Calibri" pitchFamily="34" charset="0"/>
-                <a:ea typeface="Calibri" pitchFamily="34" charset="-122"/>
-                <a:cs typeface="Calibri" pitchFamily="34" charset="-120"/>
+                <a:cs typeface="Amiri" pitchFamily="2" charset="-78"/>
               </a:rPr>
               <a:t>pl.</a:t>
             </a:r>
@@ -38708,9 +37950,8 @@
                 <a:solidFill>
                   <a:srgbClr val="1B3B6F"/>
                 </a:solidFill>
-                <a:latin typeface="Amiri" pitchFamily="34" charset="0"/>
-                <a:ea typeface="Amiri" pitchFamily="34" charset="-122"/>
-                <a:cs typeface="Amiri" pitchFamily="34" charset="-120"/>
+                <a:latin typeface="Amiri" pitchFamily="2" charset="-78"/>
+                <a:cs typeface="Amiri" pitchFamily="2" charset="-78"/>
               </a:rPr>
               <a:t>الأُطْرُوحَاتُ</a:t>
             </a:r>
@@ -38807,8 +38048,7 @@
                   <a:srgbClr val="1B3B6F"/>
                 </a:solidFill>
                 <a:latin typeface="Calibri" pitchFamily="34" charset="0"/>
-                <a:ea typeface="Calibri" pitchFamily="34" charset="-122"/>
-                <a:cs typeface="Calibri" pitchFamily="34" charset="-120"/>
+                <a:cs typeface="Amiri" pitchFamily="2" charset="-78"/>
               </a:rPr>
               <a:t>4</a:t>
             </a:r>
@@ -38873,8 +38113,7 @@
                   <a:srgbClr val="FFFFFF"/>
                 </a:solidFill>
                 <a:latin typeface="Calibri" pitchFamily="34" charset="0"/>
-                <a:ea typeface="Calibri" pitchFamily="34" charset="-122"/>
-                <a:cs typeface="Calibri" pitchFamily="34" charset="-120"/>
+                <a:cs typeface="Amiri" pitchFamily="2" charset="-78"/>
               </a:rPr>
               <a:t>CORE</a:t>
             </a:r>
@@ -38911,9 +38150,8 @@
                 <a:solidFill>
                   <a:srgbClr val="1B3B6F"/>
                 </a:solidFill>
-                <a:latin typeface="Amiri" pitchFamily="34" charset="0"/>
-                <a:ea typeface="Amiri" pitchFamily="34" charset="-122"/>
-                <a:cs typeface="Amiri" pitchFamily="34" charset="-120"/>
+                <a:latin typeface="Amiri" pitchFamily="2" charset="-78"/>
+                <a:cs typeface="Amiri" pitchFamily="2" charset="-78"/>
               </a:rPr>
               <a:t>نَقِيضُ الحُجَّةِ</a:t>
             </a:r>
@@ -38951,8 +38189,7 @@
                   <a:srgbClr val="1F2A37"/>
                 </a:solidFill>
                 <a:latin typeface="Calibri" pitchFamily="34" charset="0"/>
-                <a:ea typeface="Calibri" pitchFamily="34" charset="-122"/>
-                <a:cs typeface="Calibri" pitchFamily="34" charset="-120"/>
+                <a:cs typeface="Amiri" pitchFamily="2" charset="-78"/>
               </a:rPr>
               <a:t>the counter-argument</a:t>
             </a:r>
@@ -38968,8 +38205,7 @@
                   <a:srgbClr val="5A6472"/>
                 </a:solidFill>
                 <a:latin typeface="Calibri" pitchFamily="34" charset="0"/>
-                <a:ea typeface="Calibri" pitchFamily="34" charset="-122"/>
-                <a:cs typeface="Calibri" pitchFamily="34" charset="-120"/>
+                <a:cs typeface="Amiri" pitchFamily="2" charset="-78"/>
               </a:rPr>
               <a:t>na-qī-ḍu al-ḥuj-ja-ti</a:t>
             </a:r>
@@ -39007,8 +38243,7 @@
                   <a:srgbClr val="8A93A0"/>
                 </a:solidFill>
                 <a:latin typeface="Calibri" pitchFamily="34" charset="0"/>
-                <a:ea typeface="Calibri" pitchFamily="34" charset="-122"/>
-                <a:cs typeface="Calibri" pitchFamily="34" charset="-120"/>
+                <a:cs typeface="Amiri" pitchFamily="2" charset="-78"/>
               </a:rPr>
               <a:t>8 / 25</a:t>
             </a:r>
@@ -39102,9 +38337,8 @@
                 <a:solidFill>
                   <a:srgbClr val="D4AF37"/>
                 </a:solidFill>
-                <a:latin typeface="Amiri" pitchFamily="34" charset="0"/>
-                <a:ea typeface="Amiri" pitchFamily="34" charset="-122"/>
-                <a:cs typeface="Amiri" pitchFamily="34" charset="-120"/>
+                <a:latin typeface="Amiri" pitchFamily="2" charset="-78"/>
+                <a:cs typeface="Amiri" pitchFamily="2" charset="-78"/>
               </a:rPr>
               <a:t>م</a:t>
             </a:r>
@@ -39142,8 +38376,7 @@
                   <a:srgbClr val="1B3B6F"/>
                 </a:solidFill>
                 <a:latin typeface="Cambria" pitchFamily="34" charset="0"/>
-                <a:ea typeface="Cambria" pitchFamily="34" charset="-122"/>
-                <a:cs typeface="Cambria" pitchFamily="34" charset="-120"/>
+                <a:cs typeface="Amiri" pitchFamily="2" charset="-78"/>
               </a:rPr>
               <a:t>Al Madina Online School</a:t>
             </a:r>
@@ -39181,8 +38414,7 @@
                   <a:srgbClr val="8A6D1E"/>
                 </a:solidFill>
                 <a:latin typeface="Calibri" pitchFamily="34" charset="0"/>
-                <a:ea typeface="Calibri" pitchFamily="34" charset="-122"/>
-                <a:cs typeface="Calibri" pitchFamily="34" charset="-120"/>
+                <a:cs typeface="Amiri" pitchFamily="2" charset="-78"/>
               </a:rPr>
               <a:t>ARABIC DEPARTMENT · MIFTAH ARABIC · IGCSE 0544</a:t>
             </a:r>
@@ -39247,8 +38479,7 @@
                   <a:srgbClr val="FFFFFF"/>
                 </a:solidFill>
                 <a:latin typeface="Calibri" pitchFamily="34" charset="0"/>
-                <a:ea typeface="Calibri" pitchFamily="34" charset="-122"/>
-                <a:cs typeface="Calibri" pitchFamily="34" charset="-120"/>
+                <a:cs typeface="Amiri" pitchFamily="2" charset="-78"/>
               </a:rPr>
               <a:t>P6-L05 · IGCSE Bridge</a:t>
             </a:r>
@@ -39313,8 +38544,7 @@
                   <a:srgbClr val="FFFFFF"/>
                 </a:solidFill>
                 <a:latin typeface="Calibri" pitchFamily="34" charset="0"/>
-                <a:ea typeface="Calibri" pitchFamily="34" charset="-122"/>
-                <a:cs typeface="Calibri" pitchFamily="34" charset="-120"/>
+                <a:cs typeface="Amiri" pitchFamily="2" charset="-78"/>
               </a:rPr>
               <a:t>TEACHER INSTRUCTION · 2 MIN</a:t>
             </a:r>
@@ -39352,8 +38582,7 @@
                   <a:srgbClr val="1B3B6F"/>
                 </a:solidFill>
                 <a:latin typeface="Calibri" pitchFamily="34" charset="0"/>
-                <a:ea typeface="Calibri" pitchFamily="34" charset="-122"/>
-                <a:cs typeface="Calibri" pitchFamily="34" charset="-120"/>
+                <a:cs typeface="Amiri" pitchFamily="2" charset="-78"/>
               </a:rPr>
               <a:t>KEY WORDS · GROUP 1</a:t>
             </a:r>
@@ -39391,8 +38620,7 @@
                   <a:srgbClr val="1B3B6F"/>
                 </a:solidFill>
                 <a:latin typeface="Cambria" pitchFamily="34" charset="0"/>
-                <a:ea typeface="Cambria" pitchFamily="34" charset="-122"/>
-                <a:cs typeface="Cambria" pitchFamily="34" charset="-120"/>
+                <a:cs typeface="Amiri" pitchFamily="2" charset="-78"/>
               </a:rPr>
               <a:t>Essay and exam craft (2 of 2)</a:t>
             </a:r>
@@ -39429,9 +38657,8 @@
                 <a:solidFill>
                   <a:srgbClr val="8A6D1E"/>
                 </a:solidFill>
-                <a:latin typeface="Amiri" pitchFamily="34" charset="0"/>
-                <a:ea typeface="Amiri" pitchFamily="34" charset="-122"/>
-                <a:cs typeface="Amiri" pitchFamily="34" charset="-120"/>
+                <a:latin typeface="Amiri" pitchFamily="2" charset="-78"/>
+                <a:cs typeface="Amiri" pitchFamily="2" charset="-78"/>
               </a:rPr>
               <a:t>كَلِمَاتُ الدَّرْسِ</a:t>
             </a:r>
@@ -39469,8 +38696,7 @@
                   <a:srgbClr val="8A93A0"/>
                 </a:solidFill>
                 <a:latin typeface="Calibri" pitchFamily="34" charset="0"/>
-                <a:ea typeface="Calibri" pitchFamily="34" charset="-122"/>
-                <a:cs typeface="Calibri" pitchFamily="34" charset="-120"/>
+                <a:cs typeface="Amiri" pitchFamily="2" charset="-78"/>
               </a:rPr>
               <a:t>Miftah Arabic · Progression P6 · IGCSE Bridge · P6-L05</a:t>
             </a:r>
@@ -39567,8 +38793,7 @@
                   <a:srgbClr val="1B3B6F"/>
                 </a:solidFill>
                 <a:latin typeface="Calibri" pitchFamily="34" charset="0"/>
-                <a:ea typeface="Calibri" pitchFamily="34" charset="-122"/>
-                <a:cs typeface="Calibri" pitchFamily="34" charset="-120"/>
+                <a:cs typeface="Amiri" pitchFamily="2" charset="-78"/>
               </a:rPr>
               <a:t>5</a:t>
             </a:r>
@@ -39633,8 +38858,7 @@
                   <a:srgbClr val="FFFFFF"/>
                 </a:solidFill>
                 <a:latin typeface="Calibri" pitchFamily="34" charset="0"/>
-                <a:ea typeface="Calibri" pitchFamily="34" charset="-122"/>
-                <a:cs typeface="Calibri" pitchFamily="34" charset="-120"/>
+                <a:cs typeface="Amiri" pitchFamily="2" charset="-78"/>
               </a:rPr>
               <a:t>CORE</a:t>
             </a:r>
@@ -39671,9 +38895,8 @@
                 <a:solidFill>
                   <a:srgbClr val="1B3B6F"/>
                 </a:solidFill>
-                <a:latin typeface="Amiri" pitchFamily="34" charset="0"/>
-                <a:ea typeface="Amiri" pitchFamily="34" charset="-122"/>
-                <a:cs typeface="Amiri" pitchFamily="34" charset="-120"/>
+                <a:latin typeface="Amiri" pitchFamily="2" charset="-78"/>
+                <a:cs typeface="Amiri" pitchFamily="2" charset="-78"/>
               </a:rPr>
               <a:t>الرَّدُّ</a:t>
             </a:r>
@@ -39711,8 +38934,7 @@
                   <a:srgbClr val="1F2A37"/>
                 </a:solidFill>
                 <a:latin typeface="Calibri" pitchFamily="34" charset="0"/>
-                <a:ea typeface="Calibri" pitchFamily="34" charset="-122"/>
-                <a:cs typeface="Calibri" pitchFamily="34" charset="-120"/>
+                <a:cs typeface="Amiri" pitchFamily="2" charset="-78"/>
               </a:rPr>
               <a:t>the refutation</a:t>
             </a:r>
@@ -39728,8 +38950,7 @@
                   <a:srgbClr val="5A6472"/>
                 </a:solidFill>
                 <a:latin typeface="Calibri" pitchFamily="34" charset="0"/>
-                <a:ea typeface="Calibri" pitchFamily="34" charset="-122"/>
-                <a:cs typeface="Calibri" pitchFamily="34" charset="-120"/>
+                <a:cs typeface="Amiri" pitchFamily="2" charset="-78"/>
               </a:rPr>
               <a:t>ar-rad-du</a:t>
             </a:r>
@@ -39826,8 +39047,7 @@
                   <a:srgbClr val="1B3B6F"/>
                 </a:solidFill>
                 <a:latin typeface="Calibri" pitchFamily="34" charset="0"/>
-                <a:ea typeface="Calibri" pitchFamily="34" charset="-122"/>
-                <a:cs typeface="Calibri" pitchFamily="34" charset="-120"/>
+                <a:cs typeface="Amiri" pitchFamily="2" charset="-78"/>
               </a:rPr>
               <a:t>6</a:t>
             </a:r>
@@ -39892,8 +39112,7 @@
                   <a:srgbClr val="8A6D1E"/>
                 </a:solidFill>
                 <a:latin typeface="Calibri" pitchFamily="34" charset="0"/>
-                <a:ea typeface="Calibri" pitchFamily="34" charset="-122"/>
-                <a:cs typeface="Calibri" pitchFamily="34" charset="-120"/>
+                <a:cs typeface="Amiri" pitchFamily="2" charset="-78"/>
               </a:rPr>
               <a:t>sg · pl</a:t>
             </a:r>
@@ -39958,8 +39177,7 @@
                   <a:srgbClr val="FFFFFF"/>
                 </a:solidFill>
                 <a:latin typeface="Calibri" pitchFamily="34" charset="0"/>
-                <a:ea typeface="Calibri" pitchFamily="34" charset="-122"/>
-                <a:cs typeface="Calibri" pitchFamily="34" charset="-120"/>
+                <a:cs typeface="Amiri" pitchFamily="2" charset="-78"/>
               </a:rPr>
               <a:t>CORE</a:t>
             </a:r>
@@ -39996,9 +39214,8 @@
                 <a:solidFill>
                   <a:srgbClr val="1B3B6F"/>
                 </a:solidFill>
-                <a:latin typeface="Amiri" pitchFamily="34" charset="0"/>
-                <a:ea typeface="Amiri" pitchFamily="34" charset="-122"/>
-                <a:cs typeface="Amiri" pitchFamily="34" charset="-120"/>
+                <a:latin typeface="Amiri" pitchFamily="2" charset="-78"/>
+                <a:cs typeface="Amiri" pitchFamily="2" charset="-78"/>
               </a:rPr>
               <a:t>الخَاتِمَةُ</a:t>
             </a:r>
@@ -40036,8 +39253,7 @@
                   <a:srgbClr val="1F2A37"/>
                 </a:solidFill>
                 <a:latin typeface="Calibri" pitchFamily="34" charset="0"/>
-                <a:ea typeface="Calibri" pitchFamily="34" charset="-122"/>
-                <a:cs typeface="Calibri" pitchFamily="34" charset="-120"/>
+                <a:cs typeface="Amiri" pitchFamily="2" charset="-78"/>
               </a:rPr>
               <a:t>the conclusion</a:t>
             </a:r>
@@ -40053,8 +39269,7 @@
                   <a:srgbClr val="5A6472"/>
                 </a:solidFill>
                 <a:latin typeface="Calibri" pitchFamily="34" charset="0"/>
-                <a:ea typeface="Calibri" pitchFamily="34" charset="-122"/>
-                <a:cs typeface="Calibri" pitchFamily="34" charset="-120"/>
+                <a:cs typeface="Amiri" pitchFamily="2" charset="-78"/>
               </a:rPr>
               <a:t>al-khā-ti-ma-tu</a:t>
             </a:r>
@@ -40119,8 +39334,7 @@
                   <a:srgbClr val="8A6D1E"/>
                 </a:solidFill>
                 <a:latin typeface="Calibri" pitchFamily="34" charset="0"/>
-                <a:ea typeface="Calibri" pitchFamily="34" charset="-122"/>
-                <a:cs typeface="Calibri" pitchFamily="34" charset="-120"/>
+                <a:cs typeface="Amiri" pitchFamily="2" charset="-78"/>
               </a:rPr>
               <a:t>pl.</a:t>
             </a:r>
@@ -40157,9 +39371,8 @@
                 <a:solidFill>
                   <a:srgbClr val="1B3B6F"/>
                 </a:solidFill>
-                <a:latin typeface="Amiri" pitchFamily="34" charset="0"/>
-                <a:ea typeface="Amiri" pitchFamily="34" charset="-122"/>
-                <a:cs typeface="Amiri" pitchFamily="34" charset="-120"/>
+                <a:latin typeface="Amiri" pitchFamily="2" charset="-78"/>
+                <a:cs typeface="Amiri" pitchFamily="2" charset="-78"/>
               </a:rPr>
               <a:t>الخَوَاتِمُ</a:t>
             </a:r>
@@ -40256,8 +39469,7 @@
                   <a:srgbClr val="1B3B6F"/>
                 </a:solidFill>
                 <a:latin typeface="Calibri" pitchFamily="34" charset="0"/>
-                <a:ea typeface="Calibri" pitchFamily="34" charset="-122"/>
-                <a:cs typeface="Calibri" pitchFamily="34" charset="-120"/>
+                <a:cs typeface="Amiri" pitchFamily="2" charset="-78"/>
               </a:rPr>
               <a:t>7</a:t>
             </a:r>
@@ -40294,9 +39506,8 @@
                 <a:solidFill>
                   <a:srgbClr val="1B3B6F"/>
                 </a:solidFill>
-                <a:latin typeface="Amiri" pitchFamily="34" charset="0"/>
-                <a:ea typeface="Amiri" pitchFamily="34" charset="-122"/>
-                <a:cs typeface="Amiri" pitchFamily="34" charset="-120"/>
+                <a:latin typeface="Amiri" pitchFamily="2" charset="-78"/>
+                <a:cs typeface="Amiri" pitchFamily="2" charset="-78"/>
               </a:rPr>
               <a:t>التَّنَوُّعُ المَعْجَمِيُّ</a:t>
             </a:r>
@@ -40334,8 +39545,7 @@
                   <a:srgbClr val="1F2A37"/>
                 </a:solidFill>
                 <a:latin typeface="Calibri" pitchFamily="34" charset="0"/>
-                <a:ea typeface="Calibri" pitchFamily="34" charset="-122"/>
-                <a:cs typeface="Calibri" pitchFamily="34" charset="-120"/>
+                <a:cs typeface="Amiri" pitchFamily="2" charset="-78"/>
               </a:rPr>
               <a:t>lexical variety</a:t>
             </a:r>
@@ -40351,8 +39561,7 @@
                   <a:srgbClr val="5A6472"/>
                 </a:solidFill>
                 <a:latin typeface="Calibri" pitchFamily="34" charset="0"/>
-                <a:ea typeface="Calibri" pitchFamily="34" charset="-122"/>
-                <a:cs typeface="Calibri" pitchFamily="34" charset="-120"/>
+                <a:cs typeface="Amiri" pitchFamily="2" charset="-78"/>
               </a:rPr>
               <a:t>at-ta-naw-wu-ʿu al-maʿ-ja-miy-yu</a:t>
             </a:r>
@@ -40449,8 +39658,7 @@
                   <a:srgbClr val="1B3B6F"/>
                 </a:solidFill>
                 <a:latin typeface="Calibri" pitchFamily="34" charset="0"/>
-                <a:ea typeface="Calibri" pitchFamily="34" charset="-122"/>
-                <a:cs typeface="Calibri" pitchFamily="34" charset="-120"/>
+                <a:cs typeface="Amiri" pitchFamily="2" charset="-78"/>
               </a:rPr>
               <a:t>8</a:t>
             </a:r>
@@ -40487,9 +39695,8 @@
                 <a:solidFill>
                   <a:srgbClr val="1B3B6F"/>
                 </a:solidFill>
-                <a:latin typeface="Amiri" pitchFamily="34" charset="0"/>
-                <a:ea typeface="Amiri" pitchFamily="34" charset="-122"/>
-                <a:cs typeface="Amiri" pitchFamily="34" charset="-120"/>
+                <a:latin typeface="Amiri" pitchFamily="2" charset="-78"/>
+                <a:cs typeface="Amiri" pitchFamily="2" charset="-78"/>
               </a:rPr>
               <a:t>الدِّقَّةُ تَحْتَ ضَغْطِ الوَقْتِ</a:t>
             </a:r>
@@ -40527,8 +39734,7 @@
                   <a:srgbClr val="1F2A37"/>
                 </a:solidFill>
                 <a:latin typeface="Calibri" pitchFamily="34" charset="0"/>
-                <a:ea typeface="Calibri" pitchFamily="34" charset="-122"/>
-                <a:cs typeface="Calibri" pitchFamily="34" charset="-120"/>
+                <a:cs typeface="Amiri" pitchFamily="2" charset="-78"/>
               </a:rPr>
               <a:t>accuracy under time pressure</a:t>
             </a:r>
@@ -40544,8 +39750,7 @@
                   <a:srgbClr val="5A6472"/>
                 </a:solidFill>
                 <a:latin typeface="Calibri" pitchFamily="34" charset="0"/>
-                <a:ea typeface="Calibri" pitchFamily="34" charset="-122"/>
-                <a:cs typeface="Calibri" pitchFamily="34" charset="-120"/>
+                <a:cs typeface="Amiri" pitchFamily="2" charset="-78"/>
               </a:rPr>
               <a:t>ad-diq-qa-tu taḥ-ta ḍagh-ṭi al-waq-ti</a:t>
             </a:r>
@@ -40583,8 +39788,7 @@
                   <a:srgbClr val="8A93A0"/>
                 </a:solidFill>
                 <a:latin typeface="Calibri" pitchFamily="34" charset="0"/>
-                <a:ea typeface="Calibri" pitchFamily="34" charset="-122"/>
-                <a:cs typeface="Calibri" pitchFamily="34" charset="-120"/>
+                <a:cs typeface="Amiri" pitchFamily="2" charset="-78"/>
               </a:rPr>
               <a:t>9 / 25</a:t>
             </a:r>

--- a/Progression_P6/P6-L05_Paper_4_Q2_Extended_Writing.pptx
+++ b/Progression_P6/P6-L05_Paper_4_Q2_Extended_Writing.pptx
@@ -523,7 +523,11 @@
           <a:lstStyle/>
           <a:p>
             <a:r>
-              <a:rPr lang="en-US" dirty="0"/>
+              <a:rPr lang="ar-SA" dirty="0">
+                <a:latin typeface="Amiri" pitchFamily="2" charset="-78"/>
+                <a:ea typeface="Amiri" pitchFamily="2" charset="-78"/>
+                <a:cs typeface="Amiri" pitchFamily="2" charset="-78"/>
+              </a:rPr>
               <a:t>LESSON AT A GLANCE — planned for 56 minutes, leaving about 4 minutes for Teams delays.
 0–1 Welcome · 1–2 Map · 2–8 Do Now + answers · 8–9 Objectives · 9–12 Essay words · 12–15 Time and architecture · 15–17 The Q2 mark scheme · 17–21 A four-minute plan (I Do) · 21–23 Choose your essay · 23–48 Plan 4 + write 21 (exam conditions) · 48–53 Models + self-mark · 53–55 Writing profile · 55–58 Reflection + self-check · 58–60 Preparation.
 FLEX slides are optional. Use them if the class is moving quickly; otherwise the same activities are on the website for homework.
@@ -623,7 +627,11 @@
           <a:lstStyle/>
           <a:p>
             <a:r>
-              <a:rPr lang="en-US" dirty="0"/>
+              <a:rPr lang="ar-SA" dirty="0">
+                <a:latin typeface="Amiri" pitchFamily="2" charset="-78"/>
+                <a:ea typeface="Amiri" pitchFamily="2" charset="-78"/>
+                <a:cs typeface="Amiri" pitchFamily="2" charset="-78"/>
+              </a:rPr>
               <a:t>TEACH (3 min) — the website cards. Draw the hour as a bar: 20 min Q1 · 35 min Q2 · 5 min checking. Stress card 4: Range WITHOUT risk — a simple accurate sentence beats an ambitious broken one.
 WEBSITE CARDS “Time management and architecture”: Split the hour: Paper 4 is 60 minutes: about 20 for Q1, about 35 for Q2, and 5 to check. Do not let Q1 eat Q2's time. · Plan for four minutes: Before writing Q2, plan the thesis, the evidence, the concession-refutation, and the conclusion. · Write the architecture: Each paragraph has a job. (أُطْرُوحَةٌ ← دَلِيلٌ ← صَحِيحٌ أَنَّ … غَيْرَ أَنَّ ← وَبِنَاءً عَلَى مَا سَبَقَ) · Range without risk: Aim for grammar variety — different tenses, a conditional, a subjunctive trigger, a formal connector — but never at the cost of accuracy.</a:t>
             </a:r>
@@ -977,7 +985,11 @@
           <a:lstStyle/>
           <a:p>
             <a:r>
-              <a:rPr lang="en-US" dirty="0"/>
+              <a:rPr lang="ar-SA" dirty="0">
+                <a:latin typeface="Amiri" pitchFamily="2" charset="-78"/>
+                <a:ea typeface="Amiri" pitchFamily="2" charset="-78"/>
+                <a:cs typeface="Amiri" pitchFamily="2" charset="-78"/>
+              </a:rPr>
               <a:t>
 Website task: Write an argumentative essay (130–150 words): “الصِّحَّةُ النَّفْسِيَّةُ أَهَمُّ مِنَ الصِّحَّةِ الجَسَدِيَّةِ — هَلْ تُوَافِقُ؟” Use the full architecture.
 Website checklist: A clear thesis stating your position. · Cited evidence (أَكَّدَ … أَنَّ) and a concession (صَحِيحٌ أَنَّ). · A refutation (غَيْرَ أَنَّ) and a Type 2 conditional. · A conclusion (وَبِنَاءً عَلَى مَا سَبَقَ) with a subjunctive; 130–150 words.</a:t>
@@ -1067,7 +1079,11 @@
           <a:lstStyle/>
           <a:p>
             <a:r>
-              <a:rPr lang="en-US" dirty="0"/>
+              <a:rPr lang="ar-SA" dirty="0">
+                <a:latin typeface="Amiri" pitchFamily="2" charset="-78"/>
+                <a:ea typeface="Amiri" pitchFamily="2" charset="-78"/>
+                <a:cs typeface="Amiri" pitchFamily="2" charset="-78"/>
+              </a:rPr>
               <a:t>
 Website task: Write an argumentative essay (130–150 words): “التَّعْلِيمُ الجَامِعِيُّ لَمْ يَعُدْ ضَرُورِيًّا لِلنَّجَاحِ فِي عَالَمِ اليَوْمِ — هَلْ تُوَافِقُ؟”
 Website checklist: A clear thesis and cited evidence. · A concession (صَحِيحٌ أَنَّ) answered by a refutation (غَيْرَ أَنَّ). · Both a Type 1 and a Type 2 conditional if you can. · A conclusion connector with a subjunctive; 130–150 words.</a:t>
@@ -1157,7 +1173,11 @@
           <a:lstStyle/>
           <a:p>
             <a:r>
-              <a:rPr lang="en-US" dirty="0"/>
+              <a:rPr lang="ar-SA" dirty="0">
+                <a:latin typeface="Amiri" pitchFamily="2" charset="-78"/>
+                <a:ea typeface="Amiri" pitchFamily="2" charset="-78"/>
+                <a:cs typeface="Amiri" pitchFamily="2" charset="-78"/>
+              </a:rPr>
               <a:t>
 Website task: Write an argumentative essay (130–150 words): “وَسَائِلُ التَّوَاصُلِ الاجْتِمَاعِيِّ تُفِيدُ المُجْتَمَعَاتِ أَكْثَرَ مِمَّا تَضُرُّهَا — هَلْ تُوَافِقُ؟”
 Website checklist: A clear thesis and cited evidence. · A concession (صَحِيحٌ أَنَّ) and a refutation (غَيْرَ أَنَّ). · A subjunctive trigger and a Type 2 conditional. · A conclusion connector with a subjunctive; 130–150 words.</a:t>
@@ -1335,7 +1355,11 @@
           <a:lstStyle/>
           <a:p>
             <a:r>
-              <a:rPr lang="en-US" dirty="0"/>
+              <a:rPr lang="ar-SA" dirty="0">
+                <a:latin typeface="Amiri" pitchFamily="2" charset="-78"/>
+                <a:ea typeface="Amiri" pitchFamily="2" charset="-78"/>
+                <a:cs typeface="Amiri" pitchFamily="2" charset="-78"/>
+              </a:rPr>
               <a:t>MODEL (website) — show AFTER students have written. Students find the four items on the chips, then choose ONE thing to add to their own answer.
 Website model (health), with one fix: نُوَلِيَ → نُولِيَ (Form IV أَوْلَى، يُولِي). Note إِذَا وَازَنَ … عَاشَ — a past-tense result for a general truth (“whenever”).</a:t>
             </a:r>
@@ -1424,7 +1448,11 @@
           <a:lstStyle/>
           <a:p>
             <a:r>
-              <a:rPr lang="en-US" dirty="0"/>
+              <a:rPr lang="ar-SA" dirty="0">
+                <a:latin typeface="Amiri" pitchFamily="2" charset="-78"/>
+                <a:ea typeface="Amiri" pitchFamily="2" charset="-78"/>
+                <a:cs typeface="Amiri" pitchFamily="2" charset="-78"/>
+              </a:rPr>
               <a:t>MODEL (website) — show AFTER students have written. Students find the four items on the chips, then choose ONE thing to add to their own answer.
 Website model (education). Stretch point: يَنْبَغِي أَنْ نُطَوِّرَ … لَا أَنْ نَسْتَغْنِيَ — two verbs in -a, contrasted with لَا.</a:t>
             </a:r>
@@ -1513,7 +1541,11 @@
           <a:lstStyle/>
           <a:p>
             <a:r>
-              <a:rPr lang="en-US" dirty="0"/>
+              <a:rPr lang="ar-SA" dirty="0">
+                <a:latin typeface="Amiri" pitchFamily="2" charset="-78"/>
+                <a:ea typeface="Amiri" pitchFamily="2" charset="-78"/>
+                <a:cs typeface="Amiri" pitchFamily="2" charset="-78"/>
+              </a:rPr>
               <a:t>WELCOME (1 min) — while students join.
 • Greet each student by name as they arrive: السَّلَامُ عَلَيْكُمْ. Take the register (Pastoral Tracker: attendance 0/1).
 • 2-MINUTE CHECK-IN (SEND training): a private chat to any student who seemed unsettled last lesson — “Are you okay today? 👍 / 👎”.
@@ -1606,7 +1638,11 @@
           <a:lstStyle/>
           <a:p>
             <a:r>
-              <a:rPr lang="en-US" dirty="0"/>
+              <a:rPr lang="ar-SA" dirty="0">
+                <a:latin typeface="Amiri" pitchFamily="2" charset="-78"/>
+                <a:ea typeface="Amiri" pitchFamily="2" charset="-78"/>
+                <a:cs typeface="Amiri" pitchFamily="2" charset="-78"/>
+              </a:rPr>
               <a:t>MODEL (website) — show AFTER students have written. Students find the four items on the chips, then choose ONE thing to add to their own answer.
 Website model (social issues). Count the verbs in -a in the last sentence: نُرَبِّيَ · نَجْنِيَ · نَتَجَنَّبَ.</a:t>
             </a:r>
@@ -2502,7 +2538,11 @@
           <a:lstStyle/>
           <a:p>
             <a:r>
-              <a:rPr lang="en-US" dirty="0"/>
+              <a:rPr lang="ar-SA" dirty="0">
+                <a:latin typeface="Amiri" pitchFamily="2" charset="-78"/>
+                <a:ea typeface="Amiri" pitchFamily="2" charset="-78"/>
+                <a:cs typeface="Amiri" pitchFamily="2" charset="-78"/>
+              </a:rPr>
               <a:t>KEY WORDS — HOW TO TEACH EACH GROUP (EAL pre-teaching routine, 7 min)
 1. HEAR IT: say the word twice, clearly, with a gesture where possible.
 2. SAY IT: choral repetition — “I say, you say” — then two volunteers.
@@ -2597,7 +2637,11 @@
           <a:lstStyle/>
           <a:p>
             <a:r>
-              <a:rPr lang="en-US" dirty="0"/>
+              <a:rPr lang="ar-SA" dirty="0">
+                <a:latin typeface="Amiri" pitchFamily="2" charset="-78"/>
+                <a:ea typeface="Amiri" pitchFamily="2" charset="-78"/>
+                <a:cs typeface="Amiri" pitchFamily="2" charset="-78"/>
+              </a:rPr>
               <a:t>KEY WORDS — Essay and exam craft (website vocabulary (1 of 2)). Hear → Say → See → Use. Transliteration is printed for Core students (cover it for Develop/Stretch).
 The essay in five words: الأُطْرُوحَةُ (thesis) → الدَّلِيلُ (evidence) → نَقِيضُ الحُجَّةِ (the counter-argument, conceded) → الرَّدُّ (the refutation) → الخَاتِمَةُ (the conclusion). التَّنَوُّعُ المَعْجَمِيُّ (lexical variety) and الدِّقَّةُ تَحْتَ ضَغْطِ الوَقْتِ (accuracy under time pressure) are today’s two challenges.</a:t>
             </a:r>
@@ -2686,7 +2730,11 @@
           <a:lstStyle/>
           <a:p>
             <a:r>
-              <a:rPr lang="en-US" dirty="0"/>
+              <a:rPr lang="ar-SA" dirty="0">
+                <a:latin typeface="Amiri" pitchFamily="2" charset="-78"/>
+                <a:ea typeface="Amiri" pitchFamily="2" charset="-78"/>
+                <a:cs typeface="Amiri" pitchFamily="2" charset="-78"/>
+              </a:rPr>
               <a:t>KEY WORDS — Essay and exam craft (website vocabulary (2 of 2)). Hear → Say → See → Use. Transliteration is printed for Core students (cover it for Develop/Stretch).
 The essay in five words: الأُطْرُوحَةُ (thesis) → الدَّلِيلُ (evidence) → نَقِيضُ الحُجَّةِ (the counter-argument, conceded) → الرَّدُّ (the refutation) → الخَاتِمَةُ (the conclusion). التَّنَوُّعُ المَعْجَمِيُّ (lexical variety) and الدِّقَّةُ تَحْتَ ضَغْطِ الوَقْتِ (accuracy under time pressure) are today’s two challenges.</a:t>
             </a:r>
@@ -3171,6 +3219,7 @@
                   <a:srgbClr val="D4AF37"/>
                 </a:solidFill>
                 <a:latin typeface="Amiri" pitchFamily="2" charset="-78"/>
+                <a:ea typeface="Amiri" pitchFamily="2" charset="-78"/>
                 <a:cs typeface="Amiri" pitchFamily="2" charset="-78"/>
               </a:rPr>
               <a:t>م</a:t>
@@ -3377,6 +3426,7 @@
                   <a:srgbClr val="D4AF37"/>
                 </a:solidFill>
                 <a:latin typeface="Amiri" pitchFamily="2" charset="-78"/>
+                <a:ea typeface="Amiri" pitchFamily="2" charset="-78"/>
                 <a:cs typeface="Amiri" pitchFamily="2" charset="-78"/>
               </a:rPr>
               <a:t>الوَرَقَةُ الرَّابِعَةُ — الكِتَابَةُ المُوَسَّعَةُ: هَيْكَلُ المَقَالِ تَحْتَ ضَغْطِ الوَقْتِ</a:t>
@@ -3834,6 +3884,7 @@
                   <a:srgbClr val="D4AF37"/>
                 </a:solidFill>
                 <a:latin typeface="Amiri" pitchFamily="2" charset="-78"/>
+                <a:ea typeface="Amiri" pitchFamily="2" charset="-78"/>
                 <a:cs typeface="Amiri" pitchFamily="2" charset="-78"/>
               </a:rPr>
               <a:t>م</a:t>
@@ -4154,6 +4205,7 @@
                   <a:srgbClr val="8A6D1E"/>
                 </a:solidFill>
                 <a:latin typeface="Amiri" pitchFamily="2" charset="-78"/>
+                <a:ea typeface="Amiri" pitchFamily="2" charset="-78"/>
                 <a:cs typeface="Amiri" pitchFamily="2" charset="-78"/>
               </a:rPr>
               <a:t>الوَقْتُ وَالهَيْكَلُ</a:t>
@@ -4778,6 +4830,7 @@
                   <a:srgbClr val="1B3B6F"/>
                 </a:solidFill>
                 <a:latin typeface="Amiri" pitchFamily="2" charset="-78"/>
+                <a:ea typeface="Amiri" pitchFamily="2" charset="-78"/>
                 <a:cs typeface="Amiri" pitchFamily="2" charset="-78"/>
               </a:rPr>
               <a:t>عِشْرُونَ دَقِيقَةً · خَمْسٌ وَثَلَاثُونَ · خَمْسٌ</a:t>
@@ -4877,6 +4930,7 @@
                   <a:srgbClr val="1B3B6F"/>
                 </a:solidFill>
                 <a:latin typeface="Amiri" pitchFamily="2" charset="-78"/>
+                <a:ea typeface="Amiri" pitchFamily="2" charset="-78"/>
                 <a:cs typeface="Amiri" pitchFamily="2" charset="-78"/>
               </a:rPr>
               <a:t>أُطْرُوحَةٌ ← دَلِيلٌ</a:t>
@@ -4976,6 +5030,7 @@
                   <a:srgbClr val="1B3B6F"/>
                 </a:solidFill>
                 <a:latin typeface="Amiri" pitchFamily="2" charset="-78"/>
+                <a:ea typeface="Amiri" pitchFamily="2" charset="-78"/>
                 <a:cs typeface="Amiri" pitchFamily="2" charset="-78"/>
               </a:rPr>
               <a:t>صَحِيحٌ أَنَّ … غَيْرَ أَنَّ ← وَبِنَاءً عَلَى مَا سَبَقَ</a:t>
@@ -5147,6 +5202,7 @@
                   <a:srgbClr val="D4AF37"/>
                 </a:solidFill>
                 <a:latin typeface="Amiri" pitchFamily="2" charset="-78"/>
+                <a:ea typeface="Amiri" pitchFamily="2" charset="-78"/>
                 <a:cs typeface="Amiri" pitchFamily="2" charset="-78"/>
               </a:rPr>
               <a:t>م</a:t>
@@ -5467,6 +5523,7 @@
                   <a:srgbClr val="8A6D1E"/>
                 </a:solidFill>
                 <a:latin typeface="Amiri" pitchFamily="2" charset="-78"/>
+                <a:ea typeface="Amiri" pitchFamily="2" charset="-78"/>
                 <a:cs typeface="Amiri" pitchFamily="2" charset="-78"/>
               </a:rPr>
               <a:t>مَعَايِيرُ التَّقْيِيمِ</a:t>
@@ -6303,6 +6360,7 @@
                   <a:srgbClr val="D4AF37"/>
                 </a:solidFill>
                 <a:latin typeface="Amiri" pitchFamily="2" charset="-78"/>
+                <a:ea typeface="Amiri" pitchFamily="2" charset="-78"/>
                 <a:cs typeface="Amiri" pitchFamily="2" charset="-78"/>
               </a:rPr>
               <a:t>م</a:t>
@@ -6623,6 +6681,7 @@
                   <a:srgbClr val="8A6D1E"/>
                 </a:solidFill>
                 <a:latin typeface="Amiri" pitchFamily="2" charset="-78"/>
+                <a:ea typeface="Amiri" pitchFamily="2" charset="-78"/>
                 <a:cs typeface="Amiri" pitchFamily="2" charset="-78"/>
               </a:rPr>
               <a:t>خُطَّةُ أَرْبَعِ دَقَائِقَ</a:t>
@@ -6941,6 +7000,7 @@
                   <a:srgbClr val="1B3B6F"/>
                 </a:solidFill>
                 <a:latin typeface="Amiri" pitchFamily="2" charset="-78"/>
+                <a:ea typeface="Amiri" pitchFamily="2" charset="-78"/>
                 <a:cs typeface="Amiri" pitchFamily="2" charset="-78"/>
               </a:rPr>
               <a:t>سِلَاحٌ ذُو حَدَّيْنِ</a:t>
@@ -7185,6 +7245,7 @@
                   <a:srgbClr val="1B3B6F"/>
                 </a:solidFill>
                 <a:latin typeface="Amiri" pitchFamily="2" charset="-78"/>
+                <a:ea typeface="Amiri" pitchFamily="2" charset="-78"/>
                 <a:cs typeface="Amiri" pitchFamily="2" charset="-78"/>
               </a:rPr>
               <a:t>البَاحِثُونَ: الإِفْرَاطُ ← التَّرْكِيزُ</a:t>
@@ -7429,6 +7490,7 @@
                   <a:srgbClr val="1B3B6F"/>
                 </a:solidFill>
                 <a:latin typeface="Amiri" pitchFamily="2" charset="-78"/>
+                <a:ea typeface="Amiri" pitchFamily="2" charset="-78"/>
                 <a:cs typeface="Amiri" pitchFamily="2" charset="-78"/>
               </a:rPr>
               <a:t>تُقَرِّبُ النَّاسَ ✗ ← تَنْشُرُ المَعْلُومَاتِ المُضَلِّلَةَ</a:t>
@@ -7673,6 +7735,7 @@
                   <a:srgbClr val="1B3B6F"/>
                 </a:solidFill>
                 <a:latin typeface="Amiri" pitchFamily="2" charset="-78"/>
+                <a:ea typeface="Amiri" pitchFamily="2" charset="-78"/>
                 <a:cs typeface="Amiri" pitchFamily="2" charset="-78"/>
               </a:rPr>
               <a:t>ضَوَابِطُ حَكِيمَةٌ · اسْتِخْدَامٌ وَاعٍ</a:t>
@@ -7852,6 +7915,7 @@
                   <a:srgbClr val="1B3B6F"/>
                 </a:solidFill>
                 <a:latin typeface="Amiri" pitchFamily="2" charset="-78"/>
+                <a:ea typeface="Amiri" pitchFamily="2" charset="-78"/>
                 <a:cs typeface="Amiri" pitchFamily="2" charset="-78"/>
               </a:rPr>
               <a:t>تَرْبِيَةُ الأَجْيَالِ ← الفَوَائِدُ</a:t>
@@ -8164,6 +8228,7 @@
                   <a:srgbClr val="D4AF37"/>
                 </a:solidFill>
                 <a:latin typeface="Amiri" pitchFamily="2" charset="-78"/>
+                <a:ea typeface="Amiri" pitchFamily="2" charset="-78"/>
                 <a:cs typeface="Amiri" pitchFamily="2" charset="-78"/>
               </a:rPr>
               <a:t>م</a:t>
@@ -8484,6 +8549,7 @@
                   <a:srgbClr val="8A6D1E"/>
                 </a:solidFill>
                 <a:latin typeface="Amiri" pitchFamily="2" charset="-78"/>
+                <a:ea typeface="Amiri" pitchFamily="2" charset="-78"/>
                 <a:cs typeface="Amiri" pitchFamily="2" charset="-78"/>
               </a:rPr>
               <a:t>اخْتَرْ مَقَالَكَ</a:t>
@@ -8659,6 +8725,7 @@
                   <a:srgbClr val="2E8B57"/>
                 </a:solidFill>
                 <a:latin typeface="Amiri" pitchFamily="2" charset="-78"/>
+                <a:ea typeface="Amiri" pitchFamily="2" charset="-78"/>
                 <a:cs typeface="Amiri" pitchFamily="2" charset="-78"/>
               </a:rPr>
               <a:t>الأَسَاسُ</a:t>
@@ -8953,6 +9020,7 @@
                   <a:srgbClr val="C9780A"/>
                 </a:solidFill>
                 <a:latin typeface="Amiri" pitchFamily="2" charset="-78"/>
+                <a:ea typeface="Amiri" pitchFamily="2" charset="-78"/>
                 <a:cs typeface="Amiri" pitchFamily="2" charset="-78"/>
               </a:rPr>
               <a:t>التَّطْوِيرُ</a:t>
@@ -9247,6 +9315,7 @@
                   <a:srgbClr val="B83227"/>
                 </a:solidFill>
                 <a:latin typeface="Amiri" pitchFamily="2" charset="-78"/>
+                <a:ea typeface="Amiri" pitchFamily="2" charset="-78"/>
                 <a:cs typeface="Amiri" pitchFamily="2" charset="-78"/>
               </a:rPr>
               <a:t>التَّحَدِّي</a:t>
@@ -9537,6 +9606,7 @@
                   <a:srgbClr val="D4AF37"/>
                 </a:solidFill>
                 <a:latin typeface="Amiri" pitchFamily="2" charset="-78"/>
+                <a:ea typeface="Amiri" pitchFamily="2" charset="-78"/>
                 <a:cs typeface="Amiri" pitchFamily="2" charset="-78"/>
               </a:rPr>
               <a:t>م</a:t>
@@ -9857,6 +9927,7 @@
                   <a:srgbClr val="8A6D1E"/>
                 </a:solidFill>
                 <a:latin typeface="Amiri" pitchFamily="2" charset="-78"/>
+                <a:ea typeface="Amiri" pitchFamily="2" charset="-78"/>
                 <a:cs typeface="Amiri" pitchFamily="2" charset="-78"/>
               </a:rPr>
               <a:t>الصِّحَّةُ النَّفْسِيَّةُ</a:t>
@@ -10045,6 +10116,7 @@
                   <a:srgbClr val="1F2A37"/>
                 </a:solidFill>
                 <a:latin typeface="Amiri" pitchFamily="2" charset="-78"/>
+                <a:ea typeface="Amiri" pitchFamily="2" charset="-78"/>
                 <a:cs typeface="Amiri" pitchFamily="2" charset="-78"/>
               </a:rPr>
               <a:t>الصِّحَّةُ النَّفْسِيَّةُ أَهَمُّ مِنَ الصِّحَّةِ الجَسَدِيَّةِ</a:t>
@@ -10071,6 +10143,7 @@
                   <a:srgbClr val="1F2A37"/>
                 </a:solidFill>
                 <a:latin typeface="Amiri" pitchFamily="2" charset="-78"/>
+                <a:ea typeface="Amiri" pitchFamily="2" charset="-78"/>
                 <a:cs typeface="Amiri" pitchFamily="2" charset="-78"/>
               </a:rPr>
               <a:t>هَلْ تُوَافِقُ؟</a:t>
@@ -10173,6 +10246,7 @@
                   <a:srgbClr val="1F2A37"/>
                 </a:solidFill>
                 <a:latin typeface="Amiri" pitchFamily="2" charset="-78"/>
+                <a:ea typeface="Amiri" pitchFamily="2" charset="-78"/>
                 <a:cs typeface="Amiri" pitchFamily="2" charset="-78"/>
               </a:rPr>
               <a:t>أَكَّدَ … أَنَّ</a:t>
@@ -10199,6 +10273,7 @@
                   <a:srgbClr val="1F2A37"/>
                 </a:solidFill>
                 <a:latin typeface="Amiri" pitchFamily="2" charset="-78"/>
+                <a:ea typeface="Amiri" pitchFamily="2" charset="-78"/>
                 <a:cs typeface="Amiri" pitchFamily="2" charset="-78"/>
               </a:rPr>
               <a:t>صَحِيحٌ أَنَّ</a:t>
@@ -10263,6 +10338,7 @@
                   <a:srgbClr val="1F2A37"/>
                 </a:solidFill>
                 <a:latin typeface="Amiri" pitchFamily="2" charset="-78"/>
+                <a:ea typeface="Amiri" pitchFamily="2" charset="-78"/>
                 <a:cs typeface="Amiri" pitchFamily="2" charset="-78"/>
               </a:rPr>
               <a:t>غَيْرَ أَنَّ</a:t>
@@ -10327,6 +10403,7 @@
                   <a:srgbClr val="1F2A37"/>
                 </a:solidFill>
                 <a:latin typeface="Amiri" pitchFamily="2" charset="-78"/>
+                <a:ea typeface="Amiri" pitchFamily="2" charset="-78"/>
                 <a:cs typeface="Amiri" pitchFamily="2" charset="-78"/>
               </a:rPr>
               <a:t>وَبِنَاءً عَلَى مَا سَبَقَ</a:t>
@@ -10450,6 +10527,7 @@
                   <a:srgbClr val="1B3B6F"/>
                 </a:solidFill>
                 <a:latin typeface="Amiri" pitchFamily="2" charset="-78"/>
+                <a:ea typeface="Amiri" pitchFamily="2" charset="-78"/>
                 <a:cs typeface="Amiri" pitchFamily="2" charset="-78"/>
               </a:rPr>
               <a:t>لَا تَقِلُّ أَهَمِّيَّةً عَنِ</a:t>
@@ -10526,6 +10604,7 @@
                   <a:srgbClr val="1B3B6F"/>
                 </a:solidFill>
                 <a:latin typeface="Amiri" pitchFamily="2" charset="-78"/>
+                <a:ea typeface="Amiri" pitchFamily="2" charset="-78"/>
                 <a:cs typeface="Amiri" pitchFamily="2" charset="-78"/>
               </a:rPr>
               <a:t>التَّوَتُّرَ المُزْمِنَ يُضْعِفُ المَنَاعَةَ</a:t>
@@ -10602,6 +10681,7 @@
                   <a:srgbClr val="1B3B6F"/>
                 </a:solidFill>
                 <a:latin typeface="Amiri" pitchFamily="2" charset="-78"/>
+                <a:ea typeface="Amiri" pitchFamily="2" charset="-78"/>
                 <a:cs typeface="Amiri" pitchFamily="2" charset="-78"/>
               </a:rPr>
               <a:t>إِهْمَالَ النَّفْسِ</a:t>
@@ -10678,6 +10758,7 @@
                   <a:srgbClr val="1B3B6F"/>
                 </a:solidFill>
                 <a:latin typeface="Amiri" pitchFamily="2" charset="-78"/>
+                <a:ea typeface="Amiri" pitchFamily="2" charset="-78"/>
                 <a:cs typeface="Amiri" pitchFamily="2" charset="-78"/>
               </a:rPr>
               <a:t>لَقَلَّتْ حَالَاتُ الاحْتِرَاقِ</a:t>
@@ -10754,6 +10835,7 @@
                   <a:srgbClr val="1B3B6F"/>
                 </a:solidFill>
                 <a:latin typeface="Amiri" pitchFamily="2" charset="-78"/>
+                <a:ea typeface="Amiri" pitchFamily="2" charset="-78"/>
                 <a:cs typeface="Amiri" pitchFamily="2" charset="-78"/>
               </a:rPr>
               <a:t>أَنْ نُولِيَ … العِنَايَةَ</a:t>
@@ -10925,6 +11007,7 @@
                   <a:srgbClr val="D4AF37"/>
                 </a:solidFill>
                 <a:latin typeface="Amiri" pitchFamily="2" charset="-78"/>
+                <a:ea typeface="Amiri" pitchFamily="2" charset="-78"/>
                 <a:cs typeface="Amiri" pitchFamily="2" charset="-78"/>
               </a:rPr>
               <a:t>م</a:t>
@@ -11245,6 +11328,7 @@
                   <a:srgbClr val="8A6D1E"/>
                 </a:solidFill>
                 <a:latin typeface="Amiri" pitchFamily="2" charset="-78"/>
+                <a:ea typeface="Amiri" pitchFamily="2" charset="-78"/>
                 <a:cs typeface="Amiri" pitchFamily="2" charset="-78"/>
               </a:rPr>
               <a:t>التَّعْلِيمُ الجَامِعِيُّ</a:t>
@@ -11433,6 +11517,7 @@
                   <a:srgbClr val="1F2A37"/>
                 </a:solidFill>
                 <a:latin typeface="Amiri" pitchFamily="2" charset="-78"/>
+                <a:ea typeface="Amiri" pitchFamily="2" charset="-78"/>
                 <a:cs typeface="Amiri" pitchFamily="2" charset="-78"/>
               </a:rPr>
               <a:t>التَّعْلِيمُ الجَامِعِيُّ لَمْ يَعُدْ ضَرُورِيًّا لِلنَّجَاحِ فِي عَالَمِ اليَوْمِ</a:t>
@@ -11459,6 +11544,7 @@
                   <a:srgbClr val="1F2A37"/>
                 </a:solidFill>
                 <a:latin typeface="Amiri" pitchFamily="2" charset="-78"/>
+                <a:ea typeface="Amiri" pitchFamily="2" charset="-78"/>
                 <a:cs typeface="Amiri" pitchFamily="2" charset="-78"/>
               </a:rPr>
               <a:t>هَلْ تُوَافِقُ؟</a:t>
@@ -11561,6 +11647,7 @@
                   <a:srgbClr val="1F2A37"/>
                 </a:solidFill>
                 <a:latin typeface="Amiri" pitchFamily="2" charset="-78"/>
+                <a:ea typeface="Amiri" pitchFamily="2" charset="-78"/>
                 <a:cs typeface="Amiri" pitchFamily="2" charset="-78"/>
               </a:rPr>
               <a:t>صَحِيحٌ أَنَّ</a:t>
@@ -11587,6 +11674,7 @@
                   <a:srgbClr val="1F2A37"/>
                 </a:solidFill>
                 <a:latin typeface="Amiri" pitchFamily="2" charset="-78"/>
+                <a:ea typeface="Amiri" pitchFamily="2" charset="-78"/>
                 <a:cs typeface="Amiri" pitchFamily="2" charset="-78"/>
               </a:rPr>
               <a:t>غَيْرَ أَنَّ</a:t>
@@ -11786,6 +11874,7 @@
                   <a:srgbClr val="1B3B6F"/>
                 </a:solidFill>
                 <a:latin typeface="Amiri" pitchFamily="2" charset="-78"/>
+                <a:ea typeface="Amiri" pitchFamily="2" charset="-78"/>
                 <a:cs typeface="Amiri" pitchFamily="2" charset="-78"/>
               </a:rPr>
               <a:t>لَا يَزَالُ رَكِيزَةً مُهِمَّةً</a:t>
@@ -11862,6 +11951,7 @@
                   <a:srgbClr val="1B3B6F"/>
                 </a:solidFill>
                 <a:latin typeface="Amiri" pitchFamily="2" charset="-78"/>
+                <a:ea typeface="Amiri" pitchFamily="2" charset="-78"/>
                 <a:cs typeface="Amiri" pitchFamily="2" charset="-78"/>
               </a:rPr>
               <a:t>رُوَّادِ الأَعْمَالِ</a:t>
@@ -11938,6 +12028,7 @@
                   <a:srgbClr val="1B3B6F"/>
                 </a:solidFill>
                 <a:latin typeface="Amiri" pitchFamily="2" charset="-78"/>
+                <a:ea typeface="Amiri" pitchFamily="2" charset="-78"/>
                 <a:cs typeface="Amiri" pitchFamily="2" charset="-78"/>
               </a:rPr>
               <a:t>لَا تُبْنَى إِلَّا بِـ…</a:t>
@@ -12014,6 +12105,7 @@
                   <a:srgbClr val="1B3B6F"/>
                 </a:solidFill>
                 <a:latin typeface="Amiri" pitchFamily="2" charset="-78"/>
+                <a:ea typeface="Amiri" pitchFamily="2" charset="-78"/>
                 <a:cs typeface="Amiri" pitchFamily="2" charset="-78"/>
               </a:rPr>
               <a:t>تَرْفَعُ فُرَصَ التَّوْظِيفِ</a:t>
@@ -12090,6 +12182,7 @@
                   <a:srgbClr val="1B3B6F"/>
                 </a:solidFill>
                 <a:latin typeface="Amiri" pitchFamily="2" charset="-78"/>
+                <a:ea typeface="Amiri" pitchFamily="2" charset="-78"/>
                 <a:cs typeface="Amiri" pitchFamily="2" charset="-78"/>
               </a:rPr>
               <a:t>لَا أَنْ نَسْتَغْنِيَ عَنْهُ</a:t>
@@ -12261,6 +12354,7 @@
                   <a:srgbClr val="D4AF37"/>
                 </a:solidFill>
                 <a:latin typeface="Amiri" pitchFamily="2" charset="-78"/>
+                <a:ea typeface="Amiri" pitchFamily="2" charset="-78"/>
                 <a:cs typeface="Amiri" pitchFamily="2" charset="-78"/>
               </a:rPr>
               <a:t>م</a:t>
@@ -12581,6 +12675,7 @@
                   <a:srgbClr val="8A6D1E"/>
                 </a:solidFill>
                 <a:latin typeface="Amiri" pitchFamily="2" charset="-78"/>
+                <a:ea typeface="Amiri" pitchFamily="2" charset="-78"/>
                 <a:cs typeface="Amiri" pitchFamily="2" charset="-78"/>
               </a:rPr>
               <a:t>وَسَائِلُ التَّوَاصُلِ</a:t>
@@ -12769,6 +12864,7 @@
                   <a:srgbClr val="1F2A37"/>
                 </a:solidFill>
                 <a:latin typeface="Amiri" pitchFamily="2" charset="-78"/>
+                <a:ea typeface="Amiri" pitchFamily="2" charset="-78"/>
                 <a:cs typeface="Amiri" pitchFamily="2" charset="-78"/>
               </a:rPr>
               <a:t>وَسَائِلُ التَّوَاصُلِ الاجْتِمَاعِيِّ تُفِيدُ المُجْتَمَعَاتِ أَكْثَرَ مِمَّا تَضُرُّهَا</a:t>
@@ -12795,6 +12891,7 @@
                   <a:srgbClr val="1F2A37"/>
                 </a:solidFill>
                 <a:latin typeface="Amiri" pitchFamily="2" charset="-78"/>
+                <a:ea typeface="Amiri" pitchFamily="2" charset="-78"/>
                 <a:cs typeface="Amiri" pitchFamily="2" charset="-78"/>
               </a:rPr>
               <a:t>هَلْ تُوَافِقُ؟</a:t>
@@ -12897,6 +12994,7 @@
                   <a:srgbClr val="1F2A37"/>
                 </a:solidFill>
                 <a:latin typeface="Amiri" pitchFamily="2" charset="-78"/>
+                <a:ea typeface="Amiri" pitchFamily="2" charset="-78"/>
                 <a:cs typeface="Amiri" pitchFamily="2" charset="-78"/>
               </a:rPr>
               <a:t>صَحِيحٌ أَنَّ</a:t>
@@ -12923,6 +13021,7 @@
                   <a:srgbClr val="1F2A37"/>
                 </a:solidFill>
                 <a:latin typeface="Amiri" pitchFamily="2" charset="-78"/>
+                <a:ea typeface="Amiri" pitchFamily="2" charset="-78"/>
                 <a:cs typeface="Amiri" pitchFamily="2" charset="-78"/>
               </a:rPr>
               <a:t>غَيْرَ أَنَّ</a:t>
@@ -13122,6 +13221,7 @@
                   <a:srgbClr val="1B3B6F"/>
                 </a:solidFill>
                 <a:latin typeface="Amiri" pitchFamily="2" charset="-78"/>
+                <a:ea typeface="Amiri" pitchFamily="2" charset="-78"/>
                 <a:cs typeface="Amiri" pitchFamily="2" charset="-78"/>
               </a:rPr>
               <a:t>سِلَاحٌ ذُو حَدَّيْنِ</a:t>
@@ -13198,6 +13298,7 @@
                   <a:srgbClr val="1B3B6F"/>
                 </a:solidFill>
                 <a:latin typeface="Amiri" pitchFamily="2" charset="-78"/>
+                <a:ea typeface="Amiri" pitchFamily="2" charset="-78"/>
                 <a:cs typeface="Amiri" pitchFamily="2" charset="-78"/>
               </a:rPr>
               <a:t>تُقَرِّبُ النَّاسَ</a:t>
@@ -13274,6 +13375,7 @@
                   <a:srgbClr val="1B3B6F"/>
                 </a:solidFill>
                 <a:latin typeface="Amiri" pitchFamily="2" charset="-78"/>
+                <a:ea typeface="Amiri" pitchFamily="2" charset="-78"/>
                 <a:cs typeface="Amiri" pitchFamily="2" charset="-78"/>
               </a:rPr>
               <a:t>المَعْلُومَاتِ المُضَلِّلَةَ</a:t>
@@ -13350,6 +13452,7 @@
                   <a:srgbClr val="1B3B6F"/>
                 </a:solidFill>
                 <a:latin typeface="Amiri" pitchFamily="2" charset="-78"/>
+                <a:ea typeface="Amiri" pitchFamily="2" charset="-78"/>
                 <a:cs typeface="Amiri" pitchFamily="2" charset="-78"/>
               </a:rPr>
               <a:t>لَوْ وُضِعَتْ ضَوَابِطُ حَكِيمَةٌ</a:t>
@@ -13426,6 +13529,7 @@
                   <a:srgbClr val="1B3B6F"/>
                 </a:solidFill>
                 <a:latin typeface="Amiri" pitchFamily="2" charset="-78"/>
+                <a:ea typeface="Amiri" pitchFamily="2" charset="-78"/>
                 <a:cs typeface="Amiri" pitchFamily="2" charset="-78"/>
               </a:rPr>
               <a:t>لِكَيْ نَجْنِيَ فَوَائِدَهَا</a:t>
@@ -13597,6 +13701,7 @@
                   <a:srgbClr val="D4AF37"/>
                 </a:solidFill>
                 <a:latin typeface="Amiri" pitchFamily="2" charset="-78"/>
+                <a:ea typeface="Amiri" pitchFamily="2" charset="-78"/>
                 <a:cs typeface="Amiri" pitchFamily="2" charset="-78"/>
               </a:rPr>
               <a:t>م</a:t>
@@ -13917,6 +14022,7 @@
                   <a:srgbClr val="8A6D1E"/>
                 </a:solidFill>
                 <a:latin typeface="Amiri" pitchFamily="2" charset="-78"/>
+                <a:ea typeface="Amiri" pitchFamily="2" charset="-78"/>
                 <a:cs typeface="Amiri" pitchFamily="2" charset="-78"/>
               </a:rPr>
               <a:t>هَيْكَلُ المَقَالِ</a:t>
@@ -14092,6 +14198,7 @@
                   <a:srgbClr val="1B3B6F"/>
                 </a:solidFill>
                 <a:latin typeface="Amiri" pitchFamily="2" charset="-78"/>
+                <a:ea typeface="Amiri" pitchFamily="2" charset="-78"/>
                 <a:cs typeface="Amiri" pitchFamily="2" charset="-78"/>
               </a:rPr>
               <a:t>لَوْ ______ مُبَكِّرًا، لَكَانَ ______ .</a:t>
@@ -14168,6 +14275,7 @@
                   <a:srgbClr val="1B3B6F"/>
                 </a:solidFill>
                 <a:latin typeface="Amiri" pitchFamily="2" charset="-78"/>
+                <a:ea typeface="Amiri" pitchFamily="2" charset="-78"/>
                 <a:cs typeface="Amiri" pitchFamily="2" charset="-78"/>
               </a:rPr>
               <a:t>إِذَا ______ ، سَيَكُونُ ______ .</a:t>
@@ -14244,6 +14352,7 @@
                   <a:srgbClr val="1B3B6F"/>
                 </a:solidFill>
                 <a:latin typeface="Amiri" pitchFamily="2" charset="-78"/>
+                <a:ea typeface="Amiri" pitchFamily="2" charset="-78"/>
                 <a:cs typeface="Amiri" pitchFamily="2" charset="-78"/>
               </a:rPr>
               <a:t>______ لَا يَقِلُّ أَهَمِّيَّةً عَنْ ______ .</a:t>
@@ -14320,6 +14429,7 @@
                   <a:srgbClr val="1B3B6F"/>
                 </a:solidFill>
                 <a:latin typeface="Amiri" pitchFamily="2" charset="-78"/>
+                <a:ea typeface="Amiri" pitchFamily="2" charset="-78"/>
                 <a:cs typeface="Amiri" pitchFamily="2" charset="-78"/>
               </a:rPr>
               <a:t>______ لِكَيْ ______ .</a:t>
@@ -14495,6 +14605,7 @@
                   <a:srgbClr val="1B3B6F"/>
                 </a:solidFill>
                 <a:latin typeface="Amiri" pitchFamily="2" charset="-78"/>
+                <a:ea typeface="Amiri" pitchFamily="2" charset="-78"/>
                 <a:cs typeface="Amiri" pitchFamily="2" charset="-78"/>
               </a:rPr>
               <a:t>يُشَارُ إِلَى أَنَّ ______ أَكْثَرَ مِمَّا ______ .</a:t>
@@ -14571,6 +14682,7 @@
                   <a:srgbClr val="1B3B6F"/>
                 </a:solidFill>
                 <a:latin typeface="Amiri" pitchFamily="2" charset="-78"/>
+                <a:ea typeface="Amiri" pitchFamily="2" charset="-78"/>
                 <a:cs typeface="Amiri" pitchFamily="2" charset="-78"/>
               </a:rPr>
               <a:t>أَكَّدَ البَاحِثُونَ أَنَّ ______ .</a:t>
@@ -14647,6 +14759,7 @@
                   <a:srgbClr val="1B3B6F"/>
                 </a:solidFill>
                 <a:latin typeface="Amiri" pitchFamily="2" charset="-78"/>
+                <a:ea typeface="Amiri" pitchFamily="2" charset="-78"/>
                 <a:cs typeface="Amiri" pitchFamily="2" charset="-78"/>
               </a:rPr>
               <a:t>صَحِيحٌ أَنَّ ______ ، غَيْرَ أَنَّ ______ .</a:t>
@@ -14723,6 +14836,7 @@
                   <a:srgbClr val="1B3B6F"/>
                 </a:solidFill>
                 <a:latin typeface="Amiri" pitchFamily="2" charset="-78"/>
+                <a:ea typeface="Amiri" pitchFamily="2" charset="-78"/>
                 <a:cs typeface="Amiri" pitchFamily="2" charset="-78"/>
               </a:rPr>
               <a:t>وَبِنَاءً عَلَى مَا سَبَقَ، يَتَطَلَّبُ الأَمْرُ أَنْ ______ .</a:t>
@@ -14871,6 +14985,7 @@
                   <a:srgbClr val="1B3B6F"/>
                 </a:solidFill>
                 <a:latin typeface="Amiri" pitchFamily="2" charset="-78"/>
+                <a:ea typeface="Amiri" pitchFamily="2" charset="-78"/>
                 <a:cs typeface="Amiri" pitchFamily="2" charset="-78"/>
               </a:rPr>
               <a:t>الصِّحَّةَ النَّفْسِيَّةَ  ·  التَّعْلِيمَ الجَامِعِيَّ  ·  وَسَائِلَ التَّوَاصُلِ  ·  سِلَاحٌ ذُو حَدَّيْنِ  ·  يُضْعِفُ التَّرْكِيزَ  ·  فُرَصَ التَّوْظِيفِ  ·  الدَّعْمِ النَّفْسِيِّ  ·  المَعْلُومَاتِ المُضَلِّلَةَ  ·  نُطَوِّرَ  ·  نُولِيَ … العِنَايَةَ  ·  نَجْنِيَ فَوَائِدَهَا  ·  الاسْتِخْدَامِ المَسْؤُولِ</a:t>
@@ -15004,6 +15119,7 @@
                   <a:srgbClr val="D4AF37"/>
                 </a:solidFill>
                 <a:latin typeface="Amiri" pitchFamily="2" charset="-78"/>
+                <a:ea typeface="Amiri" pitchFamily="2" charset="-78"/>
                 <a:cs typeface="Amiri" pitchFamily="2" charset="-78"/>
               </a:rPr>
               <a:t>م</a:t>
@@ -15324,6 +15440,7 @@
                   <a:srgbClr val="8A6D1E"/>
                 </a:solidFill>
                 <a:latin typeface="Amiri" pitchFamily="2" charset="-78"/>
+                <a:ea typeface="Amiri" pitchFamily="2" charset="-78"/>
                 <a:cs typeface="Amiri" pitchFamily="2" charset="-78"/>
               </a:rPr>
               <a:t>نَمُوذَجُ الإِجَابَةِ</a:t>
@@ -15437,6 +15554,7 @@
                   <a:srgbClr val="1F2A37"/>
                 </a:solidFill>
                 <a:latin typeface="Amiri" pitchFamily="2" charset="-78"/>
+                <a:ea typeface="Amiri" pitchFamily="2" charset="-78"/>
                 <a:cs typeface="Amiri" pitchFamily="2" charset="-78"/>
               </a:rPr>
               <a:t>يُشَارُ إِلَى أَنَّ الصِّحَّةَ النَّفْسِيَّةَ لَا تَقِلُّ أَهَمِّيَّةً عَنِ الصِّحَّةِ الجَسَدِيَّةِ. أَكَّدَ البَاحِثُونَ أَنَّ التَّوَتُّرَ المُزْمِنَ يُضْعِفُ المَنَاعَةَ وَيُؤَثِّرُ فِي الجَسَدِ. صَحِيحٌ أَنَّ الجَسَدَ يَحْتَاجُ إِلَى رِعَايَةٍ، غَيْرَ أَنَّ إِهْمَالَ النَّفْسِ يَهْدِمُ الصِّحَّةَ كُلَّهَا. وَلَوِ اهْتَمَّتِ المَدَارِسُ بِالدَّعْمِ النَّفْسِيِّ مُبَكِّرًا، لَقَلَّتْ حَالَاتُ الاحْتِرَاقِ. وَإِذَا وَازَنَ الإِنْسَانُ بَيْنَ الجَسَدِ وَالنَّفْسِ، عَاشَ حَيَاةً أَفْضَلَ. وَبِنَاءً عَلَى مَا سَبَقَ، يَتَطَلَّبُ الأَمْرُ أَنْ نُولِيَ الصِّحَّةَ النَّفْسِيَّةَ العِنَايَةَ الَّتِي تَسْتَحِقُّهَا.</a:t>
@@ -15933,6 +16051,7 @@
                   <a:srgbClr val="D4AF37"/>
                 </a:solidFill>
                 <a:latin typeface="Amiri" pitchFamily="2" charset="-78"/>
+                <a:ea typeface="Amiri" pitchFamily="2" charset="-78"/>
                 <a:cs typeface="Amiri" pitchFamily="2" charset="-78"/>
               </a:rPr>
               <a:t>م</a:t>
@@ -16253,6 +16372,7 @@
                   <a:srgbClr val="8A6D1E"/>
                 </a:solidFill>
                 <a:latin typeface="Amiri" pitchFamily="2" charset="-78"/>
+                <a:ea typeface="Amiri" pitchFamily="2" charset="-78"/>
                 <a:cs typeface="Amiri" pitchFamily="2" charset="-78"/>
               </a:rPr>
               <a:t>نَمُوذَجُ الإِجَابَةِ</a:t>
@@ -16366,6 +16486,7 @@
                   <a:srgbClr val="1F2A37"/>
                 </a:solidFill>
                 <a:latin typeface="Amiri" pitchFamily="2" charset="-78"/>
+                <a:ea typeface="Amiri" pitchFamily="2" charset="-78"/>
                 <a:cs typeface="Amiri" pitchFamily="2" charset="-78"/>
               </a:rPr>
               <a:t>يُشَارُ إِلَى أَنَّ التَّعْلِيمَ الجَامِعِيَّ لَا يَزَالُ رَكِيزَةً مُهِمَّةً لِلنَّجَاحِ. صَحِيحٌ أَنَّ بَعْضَ رُوَّادِ الأَعْمَالِ نَجَحُوا دُونَ شَهَادَةٍ، غَيْرَ أَنَّ الأَغْلَبِيَّةَ تَحْتَاجُ إِلَى مَهَارَاتٍ لَا تُبْنَى إِلَّا بِالتَّعَلُّمِ المُنَظَّمِ. أَكَّدَ خُبَرَاءُ سُوقِ العَمَلِ أَنَّ المَعْرِفَةَ المُتَخَصِّصَةَ تَرْفَعُ فُرَصَ التَّوْظِيفِ. وَإِذَا طَوَّرَتِ الجَامِعَاتُ مَنَاهِجَهَا، سَيَزْدَادُ ارْتِبَاطُهَا بِالوَاقِعِ. وَلَوِ اقْتَصَرْنَا عَلَى المَهَارَاتِ الذَّاتِيَّةِ وَحْدَهَا، لَحُرِمَ كَثِيرُونَ مِنْ فُرَصٍ عَادِلَةٍ. وَبِنَاءً عَلَى مَا سَبَقَ، يَنْبَغِي أَنْ نُطَوِّرَ التَّعْلِيمَ لَا أَنْ نَسْتَغْنِيَ عَنْهُ.</a:t>
@@ -16862,6 +16983,7 @@
                   <a:srgbClr val="D4AF37"/>
                 </a:solidFill>
                 <a:latin typeface="Amiri" pitchFamily="2" charset="-78"/>
+                <a:ea typeface="Amiri" pitchFamily="2" charset="-78"/>
                 <a:cs typeface="Amiri" pitchFamily="2" charset="-78"/>
               </a:rPr>
               <a:t>م</a:t>
@@ -17182,6 +17304,7 @@
                   <a:srgbClr val="8A6D1E"/>
                 </a:solidFill>
                 <a:latin typeface="Amiri" pitchFamily="2" charset="-78"/>
+                <a:ea typeface="Amiri" pitchFamily="2" charset="-78"/>
                 <a:cs typeface="Amiri" pitchFamily="2" charset="-78"/>
               </a:rPr>
               <a:t>آدَابُ الصَّفِّ</a:t>
@@ -18713,6 +18836,7 @@
                   <a:srgbClr val="D4AF37"/>
                 </a:solidFill>
                 <a:latin typeface="Amiri" pitchFamily="2" charset="-78"/>
+                <a:ea typeface="Amiri" pitchFamily="2" charset="-78"/>
                 <a:cs typeface="Amiri" pitchFamily="2" charset="-78"/>
               </a:rPr>
               <a:t>م</a:t>
@@ -19033,6 +19157,7 @@
                   <a:srgbClr val="8A6D1E"/>
                 </a:solidFill>
                 <a:latin typeface="Amiri" pitchFamily="2" charset="-78"/>
+                <a:ea typeface="Amiri" pitchFamily="2" charset="-78"/>
                 <a:cs typeface="Amiri" pitchFamily="2" charset="-78"/>
               </a:rPr>
               <a:t>نَمُوذَجُ الإِجَابَةِ</a:t>
@@ -19146,6 +19271,7 @@
                   <a:srgbClr val="1F2A37"/>
                 </a:solidFill>
                 <a:latin typeface="Amiri" pitchFamily="2" charset="-78"/>
+                <a:ea typeface="Amiri" pitchFamily="2" charset="-78"/>
                 <a:cs typeface="Amiri" pitchFamily="2" charset="-78"/>
               </a:rPr>
               <a:t>يُشَارُ إِلَى أَنَّ وَسَائِلَ التَّوَاصُلِ الاجْتِمَاعِيِّ سِلَاحٌ ذُو حَدَّيْنِ. صَحِيحٌ أَنَّهَا تُقَرِّبُ النَّاسَ وَتَنْشُرُ المَعْرِفَةَ، غَيْرَ أَنَّهَا تُعَمِّقُ الفَجْوَةَ وَتَنْشُرُ المَعْلُومَاتِ المُضَلِّلَةَ. أَكَّدَ البَاحِثُونَ أَنَّ الإِفْرَاطَ فِيهَا يُضْعِفُ التَّرْكِيزَ. وَلَوْ وُضِعَتْ ضَوَابِطُ حَكِيمَةٌ، لَتَقَلَّصَتِ الأَضْرَارُ. وَإِذَا اسْتَخْدَمْنَاهَا بِوَعْيٍ، سَتُصْبِحُ أَدَاةً لِلْبِنَاءِ. وَبِنَاءً عَلَى مَا سَبَقَ، يَتَطَلَّبُ الأَمْرُ أَنْ نُرَبِّيَ الأَجْيَالَ عَلَى الاسْتِخْدَامِ المَسْؤُولِ لِكَيْ نَجْنِيَ فَوَائِدَهَا وَنَتَجَنَّبَ مَخَاطِرَهَا.</a:t>
@@ -19642,6 +19768,7 @@
                   <a:srgbClr val="D4AF37"/>
                 </a:solidFill>
                 <a:latin typeface="Amiri" pitchFamily="2" charset="-78"/>
+                <a:ea typeface="Amiri" pitchFamily="2" charset="-78"/>
                 <a:cs typeface="Amiri" pitchFamily="2" charset="-78"/>
               </a:rPr>
               <a:t>م</a:t>
@@ -19962,6 +20089,7 @@
                   <a:srgbClr val="8A6D1E"/>
                 </a:solidFill>
                 <a:latin typeface="Amiri" pitchFamily="2" charset="-78"/>
+                <a:ea typeface="Amiri" pitchFamily="2" charset="-78"/>
                 <a:cs typeface="Amiri" pitchFamily="2" charset="-78"/>
               </a:rPr>
               <a:t>مِلَفُّ الكِتَابَةِ</a:t>
@@ -20874,6 +21002,7 @@
                   <a:srgbClr val="D4AF37"/>
                 </a:solidFill>
                 <a:latin typeface="Amiri" pitchFamily="2" charset="-78"/>
+                <a:ea typeface="Amiri" pitchFamily="2" charset="-78"/>
                 <a:cs typeface="Amiri" pitchFamily="2" charset="-78"/>
               </a:rPr>
               <a:t>م</a:t>
@@ -21194,6 +21323,7 @@
                   <a:srgbClr val="8A6D1E"/>
                 </a:solidFill>
                 <a:latin typeface="Amiri" pitchFamily="2" charset="-78"/>
+                <a:ea typeface="Amiri" pitchFamily="2" charset="-78"/>
                 <a:cs typeface="Amiri" pitchFamily="2" charset="-78"/>
               </a:rPr>
               <a:t>التَّأَمُّلُ</a:t>
@@ -21718,6 +21848,7 @@
                   <a:srgbClr val="1B3B6F"/>
                 </a:solidFill>
                 <a:latin typeface="Amiri" pitchFamily="2" charset="-78"/>
+                <a:ea typeface="Amiri" pitchFamily="2" charset="-78"/>
                 <a:cs typeface="Amiri" pitchFamily="2" charset="-78"/>
               </a:rPr>
               <a:t>بِنْيَةَ المَقَالِ</a:t>
@@ -21794,6 +21925,7 @@
                   <a:srgbClr val="1B3B6F"/>
                 </a:solidFill>
                 <a:latin typeface="Amiri" pitchFamily="2" charset="-78"/>
+                <a:ea typeface="Amiri" pitchFamily="2" charset="-78"/>
                 <a:cs typeface="Amiri" pitchFamily="2" charset="-78"/>
               </a:rPr>
               <a:t>أُتْقِنُ الآنَ ______ .</a:t>
@@ -21965,6 +22097,7 @@
                   <a:srgbClr val="D4AF37"/>
                 </a:solidFill>
                 <a:latin typeface="Amiri" pitchFamily="2" charset="-78"/>
+                <a:ea typeface="Amiri" pitchFamily="2" charset="-78"/>
                 <a:cs typeface="Amiri" pitchFamily="2" charset="-78"/>
               </a:rPr>
               <a:t>م</a:t>
@@ -22285,6 +22418,7 @@
                   <a:srgbClr val="8A6D1E"/>
                 </a:solidFill>
                 <a:latin typeface="Amiri" pitchFamily="2" charset="-78"/>
+                <a:ea typeface="Amiri" pitchFamily="2" charset="-78"/>
                 <a:cs typeface="Amiri" pitchFamily="2" charset="-78"/>
               </a:rPr>
               <a:t>قَيِّمْ عَمَلَكَ</a:t>
@@ -23442,6 +23576,7 @@
                   <a:srgbClr val="D4AF37"/>
                 </a:solidFill>
                 <a:latin typeface="Amiri" pitchFamily="2" charset="-78"/>
+                <a:ea typeface="Amiri" pitchFamily="2" charset="-78"/>
                 <a:cs typeface="Amiri" pitchFamily="2" charset="-78"/>
               </a:rPr>
               <a:t>م</a:t>
@@ -23762,6 +23897,7 @@
                   <a:srgbClr val="8A6D1E"/>
                 </a:solidFill>
                 <a:latin typeface="Amiri" pitchFamily="2" charset="-78"/>
+                <a:ea typeface="Amiri" pitchFamily="2" charset="-78"/>
                 <a:cs typeface="Amiri" pitchFamily="2" charset="-78"/>
               </a:rPr>
               <a:t>التَّحْضِيرُ لِلدَّرْسِ القَادِمِ</a:t>
@@ -23975,6 +24111,7 @@
                   <a:srgbClr val="1B3B6F"/>
                 </a:solidFill>
                 <a:latin typeface="Amiri" pitchFamily="2" charset="-78"/>
+                <a:ea typeface="Amiri" pitchFamily="2" charset="-78"/>
                 <a:cs typeface="Amiri" pitchFamily="2" charset="-78"/>
               </a:rPr>
               <a:t>تَمْثِيلُ الدَّوْرِ</a:t>
@@ -24064,6 +24201,7 @@
                   <a:srgbClr val="1B3B6F"/>
                 </a:solidFill>
                 <a:latin typeface="Amiri" pitchFamily="2" charset="-78"/>
+                <a:ea typeface="Amiri" pitchFamily="2" charset="-78"/>
                 <a:cs typeface="Amiri" pitchFamily="2" charset="-78"/>
               </a:rPr>
               <a:t>الاسْتِجَابَةُ لِلْمُحَفِّزَاتِ</a:t>
@@ -24153,6 +24291,7 @@
                   <a:srgbClr val="1B3B6F"/>
                 </a:solidFill>
                 <a:latin typeface="Amiri" pitchFamily="2" charset="-78"/>
+                <a:ea typeface="Amiri" pitchFamily="2" charset="-78"/>
                 <a:cs typeface="Amiri" pitchFamily="2" charset="-78"/>
               </a:rPr>
               <a:t>طَلَبُ المَعْلُومَاتِ</a:t>
@@ -24242,6 +24381,7 @@
                   <a:srgbClr val="1B3B6F"/>
                 </a:solidFill>
                 <a:latin typeface="Amiri" pitchFamily="2" charset="-78"/>
+                <a:ea typeface="Amiri" pitchFamily="2" charset="-78"/>
                 <a:cs typeface="Amiri" pitchFamily="2" charset="-78"/>
               </a:rPr>
               <a:t>التَّفَاوُضُ</a:t>
@@ -24331,6 +24471,7 @@
                   <a:srgbClr val="1B3B6F"/>
                 </a:solidFill>
                 <a:latin typeface="Amiri" pitchFamily="2" charset="-78"/>
+                <a:ea typeface="Amiri" pitchFamily="2" charset="-78"/>
                 <a:cs typeface="Amiri" pitchFamily="2" charset="-78"/>
               </a:rPr>
               <a:t>حَلُّ المُشْكِلَةِ</a:t>
@@ -24377,11 +24518,12 @@
               <a:buNone/>
             </a:pPr>
             <a:r>
-              <a:rPr lang="en-US" sz="1000" i="1" dirty="0">
+              <a:rPr lang="ar-SA" sz="1000" i="1" dirty="0">
                 <a:solidFill>
                   <a:srgbClr val="5A6472"/>
                 </a:solidFill>
                 <a:latin typeface="Calibri" pitchFamily="34" charset="0"/>
+                <a:ea typeface="Amiri" pitchFamily="2" charset="-78"/>
                 <a:cs typeface="Amiri" pitchFamily="2" charset="-78"/>
               </a:rPr>
               <a:t>  pl. حُلُولٌ</a:t>
@@ -24496,6 +24638,7 @@
                   <a:srgbClr val="1B3B6F"/>
                 </a:solidFill>
                 <a:latin typeface="Amiri" pitchFamily="2" charset="-78"/>
+                <a:ea typeface="Amiri" pitchFamily="2" charset="-78"/>
                 <a:cs typeface="Amiri" pitchFamily="2" charset="-78"/>
               </a:rPr>
               <a:t>مِنْ فَضْلِكَ، أُرِيدُ أَنْ ______ .</a:t>
@@ -25165,6 +25308,7 @@
                   <a:srgbClr val="FFFFFF"/>
                 </a:solidFill>
                 <a:latin typeface="Amiri" pitchFamily="2" charset="-78"/>
+                <a:ea typeface="Amiri" pitchFamily="2" charset="-78"/>
                 <a:cs typeface="Amiri" pitchFamily="2" charset="-78"/>
               </a:rPr>
               <a:t>أَحْسَنْتُمْ! إِلَى اللِّقَاءِ</a:t>
@@ -25317,6 +25461,7 @@
                   <a:srgbClr val="D4AF37"/>
                 </a:solidFill>
                 <a:latin typeface="Amiri" pitchFamily="2" charset="-78"/>
+                <a:ea typeface="Amiri" pitchFamily="2" charset="-78"/>
                 <a:cs typeface="Amiri" pitchFamily="2" charset="-78"/>
               </a:rPr>
               <a:t>الوَرَقَةُ الثَّالِثَةُ — تَمْثِيلُ الدَّوْرِ</a:t>
@@ -25450,6 +25595,7 @@
                   <a:srgbClr val="D4AF37"/>
                 </a:solidFill>
                 <a:latin typeface="Amiri" pitchFamily="2" charset="-78"/>
+                <a:ea typeface="Amiri" pitchFamily="2" charset="-78"/>
                 <a:cs typeface="Amiri" pitchFamily="2" charset="-78"/>
               </a:rPr>
               <a:t>م</a:t>
@@ -25770,6 +25916,7 @@
                   <a:srgbClr val="8A6D1E"/>
                 </a:solidFill>
                 <a:latin typeface="Amiri" pitchFamily="2" charset="-78"/>
+                <a:ea typeface="Amiri" pitchFamily="2" charset="-78"/>
                 <a:cs typeface="Amiri" pitchFamily="2" charset="-78"/>
               </a:rPr>
               <a:t>خَرِيطَةُ الدَّرْسِ</a:t>
@@ -26084,6 +26231,7 @@
                   <a:srgbClr val="0E7C86"/>
                 </a:solidFill>
                 <a:latin typeface="Amiri" pitchFamily="2" charset="-78"/>
+                <a:ea typeface="Amiri" pitchFamily="2" charset="-78"/>
                 <a:cs typeface="Amiri" pitchFamily="2" charset="-78"/>
               </a:rPr>
               <a:t>اِبْدَأِ الآنَ</a:t>
@@ -26360,6 +26508,7 @@
                   <a:srgbClr val="1B3B6F"/>
                 </a:solidFill>
                 <a:latin typeface="Amiri" pitchFamily="2" charset="-78"/>
+                <a:ea typeface="Amiri" pitchFamily="2" charset="-78"/>
                 <a:cs typeface="Amiri" pitchFamily="2" charset="-78"/>
               </a:rPr>
               <a:t>الهَيْكَلُ</a:t>
@@ -26636,6 +26785,7 @@
                   <a:srgbClr val="6B4C9A"/>
                 </a:solidFill>
                 <a:latin typeface="Amiri" pitchFamily="2" charset="-78"/>
+                <a:ea typeface="Amiri" pitchFamily="2" charset="-78"/>
                 <a:cs typeface="Amiri" pitchFamily="2" charset="-78"/>
               </a:rPr>
               <a:t>شَاهِدْ</a:t>
@@ -26912,6 +27062,7 @@
                   <a:srgbClr val="1E6B52"/>
                 </a:solidFill>
                 <a:latin typeface="Amiri" pitchFamily="2" charset="-78"/>
+                <a:ea typeface="Amiri" pitchFamily="2" charset="-78"/>
                 <a:cs typeface="Amiri" pitchFamily="2" charset="-78"/>
               </a:rPr>
               <a:t>اُكْتُبْ</a:t>
@@ -27188,6 +27339,7 @@
                   <a:srgbClr val="8A6D1E"/>
                 </a:solidFill>
                 <a:latin typeface="Amiri" pitchFamily="2" charset="-78"/>
+                <a:ea typeface="Amiri" pitchFamily="2" charset="-78"/>
                 <a:cs typeface="Amiri" pitchFamily="2" charset="-78"/>
               </a:rPr>
               <a:t>قَيِّمْ</a:t>
@@ -27464,6 +27616,7 @@
                   <a:srgbClr val="C45A3C"/>
                 </a:solidFill>
                 <a:latin typeface="Amiri" pitchFamily="2" charset="-78"/>
+                <a:ea typeface="Amiri" pitchFamily="2" charset="-78"/>
                 <a:cs typeface="Amiri" pitchFamily="2" charset="-78"/>
               </a:rPr>
               <a:t>اِسْتَعِدَّ</a:t>
@@ -27707,6 +27860,7 @@
                   <a:srgbClr val="D4AF37"/>
                 </a:solidFill>
                 <a:latin typeface="Amiri" pitchFamily="2" charset="-78"/>
+                <a:ea typeface="Amiri" pitchFamily="2" charset="-78"/>
                 <a:cs typeface="Amiri" pitchFamily="2" charset="-78"/>
               </a:rPr>
               <a:t>م</a:t>
@@ -28027,6 +28181,7 @@
                   <a:srgbClr val="8A6D1E"/>
                 </a:solidFill>
                 <a:latin typeface="Amiri" pitchFamily="2" charset="-78"/>
+                <a:ea typeface="Amiri" pitchFamily="2" charset="-78"/>
                 <a:cs typeface="Amiri" pitchFamily="2" charset="-78"/>
               </a:rPr>
               <a:t>اِبْدَأِ الآنَ</a:t>
@@ -28213,6 +28368,7 @@
                   <a:srgbClr val="1B3B6F"/>
                 </a:solidFill>
                 <a:latin typeface="Amiri" pitchFamily="2" charset="-78"/>
+                <a:ea typeface="Amiri" pitchFamily="2" charset="-78"/>
                 <a:cs typeface="Amiri" pitchFamily="2" charset="-78"/>
               </a:rPr>
               <a:t>هَيْكَلُ المَقَالِ</a:t>
@@ -28677,6 +28833,7 @@
                   <a:srgbClr val="1B3B6F"/>
                 </a:solidFill>
                 <a:latin typeface="Amiri" pitchFamily="2" charset="-78"/>
+                <a:ea typeface="Amiri" pitchFamily="2" charset="-78"/>
                 <a:cs typeface="Amiri" pitchFamily="2" charset="-78"/>
               </a:rPr>
               <a:t>التَّنَوُّعُ المَعْجَمِيُّ</a:t>
@@ -29141,6 +29298,7 @@
                   <a:srgbClr val="1B3B6F"/>
                 </a:solidFill>
                 <a:latin typeface="Amiri" pitchFamily="2" charset="-78"/>
+                <a:ea typeface="Amiri" pitchFamily="2" charset="-78"/>
                 <a:cs typeface="Amiri" pitchFamily="2" charset="-78"/>
               </a:rPr>
               <a:t>الدِّقَّةُ تَحْتَ ضَغْطِ الوَقْتِ</a:t>
@@ -29693,6 +29851,7 @@
                   <a:srgbClr val="1F2A37"/>
                 </a:solidFill>
                 <a:latin typeface="Amiri" pitchFamily="2" charset="-78"/>
+                <a:ea typeface="Amiri" pitchFamily="2" charset="-78"/>
                 <a:cs typeface="Amiri" pitchFamily="2" charset="-78"/>
               </a:rPr>
               <a:t>صَحِيحٌ أَنَّ</a:t>
@@ -29794,6 +29953,7 @@
                   <a:srgbClr val="1F2A37"/>
                 </a:solidFill>
                 <a:latin typeface="Amiri" pitchFamily="2" charset="-78"/>
+                <a:ea typeface="Amiri" pitchFamily="2" charset="-78"/>
                 <a:cs typeface="Amiri" pitchFamily="2" charset="-78"/>
               </a:rPr>
               <a:t>أَكَّدَ البَاحِثُونَ أَنَّ</a:t>
@@ -29895,6 +30055,7 @@
                   <a:srgbClr val="1F2A37"/>
                 </a:solidFill>
                 <a:latin typeface="Amiri" pitchFamily="2" charset="-78"/>
+                <a:ea typeface="Amiri" pitchFamily="2" charset="-78"/>
                 <a:cs typeface="Amiri" pitchFamily="2" charset="-78"/>
               </a:rPr>
               <a:t>وَبِنَاءً عَلَى مَا سَبَقَ</a:t>
@@ -30043,6 +30204,7 @@
                   <a:srgbClr val="1B3B6F"/>
                 </a:solidFill>
                 <a:latin typeface="Amiri" pitchFamily="2" charset="-78"/>
+                <a:ea typeface="Amiri" pitchFamily="2" charset="-78"/>
                 <a:cs typeface="Amiri" pitchFamily="2" charset="-78"/>
               </a:rPr>
               <a:t>يَتَطَلَّبُ الأَمْرُ أَنْ</a:t>
@@ -30069,6 +30231,7 @@
                   <a:srgbClr val="1B3B6F"/>
                 </a:solidFill>
                 <a:latin typeface="Amiri" pitchFamily="2" charset="-78"/>
+                <a:ea typeface="Amiri" pitchFamily="2" charset="-78"/>
                 <a:cs typeface="Amiri" pitchFamily="2" charset="-78"/>
               </a:rPr>
               <a:t>الأَجْيَالَ عَلَى الاسْتِخْدَامِ المَسْؤُولِ</a:t>
@@ -30183,6 +30346,7 @@
                   <a:srgbClr val="1F2A37"/>
                 </a:solidFill>
                 <a:latin typeface="Amiri" pitchFamily="2" charset="-78"/>
+                <a:ea typeface="Amiri" pitchFamily="2" charset="-78"/>
                 <a:cs typeface="Amiri" pitchFamily="2" charset="-78"/>
               </a:rPr>
               <a:t>نُرَبِّيَ</a:t>
@@ -30284,6 +30448,7 @@
                   <a:srgbClr val="1F2A37"/>
                 </a:solidFill>
                 <a:latin typeface="Amiri" pitchFamily="2" charset="-78"/>
+                <a:ea typeface="Amiri" pitchFamily="2" charset="-78"/>
                 <a:cs typeface="Amiri" pitchFamily="2" charset="-78"/>
               </a:rPr>
               <a:t>نُرَبِّي</a:t>
@@ -30385,6 +30550,7 @@
                   <a:srgbClr val="1F2A37"/>
                 </a:solidFill>
                 <a:latin typeface="Amiri" pitchFamily="2" charset="-78"/>
+                <a:ea typeface="Amiri" pitchFamily="2" charset="-78"/>
                 <a:cs typeface="Amiri" pitchFamily="2" charset="-78"/>
               </a:rPr>
               <a:t>رَبَّيْنَا</a:t>
@@ -30720,6 +30886,7 @@
                   <a:srgbClr val="D4AF37"/>
                 </a:solidFill>
                 <a:latin typeface="Amiri" pitchFamily="2" charset="-78"/>
+                <a:ea typeface="Amiri" pitchFamily="2" charset="-78"/>
                 <a:cs typeface="Amiri" pitchFamily="2" charset="-78"/>
               </a:rPr>
               <a:t>م</a:t>
@@ -31040,6 +31207,7 @@
                   <a:srgbClr val="8A6D1E"/>
                 </a:solidFill>
                 <a:latin typeface="Amiri" pitchFamily="2" charset="-78"/>
+                <a:ea typeface="Amiri" pitchFamily="2" charset="-78"/>
                 <a:cs typeface="Amiri" pitchFamily="2" charset="-78"/>
               </a:rPr>
               <a:t>الإِجَابَاتُ وَالتَّعْلِيلُ</a:t>
@@ -31226,6 +31394,7 @@
                   <a:srgbClr val="1B3B6F"/>
                 </a:solidFill>
                 <a:latin typeface="Amiri" pitchFamily="2" charset="-78"/>
+                <a:ea typeface="Amiri" pitchFamily="2" charset="-78"/>
                 <a:cs typeface="Amiri" pitchFamily="2" charset="-78"/>
               </a:rPr>
               <a:t>هَيْكَلُ المَقَالِ</a:t>
@@ -31755,6 +31924,7 @@
                   <a:srgbClr val="1B3B6F"/>
                 </a:solidFill>
                 <a:latin typeface="Amiri" pitchFamily="2" charset="-78"/>
+                <a:ea typeface="Amiri" pitchFamily="2" charset="-78"/>
                 <a:cs typeface="Amiri" pitchFamily="2" charset="-78"/>
               </a:rPr>
               <a:t>التَّنَوُّعُ المَعْجَمِيُّ</a:t>
@@ -32284,6 +32454,7 @@
                   <a:srgbClr val="1B3B6F"/>
                 </a:solidFill>
                 <a:latin typeface="Amiri" pitchFamily="2" charset="-78"/>
+                <a:ea typeface="Amiri" pitchFamily="2" charset="-78"/>
                 <a:cs typeface="Amiri" pitchFamily="2" charset="-78"/>
               </a:rPr>
               <a:t>الدِّقَّةُ تَحْتَ ضَغْطِ الوَقْتِ</a:t>
@@ -32901,6 +33072,7 @@
                   <a:srgbClr val="9AA1AB"/>
                 </a:solidFill>
                 <a:latin typeface="Amiri" pitchFamily="2" charset="-78"/>
+                <a:ea typeface="Amiri" pitchFamily="2" charset="-78"/>
                 <a:cs typeface="Amiri" pitchFamily="2" charset="-78"/>
               </a:rPr>
               <a:t>صَحِيحٌ أَنَّ</a:t>
@@ -33002,6 +33174,7 @@
                   <a:srgbClr val="9AA1AB"/>
                 </a:solidFill>
                 <a:latin typeface="Amiri" pitchFamily="2" charset="-78"/>
+                <a:ea typeface="Amiri" pitchFamily="2" charset="-78"/>
                 <a:cs typeface="Amiri" pitchFamily="2" charset="-78"/>
               </a:rPr>
               <a:t>أَكَّدَ البَاحِثُونَ أَنَّ</a:t>
@@ -33130,6 +33303,7 @@
                   <a:srgbClr val="1F2A37"/>
                 </a:solidFill>
                 <a:latin typeface="Amiri" pitchFamily="2" charset="-78"/>
+                <a:ea typeface="Amiri" pitchFamily="2" charset="-78"/>
                 <a:cs typeface="Amiri" pitchFamily="2" charset="-78"/>
               </a:rPr>
               <a:t>وَبِنَاءً عَلَى مَا سَبَقَ</a:t>
@@ -33316,6 +33490,7 @@
                   <a:srgbClr val="1B3B6F"/>
                 </a:solidFill>
                 <a:latin typeface="Amiri" pitchFamily="2" charset="-78"/>
+                <a:ea typeface="Amiri" pitchFamily="2" charset="-78"/>
                 <a:cs typeface="Amiri" pitchFamily="2" charset="-78"/>
               </a:rPr>
               <a:t>يَتَطَلَّبُ الأَمْرُ أَنْ</a:t>
@@ -33342,6 +33517,7 @@
                   <a:srgbClr val="1B3B6F"/>
                 </a:solidFill>
                 <a:latin typeface="Amiri" pitchFamily="2" charset="-78"/>
+                <a:ea typeface="Amiri" pitchFamily="2" charset="-78"/>
                 <a:cs typeface="Amiri" pitchFamily="2" charset="-78"/>
               </a:rPr>
               <a:t>الأَجْيَالَ عَلَى الاسْتِخْدَامِ المَسْؤُولِ</a:t>
@@ -33483,6 +33659,7 @@
                   <a:srgbClr val="1F2A37"/>
                 </a:solidFill>
                 <a:latin typeface="Amiri" pitchFamily="2" charset="-78"/>
+                <a:ea typeface="Amiri" pitchFamily="2" charset="-78"/>
                 <a:cs typeface="Amiri" pitchFamily="2" charset="-78"/>
               </a:rPr>
               <a:t>نُرَبِّيَ</a:t>
@@ -33584,6 +33761,7 @@
                   <a:srgbClr val="9AA1AB"/>
                 </a:solidFill>
                 <a:latin typeface="Amiri" pitchFamily="2" charset="-78"/>
+                <a:ea typeface="Amiri" pitchFamily="2" charset="-78"/>
                 <a:cs typeface="Amiri" pitchFamily="2" charset="-78"/>
               </a:rPr>
               <a:t>نُرَبِّي</a:t>
@@ -33685,6 +33863,7 @@
                   <a:srgbClr val="9AA1AB"/>
                 </a:solidFill>
                 <a:latin typeface="Amiri" pitchFamily="2" charset="-78"/>
+                <a:ea typeface="Amiri" pitchFamily="2" charset="-78"/>
                 <a:cs typeface="Amiri" pitchFamily="2" charset="-78"/>
               </a:rPr>
               <a:t>رَبَّيْنَا</a:t>
@@ -33874,6 +34053,7 @@
                   <a:srgbClr val="1B3B6F"/>
                 </a:solidFill>
                 <a:latin typeface="Amiri" pitchFamily="2" charset="-78"/>
+                <a:ea typeface="Amiri" pitchFamily="2" charset="-78"/>
                 <a:cs typeface="Amiri" pitchFamily="2" charset="-78"/>
               </a:rPr>
               <a:t>أُطْرُوحَةٌ ← دَلِيلٌ ← صَحِيحٌ أَنَّ … غَيْرَ أَنَّ ← وَبِنَاءً عَلَى مَا سَبَقَ</a:t>
@@ -34007,6 +34187,7 @@
                   <a:srgbClr val="D4AF37"/>
                 </a:solidFill>
                 <a:latin typeface="Amiri" pitchFamily="2" charset="-78"/>
+                <a:ea typeface="Amiri" pitchFamily="2" charset="-78"/>
                 <a:cs typeface="Amiri" pitchFamily="2" charset="-78"/>
               </a:rPr>
               <a:t>م</a:t>
@@ -34327,6 +34508,7 @@
                   <a:srgbClr val="8A6D1E"/>
                 </a:solidFill>
                 <a:latin typeface="Amiri" pitchFamily="2" charset="-78"/>
+                <a:ea typeface="Amiri" pitchFamily="2" charset="-78"/>
                 <a:cs typeface="Amiri" pitchFamily="2" charset="-78"/>
               </a:rPr>
               <a:t>الأَهْدَافُ وَمَعَايِيرُ النَّجَاحِ</a:t>
@@ -34475,6 +34657,7 @@
                   <a:srgbClr val="8A6D1E"/>
                 </a:solidFill>
                 <a:latin typeface="Amiri" pitchFamily="2" charset="-78"/>
+                <a:ea typeface="Amiri" pitchFamily="2" charset="-78"/>
                 <a:cs typeface="Amiri" pitchFamily="2" charset="-78"/>
               </a:rPr>
               <a:t>سَتَتَعَلَّمُ اليَوْمَ</a:t>
@@ -35733,6 +35916,7 @@
                   <a:srgbClr val="D4AF37"/>
                 </a:solidFill>
                 <a:latin typeface="Amiri" pitchFamily="2" charset="-78"/>
+                <a:ea typeface="Amiri" pitchFamily="2" charset="-78"/>
                 <a:cs typeface="Amiri" pitchFamily="2" charset="-78"/>
               </a:rPr>
               <a:t>كَلِمَاتُ الدَّرْسِ</a:t>
@@ -35955,6 +36139,7 @@
                   <a:srgbClr val="1B3B6F"/>
                 </a:solidFill>
                 <a:latin typeface="Amiri" pitchFamily="2" charset="-78"/>
+                <a:ea typeface="Amiri" pitchFamily="2" charset="-78"/>
                 <a:cs typeface="Amiri" pitchFamily="2" charset="-78"/>
               </a:rPr>
               <a:t>وَقْتٌ</a:t>
@@ -35988,11 +36173,12 @@
               <a:buNone/>
             </a:pPr>
             <a:r>
-              <a:rPr lang="ur-PK" altLang="en-US" sz="1400" b="1" dirty="0">
+              <a:rPr lang="ar-SA" altLang="en-US" sz="1400" b="1" dirty="0">
                 <a:solidFill>
                   <a:srgbClr val="2E8B57"/>
                 </a:solidFill>
                 <a:latin typeface="Amiri" pitchFamily="2" charset="-78"/>
+                <a:ea typeface="Amiri" pitchFamily="2" charset="-78"/>
                 <a:cs typeface="Amiri" pitchFamily="2" charset="-78"/>
               </a:rPr>
               <a:t>‎وقت‎ </a:t>
@@ -36044,6 +36230,7 @@
                   <a:srgbClr val="1B3B6F"/>
                 </a:solidFill>
                 <a:latin typeface="Amiri" pitchFamily="2" charset="-78"/>
+                <a:ea typeface="Amiri" pitchFamily="2" charset="-78"/>
                 <a:cs typeface="Amiri" pitchFamily="2" charset="-78"/>
               </a:rPr>
               <a:t>نَقِيضٌ</a:t>
@@ -36077,11 +36264,12 @@
               <a:buNone/>
             </a:pPr>
             <a:r>
-              <a:rPr lang="ur-PK" altLang="en-US" sz="1400" b="1" dirty="0">
+              <a:rPr lang="ar-SA" altLang="en-US" sz="1400" b="1" dirty="0">
                 <a:solidFill>
                   <a:srgbClr val="2E8B57"/>
                 </a:solidFill>
                 <a:latin typeface="Amiri" pitchFamily="2" charset="-78"/>
+                <a:ea typeface="Amiri" pitchFamily="2" charset="-78"/>
                 <a:cs typeface="Amiri" pitchFamily="2" charset="-78"/>
               </a:rPr>
               <a:t>‎نقیض‎ </a:t>
@@ -36133,6 +36321,7 @@
                   <a:srgbClr val="1B3B6F"/>
                 </a:solidFill>
                 <a:latin typeface="Amiri" pitchFamily="2" charset="-78"/>
+                <a:ea typeface="Amiri" pitchFamily="2" charset="-78"/>
                 <a:cs typeface="Amiri" pitchFamily="2" charset="-78"/>
               </a:rPr>
               <a:t>خَاتِمَةٌ</a:t>
@@ -36166,11 +36355,12 @@
               <a:buNone/>
             </a:pPr>
             <a:r>
-              <a:rPr lang="ur-PK" altLang="en-US" sz="1400" b="1" dirty="0">
+              <a:rPr lang="ar-SA" altLang="en-US" sz="1400" b="1" dirty="0">
                 <a:solidFill>
                   <a:srgbClr val="2E8B57"/>
                 </a:solidFill>
                 <a:latin typeface="Amiri" pitchFamily="2" charset="-78"/>
+                <a:ea typeface="Amiri" pitchFamily="2" charset="-78"/>
                 <a:cs typeface="Amiri" pitchFamily="2" charset="-78"/>
               </a:rPr>
               <a:t>‎خاتمہ‎ </a:t>
@@ -36222,6 +36412,7 @@
                   <a:srgbClr val="1B3B6F"/>
                 </a:solidFill>
                 <a:latin typeface="Amiri" pitchFamily="2" charset="-78"/>
+                <a:ea typeface="Amiri" pitchFamily="2" charset="-78"/>
                 <a:cs typeface="Amiri" pitchFamily="2" charset="-78"/>
               </a:rPr>
               <a:t>دِقَّةٌ</a:t>
@@ -36255,11 +36446,12 @@
               <a:buNone/>
             </a:pPr>
             <a:r>
-              <a:rPr lang="ur-PK" altLang="en-US" sz="1400" b="1" dirty="0">
+              <a:rPr lang="ar-SA" altLang="en-US" sz="1400" b="1" dirty="0">
                 <a:solidFill>
                   <a:srgbClr val="2E8B57"/>
                 </a:solidFill>
                 <a:latin typeface="Amiri" pitchFamily="2" charset="-78"/>
+                <a:ea typeface="Amiri" pitchFamily="2" charset="-78"/>
                 <a:cs typeface="Amiri" pitchFamily="2" charset="-78"/>
               </a:rPr>
               <a:t>‎دقت‎ </a:t>
@@ -36311,6 +36503,7 @@
                   <a:srgbClr val="1B3B6F"/>
                 </a:solidFill>
                 <a:latin typeface="Amiri" pitchFamily="2" charset="-78"/>
+                <a:ea typeface="Amiri" pitchFamily="2" charset="-78"/>
                 <a:cs typeface="Amiri" pitchFamily="2" charset="-78"/>
               </a:rPr>
               <a:t>ضَغْطٌ</a:t>
@@ -36344,11 +36537,12 @@
               <a:buNone/>
             </a:pPr>
             <a:r>
-              <a:rPr lang="ur-PK" altLang="en-US" sz="1400" b="1" dirty="0">
+              <a:rPr lang="ar-SA" altLang="en-US" sz="1400" b="1" dirty="0">
                 <a:solidFill>
                   <a:srgbClr val="2E8B57"/>
                 </a:solidFill>
                 <a:latin typeface="Amiri" pitchFamily="2" charset="-78"/>
+                <a:ea typeface="Amiri" pitchFamily="2" charset="-78"/>
                 <a:cs typeface="Amiri" pitchFamily="2" charset="-78"/>
               </a:rPr>
               <a:t>‎دباؤ‎ </a:t>
@@ -36357,11 +36551,12 @@
               <a:buNone/>
             </a:pPr>
             <a:r>
-              <a:rPr lang="en-US" sz="950" b="1" dirty="0">
+              <a:rPr lang="ar-SA" sz="950" b="1" dirty="0">
                 <a:solidFill>
                   <a:srgbClr val="2E8B57"/>
                 </a:solidFill>
                 <a:latin typeface="Calibri" pitchFamily="34" charset="0"/>
+                <a:ea typeface="Amiri" pitchFamily="2" charset="-78"/>
                 <a:cs typeface="Amiri" pitchFamily="2" charset="-78"/>
               </a:rPr>
               <a:t> dabāo · pressure (Arabic ضَغْطٌ, Urdu دباؤ)</a:t>
@@ -36495,6 +36690,7 @@
                   <a:srgbClr val="D4AF37"/>
                 </a:solidFill>
                 <a:latin typeface="Amiri" pitchFamily="2" charset="-78"/>
+                <a:ea typeface="Amiri" pitchFamily="2" charset="-78"/>
                 <a:cs typeface="Amiri" pitchFamily="2" charset="-78"/>
               </a:rPr>
               <a:t>م</a:t>
@@ -36815,6 +37011,7 @@
                   <a:srgbClr val="8A6D1E"/>
                 </a:solidFill>
                 <a:latin typeface="Amiri" pitchFamily="2" charset="-78"/>
+                <a:ea typeface="Amiri" pitchFamily="2" charset="-78"/>
                 <a:cs typeface="Amiri" pitchFamily="2" charset="-78"/>
               </a:rPr>
               <a:t>كَلِمَاتُ الدَّرْسِ</a:t>
@@ -37053,6 +37250,7 @@
                   <a:srgbClr val="1B3B6F"/>
                 </a:solidFill>
                 <a:latin typeface="Amiri" pitchFamily="2" charset="-78"/>
+                <a:ea typeface="Amiri" pitchFamily="2" charset="-78"/>
                 <a:cs typeface="Amiri" pitchFamily="2" charset="-78"/>
               </a:rPr>
               <a:t>الكِتَابَةُ المُوَسَّعَةُ</a:t>
@@ -37372,6 +37570,7 @@
                   <a:srgbClr val="1B3B6F"/>
                 </a:solidFill>
                 <a:latin typeface="Amiri" pitchFamily="2" charset="-78"/>
+                <a:ea typeface="Amiri" pitchFamily="2" charset="-78"/>
                 <a:cs typeface="Amiri" pitchFamily="2" charset="-78"/>
               </a:rPr>
               <a:t>هَيْكَلُ المَقَالِ</a:t>
@@ -37529,6 +37728,7 @@
                   <a:srgbClr val="1B3B6F"/>
                 </a:solidFill>
                 <a:latin typeface="Amiri" pitchFamily="2" charset="-78"/>
+                <a:ea typeface="Amiri" pitchFamily="2" charset="-78"/>
                 <a:cs typeface="Amiri" pitchFamily="2" charset="-78"/>
               </a:rPr>
               <a:t>هَيَاكِلُ</a:t>
@@ -37794,6 +37994,7 @@
                   <a:srgbClr val="1B3B6F"/>
                 </a:solidFill>
                 <a:latin typeface="Amiri" pitchFamily="2" charset="-78"/>
+                <a:ea typeface="Amiri" pitchFamily="2" charset="-78"/>
                 <a:cs typeface="Amiri" pitchFamily="2" charset="-78"/>
               </a:rPr>
               <a:t>الأُطْرُوحَةُ</a:t>
@@ -37951,6 +38152,7 @@
                   <a:srgbClr val="1B3B6F"/>
                 </a:solidFill>
                 <a:latin typeface="Amiri" pitchFamily="2" charset="-78"/>
+                <a:ea typeface="Amiri" pitchFamily="2" charset="-78"/>
                 <a:cs typeface="Amiri" pitchFamily="2" charset="-78"/>
               </a:rPr>
               <a:t>الأُطْرُوحَاتُ</a:t>
@@ -38151,6 +38353,7 @@
                   <a:srgbClr val="1B3B6F"/>
                 </a:solidFill>
                 <a:latin typeface="Amiri" pitchFamily="2" charset="-78"/>
+                <a:ea typeface="Amiri" pitchFamily="2" charset="-78"/>
                 <a:cs typeface="Amiri" pitchFamily="2" charset="-78"/>
               </a:rPr>
               <a:t>نَقِيضُ الحُجَّةِ</a:t>
@@ -38338,6 +38541,7 @@
                   <a:srgbClr val="D4AF37"/>
                 </a:solidFill>
                 <a:latin typeface="Amiri" pitchFamily="2" charset="-78"/>
+                <a:ea typeface="Amiri" pitchFamily="2" charset="-78"/>
                 <a:cs typeface="Amiri" pitchFamily="2" charset="-78"/>
               </a:rPr>
               <a:t>م</a:t>
@@ -38658,6 +38862,7 @@
                   <a:srgbClr val="8A6D1E"/>
                 </a:solidFill>
                 <a:latin typeface="Amiri" pitchFamily="2" charset="-78"/>
+                <a:ea typeface="Amiri" pitchFamily="2" charset="-78"/>
                 <a:cs typeface="Amiri" pitchFamily="2" charset="-78"/>
               </a:rPr>
               <a:t>كَلِمَاتُ الدَّرْسِ</a:t>
@@ -38896,6 +39101,7 @@
                   <a:srgbClr val="1B3B6F"/>
                 </a:solidFill>
                 <a:latin typeface="Amiri" pitchFamily="2" charset="-78"/>
+                <a:ea typeface="Amiri" pitchFamily="2" charset="-78"/>
                 <a:cs typeface="Amiri" pitchFamily="2" charset="-78"/>
               </a:rPr>
               <a:t>الرَّدُّ</a:t>
@@ -39215,6 +39421,7 @@
                   <a:srgbClr val="1B3B6F"/>
                 </a:solidFill>
                 <a:latin typeface="Amiri" pitchFamily="2" charset="-78"/>
+                <a:ea typeface="Amiri" pitchFamily="2" charset="-78"/>
                 <a:cs typeface="Amiri" pitchFamily="2" charset="-78"/>
               </a:rPr>
               <a:t>الخَاتِمَةُ</a:t>
@@ -39372,6 +39579,7 @@
                   <a:srgbClr val="1B3B6F"/>
                 </a:solidFill>
                 <a:latin typeface="Amiri" pitchFamily="2" charset="-78"/>
+                <a:ea typeface="Amiri" pitchFamily="2" charset="-78"/>
                 <a:cs typeface="Amiri" pitchFamily="2" charset="-78"/>
               </a:rPr>
               <a:t>الخَوَاتِمُ</a:t>
@@ -39507,6 +39715,7 @@
                   <a:srgbClr val="1B3B6F"/>
                 </a:solidFill>
                 <a:latin typeface="Amiri" pitchFamily="2" charset="-78"/>
+                <a:ea typeface="Amiri" pitchFamily="2" charset="-78"/>
                 <a:cs typeface="Amiri" pitchFamily="2" charset="-78"/>
               </a:rPr>
               <a:t>التَّنَوُّعُ المَعْجَمِيُّ</a:t>
@@ -39696,6 +39905,7 @@
                   <a:srgbClr val="1B3B6F"/>
                 </a:solidFill>
                 <a:latin typeface="Amiri" pitchFamily="2" charset="-78"/>
+                <a:ea typeface="Amiri" pitchFamily="2" charset="-78"/>
                 <a:cs typeface="Amiri" pitchFamily="2" charset="-78"/>
               </a:rPr>
               <a:t>الدِّقَّةُ تَحْتَ ضَغْطِ الوَقْتِ</a:t>
@@ -39848,13 +40058,9 @@
     <a:fontScheme name="Office">
       <a:majorFont>
         <a:latin typeface="Calibri Light" panose="020F0302020204030204"/>
-        <a:ea typeface=""/>
-        <a:cs typeface=""/>
-        <a:font script="Jpan" typeface="游ゴシック Light"/>
-        <a:font script="Hang" typeface="맑은 고딕"/>
-        <a:font script="Hans" typeface="等线 Light"/>
-        <a:font script="Hant" typeface="新細明體"/>
-        <a:font script="Arab" typeface="Times New Roman"/>
+        <a:ea typeface="Amiri" pitchFamily="2" charset="-78"/>
+        <a:cs typeface="Amiri" pitchFamily="2" charset="-78"/>
+        <a:font script="Arab" typeface="Amiri"/>
         <a:font script="Hebr" typeface="Times New Roman"/>
         <a:font script="Thai" typeface="Angsana New"/>
         <a:font script="Ethi" typeface="Nyala"/>
@@ -39900,13 +40106,9 @@
       </a:majorFont>
       <a:minorFont>
         <a:latin typeface="Calibri" panose="020F0502020204030204"/>
-        <a:ea typeface=""/>
-        <a:cs typeface=""/>
-        <a:font script="Jpan" typeface="游ゴシック"/>
-        <a:font script="Hang" typeface="맑은 고딕"/>
-        <a:font script="Hans" typeface="等线"/>
-        <a:font script="Hant" typeface="新細明體"/>
-        <a:font script="Arab" typeface="Arial"/>
+        <a:ea typeface="Amiri" pitchFamily="2" charset="-78"/>
+        <a:cs typeface="Amiri" pitchFamily="2" charset="-78"/>
+        <a:font script="Arab" typeface="Amiri"/>
         <a:font script="Hebr" typeface="Arial"/>
         <a:font script="Thai" typeface="Cordia New"/>
         <a:font script="Ethi" typeface="Nyala"/>
